--- a/Geschichte_11/Doppelstunde_Solon/Folien_Doppelstunde_Drakon_Solon.pptx
+++ b/Geschichte_11/Doppelstunde_Solon/Folien_Doppelstunde_Drakon_Solon.pptx
@@ -36,9 +36,10 @@
     <p:sldId id="284" r:id="rId30"/>
     <p:sldId id="285" r:id="rId31"/>
     <p:sldId id="286" r:id="rId32"/>
+    <p:sldId id="287" r:id="rId33"/>
   </p:sldIdLst>
   <p:notesMasterIdLst>
-    <p:notesMasterId r:id="rId33"/>
+    <p:notesMasterId r:id="rId34"/>
   </p:notesMasterIdLst>
   <p:sldSz cx="9144000" cy="5143500"/>
   <p:notesSz cx="5143500" cy="9144000"/>
@@ -1412,7 +1413,7 @@
           <a:p>
             <a:r>
               <a:rPr lang="en-US" dirty="0"/>
-              <a:t>7–17 Min. Einzelarbeit, dann Vergleich mit dem Nachbarn. Die Schüler schreiben die Nummern mit Lösungswort ins Heft oder füllen das ausgedruckte Blatt aus. Neue Begriffe: Chora (Umland; kam schon auf der Folie zum Aufbau der Polis vor) und Synoikismos (Zusammenschluss Attikas, LB S. 20). Distraktoren: Demokratie, Monarchie.</a:t>
+              <a:t>7–17 Min. Einzelarbeit, dann Vergleich mit dem Nachbarn (ausgedrucktes Blatt oder Nummern und Wörter ins Heft). Jedes Wort aus dem Wortspeicher passt genau einmal. Neue Begriffe: Chora (Umland) und Synoikismos (Zusammenschluss Attikas, LB S. 20). Genos, Phyle, Aristokratie, Areopag/Adelsrat, Archonten: vgl. LB S. 17.</a:t>
             </a:r>
             <a:endParaRPr lang="en-US" dirty="0"/>
           </a:p>
@@ -1676,7 +1677,7 @@
           <a:p>
             <a:r>
               <a:rPr lang="en-US" dirty="0"/>
-              <a:t>17–18 Min. Lösung zeigen, Paare korrigieren selbst. Übrig bleiben Demokratie und Monarchie. Zwei Schüler nennen kurz ihre Vermutung zur Schlussfrage – an der Tafel festhalten, sie wird durch die Hörprobe bestätigt.</a:t>
+              <a:t>Lösung Teil 1 zeigen, Paare korrigieren selbst.</a:t>
             </a:r>
             <a:endParaRPr lang="en-US" dirty="0"/>
           </a:p>
@@ -1764,7 +1765,7 @@
           <a:p>
             <a:r>
               <a:rPr lang="en-US" dirty="0"/>
-              <a:t>18–25 Min. 5 Min. schreiben, 2 Min. Partnercheck. Holt nach, was in der letzten Stunde nicht mehr geschafft wurde. Jede begründete Wahl ist zulässig (Geographie, Landmangel, Schutzbedürfnis …).</a:t>
+              <a:t>17–18 Min. Zwei Schüler nennen ihre Vermutung zur Schlussfrage. An der Tafel festhalten, die Hörprobe bestätigt sie.</a:t>
             </a:r>
             <a:endParaRPr lang="en-US" dirty="0"/>
           </a:p>
@@ -1852,7 +1853,7 @@
           <a:p>
             <a:r>
               <a:rPr lang="en-US" dirty="0"/>
-              <a:t>25–30 Min. Auftrag vor dem Abspielen geben. Danach die Problemtabelle an die Tafel (nächste Folie). Falls die Hörprobe überarbeitet wird: Audio auf dieser Folie ersetzen (Rechtsklick &gt; Audio ändern).</a:t>
+              <a:t>18–25 Min. 5 Min. schreiben, 2 Min. Partnercheck. Holt nach, was in der letzten Stunde nicht mehr geschafft wurde. Jede begründete Wahl ist zulässig (Geographie, Landmangel, Schutzbedürfnis …).</a:t>
             </a:r>
             <a:endParaRPr lang="en-US" dirty="0"/>
           </a:p>
@@ -1940,7 +1941,7 @@
           <a:p>
             <a:r>
               <a:rPr lang="en-US" dirty="0"/>
-              <a:t>Tabelle an die Tafel schreiben oder diese Folie zeigen. Die Schüler übernehmen sie ins Heft und füllen die Spalten in den nächsten Phasen aus.</a:t>
+              <a:t>25–30 Min. Auftrag vor dem Abspielen geben. Danach die Problemtabelle an die Tafel (nächste Folie). Falls die Hörprobe überarbeitet wird: Audio auf dieser Folie ersetzen (Rechtsklick &gt; Audio ändern).</a:t>
             </a:r>
             <a:endParaRPr lang="en-US" dirty="0"/>
           </a:p>
@@ -2028,7 +2029,7 @@
           <a:p>
             <a:r>
               <a:rPr lang="en-US" dirty="0"/>
-              <a:t>30–38 Min. Erwartung: P1 ✘ (Schuldknechtschaft bleibt), P2 ✘, P3 ~ (geschriebenes, verbindliches Recht, 51 Richter, Blutrache aufgehoben; Vollzug bleibt bei der Sippe), P4 ✘, P5 ✘. Das Beispiel P3 bewusst stehen lassen – es zeigt, wie ein Beleg aussieht.</a:t>
+              <a:t>Tabelle an die Tafel schreiben oder diese Folie zeigen. Die Schüler übernehmen sie ins Heft und füllen die Spalten in den nächsten Phasen aus.</a:t>
             </a:r>
             <a:endParaRPr lang="en-US" dirty="0"/>
           </a:p>
@@ -2116,9 +2117,7 @@
           <a:p>
             <a:r>
               <a:rPr lang="en-US" dirty="0"/>
-              <a:t>38–53 Min. Wichtig: Jeder liest nur seinen Teil – der Partner braucht die Erklärung, um die Spalte ausfüllen zu können.
-A findet: Schulden getilgt, Schuldknechtschaft aufgehoben, Versklavte zurückgekauft, keine Zwangsenteignung der Grundherren, Förderung des Mittelstands.
-B findet: vier Klassen nach Besitz, Theten nur aktives Wahlrecht, Archonten nur aus der 1. Klasse, Volksversammlung stimmt ab, wählt Beamte, Rat der 400 bereitet vor, Klagerecht jedes Bürgers, Areopag als Aufsicht.</a:t>
+              <a:t>30–38 Min. Erwartung: P1 ✘ (Schuldknechtschaft bleibt), P2 ✘, P3 ~ (geschriebenes, verbindliches Recht, 51 Richter, Blutrache aufgehoben; Vollzug bleibt bei der Sippe), P4 ✘, P5 ✘. Das Beispiel P3 bewusst stehen lassen – es zeigt, wie ein Beleg aussieht.</a:t>
             </a:r>
             <a:endParaRPr lang="en-US" dirty="0"/>
           </a:p>
@@ -2206,7 +2205,9 @@
           <a:p>
             <a:r>
               <a:rPr lang="en-US" dirty="0"/>
-              <a:t>53–57 Min. Video läuft ca. 1 Minute. Die Schlussfrage im Video („Ist das schon Demokratie?“) kann kurz stehen bleiben – sie wird in der Beurteilung wieder aufgegriffen.</a:t>
+              <a:t>38–53 Min. Wichtig: Jeder liest nur seinen Teil – der Partner braucht die Erklärung, um die Spalte ausfüllen zu können.
+A findet: Schulden getilgt, Schuldknechtschaft aufgehoben, Versklavte zurückgekauft, keine Zwangsenteignung der Grundherren, Förderung des Mittelstands.
+B findet: vier Klassen nach Besitz, Theten nur aktives Wahlrecht, Archonten nur aus der 1. Klasse, Volksversammlung stimmt ab, wählt Beamte, Rat der 400 bereitet vor, Klagerecht jedes Bürgers, Areopag als Aufsicht.</a:t>
             </a:r>
             <a:endParaRPr lang="en-US" dirty="0"/>
           </a:p>
@@ -2294,13 +2295,7 @@
           <a:p>
             <a:r>
               <a:rPr lang="en-US" dirty="0"/>
-              <a:t>57–63 Min. Erst NACH der Besprechung zeigen. Begründungen:
-P1: Drakon ✘ / Solon ✔ Schulden getilgt, Verbot der Schuldknechtschaft, Rückkauf.
-P2: beide ✘ – Solon lehnt die Zwangsenteignung ab.
-P3: Drakon ~ geschriebenes Recht, Ende der Blutrache, aber strenge Strafen / Solon ✔ Klagerecht jedes Bürgers.
-P4: Solon ~ Rechte nach Besitz statt Herkunft, Volksversammlung gestärkt – aber Theten nicht wählbar, Archonten nur 1. Klasse.
-P5: Solon ~ zunächst Beruhigung, bald neue bürgerkriegsähnliche Kämpfe (LB S. 22).
-Abweichende, gut begründete Einschätzungen sind zulässig.</a:t>
+              <a:t>53–57 Min. Video läuft ca. 1 Minute. Die Schlussfrage im Video („Ist das schon Demokratie?“) kann kurz stehen bleiben – sie wird in der Beurteilung wieder aufgegriffen.</a:t>
             </a:r>
             <a:endParaRPr lang="en-US" dirty="0"/>
           </a:p>
@@ -2388,7 +2383,13 @@
           <a:p>
             <a:r>
               <a:rPr lang="en-US" dirty="0"/>
-              <a:t>63–80 Min. 12 Min. schreiben, 5 Min. Partnercheck. „Beurteile, inwieweit …“ ist ein Abitur-Operator – ggf. kurz darauf hinweisen. Zeit knapp? Werturteil als Hausaufgabe.</a:t>
+              <a:t>57–63 Min. Erst NACH der Besprechung zeigen. Begründungen:
+P1: Drakon ✘ / Solon ✔ Schulden getilgt, Verbot der Schuldknechtschaft, Rückkauf.
+P2: beide ✘ – Solon lehnt die Zwangsenteignung ab.
+P3: Drakon ~ geschriebenes Recht, Ende der Blutrache, aber strenge Strafen / Solon ✔ Klagerecht jedes Bürgers.
+P4: Solon ~ Rechte nach Besitz statt Herkunft, Volksversammlung gestärkt – aber Theten nicht wählbar, Archonten nur 1. Klasse.
+P5: Solon ~ zunächst Beruhigung, bald neue bürgerkriegsähnliche Kämpfe (LB S. 22).
+Abweichende, gut begründete Einschätzungen sind zulässig.</a:t>
             </a:r>
             <a:endParaRPr lang="en-US" dirty="0"/>
           </a:p>
@@ -2564,7 +2565,7 @@
           <a:p>
             <a:r>
               <a:rPr lang="en-US" dirty="0"/>
-              <a:t>80–88 Min. Figurenkarten ausgedruckt an die Tafel. Mögliche Einordnung: Schuldsklave und Kleinbauer gewinnen (Freiheit, Schuldenerlass), aber ohne Land; reicher Händler gewinnt politisch; Großgrundbesitzer verliert Forderungen, behält Land; verarmter Adliger verliert Einfluss; Thete gewinnt Stimmrecht, aber nicht wählbar. Frauen: kommen in der Reform gar nicht vor.</a:t>
+              <a:t>63–80 Min. 12 Min. schreiben, 5 Min. Partnercheck. „Beurteile, inwieweit …“ ist ein Abitur-Operator – ggf. kurz darauf hinweisen. Zeit knapp? Werturteil als Hausaufgabe.</a:t>
             </a:r>
             <a:endParaRPr lang="en-US" dirty="0"/>
           </a:p>
@@ -2652,7 +2653,7 @@
           <a:p>
             <a:r>
               <a:rPr lang="en-US" dirty="0"/>
-              <a:t>88–90 Min. Überleitung zu Peisistratos. Die Figurenkarten an der Tafel liefern die Antwort: die, die links auf der Linie hängen.</a:t>
+              <a:t>80–88 Min. Figurenkarten ausgedruckt an die Tafel. Mögliche Einordnung: Schuldsklave und Kleinbauer gewinnen (Freiheit, Schuldenerlass), aber ohne Land; reicher Händler gewinnt politisch; Großgrundbesitzer verliert Forderungen, behält Land; verarmter Adliger verliert Einfluss; Thete gewinnt Stimmrecht, aber nicht wählbar. Frauen: kommen in der Reform gar nicht vor.</a:t>
             </a:r>
             <a:endParaRPr lang="en-US" dirty="0"/>
           </a:p>
@@ -2676,6 +2677,94 @@
             <a:fld id="{F7021451-1387-4CA6-816F-3879F97B5CBC}" type="slidenum">
               <a:rPr lang="en-US"/>
               <a:t>31</a:t>
+            </a:fld>
+            <a:endParaRPr lang="en-US"/>
+          </a:p>
+        </p:txBody>
+      </p:sp>
+    </p:spTree>
+    <p:extLst>
+      <p:ext uri="{BB962C8B-B14F-4D97-AF65-F5344CB8AC3E}">
+        <p14:creationId xmlns:p14="http://schemas.microsoft.com/office/powerpoint/2010/main" val="1024086991"/>
+      </p:ext>
+    </p:extLst>
+  </p:cSld>
+  <p:clrMapOvr>
+    <a:masterClrMapping/>
+  </p:clrMapOvr>
+</p:notes>
+</file>
+
+<file path=ppt/notesSlides/notesSlide32.xml><?xml version="1.0" encoding="utf-8"?>
+<p:notes xmlns:a="http://schemas.openxmlformats.org/drawingml/2006/main" xmlns:r="http://schemas.openxmlformats.org/officeDocument/2006/relationships" xmlns:p="http://schemas.openxmlformats.org/presentationml/2006/main">
+  <p:cSld>
+    <p:spTree>
+      <p:nvGrpSpPr>
+        <p:cNvPr id="1" name=""/>
+        <p:cNvGrpSpPr/>
+        <p:nvPr/>
+      </p:nvGrpSpPr>
+      <p:grpSpPr>
+        <a:xfrm>
+          <a:off x="0" y="0"/>
+          <a:ext cx="0" cy="0"/>
+          <a:chOff x="0" y="0"/>
+          <a:chExt cx="0" cy="0"/>
+        </a:xfrm>
+      </p:grpSpPr>
+      <p:sp>
+        <p:nvSpPr>
+          <p:cNvPr id="2" name="Slide Image Placeholder 1"/>
+          <p:cNvSpPr>
+            <a:spLocks noGrp="1" noRot="1" noChangeAspect="1"/>
+          </p:cNvSpPr>
+          <p:nvPr>
+            <p:ph type="sldImg"/>
+          </p:nvPr>
+        </p:nvSpPr>
+        <p:spPr/>
+      </p:sp>
+      <p:sp>
+        <p:nvSpPr>
+          <p:cNvPr id="3" name="Notes Placeholder 2"/>
+          <p:cNvSpPr>
+            <a:spLocks noGrp="1"/>
+          </p:cNvSpPr>
+          <p:nvPr>
+            <p:ph type="body" idx="1"/>
+          </p:nvPr>
+        </p:nvSpPr>
+        <p:spPr/>
+        <p:txBody>
+          <a:bodyPr/>
+          <a:lstStyle/>
+          <a:p>
+            <a:r>
+              <a:rPr lang="en-US" dirty="0"/>
+              <a:t>88–90 Min. Überleitung zu Peisistratos. Die Figurenkarten an der Tafel liefern die Antwort: die, die links auf der Linie hängen.</a:t>
+            </a:r>
+            <a:endParaRPr lang="en-US" dirty="0"/>
+          </a:p>
+        </p:txBody>
+      </p:sp>
+      <p:sp>
+        <p:nvSpPr>
+          <p:cNvPr id="4" name="Slide Number Placeholder 3"/>
+          <p:cNvSpPr>
+            <a:spLocks noGrp="1"/>
+          </p:cNvSpPr>
+          <p:nvPr>
+            <p:ph type="sldNum" sz="quarter" idx="10"/>
+          </p:nvPr>
+        </p:nvSpPr>
+        <p:spPr/>
+        <p:txBody>
+          <a:bodyPr/>
+          <a:lstStyle/>
+          <a:p>
+            <a:fld id="{F7021451-1387-4CA6-816F-3879F97B5CBC}" type="slidenum">
+              <a:rPr lang="en-US"/>
+              <a:t>32</a:t>
             </a:fld>
             <a:endParaRPr lang="en-US"/>
           </a:p>
@@ -8785,8 +8874,8 @@
         </p:nvSpPr>
         <p:spPr>
           <a:xfrm>
-            <a:off x="457200" y="1143000"/>
-            <a:ext cx="8229600" cy="320040"/>
+            <a:off x="457200" y="1115568"/>
+            <a:ext cx="8229600" cy="274320"/>
           </a:xfrm>
           <a:prstGeom prst="rect">
             <a:avLst/>
@@ -8810,7 +8899,7 @@
                 <a:ea typeface="Calibri" pitchFamily="34" charset="-122"/>
                 <a:cs typeface="Calibri" pitchFamily="34" charset="-120"/>
               </a:rPr>
-              <a:t>Ergänzt die Lücken 1–10. Zwei Wörter bleiben übrig. Fett gedruckt: neue Begriffe.</a:t>
+              <a:t>Ergänzt die Lücken 1–14 mit dem Wortspeicher. Fett gedruckt: neue Begriffe.</a:t>
             </a:r>
             <a:endParaRPr lang="en-US" sz="1300" dirty="0"/>
           </a:p>
@@ -8824,12 +8913,12 @@
         </p:nvSpPr>
         <p:spPr>
           <a:xfrm>
-            <a:off x="457200" y="1508760"/>
-            <a:ext cx="8229600" cy="2148840"/>
+            <a:off x="457200" y="1444752"/>
+            <a:ext cx="8229600" cy="2286000"/>
           </a:xfrm>
           <a:prstGeom prst="roundRect">
             <a:avLst>
-              <a:gd name="adj" fmla="val 3404"/>
+              <a:gd name="adj" fmla="val 3200"/>
             </a:avLst>
           </a:prstGeom>
           <a:solidFill>
@@ -8851,8 +8940,8 @@
         </p:nvSpPr>
         <p:spPr>
           <a:xfrm>
-            <a:off x="640080" y="1572768"/>
-            <a:ext cx="7863840" cy="2011680"/>
+            <a:off x="621792" y="1490472"/>
+            <a:ext cx="7900416" cy="2194560"/>
           </a:xfrm>
           <a:prstGeom prst="rect">
             <a:avLst/>
@@ -8865,9 +8954,6 @@
           <a:lstStyle/>
           <a:p>
             <a:pPr indent="0" marL="0">
-              <a:lnSpc>
-                <a:spcPct val="105000"/>
-              </a:lnSpc>
               <a:buNone/>
             </a:pPr>
             <a:r>
@@ -8882,9 +8968,6 @@
               <a:t>Das griechische Festland ist von </a:t>
             </a:r>
             <a:pPr indent="0" marL="0">
-              <a:lnSpc>
-                <a:spcPct val="105000"/>
-              </a:lnSpc>
               <a:buNone/>
             </a:pPr>
             <a:r>
@@ -8899,9 +8982,6 @@
               <a:t>(1) __________</a:t>
             </a:r>
             <a:pPr indent="0" marL="0">
-              <a:lnSpc>
-                <a:spcPct val="105000"/>
-              </a:lnSpc>
               <a:buNone/>
             </a:pPr>
             <a:r>
@@ -8916,9 +8996,6 @@
               <a:t> durchzogen. Fruchtbares Ackerland gibt es nur in kleinen </a:t>
             </a:r>
             <a:pPr indent="0" marL="0">
-              <a:lnSpc>
-                <a:spcPct val="105000"/>
-              </a:lnSpc>
               <a:buNone/>
             </a:pPr>
             <a:r>
@@ -8933,9 +9010,6 @@
               <a:t>(2) __________</a:t>
             </a:r>
             <a:pPr indent="0" marL="0">
-              <a:lnSpc>
-                <a:spcPct val="105000"/>
-              </a:lnSpc>
               <a:buNone/>
             </a:pPr>
             <a:r>
@@ -8950,9 +9024,6 @@
               <a:t> an den Küsten und in den Tälern. Weil die Berge die Siedlungen voneinander trennten, entstand kein großes Reich, sondern viele kleine, unabhängige Stadtstaaten: die </a:t>
             </a:r>
             <a:pPr indent="0" marL="0">
-              <a:lnSpc>
-                <a:spcPct val="105000"/>
-              </a:lnSpc>
               <a:buNone/>
             </a:pPr>
             <a:r>
@@ -8967,9 +9038,6 @@
               <a:t>(3) __________</a:t>
             </a:r>
             <a:pPr indent="0" marL="0">
-              <a:lnSpc>
-                <a:spcPct val="105000"/>
-              </a:lnSpc>
               <a:buNone/>
             </a:pPr>
             <a:r>
@@ -8981,12 +9049,9 @@
                 <a:ea typeface="Calibri" pitchFamily="34" charset="-122"/>
                 <a:cs typeface="Calibri" pitchFamily="34" charset="-120"/>
               </a:rPr>
-              <a:t>. Zu jeder Polis gehörten die Stadt mit dem Burgberg, der </a:t>
-            </a:r>
-            <a:pPr indent="0" marL="0">
-              <a:lnSpc>
-                <a:spcPct val="105000"/>
-              </a:lnSpc>
+              <a:t>. Eine Polis war ein </a:t>
+            </a:r>
+            <a:pPr indent="0" marL="0">
               <a:buNone/>
             </a:pPr>
             <a:r>
@@ -9001,9 +9066,6 @@
               <a:t>(4) __________</a:t>
             </a:r>
             <a:pPr indent="0" marL="0">
-              <a:lnSpc>
-                <a:spcPct val="105000"/>
-              </a:lnSpc>
               <a:buNone/>
             </a:pPr>
             <a:r>
@@ -9015,12 +9077,74 @@
                 <a:ea typeface="Calibri" pitchFamily="34" charset="-122"/>
                 <a:cs typeface="Calibri" pitchFamily="34" charset="-120"/>
               </a:rPr>
+              <a:t>: Der Staat, das waren seine Bürger. Man sprach deshalb von „den Athenern“, nicht von „Athen“.</a:t>
+            </a:r>
+            <a:pPr indent="0" marL="0">
+              <a:buNone/>
+            </a:pPr>
+            <a:endParaRPr lang="en-US" sz="1350" dirty="0"/>
+          </a:p>
+          <a:p>
+            <a:pPr indent="0" marL="0">
+              <a:buNone/>
+            </a:pPr>
+            <a:r>
+              <a:rPr lang="en-US" sz="500" dirty="0">
+                <a:solidFill>
+                  <a:srgbClr val="2B2318"/>
+                </a:solidFill>
+                <a:latin typeface="Calibri" pitchFamily="34" charset="0"/>
+                <a:ea typeface="Calibri" pitchFamily="34" charset="-122"/>
+                <a:cs typeface="Calibri" pitchFamily="34" charset="-120"/>
+              </a:rPr>
+              <a:t> </a:t>
+            </a:r>
+            <a:endParaRPr lang="en-US" sz="1350" dirty="0"/>
+          </a:p>
+          <a:p>
+            <a:pPr indent="0" marL="0">
+              <a:buNone/>
+            </a:pPr>
+            <a:r>
+              <a:rPr lang="en-US" sz="1350" dirty="0">
+                <a:solidFill>
+                  <a:srgbClr val="2B2318"/>
+                </a:solidFill>
+                <a:latin typeface="Calibri" pitchFamily="34" charset="0"/>
+                <a:ea typeface="Calibri" pitchFamily="34" charset="-122"/>
+                <a:cs typeface="Calibri" pitchFamily="34" charset="-120"/>
+              </a:rPr>
+              <a:t>Zu jeder Polis gehörten die Stadt mit dem Burgberg, der </a:t>
+            </a:r>
+            <a:pPr indent="0" marL="0">
+              <a:buNone/>
+            </a:pPr>
+            <a:r>
+              <a:rPr lang="en-US" sz="1350" b="1" dirty="0">
+                <a:solidFill>
+                  <a:srgbClr val="AD4426"/>
+                </a:solidFill>
+                <a:latin typeface="Calibri" pitchFamily="34" charset="0"/>
+                <a:ea typeface="Calibri" pitchFamily="34" charset="-122"/>
+                <a:cs typeface="Calibri" pitchFamily="34" charset="-120"/>
+              </a:rPr>
+              <a:t>(5) __________</a:t>
+            </a:r>
+            <a:pPr indent="0" marL="0">
+              <a:buNone/>
+            </a:pPr>
+            <a:r>
+              <a:rPr lang="en-US" sz="1350" dirty="0">
+                <a:solidFill>
+                  <a:srgbClr val="2B2318"/>
+                </a:solidFill>
+                <a:latin typeface="Calibri" pitchFamily="34" charset="0"/>
+                <a:ea typeface="Calibri" pitchFamily="34" charset="-122"/>
+                <a:cs typeface="Calibri" pitchFamily="34" charset="-120"/>
+              </a:rPr>
               <a:t>, und dem Marktplatz, der </a:t>
             </a:r>
             <a:pPr indent="0" marL="0">
-              <a:lnSpc>
-                <a:spcPct val="105000"/>
-              </a:lnSpc>
               <a:buNone/>
             </a:pPr>
             <a:r>
@@ -9032,12 +9156,9 @@
                 <a:ea typeface="Calibri" pitchFamily="34" charset="-122"/>
                 <a:cs typeface="Calibri" pitchFamily="34" charset="-120"/>
               </a:rPr>
-              <a:t>(5) __________</a:t>
-            </a:r>
-            <a:pPr indent="0" marL="0">
-              <a:lnSpc>
-                <a:spcPct val="105000"/>
-              </a:lnSpc>
+              <a:t>(6) __________</a:t>
+            </a:r>
+            <a:pPr indent="0" marL="0">
               <a:buNone/>
             </a:pPr>
             <a:r>
@@ -9052,9 +9173,6 @@
               <a:t>, sowie das Umland mit Feldern und Weiden, die </a:t>
             </a:r>
             <a:pPr indent="0" marL="0">
-              <a:lnSpc>
-                <a:spcPct val="105000"/>
-              </a:lnSpc>
               <a:buNone/>
             </a:pPr>
             <a:r>
@@ -9069,9 +9187,6 @@
               <a:t>Chora</a:t>
             </a:r>
             <a:pPr indent="0" marL="0">
-              <a:lnSpc>
-                <a:spcPct val="105000"/>
-              </a:lnSpc>
               <a:buNone/>
             </a:pPr>
             <a:r>
@@ -9083,90 +9198,38 @@
                 <a:ea typeface="Calibri" pitchFamily="34" charset="-122"/>
                 <a:cs typeface="Calibri" pitchFamily="34" charset="-120"/>
               </a:rPr>
-              <a:t>.</a:t>
-            </a:r>
-            <a:pPr indent="0" marL="0">
-              <a:lnSpc>
-                <a:spcPct val="105000"/>
-              </a:lnSpc>
-              <a:buNone/>
-            </a:pPr>
+              <a:t>. Athen entstand durch den Zusammenschluss vieler Dörfer und Gemeinden der Halbinsel Attika. Dieser Vorgang, der um 700 v. Chr. abgeschlossen war, heißt </a:t>
+            </a:r>
+            <a:pPr indent="0" marL="0">
+              <a:buNone/>
+            </a:pPr>
+            <a:r>
+              <a:rPr lang="en-US" sz="1350" b="1" dirty="0">
+                <a:solidFill>
+                  <a:srgbClr val="AD4426"/>
+                </a:solidFill>
+                <a:latin typeface="Calibri" pitchFamily="34" charset="0"/>
+                <a:ea typeface="Calibri" pitchFamily="34" charset="-122"/>
+                <a:cs typeface="Calibri" pitchFamily="34" charset="-120"/>
+              </a:rPr>
+              <a:t>Synoikismos</a:t>
+            </a:r>
+            <a:pPr indent="0" marL="0">
+              <a:buNone/>
+            </a:pPr>
+            <a:r>
+              <a:rPr lang="en-US" sz="1350" dirty="0">
+                <a:solidFill>
+                  <a:srgbClr val="2B2318"/>
+                </a:solidFill>
+                <a:latin typeface="Calibri" pitchFamily="34" charset="0"/>
+                <a:ea typeface="Calibri" pitchFamily="34" charset="-122"/>
+                <a:cs typeface="Calibri" pitchFamily="34" charset="-120"/>
+              </a:rPr>
+              <a:t> (griechisch: „Zusammensiedlung“).</a:t>
+            </a:r>
             <a:endParaRPr lang="en-US" sz="1350" dirty="0"/>
           </a:p>
-          <a:p>
-            <a:pPr indent="0" marL="0">
-              <a:lnSpc>
-                <a:spcPct val="105000"/>
-              </a:lnSpc>
-              <a:buNone/>
-            </a:pPr>
-            <a:r>
-              <a:rPr lang="en-US" sz="600" dirty="0">
-                <a:solidFill>
-                  <a:srgbClr val="2B2318"/>
-                </a:solidFill>
-                <a:latin typeface="Calibri" pitchFamily="34" charset="0"/>
-                <a:ea typeface="Calibri" pitchFamily="34" charset="-122"/>
-                <a:cs typeface="Calibri" pitchFamily="34" charset="-120"/>
-              </a:rPr>
-              <a:t> </a:t>
-            </a:r>
-            <a:endParaRPr lang="en-US" sz="1350" dirty="0"/>
-          </a:p>
-          <a:p>
-            <a:pPr indent="0" marL="0">
-              <a:lnSpc>
-                <a:spcPct val="105000"/>
-              </a:lnSpc>
-              <a:buNone/>
-            </a:pPr>
-            <a:r>
-              <a:rPr lang="en-US" sz="1350" dirty="0">
-                <a:solidFill>
-                  <a:srgbClr val="2B2318"/>
-                </a:solidFill>
-                <a:latin typeface="Calibri" pitchFamily="34" charset="0"/>
-                <a:ea typeface="Calibri" pitchFamily="34" charset="-122"/>
-                <a:cs typeface="Calibri" pitchFamily="34" charset="-120"/>
-              </a:rPr>
-              <a:t>Athen entstand durch den Zusammenschluss vieler Dörfer und Gemeinden der Halbinsel Attika. Dieser Vorgang, der um 700 v. Chr. abgeschlossen war, heißt </a:t>
-            </a:r>
-            <a:pPr indent="0" marL="0">
-              <a:lnSpc>
-                <a:spcPct val="105000"/>
-              </a:lnSpc>
-              <a:buNone/>
-            </a:pPr>
-            <a:r>
-              <a:rPr lang="en-US" sz="1350" b="1" dirty="0">
-                <a:solidFill>
-                  <a:srgbClr val="AD4426"/>
-                </a:solidFill>
-                <a:latin typeface="Calibri" pitchFamily="34" charset="0"/>
-                <a:ea typeface="Calibri" pitchFamily="34" charset="-122"/>
-                <a:cs typeface="Calibri" pitchFamily="34" charset="-120"/>
-              </a:rPr>
-              <a:t>Synoikismos</a:t>
-            </a:r>
-            <a:pPr indent="0" marL="0">
-              <a:lnSpc>
-                <a:spcPct val="105000"/>
-              </a:lnSpc>
-              <a:buNone/>
-            </a:pPr>
-            <a:r>
-              <a:rPr lang="en-US" sz="1350" dirty="0">
-                <a:solidFill>
-                  <a:srgbClr val="2B2318"/>
-                </a:solidFill>
-                <a:latin typeface="Calibri" pitchFamily="34" charset="0"/>
-                <a:ea typeface="Calibri" pitchFamily="34" charset="-122"/>
-                <a:cs typeface="Calibri" pitchFamily="34" charset="-120"/>
-              </a:rPr>
-              <a:t> (griechisch: „Zusammensiedlung“).</a:t>
-            </a:r>
-            <a:endParaRPr lang="en-US" sz="1350" dirty="0"/>
-          </a:p>
         </p:txBody>
       </p:sp>
       <p:sp>
@@ -9177,7 +9240,7 @@
         </p:nvSpPr>
         <p:spPr>
           <a:xfrm>
-            <a:off x="457200" y="3749040"/>
+            <a:off x="457200" y="3767328"/>
             <a:ext cx="1828800" cy="228600"/>
           </a:xfrm>
           <a:prstGeom prst="rect">
@@ -9217,11 +9280,11 @@
         <p:spPr>
           <a:xfrm>
             <a:off x="457200" y="4023360"/>
-            <a:ext cx="1280160" cy="310896"/>
+            <a:ext cx="1106424" cy="301752"/>
           </a:xfrm>
           <a:prstGeom prst="roundRect">
             <a:avLst>
-              <a:gd name="adj" fmla="val 29412"/>
+              <a:gd name="adj" fmla="val 30303"/>
             </a:avLst>
           </a:prstGeom>
           <a:solidFill>
@@ -9237,7 +9300,7 @@
               <a:buNone/>
             </a:pPr>
             <a:r>
-              <a:rPr lang="en-US" sz="1100" b="1" dirty="0">
+              <a:rPr lang="en-US" sz="1050" b="1" dirty="0">
                 <a:solidFill>
                   <a:srgbClr val="2B2318"/>
                 </a:solidFill>
@@ -9247,7 +9310,7 @@
               </a:rPr>
               <a:t>Adel</a:t>
             </a:r>
-            <a:endParaRPr lang="en-US" sz="1100" dirty="0"/>
+            <a:endParaRPr lang="en-US" sz="1050" dirty="0"/>
           </a:p>
         </p:txBody>
       </p:sp>
@@ -9259,12 +9322,12 @@
         </p:nvSpPr>
         <p:spPr>
           <a:xfrm>
-            <a:off x="1828800" y="4023360"/>
-            <a:ext cx="1280160" cy="310896"/>
+            <a:off x="1636776" y="4023360"/>
+            <a:ext cx="1106424" cy="301752"/>
           </a:xfrm>
           <a:prstGeom prst="roundRect">
             <a:avLst>
-              <a:gd name="adj" fmla="val 29412"/>
+              <a:gd name="adj" fmla="val 30303"/>
             </a:avLst>
           </a:prstGeom>
           <a:solidFill>
@@ -9280,7 +9343,7 @@
               <a:buNone/>
             </a:pPr>
             <a:r>
-              <a:rPr lang="en-US" sz="1100" b="1" dirty="0">
+              <a:rPr lang="en-US" sz="1050" b="1" dirty="0">
                 <a:solidFill>
                   <a:srgbClr val="2B2318"/>
                 </a:solidFill>
@@ -9290,7 +9353,7 @@
               </a:rPr>
               <a:t>Agora</a:t>
             </a:r>
-            <a:endParaRPr lang="en-US" sz="1100" dirty="0"/>
+            <a:endParaRPr lang="en-US" sz="1050" dirty="0"/>
           </a:p>
         </p:txBody>
       </p:sp>
@@ -9302,12 +9365,12 @@
         </p:nvSpPr>
         <p:spPr>
           <a:xfrm>
-            <a:off x="3200400" y="4023360"/>
-            <a:ext cx="1280160" cy="310896"/>
+            <a:off x="2816352" y="4023360"/>
+            <a:ext cx="1106424" cy="301752"/>
           </a:xfrm>
           <a:prstGeom prst="roundRect">
             <a:avLst>
-              <a:gd name="adj" fmla="val 29412"/>
+              <a:gd name="adj" fmla="val 30303"/>
             </a:avLst>
           </a:prstGeom>
           <a:solidFill>
@@ -9323,7 +9386,7 @@
               <a:buNone/>
             </a:pPr>
             <a:r>
-              <a:rPr lang="en-US" sz="1100" b="1" dirty="0">
+              <a:rPr lang="en-US" sz="1050" b="1" dirty="0">
                 <a:solidFill>
                   <a:srgbClr val="2B2318"/>
                 </a:solidFill>
@@ -9333,7 +9396,7 @@
               </a:rPr>
               <a:t>Akropolis</a:t>
             </a:r>
-            <a:endParaRPr lang="en-US" sz="1100" dirty="0"/>
+            <a:endParaRPr lang="en-US" sz="1050" dirty="0"/>
           </a:p>
         </p:txBody>
       </p:sp>
@@ -9345,12 +9408,12 @@
         </p:nvSpPr>
         <p:spPr>
           <a:xfrm>
-            <a:off x="4572000" y="4023360"/>
-            <a:ext cx="1280160" cy="310896"/>
+            <a:off x="3995928" y="4023360"/>
+            <a:ext cx="1106424" cy="301752"/>
           </a:xfrm>
           <a:prstGeom prst="roundRect">
             <a:avLst>
-              <a:gd name="adj" fmla="val 29412"/>
+              <a:gd name="adj" fmla="val 30303"/>
             </a:avLst>
           </a:prstGeom>
           <a:solidFill>
@@ -9366,7 +9429,7 @@
               <a:buNone/>
             </a:pPr>
             <a:r>
-              <a:rPr lang="en-US" sz="1100" b="1" dirty="0">
+              <a:rPr lang="en-US" sz="1050" b="1" dirty="0">
                 <a:solidFill>
                   <a:srgbClr val="2B2318"/>
                 </a:solidFill>
@@ -9374,9 +9437,9 @@
                 <a:ea typeface="Calibri" pitchFamily="34" charset="-122"/>
                 <a:cs typeface="Calibri" pitchFamily="34" charset="-120"/>
               </a:rPr>
-              <a:t>Aristokratie</a:t>
-            </a:r>
-            <a:endParaRPr lang="en-US" sz="1100" dirty="0"/>
+              <a:t>Areopag</a:t>
+            </a:r>
+            <a:endParaRPr lang="en-US" sz="1050" dirty="0"/>
           </a:p>
         </p:txBody>
       </p:sp>
@@ -9388,12 +9451,12 @@
         </p:nvSpPr>
         <p:spPr>
           <a:xfrm>
-            <a:off x="5943600" y="4023360"/>
-            <a:ext cx="1280160" cy="310896"/>
+            <a:off x="5175504" y="4023360"/>
+            <a:ext cx="1106424" cy="301752"/>
           </a:xfrm>
           <a:prstGeom prst="roundRect">
             <a:avLst>
-              <a:gd name="adj" fmla="val 29412"/>
+              <a:gd name="adj" fmla="val 30303"/>
             </a:avLst>
           </a:prstGeom>
           <a:solidFill>
@@ -9409,7 +9472,7 @@
               <a:buNone/>
             </a:pPr>
             <a:r>
-              <a:rPr lang="en-US" sz="1100" b="1" dirty="0">
+              <a:rPr lang="en-US" sz="1050" b="1" dirty="0">
                 <a:solidFill>
                   <a:srgbClr val="2B2318"/>
                 </a:solidFill>
@@ -9417,9 +9480,9 @@
                 <a:ea typeface="Calibri" pitchFamily="34" charset="-122"/>
                 <a:cs typeface="Calibri" pitchFamily="34" charset="-120"/>
               </a:rPr>
-              <a:t>Demokratie</a:t>
-            </a:r>
-            <a:endParaRPr lang="en-US" sz="1100" dirty="0"/>
+              <a:t>Aristokratie</a:t>
+            </a:r>
+            <a:endParaRPr lang="en-US" sz="1050" dirty="0"/>
           </a:p>
         </p:txBody>
       </p:sp>
@@ -9431,12 +9494,12 @@
         </p:nvSpPr>
         <p:spPr>
           <a:xfrm>
-            <a:off x="7315200" y="4023360"/>
-            <a:ext cx="1280160" cy="310896"/>
+            <a:off x="6355080" y="4023360"/>
+            <a:ext cx="1106424" cy="301752"/>
           </a:xfrm>
           <a:prstGeom prst="roundRect">
             <a:avLst>
-              <a:gd name="adj" fmla="val 29412"/>
+              <a:gd name="adj" fmla="val 30303"/>
             </a:avLst>
           </a:prstGeom>
           <a:solidFill>
@@ -9452,7 +9515,7 @@
               <a:buNone/>
             </a:pPr>
             <a:r>
-              <a:rPr lang="en-US" sz="1100" b="1" dirty="0">
+              <a:rPr lang="en-US" sz="1050" b="1" dirty="0">
                 <a:solidFill>
                   <a:srgbClr val="2B2318"/>
                 </a:solidFill>
@@ -9462,7 +9525,7 @@
               </a:rPr>
               <a:t>Ebenen</a:t>
             </a:r>
-            <a:endParaRPr lang="en-US" sz="1100" dirty="0"/>
+            <a:endParaRPr lang="en-US" sz="1050" dirty="0"/>
           </a:p>
         </p:txBody>
       </p:sp>
@@ -9474,12 +9537,12 @@
         </p:nvSpPr>
         <p:spPr>
           <a:xfrm>
-            <a:off x="457200" y="4407408"/>
-            <a:ext cx="1280160" cy="310896"/>
+            <a:off x="7534656" y="4023360"/>
+            <a:ext cx="1106424" cy="301752"/>
           </a:xfrm>
           <a:prstGeom prst="roundRect">
             <a:avLst>
-              <a:gd name="adj" fmla="val 29412"/>
+              <a:gd name="adj" fmla="val 30303"/>
             </a:avLst>
           </a:prstGeom>
           <a:solidFill>
@@ -9495,7 +9558,7 @@
               <a:buNone/>
             </a:pPr>
             <a:r>
-              <a:rPr lang="en-US" sz="1100" b="1" dirty="0">
+              <a:rPr lang="en-US" sz="1050" b="1" dirty="0">
                 <a:solidFill>
                   <a:srgbClr val="2B2318"/>
                 </a:solidFill>
@@ -9505,7 +9568,7 @@
               </a:rPr>
               <a:t>Gebirgen</a:t>
             </a:r>
-            <a:endParaRPr lang="en-US" sz="1100" dirty="0"/>
+            <a:endParaRPr lang="en-US" sz="1050" dirty="0"/>
           </a:p>
         </p:txBody>
       </p:sp>
@@ -9517,12 +9580,12 @@
         </p:nvSpPr>
         <p:spPr>
           <a:xfrm>
-            <a:off x="1828800" y="4407408"/>
-            <a:ext cx="1280160" cy="310896"/>
+            <a:off x="457200" y="4389120"/>
+            <a:ext cx="1106424" cy="301752"/>
           </a:xfrm>
           <a:prstGeom prst="roundRect">
             <a:avLst>
-              <a:gd name="adj" fmla="val 29412"/>
+              <a:gd name="adj" fmla="val 30303"/>
             </a:avLst>
           </a:prstGeom>
           <a:solidFill>
@@ -9538,7 +9601,7 @@
               <a:buNone/>
             </a:pPr>
             <a:r>
-              <a:rPr lang="en-US" sz="1100" b="1" dirty="0">
+              <a:rPr lang="en-US" sz="1050" b="1" dirty="0">
                 <a:solidFill>
                   <a:srgbClr val="2B2318"/>
                 </a:solidFill>
@@ -9546,9 +9609,9 @@
                 <a:ea typeface="Calibri" pitchFamily="34" charset="-122"/>
                 <a:cs typeface="Calibri" pitchFamily="34" charset="-120"/>
               </a:rPr>
-              <a:t>knapper</a:t>
-            </a:r>
-            <a:endParaRPr lang="en-US" sz="1100" dirty="0"/>
+              <a:t>Gemeinde­staat</a:t>
+            </a:r>
+            <a:endParaRPr lang="en-US" sz="1050" dirty="0"/>
           </a:p>
         </p:txBody>
       </p:sp>
@@ -9560,12 +9623,12 @@
         </p:nvSpPr>
         <p:spPr>
           <a:xfrm>
-            <a:off x="3200400" y="4407408"/>
-            <a:ext cx="1280160" cy="310896"/>
+            <a:off x="1636776" y="4389120"/>
+            <a:ext cx="1106424" cy="301752"/>
           </a:xfrm>
           <a:prstGeom prst="roundRect">
             <a:avLst>
-              <a:gd name="adj" fmla="val 29412"/>
+              <a:gd name="adj" fmla="val 30303"/>
             </a:avLst>
           </a:prstGeom>
           <a:solidFill>
@@ -9581,7 +9644,7 @@
               <a:buNone/>
             </a:pPr>
             <a:r>
-              <a:rPr lang="en-US" sz="1100" b="1" dirty="0">
+              <a:rPr lang="en-US" sz="1050" b="1" dirty="0">
                 <a:solidFill>
                   <a:srgbClr val="2B2318"/>
                 </a:solidFill>
@@ -9589,9 +9652,9 @@
                 <a:ea typeface="Calibri" pitchFamily="34" charset="-122"/>
                 <a:cs typeface="Calibri" pitchFamily="34" charset="-120"/>
               </a:rPr>
-              <a:t>Kolonisation</a:t>
-            </a:r>
-            <a:endParaRPr lang="en-US" sz="1100" dirty="0"/>
+              <a:t>Genos</a:t>
+            </a:r>
+            <a:endParaRPr lang="en-US" sz="1050" dirty="0"/>
           </a:p>
         </p:txBody>
       </p:sp>
@@ -9603,12 +9666,12 @@
         </p:nvSpPr>
         <p:spPr>
           <a:xfrm>
-            <a:off x="4572000" y="4407408"/>
-            <a:ext cx="1280160" cy="310896"/>
+            <a:off x="2816352" y="4389120"/>
+            <a:ext cx="1106424" cy="301752"/>
           </a:xfrm>
           <a:prstGeom prst="roundRect">
             <a:avLst>
-              <a:gd name="adj" fmla="val 29412"/>
+              <a:gd name="adj" fmla="val 30303"/>
             </a:avLst>
           </a:prstGeom>
           <a:solidFill>
@@ -9624,7 +9687,7 @@
               <a:buNone/>
             </a:pPr>
             <a:r>
-              <a:rPr lang="en-US" sz="1100" b="1" dirty="0">
+              <a:rPr lang="en-US" sz="1050" b="1" dirty="0">
                 <a:solidFill>
                   <a:srgbClr val="2B2318"/>
                 </a:solidFill>
@@ -9632,9 +9695,9 @@
                 <a:ea typeface="Calibri" pitchFamily="34" charset="-122"/>
                 <a:cs typeface="Calibri" pitchFamily="34" charset="-120"/>
               </a:rPr>
-              <a:t>Monarchie</a:t>
-            </a:r>
-            <a:endParaRPr lang="en-US" sz="1100" dirty="0"/>
+              <a:t>knapper</a:t>
+            </a:r>
+            <a:endParaRPr lang="en-US" sz="1050" dirty="0"/>
           </a:p>
         </p:txBody>
       </p:sp>
@@ -9646,12 +9709,12 @@
         </p:nvSpPr>
         <p:spPr>
           <a:xfrm>
-            <a:off x="5943600" y="4407408"/>
-            <a:ext cx="1280160" cy="310896"/>
+            <a:off x="3995928" y="4389120"/>
+            <a:ext cx="1106424" cy="301752"/>
           </a:xfrm>
           <a:prstGeom prst="roundRect">
             <a:avLst>
-              <a:gd name="adj" fmla="val 29412"/>
+              <a:gd name="adj" fmla="val 30303"/>
             </a:avLst>
           </a:prstGeom>
           <a:solidFill>
@@ -9667,7 +9730,7 @@
               <a:buNone/>
             </a:pPr>
             <a:r>
-              <a:rPr lang="en-US" sz="1100" b="1" dirty="0">
+              <a:rPr lang="en-US" sz="1050" b="1" dirty="0">
                 <a:solidFill>
                   <a:srgbClr val="2B2318"/>
                 </a:solidFill>
@@ -9675,9 +9738,9 @@
                 <a:ea typeface="Calibri" pitchFamily="34" charset="-122"/>
                 <a:cs typeface="Calibri" pitchFamily="34" charset="-120"/>
               </a:rPr>
-              <a:t>Poleis</a:t>
-            </a:r>
-            <a:endParaRPr lang="en-US" sz="1100" dirty="0"/>
+              <a:t>Kolonisation</a:t>
+            </a:r>
+            <a:endParaRPr lang="en-US" sz="1050" dirty="0"/>
           </a:p>
         </p:txBody>
       </p:sp>
@@ -9689,12 +9752,12 @@
         </p:nvSpPr>
         <p:spPr>
           <a:xfrm>
-            <a:off x="7315200" y="4407408"/>
-            <a:ext cx="1280160" cy="310896"/>
+            <a:off x="5175504" y="4389120"/>
+            <a:ext cx="1106424" cy="301752"/>
           </a:xfrm>
           <a:prstGeom prst="roundRect">
             <a:avLst>
-              <a:gd name="adj" fmla="val 29412"/>
+              <a:gd name="adj" fmla="val 30303"/>
             </a:avLst>
           </a:prstGeom>
           <a:solidFill>
@@ -9710,7 +9773,7 @@
               <a:buNone/>
             </a:pPr>
             <a:r>
-              <a:rPr lang="en-US" sz="1100" b="1" dirty="0">
+              <a:rPr lang="en-US" sz="1050" b="1" dirty="0">
                 <a:solidFill>
                   <a:srgbClr val="2B2318"/>
                 </a:solidFill>
@@ -9718,15 +9781,101 @@
                 <a:ea typeface="Calibri" pitchFamily="34" charset="-122"/>
                 <a:cs typeface="Calibri" pitchFamily="34" charset="-120"/>
               </a:rPr>
+              <a:t>Phyle</a:t>
+            </a:r>
+            <a:endParaRPr lang="en-US" sz="1050" dirty="0"/>
+          </a:p>
+        </p:txBody>
+      </p:sp>
+      <p:sp>
+        <p:nvSpPr>
+          <p:cNvPr id="21" name="Text 19"/>
+          <p:cNvSpPr txBox="1"/>
+          <p:nvPr/>
+        </p:nvSpPr>
+        <p:spPr>
+          <a:xfrm>
+            <a:off x="6355080" y="4389120"/>
+            <a:ext cx="1106424" cy="301752"/>
+          </a:xfrm>
+          <a:prstGeom prst="roundRect">
+            <a:avLst>
+              <a:gd name="adj" fmla="val 30303"/>
+            </a:avLst>
+          </a:prstGeom>
+          <a:solidFill>
+            <a:srgbClr val="F4ECDE"/>
+          </a:solidFill>
+          <a:ln/>
+        </p:spPr>
+        <p:txBody>
+          <a:bodyPr wrap="square" lIns="25400" tIns="25400" rIns="25400" bIns="25400" rtlCol="0" anchor="ctr"/>
+          <a:lstStyle/>
+          <a:p>
+            <a:pPr algn="ctr" indent="0" marL="0">
+              <a:buNone/>
+            </a:pPr>
+            <a:r>
+              <a:rPr lang="en-US" sz="1050" b="1" dirty="0">
+                <a:solidFill>
+                  <a:srgbClr val="2B2318"/>
+                </a:solidFill>
+                <a:latin typeface="Calibri" pitchFamily="34" charset="0"/>
+                <a:ea typeface="Calibri" pitchFamily="34" charset="-122"/>
+                <a:cs typeface="Calibri" pitchFamily="34" charset="-120"/>
+              </a:rPr>
+              <a:t>Poleis</a:t>
+            </a:r>
+            <a:endParaRPr lang="en-US" sz="1050" dirty="0"/>
+          </a:p>
+        </p:txBody>
+      </p:sp>
+      <p:sp>
+        <p:nvSpPr>
+          <p:cNvPr id="22" name="Text 20"/>
+          <p:cNvSpPr txBox="1"/>
+          <p:nvPr/>
+        </p:nvSpPr>
+        <p:spPr>
+          <a:xfrm>
+            <a:off x="7534656" y="4389120"/>
+            <a:ext cx="1106424" cy="301752"/>
+          </a:xfrm>
+          <a:prstGeom prst="roundRect">
+            <a:avLst>
+              <a:gd name="adj" fmla="val 30303"/>
+            </a:avLst>
+          </a:prstGeom>
+          <a:solidFill>
+            <a:srgbClr val="F4ECDE"/>
+          </a:solidFill>
+          <a:ln/>
+        </p:spPr>
+        <p:txBody>
+          <a:bodyPr wrap="square" lIns="25400" tIns="25400" rIns="25400" bIns="25400" rtlCol="0" anchor="ctr"/>
+          <a:lstStyle/>
+          <a:p>
+            <a:pPr algn="ctr" indent="0" marL="0">
+              <a:buNone/>
+            </a:pPr>
+            <a:r>
+              <a:rPr lang="en-US" sz="1050" b="1" dirty="0">
+                <a:solidFill>
+                  <a:srgbClr val="2B2318"/>
+                </a:solidFill>
+                <a:latin typeface="Calibri" pitchFamily="34" charset="0"/>
+                <a:ea typeface="Calibri" pitchFamily="34" charset="-122"/>
+                <a:cs typeface="Calibri" pitchFamily="34" charset="-120"/>
+              </a:rPr>
               <a:t>Schulden</a:t>
             </a:r>
-            <a:endParaRPr lang="en-US" sz="1100" dirty="0"/>
-          </a:p>
-        </p:txBody>
-      </p:sp>
-      <p:sp>
-        <p:nvSpPr>
-          <p:cNvPr id="21" name="Text 19"/>
+            <a:endParaRPr lang="en-US" sz="1050" dirty="0"/>
+          </a:p>
+        </p:txBody>
+      </p:sp>
+      <p:sp>
+        <p:nvSpPr>
+          <p:cNvPr id="23" name="Text 21"/>
           <p:cNvSpPr txBox="1"/>
           <p:nvPr/>
         </p:nvSpPr>
@@ -9765,7 +9914,7 @@
       </p:sp>
       <p:sp>
         <p:nvSpPr>
-          <p:cNvPr id="22" name="Text 20"/>
+          <p:cNvPr id="24" name="Text 22"/>
           <p:cNvSpPr txBox="1"/>
           <p:nvPr/>
         </p:nvSpPr>
@@ -10704,8 +10853,8 @@
         </p:nvSpPr>
         <p:spPr>
           <a:xfrm>
-            <a:off x="457200" y="1143000"/>
-            <a:ext cx="8229600" cy="320040"/>
+            <a:off x="457200" y="1115568"/>
+            <a:ext cx="8229600" cy="274320"/>
           </a:xfrm>
           <a:prstGeom prst="rect">
             <a:avLst/>
@@ -10729,7 +10878,7 @@
                 <a:ea typeface="Calibri" pitchFamily="34" charset="-122"/>
                 <a:cs typeface="Calibri" pitchFamily="34" charset="-120"/>
               </a:rPr>
-              <a:t>Ergänzt die Lücken 6–10.</a:t>
+              <a:t>Ergänzt die Lücken 7–14.</a:t>
             </a:r>
             <a:endParaRPr lang="en-US" sz="1300" dirty="0"/>
           </a:p>
@@ -10743,12 +10892,12 @@
         </p:nvSpPr>
         <p:spPr>
           <a:xfrm>
-            <a:off x="457200" y="1508760"/>
-            <a:ext cx="8229600" cy="2148840"/>
+            <a:off x="457200" y="1444752"/>
+            <a:ext cx="8229600" cy="2286000"/>
           </a:xfrm>
           <a:prstGeom prst="roundRect">
             <a:avLst>
-              <a:gd name="adj" fmla="val 3404"/>
+              <a:gd name="adj" fmla="val 3200"/>
             </a:avLst>
           </a:prstGeom>
           <a:solidFill>
@@ -10770,8 +10919,8 @@
         </p:nvSpPr>
         <p:spPr>
           <a:xfrm>
-            <a:off x="640080" y="1572768"/>
-            <a:ext cx="7863840" cy="2011680"/>
+            <a:off x="621792" y="1490472"/>
+            <a:ext cx="7900416" cy="2194560"/>
           </a:xfrm>
           <a:prstGeom prst="rect">
             <a:avLst/>
@@ -10784,13 +10933,10 @@
           <a:lstStyle/>
           <a:p>
             <a:pPr indent="0" marL="0">
-              <a:lnSpc>
-                <a:spcPct val="105000"/>
-              </a:lnSpc>
-              <a:buNone/>
-            </a:pPr>
-            <a:r>
-              <a:rPr lang="en-US" sz="1350" dirty="0">
+              <a:buNone/>
+            </a:pPr>
+            <a:r>
+              <a:rPr lang="en-US" sz="1250" dirty="0">
                 <a:solidFill>
                   <a:srgbClr val="2B2318"/>
                 </a:solidFill>
@@ -10801,13 +10947,10 @@
               <a:t>Als die Bevölkerung wuchs, wurde das Ackerland immer </a:t>
             </a:r>
             <a:pPr indent="0" marL="0">
-              <a:lnSpc>
-                <a:spcPct val="105000"/>
-              </a:lnSpc>
-              <a:buNone/>
-            </a:pPr>
-            <a:r>
-              <a:rPr lang="en-US" sz="1350" b="1" dirty="0">
+              <a:buNone/>
+            </a:pPr>
+            <a:r>
+              <a:rPr lang="en-US" sz="1250" b="1" dirty="0">
                 <a:solidFill>
                   <a:srgbClr val="AD4426"/>
                 </a:solidFill>
@@ -10815,16 +10958,13 @@
                 <a:ea typeface="Calibri" pitchFamily="34" charset="-122"/>
                 <a:cs typeface="Calibri" pitchFamily="34" charset="-120"/>
               </a:rPr>
-              <a:t>(6) __________</a:t>
-            </a:r>
-            <a:pPr indent="0" marL="0">
-              <a:lnSpc>
-                <a:spcPct val="105000"/>
-              </a:lnSpc>
-              <a:buNone/>
-            </a:pPr>
-            <a:r>
-              <a:rPr lang="en-US" sz="1350" dirty="0">
+              <a:t>(7) __________</a:t>
+            </a:r>
+            <a:pPr indent="0" marL="0">
+              <a:buNone/>
+            </a:pPr>
+            <a:r>
+              <a:rPr lang="en-US" sz="1250" dirty="0">
                 <a:solidFill>
                   <a:srgbClr val="2B2318"/>
                 </a:solidFill>
@@ -10835,13 +10975,10 @@
               <a:t>. Viele Poleis schickten deshalb Bürger aus, die an den Küsten des Mittelmeers und des Schwarzen Meeres neue Siedlungen gründeten. Diesen Vorgang nennt man </a:t>
             </a:r>
             <a:pPr indent="0" marL="0">
-              <a:lnSpc>
-                <a:spcPct val="105000"/>
-              </a:lnSpc>
-              <a:buNone/>
-            </a:pPr>
-            <a:r>
-              <a:rPr lang="en-US" sz="1350" b="1" dirty="0">
+              <a:buNone/>
+            </a:pPr>
+            <a:r>
+              <a:rPr lang="en-US" sz="1250" b="1" dirty="0">
                 <a:solidFill>
                   <a:srgbClr val="AD4426"/>
                 </a:solidFill>
@@ -10849,16 +10986,13 @@
                 <a:ea typeface="Calibri" pitchFamily="34" charset="-122"/>
                 <a:cs typeface="Calibri" pitchFamily="34" charset="-120"/>
               </a:rPr>
-              <a:t>(7) __________</a:t>
-            </a:r>
-            <a:pPr indent="0" marL="0">
-              <a:lnSpc>
-                <a:spcPct val="105000"/>
-              </a:lnSpc>
-              <a:buNone/>
-            </a:pPr>
-            <a:r>
-              <a:rPr lang="en-US" sz="1350" dirty="0">
+              <a:t>(8) __________</a:t>
+            </a:r>
+            <a:pPr indent="0" marL="0">
+              <a:buNone/>
+            </a:pPr>
+            <a:r>
+              <a:rPr lang="en-US" sz="1250" dirty="0">
                 <a:solidFill>
                   <a:srgbClr val="2B2318"/>
                 </a:solidFill>
@@ -10869,22 +11003,16 @@
               <a:t>.</a:t>
             </a:r>
             <a:pPr indent="0" marL="0">
-              <a:lnSpc>
-                <a:spcPct val="105000"/>
-              </a:lnSpc>
-              <a:buNone/>
-            </a:pPr>
-            <a:endParaRPr lang="en-US" sz="1350" dirty="0"/>
-          </a:p>
-          <a:p>
-            <a:pPr indent="0" marL="0">
-              <a:lnSpc>
-                <a:spcPct val="105000"/>
-              </a:lnSpc>
-              <a:buNone/>
-            </a:pPr>
-            <a:r>
-              <a:rPr lang="en-US" sz="600" dirty="0">
+              <a:buNone/>
+            </a:pPr>
+            <a:endParaRPr lang="en-US" sz="1250" dirty="0"/>
+          </a:p>
+          <a:p>
+            <a:pPr indent="0" marL="0">
+              <a:buNone/>
+            </a:pPr>
+            <a:r>
+              <a:rPr lang="en-US" sz="500" dirty="0">
                 <a:solidFill>
                   <a:srgbClr val="2B2318"/>
                 </a:solidFill>
@@ -10894,17 +11022,14 @@
               </a:rPr>
               <a:t> </a:t>
             </a:r>
-            <a:endParaRPr lang="en-US" sz="1350" dirty="0"/>
-          </a:p>
-          <a:p>
-            <a:pPr indent="0" marL="0">
-              <a:lnSpc>
-                <a:spcPct val="105000"/>
-              </a:lnSpc>
-              <a:buNone/>
-            </a:pPr>
-            <a:r>
-              <a:rPr lang="en-US" sz="1350" dirty="0">
+            <a:endParaRPr lang="en-US" sz="1250" dirty="0"/>
+          </a:p>
+          <a:p>
+            <a:pPr indent="0" marL="0">
+              <a:buNone/>
+            </a:pPr>
+            <a:r>
+              <a:rPr lang="en-US" sz="1250" dirty="0">
                 <a:solidFill>
                   <a:srgbClr val="2B2318"/>
                 </a:solidFill>
@@ -10915,13 +11040,10 @@
               <a:t>Das meiste Land gehörte wenigen reichen Familien, dem </a:t>
             </a:r>
             <a:pPr indent="0" marL="0">
-              <a:lnSpc>
-                <a:spcPct val="105000"/>
-              </a:lnSpc>
-              <a:buNone/>
-            </a:pPr>
-            <a:r>
-              <a:rPr lang="en-US" sz="1350" b="1" dirty="0">
+              <a:buNone/>
+            </a:pPr>
+            <a:r>
+              <a:rPr lang="en-US" sz="1250" b="1" dirty="0">
                 <a:solidFill>
                   <a:srgbClr val="AD4426"/>
                 </a:solidFill>
@@ -10929,16 +11051,13 @@
                 <a:ea typeface="Calibri" pitchFamily="34" charset="-122"/>
                 <a:cs typeface="Calibri" pitchFamily="34" charset="-120"/>
               </a:rPr>
-              <a:t>(8) __________</a:t>
-            </a:r>
-            <a:pPr indent="0" marL="0">
-              <a:lnSpc>
-                <a:spcPct val="105000"/>
-              </a:lnSpc>
-              <a:buNone/>
-            </a:pPr>
-            <a:r>
-              <a:rPr lang="en-US" sz="1350" dirty="0">
+              <a:t>(9) __________</a:t>
+            </a:r>
+            <a:pPr indent="0" marL="0">
+              <a:buNone/>
+            </a:pPr>
+            <a:r>
+              <a:rPr lang="en-US" sz="1250" dirty="0">
                 <a:solidFill>
                   <a:srgbClr val="2B2318"/>
                 </a:solidFill>
@@ -10946,16 +11065,13 @@
                 <a:ea typeface="Calibri" pitchFamily="34" charset="-122"/>
                 <a:cs typeface="Calibri" pitchFamily="34" charset="-120"/>
               </a:rPr>
-              <a:t>. Sie hatten auch die politische Macht. Diese Herrschaft der „Besten“ nennt man </a:t>
-            </a:r>
-            <a:pPr indent="0" marL="0">
-              <a:lnSpc>
-                <a:spcPct val="105000"/>
-              </a:lnSpc>
-              <a:buNone/>
-            </a:pPr>
-            <a:r>
-              <a:rPr lang="en-US" sz="1350" b="1" dirty="0">
+              <a:t>. Jede dieser Familien gehörte zu einem Geschlechterverband, einem </a:t>
+            </a:r>
+            <a:pPr indent="0" marL="0">
+              <a:buNone/>
+            </a:pPr>
+            <a:r>
+              <a:rPr lang="en-US" sz="1250" b="1" dirty="0">
                 <a:solidFill>
                   <a:srgbClr val="AD4426"/>
                 </a:solidFill>
@@ -10963,16 +11079,13 @@
                 <a:ea typeface="Calibri" pitchFamily="34" charset="-122"/>
                 <a:cs typeface="Calibri" pitchFamily="34" charset="-120"/>
               </a:rPr>
-              <a:t>(9) __________</a:t>
-            </a:r>
-            <a:pPr indent="0" marL="0">
-              <a:lnSpc>
-                <a:spcPct val="105000"/>
-              </a:lnSpc>
-              <a:buNone/>
-            </a:pPr>
-            <a:r>
-              <a:rPr lang="en-US" sz="1350" dirty="0">
+              <a:t>(10) __________</a:t>
+            </a:r>
+            <a:pPr indent="0" marL="0">
+              <a:buNone/>
+            </a:pPr>
+            <a:r>
+              <a:rPr lang="en-US" sz="1250" dirty="0">
                 <a:solidFill>
                   <a:srgbClr val="2B2318"/>
                 </a:solidFill>
@@ -10980,16 +11093,13 @@
                 <a:ea typeface="Calibri" pitchFamily="34" charset="-122"/>
                 <a:cs typeface="Calibri" pitchFamily="34" charset="-120"/>
               </a:rPr>
-              <a:t>. Viele Kleinbauern dagegen konnten von ihrem Land kaum leben. Sie liehen sich Saatgut und Getreide bei den Adligen und gerieten so in </a:t>
-            </a:r>
-            <a:pPr indent="0" marL="0">
-              <a:lnSpc>
-                <a:spcPct val="105000"/>
-              </a:lnSpc>
-              <a:buNone/>
-            </a:pPr>
-            <a:r>
-              <a:rPr lang="en-US" sz="1350" b="1" dirty="0">
+              <a:t>. Alle Athener waren außerdem in vier große Stammesverbände eingeteilt; ein solcher Verband hieß </a:t>
+            </a:r>
+            <a:pPr indent="0" marL="0">
+              <a:buNone/>
+            </a:pPr>
+            <a:r>
+              <a:rPr lang="en-US" sz="1250" b="1" dirty="0">
                 <a:solidFill>
                   <a:srgbClr val="AD4426"/>
                 </a:solidFill>
@@ -10997,16 +11107,13 @@
                 <a:ea typeface="Calibri" pitchFamily="34" charset="-122"/>
                 <a:cs typeface="Calibri" pitchFamily="34" charset="-120"/>
               </a:rPr>
-              <a:t>(10) __________</a:t>
-            </a:r>
-            <a:pPr indent="0" marL="0">
-              <a:lnSpc>
-                <a:spcPct val="105000"/>
-              </a:lnSpc>
-              <a:buNone/>
-            </a:pPr>
-            <a:r>
-              <a:rPr lang="en-US" sz="1350" dirty="0">
+              <a:t>(11) __________</a:t>
+            </a:r>
+            <a:pPr indent="0" marL="0">
+              <a:buNone/>
+            </a:pPr>
+            <a:r>
+              <a:rPr lang="en-US" sz="1250" dirty="0">
                 <a:solidFill>
                   <a:srgbClr val="2B2318"/>
                 </a:solidFill>
@@ -11014,9 +11121,130 @@
                 <a:ea typeface="Calibri" pitchFamily="34" charset="-122"/>
                 <a:cs typeface="Calibri" pitchFamily="34" charset="-120"/>
               </a:rPr>
+              <a:t>. Die Adligen hatten auch die politische Macht. Diese Herrschaft der „Besten“ nennt man </a:t>
+            </a:r>
+            <a:pPr indent="0" marL="0">
+              <a:buNone/>
+            </a:pPr>
+            <a:r>
+              <a:rPr lang="en-US" sz="1250" b="1" dirty="0">
+                <a:solidFill>
+                  <a:srgbClr val="AD4426"/>
+                </a:solidFill>
+                <a:latin typeface="Calibri" pitchFamily="34" charset="0"/>
+                <a:ea typeface="Calibri" pitchFamily="34" charset="-122"/>
+                <a:cs typeface="Calibri" pitchFamily="34" charset="-120"/>
+              </a:rPr>
+              <a:t>(12) __________</a:t>
+            </a:r>
+            <a:pPr indent="0" marL="0">
+              <a:buNone/>
+            </a:pPr>
+            <a:r>
+              <a:rPr lang="en-US" sz="1250" dirty="0">
+                <a:solidFill>
+                  <a:srgbClr val="2B2318"/>
+                </a:solidFill>
+                <a:latin typeface="Calibri" pitchFamily="34" charset="0"/>
+                <a:ea typeface="Calibri" pitchFamily="34" charset="-122"/>
+                <a:cs typeface="Calibri" pitchFamily="34" charset="-120"/>
+              </a:rPr>
+              <a:t>. Aus ihren Reihen kamen die Archonten, und ihr Rat tagte auf dem Hügel des Kriegsgottes Ares. Er hieß deshalb </a:t>
+            </a:r>
+            <a:pPr indent="0" marL="0">
+              <a:buNone/>
+            </a:pPr>
+            <a:r>
+              <a:rPr lang="en-US" sz="1250" b="1" dirty="0">
+                <a:solidFill>
+                  <a:srgbClr val="AD4426"/>
+                </a:solidFill>
+                <a:latin typeface="Calibri" pitchFamily="34" charset="0"/>
+                <a:ea typeface="Calibri" pitchFamily="34" charset="-122"/>
+                <a:cs typeface="Calibri" pitchFamily="34" charset="-120"/>
+              </a:rPr>
+              <a:t>(13) __________</a:t>
+            </a:r>
+            <a:pPr indent="0" marL="0">
+              <a:buNone/>
+            </a:pPr>
+            <a:r>
+              <a:rPr lang="en-US" sz="1250" dirty="0">
+                <a:solidFill>
+                  <a:srgbClr val="2B2318"/>
+                </a:solidFill>
+                <a:latin typeface="Calibri" pitchFamily="34" charset="0"/>
+                <a:ea typeface="Calibri" pitchFamily="34" charset="-122"/>
+                <a:cs typeface="Calibri" pitchFamily="34" charset="-120"/>
+              </a:rPr>
               <a:t>.</a:t>
             </a:r>
-            <a:endParaRPr lang="en-US" sz="1350" dirty="0"/>
+            <a:pPr indent="0" marL="0">
+              <a:buNone/>
+            </a:pPr>
+            <a:endParaRPr lang="en-US" sz="1250" dirty="0"/>
+          </a:p>
+          <a:p>
+            <a:pPr indent="0" marL="0">
+              <a:buNone/>
+            </a:pPr>
+            <a:r>
+              <a:rPr lang="en-US" sz="500" dirty="0">
+                <a:solidFill>
+                  <a:srgbClr val="2B2318"/>
+                </a:solidFill>
+                <a:latin typeface="Calibri" pitchFamily="34" charset="0"/>
+                <a:ea typeface="Calibri" pitchFamily="34" charset="-122"/>
+                <a:cs typeface="Calibri" pitchFamily="34" charset="-120"/>
+              </a:rPr>
+              <a:t> </a:t>
+            </a:r>
+            <a:endParaRPr lang="en-US" sz="1250" dirty="0"/>
+          </a:p>
+          <a:p>
+            <a:pPr indent="0" marL="0">
+              <a:buNone/>
+            </a:pPr>
+            <a:r>
+              <a:rPr lang="en-US" sz="1250" dirty="0">
+                <a:solidFill>
+                  <a:srgbClr val="2B2318"/>
+                </a:solidFill>
+                <a:latin typeface="Calibri" pitchFamily="34" charset="0"/>
+                <a:ea typeface="Calibri" pitchFamily="34" charset="-122"/>
+                <a:cs typeface="Calibri" pitchFamily="34" charset="-120"/>
+              </a:rPr>
+              <a:t>Viele Kleinbauern dagegen konnten von ihrem Land kaum leben. Sie liehen sich Saatgut und Getreide bei den Adligen und gerieten so in </a:t>
+            </a:r>
+            <a:pPr indent="0" marL="0">
+              <a:buNone/>
+            </a:pPr>
+            <a:r>
+              <a:rPr lang="en-US" sz="1250" b="1" dirty="0">
+                <a:solidFill>
+                  <a:srgbClr val="AD4426"/>
+                </a:solidFill>
+                <a:latin typeface="Calibri" pitchFamily="34" charset="0"/>
+                <a:ea typeface="Calibri" pitchFamily="34" charset="-122"/>
+                <a:cs typeface="Calibri" pitchFamily="34" charset="-120"/>
+              </a:rPr>
+              <a:t>(14) __________</a:t>
+            </a:r>
+            <a:pPr indent="0" marL="0">
+              <a:buNone/>
+            </a:pPr>
+            <a:r>
+              <a:rPr lang="en-US" sz="1250" dirty="0">
+                <a:solidFill>
+                  <a:srgbClr val="2B2318"/>
+                </a:solidFill>
+                <a:latin typeface="Calibri" pitchFamily="34" charset="0"/>
+                <a:ea typeface="Calibri" pitchFamily="34" charset="-122"/>
+                <a:cs typeface="Calibri" pitchFamily="34" charset="-120"/>
+              </a:rPr>
+              <a:t>.</a:t>
+            </a:r>
+            <a:endParaRPr lang="en-US" sz="1250" dirty="0"/>
           </a:p>
         </p:txBody>
       </p:sp>
@@ -11028,7 +11256,7 @@
         </p:nvSpPr>
         <p:spPr>
           <a:xfrm>
-            <a:off x="457200" y="3749040"/>
+            <a:off x="457200" y="3767328"/>
             <a:ext cx="1828800" cy="228600"/>
           </a:xfrm>
           <a:prstGeom prst="rect">
@@ -11068,11 +11296,11 @@
         <p:spPr>
           <a:xfrm>
             <a:off x="457200" y="4023360"/>
-            <a:ext cx="1280160" cy="310896"/>
+            <a:ext cx="1106424" cy="301752"/>
           </a:xfrm>
           <a:prstGeom prst="roundRect">
             <a:avLst>
-              <a:gd name="adj" fmla="val 29412"/>
+              <a:gd name="adj" fmla="val 30303"/>
             </a:avLst>
           </a:prstGeom>
           <a:solidFill>
@@ -11088,7 +11316,7 @@
               <a:buNone/>
             </a:pPr>
             <a:r>
-              <a:rPr lang="en-US" sz="1100" b="1" dirty="0">
+              <a:rPr lang="en-US" sz="1050" b="1" dirty="0">
                 <a:solidFill>
                   <a:srgbClr val="2B2318"/>
                 </a:solidFill>
@@ -11098,7 +11326,7 @@
               </a:rPr>
               <a:t>Adel</a:t>
             </a:r>
-            <a:endParaRPr lang="en-US" sz="1100" dirty="0"/>
+            <a:endParaRPr lang="en-US" sz="1050" dirty="0"/>
           </a:p>
         </p:txBody>
       </p:sp>
@@ -11110,12 +11338,12 @@
         </p:nvSpPr>
         <p:spPr>
           <a:xfrm>
-            <a:off x="1828800" y="4023360"/>
-            <a:ext cx="1280160" cy="310896"/>
+            <a:off x="1636776" y="4023360"/>
+            <a:ext cx="1106424" cy="301752"/>
           </a:xfrm>
           <a:prstGeom prst="roundRect">
             <a:avLst>
-              <a:gd name="adj" fmla="val 29412"/>
+              <a:gd name="adj" fmla="val 30303"/>
             </a:avLst>
           </a:prstGeom>
           <a:solidFill>
@@ -11131,7 +11359,7 @@
               <a:buNone/>
             </a:pPr>
             <a:r>
-              <a:rPr lang="en-US" sz="1100" b="1" dirty="0">
+              <a:rPr lang="en-US" sz="1050" b="1" dirty="0">
                 <a:solidFill>
                   <a:srgbClr val="2B2318"/>
                 </a:solidFill>
@@ -11141,7 +11369,7 @@
               </a:rPr>
               <a:t>Agora</a:t>
             </a:r>
-            <a:endParaRPr lang="en-US" sz="1100" dirty="0"/>
+            <a:endParaRPr lang="en-US" sz="1050" dirty="0"/>
           </a:p>
         </p:txBody>
       </p:sp>
@@ -11153,12 +11381,12 @@
         </p:nvSpPr>
         <p:spPr>
           <a:xfrm>
-            <a:off x="3200400" y="4023360"/>
-            <a:ext cx="1280160" cy="310896"/>
+            <a:off x="2816352" y="4023360"/>
+            <a:ext cx="1106424" cy="301752"/>
           </a:xfrm>
           <a:prstGeom prst="roundRect">
             <a:avLst>
-              <a:gd name="adj" fmla="val 29412"/>
+              <a:gd name="adj" fmla="val 30303"/>
             </a:avLst>
           </a:prstGeom>
           <a:solidFill>
@@ -11174,7 +11402,7 @@
               <a:buNone/>
             </a:pPr>
             <a:r>
-              <a:rPr lang="en-US" sz="1100" b="1" dirty="0">
+              <a:rPr lang="en-US" sz="1050" b="1" dirty="0">
                 <a:solidFill>
                   <a:srgbClr val="2B2318"/>
                 </a:solidFill>
@@ -11184,7 +11412,7 @@
               </a:rPr>
               <a:t>Akropolis</a:t>
             </a:r>
-            <a:endParaRPr lang="en-US" sz="1100" dirty="0"/>
+            <a:endParaRPr lang="en-US" sz="1050" dirty="0"/>
           </a:p>
         </p:txBody>
       </p:sp>
@@ -11196,12 +11424,12 @@
         </p:nvSpPr>
         <p:spPr>
           <a:xfrm>
-            <a:off x="4572000" y="4023360"/>
-            <a:ext cx="1280160" cy="310896"/>
+            <a:off x="3995928" y="4023360"/>
+            <a:ext cx="1106424" cy="301752"/>
           </a:xfrm>
           <a:prstGeom prst="roundRect">
             <a:avLst>
-              <a:gd name="adj" fmla="val 29412"/>
+              <a:gd name="adj" fmla="val 30303"/>
             </a:avLst>
           </a:prstGeom>
           <a:solidFill>
@@ -11217,7 +11445,7 @@
               <a:buNone/>
             </a:pPr>
             <a:r>
-              <a:rPr lang="en-US" sz="1100" b="1" dirty="0">
+              <a:rPr lang="en-US" sz="1050" b="1" dirty="0">
                 <a:solidFill>
                   <a:srgbClr val="2B2318"/>
                 </a:solidFill>
@@ -11225,9 +11453,9 @@
                 <a:ea typeface="Calibri" pitchFamily="34" charset="-122"/>
                 <a:cs typeface="Calibri" pitchFamily="34" charset="-120"/>
               </a:rPr>
-              <a:t>Aristokratie</a:t>
-            </a:r>
-            <a:endParaRPr lang="en-US" sz="1100" dirty="0"/>
+              <a:t>Areopag</a:t>
+            </a:r>
+            <a:endParaRPr lang="en-US" sz="1050" dirty="0"/>
           </a:p>
         </p:txBody>
       </p:sp>
@@ -11239,12 +11467,12 @@
         </p:nvSpPr>
         <p:spPr>
           <a:xfrm>
-            <a:off x="5943600" y="4023360"/>
-            <a:ext cx="1280160" cy="310896"/>
+            <a:off x="5175504" y="4023360"/>
+            <a:ext cx="1106424" cy="301752"/>
           </a:xfrm>
           <a:prstGeom prst="roundRect">
             <a:avLst>
-              <a:gd name="adj" fmla="val 29412"/>
+              <a:gd name="adj" fmla="val 30303"/>
             </a:avLst>
           </a:prstGeom>
           <a:solidFill>
@@ -11260,7 +11488,7 @@
               <a:buNone/>
             </a:pPr>
             <a:r>
-              <a:rPr lang="en-US" sz="1100" b="1" dirty="0">
+              <a:rPr lang="en-US" sz="1050" b="1" dirty="0">
                 <a:solidFill>
                   <a:srgbClr val="2B2318"/>
                 </a:solidFill>
@@ -11268,9 +11496,9 @@
                 <a:ea typeface="Calibri" pitchFamily="34" charset="-122"/>
                 <a:cs typeface="Calibri" pitchFamily="34" charset="-120"/>
               </a:rPr>
-              <a:t>Demokratie</a:t>
-            </a:r>
-            <a:endParaRPr lang="en-US" sz="1100" dirty="0"/>
+              <a:t>Aristokratie</a:t>
+            </a:r>
+            <a:endParaRPr lang="en-US" sz="1050" dirty="0"/>
           </a:p>
         </p:txBody>
       </p:sp>
@@ -11282,12 +11510,12 @@
         </p:nvSpPr>
         <p:spPr>
           <a:xfrm>
-            <a:off x="7315200" y="4023360"/>
-            <a:ext cx="1280160" cy="310896"/>
+            <a:off x="6355080" y="4023360"/>
+            <a:ext cx="1106424" cy="301752"/>
           </a:xfrm>
           <a:prstGeom prst="roundRect">
             <a:avLst>
-              <a:gd name="adj" fmla="val 29412"/>
+              <a:gd name="adj" fmla="val 30303"/>
             </a:avLst>
           </a:prstGeom>
           <a:solidFill>
@@ -11303,7 +11531,7 @@
               <a:buNone/>
             </a:pPr>
             <a:r>
-              <a:rPr lang="en-US" sz="1100" b="1" dirty="0">
+              <a:rPr lang="en-US" sz="1050" b="1" dirty="0">
                 <a:solidFill>
                   <a:srgbClr val="2B2318"/>
                 </a:solidFill>
@@ -11313,7 +11541,7 @@
               </a:rPr>
               <a:t>Ebenen</a:t>
             </a:r>
-            <a:endParaRPr lang="en-US" sz="1100" dirty="0"/>
+            <a:endParaRPr lang="en-US" sz="1050" dirty="0"/>
           </a:p>
         </p:txBody>
       </p:sp>
@@ -11325,12 +11553,12 @@
         </p:nvSpPr>
         <p:spPr>
           <a:xfrm>
-            <a:off x="457200" y="4407408"/>
-            <a:ext cx="1280160" cy="310896"/>
+            <a:off x="7534656" y="4023360"/>
+            <a:ext cx="1106424" cy="301752"/>
           </a:xfrm>
           <a:prstGeom prst="roundRect">
             <a:avLst>
-              <a:gd name="adj" fmla="val 29412"/>
+              <a:gd name="adj" fmla="val 30303"/>
             </a:avLst>
           </a:prstGeom>
           <a:solidFill>
@@ -11346,7 +11574,7 @@
               <a:buNone/>
             </a:pPr>
             <a:r>
-              <a:rPr lang="en-US" sz="1100" b="1" dirty="0">
+              <a:rPr lang="en-US" sz="1050" b="1" dirty="0">
                 <a:solidFill>
                   <a:srgbClr val="2B2318"/>
                 </a:solidFill>
@@ -11356,7 +11584,7 @@
               </a:rPr>
               <a:t>Gebirgen</a:t>
             </a:r>
-            <a:endParaRPr lang="en-US" sz="1100" dirty="0"/>
+            <a:endParaRPr lang="en-US" sz="1050" dirty="0"/>
           </a:p>
         </p:txBody>
       </p:sp>
@@ -11368,12 +11596,12 @@
         </p:nvSpPr>
         <p:spPr>
           <a:xfrm>
-            <a:off x="1828800" y="4407408"/>
-            <a:ext cx="1280160" cy="310896"/>
+            <a:off x="457200" y="4389120"/>
+            <a:ext cx="1106424" cy="301752"/>
           </a:xfrm>
           <a:prstGeom prst="roundRect">
             <a:avLst>
-              <a:gd name="adj" fmla="val 29412"/>
+              <a:gd name="adj" fmla="val 30303"/>
             </a:avLst>
           </a:prstGeom>
           <a:solidFill>
@@ -11389,7 +11617,7 @@
               <a:buNone/>
             </a:pPr>
             <a:r>
-              <a:rPr lang="en-US" sz="1100" b="1" dirty="0">
+              <a:rPr lang="en-US" sz="1050" b="1" dirty="0">
                 <a:solidFill>
                   <a:srgbClr val="2B2318"/>
                 </a:solidFill>
@@ -11397,9 +11625,9 @@
                 <a:ea typeface="Calibri" pitchFamily="34" charset="-122"/>
                 <a:cs typeface="Calibri" pitchFamily="34" charset="-120"/>
               </a:rPr>
-              <a:t>knapper</a:t>
-            </a:r>
-            <a:endParaRPr lang="en-US" sz="1100" dirty="0"/>
+              <a:t>Gemeinde­staat</a:t>
+            </a:r>
+            <a:endParaRPr lang="en-US" sz="1050" dirty="0"/>
           </a:p>
         </p:txBody>
       </p:sp>
@@ -11411,12 +11639,12 @@
         </p:nvSpPr>
         <p:spPr>
           <a:xfrm>
-            <a:off x="3200400" y="4407408"/>
-            <a:ext cx="1280160" cy="310896"/>
+            <a:off x="1636776" y="4389120"/>
+            <a:ext cx="1106424" cy="301752"/>
           </a:xfrm>
           <a:prstGeom prst="roundRect">
             <a:avLst>
-              <a:gd name="adj" fmla="val 29412"/>
+              <a:gd name="adj" fmla="val 30303"/>
             </a:avLst>
           </a:prstGeom>
           <a:solidFill>
@@ -11432,7 +11660,7 @@
               <a:buNone/>
             </a:pPr>
             <a:r>
-              <a:rPr lang="en-US" sz="1100" b="1" dirty="0">
+              <a:rPr lang="en-US" sz="1050" b="1" dirty="0">
                 <a:solidFill>
                   <a:srgbClr val="2B2318"/>
                 </a:solidFill>
@@ -11440,9 +11668,9 @@
                 <a:ea typeface="Calibri" pitchFamily="34" charset="-122"/>
                 <a:cs typeface="Calibri" pitchFamily="34" charset="-120"/>
               </a:rPr>
-              <a:t>Kolonisation</a:t>
-            </a:r>
-            <a:endParaRPr lang="en-US" sz="1100" dirty="0"/>
+              <a:t>Genos</a:t>
+            </a:r>
+            <a:endParaRPr lang="en-US" sz="1050" dirty="0"/>
           </a:p>
         </p:txBody>
       </p:sp>
@@ -11454,12 +11682,12 @@
         </p:nvSpPr>
         <p:spPr>
           <a:xfrm>
-            <a:off x="4572000" y="4407408"/>
-            <a:ext cx="1280160" cy="310896"/>
+            <a:off x="2816352" y="4389120"/>
+            <a:ext cx="1106424" cy="301752"/>
           </a:xfrm>
           <a:prstGeom prst="roundRect">
             <a:avLst>
-              <a:gd name="adj" fmla="val 29412"/>
+              <a:gd name="adj" fmla="val 30303"/>
             </a:avLst>
           </a:prstGeom>
           <a:solidFill>
@@ -11475,7 +11703,7 @@
               <a:buNone/>
             </a:pPr>
             <a:r>
-              <a:rPr lang="en-US" sz="1100" b="1" dirty="0">
+              <a:rPr lang="en-US" sz="1050" b="1" dirty="0">
                 <a:solidFill>
                   <a:srgbClr val="2B2318"/>
                 </a:solidFill>
@@ -11483,9 +11711,9 @@
                 <a:ea typeface="Calibri" pitchFamily="34" charset="-122"/>
                 <a:cs typeface="Calibri" pitchFamily="34" charset="-120"/>
               </a:rPr>
-              <a:t>Monarchie</a:t>
-            </a:r>
-            <a:endParaRPr lang="en-US" sz="1100" dirty="0"/>
+              <a:t>knapper</a:t>
+            </a:r>
+            <a:endParaRPr lang="en-US" sz="1050" dirty="0"/>
           </a:p>
         </p:txBody>
       </p:sp>
@@ -11497,12 +11725,12 @@
         </p:nvSpPr>
         <p:spPr>
           <a:xfrm>
-            <a:off x="5943600" y="4407408"/>
-            <a:ext cx="1280160" cy="310896"/>
+            <a:off x="3995928" y="4389120"/>
+            <a:ext cx="1106424" cy="301752"/>
           </a:xfrm>
           <a:prstGeom prst="roundRect">
             <a:avLst>
-              <a:gd name="adj" fmla="val 29412"/>
+              <a:gd name="adj" fmla="val 30303"/>
             </a:avLst>
           </a:prstGeom>
           <a:solidFill>
@@ -11518,7 +11746,7 @@
               <a:buNone/>
             </a:pPr>
             <a:r>
-              <a:rPr lang="en-US" sz="1100" b="1" dirty="0">
+              <a:rPr lang="en-US" sz="1050" b="1" dirty="0">
                 <a:solidFill>
                   <a:srgbClr val="2B2318"/>
                 </a:solidFill>
@@ -11526,9 +11754,9 @@
                 <a:ea typeface="Calibri" pitchFamily="34" charset="-122"/>
                 <a:cs typeface="Calibri" pitchFamily="34" charset="-120"/>
               </a:rPr>
-              <a:t>Poleis</a:t>
-            </a:r>
-            <a:endParaRPr lang="en-US" sz="1100" dirty="0"/>
+              <a:t>Kolonisation</a:t>
+            </a:r>
+            <a:endParaRPr lang="en-US" sz="1050" dirty="0"/>
           </a:p>
         </p:txBody>
       </p:sp>
@@ -11540,12 +11768,12 @@
         </p:nvSpPr>
         <p:spPr>
           <a:xfrm>
-            <a:off x="7315200" y="4407408"/>
-            <a:ext cx="1280160" cy="310896"/>
+            <a:off x="5175504" y="4389120"/>
+            <a:ext cx="1106424" cy="301752"/>
           </a:xfrm>
           <a:prstGeom prst="roundRect">
             <a:avLst>
-              <a:gd name="adj" fmla="val 29412"/>
+              <a:gd name="adj" fmla="val 30303"/>
             </a:avLst>
           </a:prstGeom>
           <a:solidFill>
@@ -11561,7 +11789,7 @@
               <a:buNone/>
             </a:pPr>
             <a:r>
-              <a:rPr lang="en-US" sz="1100" b="1" dirty="0">
+              <a:rPr lang="en-US" sz="1050" b="1" dirty="0">
                 <a:solidFill>
                   <a:srgbClr val="2B2318"/>
                 </a:solidFill>
@@ -11569,15 +11797,101 @@
                 <a:ea typeface="Calibri" pitchFamily="34" charset="-122"/>
                 <a:cs typeface="Calibri" pitchFamily="34" charset="-120"/>
               </a:rPr>
+              <a:t>Phyle</a:t>
+            </a:r>
+            <a:endParaRPr lang="en-US" sz="1050" dirty="0"/>
+          </a:p>
+        </p:txBody>
+      </p:sp>
+      <p:sp>
+        <p:nvSpPr>
+          <p:cNvPr id="21" name="Text 19"/>
+          <p:cNvSpPr txBox="1"/>
+          <p:nvPr/>
+        </p:nvSpPr>
+        <p:spPr>
+          <a:xfrm>
+            <a:off x="6355080" y="4389120"/>
+            <a:ext cx="1106424" cy="301752"/>
+          </a:xfrm>
+          <a:prstGeom prst="roundRect">
+            <a:avLst>
+              <a:gd name="adj" fmla="val 30303"/>
+            </a:avLst>
+          </a:prstGeom>
+          <a:solidFill>
+            <a:srgbClr val="F4ECDE"/>
+          </a:solidFill>
+          <a:ln/>
+        </p:spPr>
+        <p:txBody>
+          <a:bodyPr wrap="square" lIns="25400" tIns="25400" rIns="25400" bIns="25400" rtlCol="0" anchor="ctr"/>
+          <a:lstStyle/>
+          <a:p>
+            <a:pPr algn="ctr" indent="0" marL="0">
+              <a:buNone/>
+            </a:pPr>
+            <a:r>
+              <a:rPr lang="en-US" sz="1050" b="1" dirty="0">
+                <a:solidFill>
+                  <a:srgbClr val="2B2318"/>
+                </a:solidFill>
+                <a:latin typeface="Calibri" pitchFamily="34" charset="0"/>
+                <a:ea typeface="Calibri" pitchFamily="34" charset="-122"/>
+                <a:cs typeface="Calibri" pitchFamily="34" charset="-120"/>
+              </a:rPr>
+              <a:t>Poleis</a:t>
+            </a:r>
+            <a:endParaRPr lang="en-US" sz="1050" dirty="0"/>
+          </a:p>
+        </p:txBody>
+      </p:sp>
+      <p:sp>
+        <p:nvSpPr>
+          <p:cNvPr id="22" name="Text 20"/>
+          <p:cNvSpPr txBox="1"/>
+          <p:nvPr/>
+        </p:nvSpPr>
+        <p:spPr>
+          <a:xfrm>
+            <a:off x="7534656" y="4389120"/>
+            <a:ext cx="1106424" cy="301752"/>
+          </a:xfrm>
+          <a:prstGeom prst="roundRect">
+            <a:avLst>
+              <a:gd name="adj" fmla="val 30303"/>
+            </a:avLst>
+          </a:prstGeom>
+          <a:solidFill>
+            <a:srgbClr val="F4ECDE"/>
+          </a:solidFill>
+          <a:ln/>
+        </p:spPr>
+        <p:txBody>
+          <a:bodyPr wrap="square" lIns="25400" tIns="25400" rIns="25400" bIns="25400" rtlCol="0" anchor="ctr"/>
+          <a:lstStyle/>
+          <a:p>
+            <a:pPr algn="ctr" indent="0" marL="0">
+              <a:buNone/>
+            </a:pPr>
+            <a:r>
+              <a:rPr lang="en-US" sz="1050" b="1" dirty="0">
+                <a:solidFill>
+                  <a:srgbClr val="2B2318"/>
+                </a:solidFill>
+                <a:latin typeface="Calibri" pitchFamily="34" charset="0"/>
+                <a:ea typeface="Calibri" pitchFamily="34" charset="-122"/>
+                <a:cs typeface="Calibri" pitchFamily="34" charset="-120"/>
+              </a:rPr>
               <a:t>Schulden</a:t>
             </a:r>
-            <a:endParaRPr lang="en-US" sz="1100" dirty="0"/>
-          </a:p>
-        </p:txBody>
-      </p:sp>
-      <p:sp>
-        <p:nvSpPr>
-          <p:cNvPr id="21" name="Text 19"/>
+            <a:endParaRPr lang="en-US" sz="1050" dirty="0"/>
+          </a:p>
+        </p:txBody>
+      </p:sp>
+      <p:sp>
+        <p:nvSpPr>
+          <p:cNvPr id="23" name="Text 21"/>
           <p:cNvSpPr txBox="1"/>
           <p:nvPr/>
         </p:nvSpPr>
@@ -11616,7 +11930,7 @@
       </p:sp>
       <p:sp>
         <p:nvSpPr>
-          <p:cNvPr id="22" name="Text 20"/>
+          <p:cNvPr id="24" name="Text 22"/>
           <p:cNvSpPr txBox="1"/>
           <p:nvPr/>
         </p:nvSpPr>
@@ -11718,7 +12032,7 @@
                 <a:ea typeface="Calibri" pitchFamily="34" charset="-122"/>
                 <a:cs typeface="Calibri" pitchFamily="34" charset="-120"/>
               </a:rPr>
-              <a:t>LÜCKENTEXT · LÖSUNG</a:t>
+              <a:t>LÜCKENTEXT · LÖSUNG 1–6</a:t>
             </a:r>
             <a:endParaRPr lang="en-US" sz="1100" dirty="0"/>
           </a:p>
@@ -11771,8 +12085,8 @@
         </p:nvSpPr>
         <p:spPr>
           <a:xfrm>
-            <a:off x="457200" y="1188720"/>
-            <a:ext cx="8229600" cy="3063240"/>
+            <a:off x="457200" y="1234440"/>
+            <a:ext cx="8229600" cy="3291840"/>
           </a:xfrm>
           <a:prstGeom prst="rect">
             <a:avLst/>
@@ -11788,7 +12102,7 @@
               <a:buNone/>
             </a:pPr>
             <a:r>
-              <a:rPr lang="en-US" sz="1150" dirty="0">
+              <a:rPr lang="en-US" sz="1400" dirty="0">
                 <a:solidFill>
                   <a:srgbClr val="2B2318"/>
                 </a:solidFill>
@@ -11802,7 +12116,7 @@
               <a:buNone/>
             </a:pPr>
             <a:r>
-              <a:rPr lang="en-US" sz="1150" b="1" dirty="0">
+              <a:rPr lang="en-US" sz="1400" b="1" dirty="0">
                 <a:solidFill>
                   <a:srgbClr val="2B2318"/>
                 </a:solidFill>
@@ -11819,7 +12133,7 @@
               <a:buNone/>
             </a:pPr>
             <a:r>
-              <a:rPr lang="en-US" sz="1150" dirty="0">
+              <a:rPr lang="en-US" sz="1400" dirty="0">
                 <a:solidFill>
                   <a:srgbClr val="2B2318"/>
                 </a:solidFill>
@@ -11833,7 +12147,7 @@
               <a:buNone/>
             </a:pPr>
             <a:r>
-              <a:rPr lang="en-US" sz="1150" b="1" dirty="0">
+              <a:rPr lang="en-US" sz="1400" b="1" dirty="0">
                 <a:solidFill>
                   <a:srgbClr val="2B2318"/>
                 </a:solidFill>
@@ -11850,7 +12164,7 @@
               <a:buNone/>
             </a:pPr>
             <a:r>
-              <a:rPr lang="en-US" sz="1150" dirty="0">
+              <a:rPr lang="en-US" sz="1400" dirty="0">
                 <a:solidFill>
                   <a:srgbClr val="2B2318"/>
                 </a:solidFill>
@@ -11864,7 +12178,7 @@
               <a:buNone/>
             </a:pPr>
             <a:r>
-              <a:rPr lang="en-US" sz="1150" b="1" dirty="0">
+              <a:rPr lang="en-US" sz="1400" b="1" dirty="0">
                 <a:solidFill>
                   <a:srgbClr val="2B2318"/>
                 </a:solidFill>
@@ -11881,7 +12195,7 @@
               <a:buNone/>
             </a:pPr>
             <a:r>
-              <a:rPr lang="en-US" sz="1150" dirty="0">
+              <a:rPr lang="en-US" sz="1400" dirty="0">
                 <a:solidFill>
                   <a:srgbClr val="2B2318"/>
                 </a:solidFill>
@@ -11889,13 +12203,13 @@
                 <a:ea typeface="Calibri" pitchFamily="34" charset="-122"/>
                 <a:cs typeface="Calibri" pitchFamily="34" charset="-120"/>
               </a:rPr>
-              <a:t>. Zu jeder Polis gehörten die Stadt mit dem Burgberg, der </a:t>
-            </a:r>
-            <a:pPr indent="0" marL="0">
-              <a:buNone/>
-            </a:pPr>
-            <a:r>
-              <a:rPr lang="en-US" sz="1150" b="1" dirty="0">
+              <a:t>. Eine Polis war ein </a:t>
+            </a:r>
+            <a:pPr indent="0" marL="0">
+              <a:buNone/>
+            </a:pPr>
+            <a:r>
+              <a:rPr lang="en-US" sz="1400" b="1" dirty="0">
                 <a:solidFill>
                   <a:srgbClr val="2B2318"/>
                 </a:solidFill>
@@ -11906,13 +12220,13 @@
                 <a:ea typeface="Calibri" pitchFamily="34" charset="-122"/>
                 <a:cs typeface="Calibri" pitchFamily="34" charset="-120"/>
               </a:rPr>
-              <a:t>Akropolis</a:t>
-            </a:r>
-            <a:pPr indent="0" marL="0">
-              <a:buNone/>
-            </a:pPr>
-            <a:r>
-              <a:rPr lang="en-US" sz="1150" dirty="0">
+              <a:t>Gemeindestaat</a:t>
+            </a:r>
+            <a:pPr indent="0" marL="0">
+              <a:buNone/>
+            </a:pPr>
+            <a:r>
+              <a:rPr lang="en-US" sz="1400" dirty="0">
                 <a:solidFill>
                   <a:srgbClr val="2B2318"/>
                 </a:solidFill>
@@ -11920,13 +12234,50 @@
                 <a:ea typeface="Calibri" pitchFamily="34" charset="-122"/>
                 <a:cs typeface="Calibri" pitchFamily="34" charset="-120"/>
               </a:rPr>
-              <a:t>, und dem Marktplatz, der </a:t>
-            </a:r>
-            <a:pPr indent="0" marL="0">
-              <a:buNone/>
-            </a:pPr>
-            <a:r>
-              <a:rPr lang="en-US" sz="1150" b="1" dirty="0">
+              <a:t>: Der Staat, das waren seine Bürger. Man sprach deshalb von „den Athenern“, nicht von „Athen“.</a:t>
+            </a:r>
+            <a:pPr indent="0" marL="0">
+              <a:buNone/>
+            </a:pPr>
+            <a:endParaRPr lang="en-US" sz="1400" dirty="0"/>
+          </a:p>
+          <a:p>
+            <a:pPr indent="0" marL="0">
+              <a:buNone/>
+            </a:pPr>
+            <a:r>
+              <a:rPr lang="en-US" sz="500" dirty="0">
+                <a:solidFill>
+                  <a:srgbClr val="2B2318"/>
+                </a:solidFill>
+                <a:latin typeface="Calibri" pitchFamily="34" charset="0"/>
+                <a:ea typeface="Calibri" pitchFamily="34" charset="-122"/>
+                <a:cs typeface="Calibri" pitchFamily="34" charset="-120"/>
+              </a:rPr>
+              <a:t> </a:t>
+            </a:r>
+            <a:endParaRPr lang="en-US" sz="1400" dirty="0"/>
+          </a:p>
+          <a:p>
+            <a:pPr indent="0" marL="0">
+              <a:buNone/>
+            </a:pPr>
+            <a:r>
+              <a:rPr lang="en-US" sz="1400" dirty="0">
+                <a:solidFill>
+                  <a:srgbClr val="2B2318"/>
+                </a:solidFill>
+                <a:latin typeface="Calibri" pitchFamily="34" charset="0"/>
+                <a:ea typeface="Calibri" pitchFamily="34" charset="-122"/>
+                <a:cs typeface="Calibri" pitchFamily="34" charset="-120"/>
+              </a:rPr>
+              <a:t>Zu jeder Polis gehörten die Stadt mit dem Burgberg, der </a:t>
+            </a:r>
+            <a:pPr indent="0" marL="0">
+              <a:buNone/>
+            </a:pPr>
+            <a:r>
+              <a:rPr lang="en-US" sz="1400" b="1" dirty="0">
                 <a:solidFill>
                   <a:srgbClr val="2B2318"/>
                 </a:solidFill>
@@ -11937,13 +12288,13 @@
                 <a:ea typeface="Calibri" pitchFamily="34" charset="-122"/>
                 <a:cs typeface="Calibri" pitchFamily="34" charset="-120"/>
               </a:rPr>
-              <a:t>Agora</a:t>
-            </a:r>
-            <a:pPr indent="0" marL="0">
-              <a:buNone/>
-            </a:pPr>
-            <a:r>
-              <a:rPr lang="en-US" sz="1150" dirty="0">
+              <a:t>Akropolis</a:t>
+            </a:r>
+            <a:pPr indent="0" marL="0">
+              <a:buNone/>
+            </a:pPr>
+            <a:r>
+              <a:rPr lang="en-US" sz="1400" dirty="0">
                 <a:solidFill>
                   <a:srgbClr val="2B2318"/>
                 </a:solidFill>
@@ -11951,143 +12302,13 @@
                 <a:ea typeface="Calibri" pitchFamily="34" charset="-122"/>
                 <a:cs typeface="Calibri" pitchFamily="34" charset="-120"/>
               </a:rPr>
-              <a:t>, sowie das Umland mit Feldern und Weiden, die </a:t>
-            </a:r>
-            <a:pPr indent="0" marL="0">
-              <a:buNone/>
-            </a:pPr>
-            <a:r>
-              <a:rPr lang="en-US" sz="1150" b="1" dirty="0">
-                <a:solidFill>
-                  <a:srgbClr val="AD4426"/>
-                </a:solidFill>
-                <a:latin typeface="Calibri" pitchFamily="34" charset="0"/>
-                <a:ea typeface="Calibri" pitchFamily="34" charset="-122"/>
-                <a:cs typeface="Calibri" pitchFamily="34" charset="-120"/>
-              </a:rPr>
-              <a:t>Chora</a:t>
-            </a:r>
-            <a:pPr indent="0" marL="0">
-              <a:buNone/>
-            </a:pPr>
-            <a:r>
-              <a:rPr lang="en-US" sz="1150" dirty="0">
-                <a:solidFill>
-                  <a:srgbClr val="2B2318"/>
-                </a:solidFill>
-                <a:latin typeface="Calibri" pitchFamily="34" charset="0"/>
-                <a:ea typeface="Calibri" pitchFamily="34" charset="-122"/>
-                <a:cs typeface="Calibri" pitchFamily="34" charset="-120"/>
-              </a:rPr>
-              <a:t>.</a:t>
-            </a:r>
-            <a:pPr indent="0" marL="0">
-              <a:buNone/>
-            </a:pPr>
-            <a:endParaRPr lang="en-US" sz="1150" dirty="0"/>
-          </a:p>
-          <a:p>
-            <a:pPr indent="0" marL="0">
-              <a:buNone/>
-            </a:pPr>
-            <a:r>
-              <a:rPr lang="en-US" sz="600" dirty="0">
-                <a:solidFill>
-                  <a:srgbClr val="2B2318"/>
-                </a:solidFill>
-                <a:latin typeface="Calibri" pitchFamily="34" charset="0"/>
-                <a:ea typeface="Calibri" pitchFamily="34" charset="-122"/>
-                <a:cs typeface="Calibri" pitchFamily="34" charset="-120"/>
-              </a:rPr>
-              <a:t> </a:t>
-            </a:r>
-            <a:endParaRPr lang="en-US" sz="1150" dirty="0"/>
-          </a:p>
-          <a:p>
-            <a:pPr indent="0" marL="0">
-              <a:buNone/>
-            </a:pPr>
-            <a:r>
-              <a:rPr lang="en-US" sz="1150" dirty="0">
-                <a:solidFill>
-                  <a:srgbClr val="2B2318"/>
-                </a:solidFill>
-                <a:latin typeface="Calibri" pitchFamily="34" charset="0"/>
-                <a:ea typeface="Calibri" pitchFamily="34" charset="-122"/>
-                <a:cs typeface="Calibri" pitchFamily="34" charset="-120"/>
-              </a:rPr>
-              <a:t>Athen entstand durch den Zusammenschluss vieler Dörfer und Gemeinden der Halbinsel Attika. Dieser Vorgang, der um 700 v. Chr. abgeschlossen war, heißt </a:t>
-            </a:r>
-            <a:pPr indent="0" marL="0">
-              <a:buNone/>
-            </a:pPr>
-            <a:r>
-              <a:rPr lang="en-US" sz="1150" b="1" dirty="0">
-                <a:solidFill>
-                  <a:srgbClr val="AD4426"/>
-                </a:solidFill>
-                <a:latin typeface="Calibri" pitchFamily="34" charset="0"/>
-                <a:ea typeface="Calibri" pitchFamily="34" charset="-122"/>
-                <a:cs typeface="Calibri" pitchFamily="34" charset="-120"/>
-              </a:rPr>
-              <a:t>Synoikismos</a:t>
-            </a:r>
-            <a:pPr indent="0" marL="0">
-              <a:buNone/>
-            </a:pPr>
-            <a:r>
-              <a:rPr lang="en-US" sz="1150" dirty="0">
-                <a:solidFill>
-                  <a:srgbClr val="2B2318"/>
-                </a:solidFill>
-                <a:latin typeface="Calibri" pitchFamily="34" charset="0"/>
-                <a:ea typeface="Calibri" pitchFamily="34" charset="-122"/>
-                <a:cs typeface="Calibri" pitchFamily="34" charset="-120"/>
-              </a:rPr>
-              <a:t> (griechisch: „Zusammensiedlung“).</a:t>
-            </a:r>
-            <a:pPr indent="0" marL="0">
-              <a:buNone/>
-            </a:pPr>
-            <a:endParaRPr lang="en-US" sz="1150" dirty="0"/>
-          </a:p>
-          <a:p>
-            <a:pPr indent="0" marL="0">
-              <a:buNone/>
-            </a:pPr>
-            <a:r>
-              <a:rPr lang="en-US" sz="600" dirty="0">
-                <a:solidFill>
-                  <a:srgbClr val="2B2318"/>
-                </a:solidFill>
-                <a:latin typeface="Calibri" pitchFamily="34" charset="0"/>
-                <a:ea typeface="Calibri" pitchFamily="34" charset="-122"/>
-                <a:cs typeface="Calibri" pitchFamily="34" charset="-120"/>
-              </a:rPr>
-              <a:t> </a:t>
-            </a:r>
-            <a:endParaRPr lang="en-US" sz="1150" dirty="0"/>
-          </a:p>
-          <a:p>
-            <a:pPr indent="0" marL="0">
-              <a:buNone/>
-            </a:pPr>
-            <a:r>
-              <a:rPr lang="en-US" sz="1150" dirty="0">
-                <a:solidFill>
-                  <a:srgbClr val="2B2318"/>
-                </a:solidFill>
-                <a:latin typeface="Calibri" pitchFamily="34" charset="0"/>
-                <a:ea typeface="Calibri" pitchFamily="34" charset="-122"/>
-                <a:cs typeface="Calibri" pitchFamily="34" charset="-120"/>
-              </a:rPr>
-              <a:t>Als die Bevölkerung wuchs, wurde das Ackerland immer </a:t>
-            </a:r>
-            <a:pPr indent="0" marL="0">
-              <a:buNone/>
-            </a:pPr>
-            <a:r>
-              <a:rPr lang="en-US" sz="1150" b="1" dirty="0">
+              <a:t>, und dem Marktplatz, der </a:t>
+            </a:r>
+            <a:pPr indent="0" marL="0">
+              <a:buNone/>
+            </a:pPr>
+            <a:r>
+              <a:rPr lang="en-US" sz="1400" b="1" dirty="0">
                 <a:solidFill>
                   <a:srgbClr val="2B2318"/>
                 </a:solidFill>
@@ -12098,13 +12319,13 @@
                 <a:ea typeface="Calibri" pitchFamily="34" charset="-122"/>
                 <a:cs typeface="Calibri" pitchFamily="34" charset="-120"/>
               </a:rPr>
-              <a:t>knapper</a:t>
-            </a:r>
-            <a:pPr indent="0" marL="0">
-              <a:buNone/>
-            </a:pPr>
-            <a:r>
-              <a:rPr lang="en-US" sz="1150" dirty="0">
+              <a:t>Agora</a:t>
+            </a:r>
+            <a:pPr indent="0" marL="0">
+              <a:buNone/>
+            </a:pPr>
+            <a:r>
+              <a:rPr lang="en-US" sz="1400" dirty="0">
                 <a:solidFill>
                   <a:srgbClr val="2B2318"/>
                 </a:solidFill>
@@ -12112,30 +12333,55 @@
                 <a:ea typeface="Calibri" pitchFamily="34" charset="-122"/>
                 <a:cs typeface="Calibri" pitchFamily="34" charset="-120"/>
               </a:rPr>
-              <a:t>. Viele Poleis schickten deshalb Bürger aus, die an den Küsten des Mittelmeers und des Schwarzen Meeres neue Siedlungen gründeten. Diesen Vorgang nennt man </a:t>
-            </a:r>
-            <a:pPr indent="0" marL="0">
-              <a:buNone/>
-            </a:pPr>
-            <a:r>
-              <a:rPr lang="en-US" sz="1150" b="1" dirty="0">
+              <a:t>, sowie das Umland mit Feldern und Weiden, die </a:t>
+            </a:r>
+            <a:pPr indent="0" marL="0">
+              <a:buNone/>
+            </a:pPr>
+            <a:r>
+              <a:rPr lang="en-US" sz="1400" b="1" dirty="0">
+                <a:solidFill>
+                  <a:srgbClr val="AD4426"/>
+                </a:solidFill>
+                <a:latin typeface="Calibri" pitchFamily="34" charset="0"/>
+                <a:ea typeface="Calibri" pitchFamily="34" charset="-122"/>
+                <a:cs typeface="Calibri" pitchFamily="34" charset="-120"/>
+              </a:rPr>
+              <a:t>Chora</a:t>
+            </a:r>
+            <a:pPr indent="0" marL="0">
+              <a:buNone/>
+            </a:pPr>
+            <a:r>
+              <a:rPr lang="en-US" sz="1400" dirty="0">
                 <a:solidFill>
                   <a:srgbClr val="2B2318"/>
                 </a:solidFill>
-                <a:highlight>
-                  <a:srgbClr val="F3DDA6"/>
-                </a:highlight>
-                <a:latin typeface="Calibri" pitchFamily="34" charset="0"/>
-                <a:ea typeface="Calibri" pitchFamily="34" charset="-122"/>
-                <a:cs typeface="Calibri" pitchFamily="34" charset="-120"/>
-              </a:rPr>
-              <a:t>Kolonisation</a:t>
-            </a:r>
-            <a:pPr indent="0" marL="0">
-              <a:buNone/>
-            </a:pPr>
-            <a:r>
-              <a:rPr lang="en-US" sz="1150" dirty="0">
+                <a:latin typeface="Calibri" pitchFamily="34" charset="0"/>
+                <a:ea typeface="Calibri" pitchFamily="34" charset="-122"/>
+                <a:cs typeface="Calibri" pitchFamily="34" charset="-120"/>
+              </a:rPr>
+              <a:t>. Athen entstand durch den Zusammenschluss vieler Dörfer und Gemeinden der Halbinsel Attika. Dieser Vorgang, der um 700 v. Chr. abgeschlossen war, heißt </a:t>
+            </a:r>
+            <a:pPr indent="0" marL="0">
+              <a:buNone/>
+            </a:pPr>
+            <a:r>
+              <a:rPr lang="en-US" sz="1400" b="1" dirty="0">
+                <a:solidFill>
+                  <a:srgbClr val="AD4426"/>
+                </a:solidFill>
+                <a:latin typeface="Calibri" pitchFamily="34" charset="0"/>
+                <a:ea typeface="Calibri" pitchFamily="34" charset="-122"/>
+                <a:cs typeface="Calibri" pitchFamily="34" charset="-120"/>
+              </a:rPr>
+              <a:t>Synoikismos</a:t>
+            </a:r>
+            <a:pPr indent="0" marL="0">
+              <a:buNone/>
+            </a:pPr>
+            <a:r>
+              <a:rPr lang="en-US" sz="1400" dirty="0">
                 <a:solidFill>
                   <a:srgbClr val="2B2318"/>
                 </a:solidFill>
@@ -12143,168 +12389,50 @@
                 <a:ea typeface="Calibri" pitchFamily="34" charset="-122"/>
                 <a:cs typeface="Calibri" pitchFamily="34" charset="-120"/>
               </a:rPr>
-              <a:t>.</a:t>
-            </a:r>
-            <a:pPr indent="0" marL="0">
-              <a:buNone/>
-            </a:pPr>
-            <a:endParaRPr lang="en-US" sz="1150" dirty="0"/>
-          </a:p>
-          <a:p>
-            <a:pPr indent="0" marL="0">
-              <a:buNone/>
-            </a:pPr>
-            <a:r>
-              <a:rPr lang="en-US" sz="600" dirty="0">
-                <a:solidFill>
-                  <a:srgbClr val="2B2318"/>
-                </a:solidFill>
-                <a:latin typeface="Calibri" pitchFamily="34" charset="0"/>
-                <a:ea typeface="Calibri" pitchFamily="34" charset="-122"/>
-                <a:cs typeface="Calibri" pitchFamily="34" charset="-120"/>
-              </a:rPr>
-              <a:t> </a:t>
-            </a:r>
-            <a:endParaRPr lang="en-US" sz="1150" dirty="0"/>
-          </a:p>
-          <a:p>
-            <a:pPr indent="0" marL="0">
-              <a:buNone/>
-            </a:pPr>
-            <a:r>
-              <a:rPr lang="en-US" sz="1150" dirty="0">
-                <a:solidFill>
-                  <a:srgbClr val="2B2318"/>
-                </a:solidFill>
-                <a:latin typeface="Calibri" pitchFamily="34" charset="0"/>
-                <a:ea typeface="Calibri" pitchFamily="34" charset="-122"/>
-                <a:cs typeface="Calibri" pitchFamily="34" charset="-120"/>
-              </a:rPr>
-              <a:t>Das meiste Land gehörte wenigen reichen Familien, dem </a:t>
-            </a:r>
-            <a:pPr indent="0" marL="0">
-              <a:buNone/>
-            </a:pPr>
-            <a:r>
-              <a:rPr lang="en-US" sz="1150" b="1" dirty="0">
-                <a:solidFill>
-                  <a:srgbClr val="2B2318"/>
-                </a:solidFill>
-                <a:highlight>
-                  <a:srgbClr val="F3DDA6"/>
-                </a:highlight>
-                <a:latin typeface="Calibri" pitchFamily="34" charset="0"/>
-                <a:ea typeface="Calibri" pitchFamily="34" charset="-122"/>
-                <a:cs typeface="Calibri" pitchFamily="34" charset="-120"/>
-              </a:rPr>
-              <a:t>Adel</a:t>
-            </a:r>
-            <a:pPr indent="0" marL="0">
-              <a:buNone/>
-            </a:pPr>
-            <a:r>
-              <a:rPr lang="en-US" sz="1150" dirty="0">
-                <a:solidFill>
-                  <a:srgbClr val="2B2318"/>
-                </a:solidFill>
-                <a:latin typeface="Calibri" pitchFamily="34" charset="0"/>
-                <a:ea typeface="Calibri" pitchFamily="34" charset="-122"/>
-                <a:cs typeface="Calibri" pitchFamily="34" charset="-120"/>
-              </a:rPr>
-              <a:t>. Sie hatten auch die politische Macht. Diese Herrschaft der „Besten“ nennt man </a:t>
-            </a:r>
-            <a:pPr indent="0" marL="0">
-              <a:buNone/>
-            </a:pPr>
-            <a:r>
-              <a:rPr lang="en-US" sz="1150" b="1" dirty="0">
-                <a:solidFill>
-                  <a:srgbClr val="2B2318"/>
-                </a:solidFill>
-                <a:highlight>
-                  <a:srgbClr val="F3DDA6"/>
-                </a:highlight>
-                <a:latin typeface="Calibri" pitchFamily="34" charset="0"/>
-                <a:ea typeface="Calibri" pitchFamily="34" charset="-122"/>
-                <a:cs typeface="Calibri" pitchFamily="34" charset="-120"/>
-              </a:rPr>
-              <a:t>Aristokratie</a:t>
-            </a:r>
-            <a:pPr indent="0" marL="0">
-              <a:buNone/>
-            </a:pPr>
-            <a:r>
-              <a:rPr lang="en-US" sz="1150" dirty="0">
-                <a:solidFill>
-                  <a:srgbClr val="2B2318"/>
-                </a:solidFill>
-                <a:latin typeface="Calibri" pitchFamily="34" charset="0"/>
-                <a:ea typeface="Calibri" pitchFamily="34" charset="-122"/>
-                <a:cs typeface="Calibri" pitchFamily="34" charset="-120"/>
-              </a:rPr>
-              <a:t>. Viele Kleinbauern dagegen konnten von ihrem Land kaum leben. Sie liehen sich Saatgut und Getreide bei den Adligen und gerieten so in </a:t>
-            </a:r>
-            <a:pPr indent="0" marL="0">
-              <a:buNone/>
-            </a:pPr>
-            <a:r>
-              <a:rPr lang="en-US" sz="1150" b="1" dirty="0">
-                <a:solidFill>
-                  <a:srgbClr val="2B2318"/>
-                </a:solidFill>
-                <a:highlight>
-                  <a:srgbClr val="F3DDA6"/>
-                </a:highlight>
-                <a:latin typeface="Calibri" pitchFamily="34" charset="0"/>
-                <a:ea typeface="Calibri" pitchFamily="34" charset="-122"/>
-                <a:cs typeface="Calibri" pitchFamily="34" charset="-120"/>
-              </a:rPr>
-              <a:t>Schulden</a:t>
-            </a:r>
-            <a:pPr indent="0" marL="0">
-              <a:buNone/>
-            </a:pPr>
-            <a:r>
-              <a:rPr lang="en-US" sz="1150" dirty="0">
-                <a:solidFill>
-                  <a:srgbClr val="2B2318"/>
-                </a:solidFill>
-                <a:latin typeface="Calibri" pitchFamily="34" charset="0"/>
-                <a:ea typeface="Calibri" pitchFamily="34" charset="-122"/>
-                <a:cs typeface="Calibri" pitchFamily="34" charset="-120"/>
-              </a:rPr>
-              <a:t>.</a:t>
-            </a:r>
-            <a:endParaRPr lang="en-US" sz="1150" dirty="0"/>
-          </a:p>
-        </p:txBody>
-      </p:sp>
-      <p:sp>
-        <p:nvSpPr>
-          <p:cNvPr id="5" name="Shape 3"/>
-          <p:cNvSpPr/>
-          <p:nvPr/>
-        </p:nvSpPr>
-        <p:spPr>
-          <a:xfrm>
-            <a:off x="457200" y="4297680"/>
-            <a:ext cx="8229600" cy="384048"/>
-          </a:xfrm>
-          <a:prstGeom prst="roundRect">
-            <a:avLst>
-              <a:gd name="adj" fmla="val 19048"/>
-            </a:avLst>
-          </a:prstGeom>
-          <a:solidFill>
-            <a:srgbClr val="2B2318"/>
-          </a:solidFill>
-          <a:ln w="12700">
-            <a:solidFill>
-              <a:srgbClr val="2B2318"/>
-            </a:solidFill>
-            <a:prstDash val="solid"/>
-          </a:ln>
-        </p:spPr>
+              <a:t> (griechisch: „Zusammensiedlung“).</a:t>
+            </a:r>
+            <a:endParaRPr lang="en-US" sz="1400" dirty="0"/>
+          </a:p>
+        </p:txBody>
+      </p:sp>
+      <p:sp>
+        <p:nvSpPr>
+          <p:cNvPr id="5" name="Text 3"/>
+          <p:cNvSpPr txBox="1"/>
+          <p:nvPr/>
+        </p:nvSpPr>
+        <p:spPr>
+          <a:xfrm>
+            <a:off x="457200" y="4754880"/>
+            <a:ext cx="4572000" cy="182880"/>
+          </a:xfrm>
+          <a:prstGeom prst="rect">
+            <a:avLst/>
+          </a:prstGeom>
+          <a:noFill/>
+          <a:ln/>
+        </p:spPr>
+        <p:txBody>
+          <a:bodyPr wrap="square" lIns="0" tIns="0" rIns="0" bIns="0" rtlCol="0" anchor="t"/>
+          <a:lstStyle/>
+          <a:p>
+            <a:pPr indent="0" marL="0">
+              <a:buNone/>
+            </a:pPr>
+            <a:r>
+              <a:rPr lang="en-US" sz="900" dirty="0">
+                <a:solidFill>
+                  <a:srgbClr val="998C77"/>
+                </a:solidFill>
+                <a:latin typeface="Calibri" pitchFamily="34" charset="0"/>
+                <a:ea typeface="Calibri" pitchFamily="34" charset="-122"/>
+                <a:cs typeface="Calibri" pitchFamily="34" charset="-120"/>
+              </a:rPr>
+              <a:t>Von der Polis zur Krise</a:t>
+            </a:r>
+            <a:endParaRPr lang="en-US" sz="900" dirty="0"/>
+          </a:p>
+        </p:txBody>
       </p:sp>
       <p:sp>
         <p:nvSpPr>
@@ -12314,46 +12442,7 @@
         </p:nvSpPr>
         <p:spPr>
           <a:xfrm>
-            <a:off x="640080" y="4297680"/>
-            <a:ext cx="7863840" cy="384048"/>
-          </a:xfrm>
-          <a:prstGeom prst="rect">
-            <a:avLst/>
-          </a:prstGeom>
-          <a:noFill/>
-          <a:ln/>
-        </p:spPr>
-        <p:txBody>
-          <a:bodyPr wrap="square" lIns="0" tIns="0" rIns="0" bIns="0" rtlCol="0" anchor="ctr"/>
-          <a:lstStyle/>
-          <a:p>
-            <a:pPr indent="0" marL="0">
-              <a:buNone/>
-            </a:pPr>
-            <a:r>
-              <a:rPr lang="en-US" sz="1300" b="1" dirty="0">
-                <a:solidFill>
-                  <a:srgbClr val="FFFFFF"/>
-                </a:solidFill>
-                <a:latin typeface="Calibri" pitchFamily="34" charset="0"/>
-                <a:ea typeface="Calibri" pitchFamily="34" charset="-122"/>
-                <a:cs typeface="Calibri" pitchFamily="34" charset="-120"/>
-              </a:rPr>
-              <a:t>Und jetzt? Was passiert, wenn die Bauern ihre Schulden nicht zurückzahlen können?</a:t>
-            </a:r>
-            <a:endParaRPr lang="en-US" sz="1300" dirty="0"/>
-          </a:p>
-        </p:txBody>
-      </p:sp>
-      <p:sp>
-        <p:nvSpPr>
-          <p:cNvPr id="7" name="Text 5"/>
-          <p:cNvSpPr txBox="1"/>
-          <p:nvPr/>
-        </p:nvSpPr>
-        <p:spPr>
-          <a:xfrm>
-            <a:off x="8229600" y="4800600"/>
+            <a:off x="8229600" y="4754880"/>
             <a:ext cx="457200" cy="182880"/>
           </a:xfrm>
           <a:prstGeom prst="rect">
@@ -12449,7 +12538,7 @@
                 <a:ea typeface="Calibri" pitchFamily="34" charset="-122"/>
                 <a:cs typeface="Calibri" pitchFamily="34" charset="-120"/>
               </a:rPr>
-              <a:t>WIEDERHOLUNG · EINZELARBEIT · HEFT</a:t>
+              <a:t>LÜCKENTEXT · LÖSUNG 7–14</a:t>
             </a:r>
             <a:endParaRPr lang="en-US" sz="1100" dirty="0"/>
           </a:p>
@@ -12488,7 +12577,7 @@
                 <a:ea typeface="Cambria" pitchFamily="34" charset="-122"/>
                 <a:cs typeface="Cambria" pitchFamily="34" charset="-120"/>
               </a:rPr>
-              <a:t>Ein Sachurteil formulieren</a:t>
+              <a:t>Wie entstanden die Poleis?</a:t>
             </a:r>
             <a:endParaRPr lang="en-US" sz="2800" dirty="0"/>
           </a:p>
@@ -12502,55 +12591,373 @@
         </p:nvSpPr>
         <p:spPr>
           <a:xfrm>
-            <a:off x="7315200" y="347472"/>
-            <a:ext cx="1371600" cy="292608"/>
+            <a:off x="457200" y="1234440"/>
+            <a:ext cx="8229600" cy="2971800"/>
+          </a:xfrm>
+          <a:prstGeom prst="rect">
+            <a:avLst/>
+          </a:prstGeom>
+          <a:noFill/>
+          <a:ln/>
+        </p:spPr>
+        <p:txBody>
+          <a:bodyPr wrap="square" lIns="0" tIns="0" rIns="0" bIns="0" rtlCol="0" anchor="t"/>
+          <a:lstStyle/>
+          <a:p>
+            <a:pPr indent="0" marL="0">
+              <a:buNone/>
+            </a:pPr>
+            <a:r>
+              <a:rPr lang="en-US" sz="1400" dirty="0">
+                <a:solidFill>
+                  <a:srgbClr val="2B2318"/>
+                </a:solidFill>
+                <a:latin typeface="Calibri" pitchFamily="34" charset="0"/>
+                <a:ea typeface="Calibri" pitchFamily="34" charset="-122"/>
+                <a:cs typeface="Calibri" pitchFamily="34" charset="-120"/>
+              </a:rPr>
+              <a:t>Als die Bevölkerung wuchs, wurde das Ackerland immer </a:t>
+            </a:r>
+            <a:pPr indent="0" marL="0">
+              <a:buNone/>
+            </a:pPr>
+            <a:r>
+              <a:rPr lang="en-US" sz="1400" b="1" dirty="0">
+                <a:solidFill>
+                  <a:srgbClr val="2B2318"/>
+                </a:solidFill>
+                <a:highlight>
+                  <a:srgbClr val="F3DDA6"/>
+                </a:highlight>
+                <a:latin typeface="Calibri" pitchFamily="34" charset="0"/>
+                <a:ea typeface="Calibri" pitchFamily="34" charset="-122"/>
+                <a:cs typeface="Calibri" pitchFamily="34" charset="-120"/>
+              </a:rPr>
+              <a:t>knapper</a:t>
+            </a:r>
+            <a:pPr indent="0" marL="0">
+              <a:buNone/>
+            </a:pPr>
+            <a:r>
+              <a:rPr lang="en-US" sz="1400" dirty="0">
+                <a:solidFill>
+                  <a:srgbClr val="2B2318"/>
+                </a:solidFill>
+                <a:latin typeface="Calibri" pitchFamily="34" charset="0"/>
+                <a:ea typeface="Calibri" pitchFamily="34" charset="-122"/>
+                <a:cs typeface="Calibri" pitchFamily="34" charset="-120"/>
+              </a:rPr>
+              <a:t>. Viele Poleis schickten deshalb Bürger aus, die an den Küsten des Mittelmeers und des Schwarzen Meeres neue Siedlungen gründeten. Diesen Vorgang nennt man </a:t>
+            </a:r>
+            <a:pPr indent="0" marL="0">
+              <a:buNone/>
+            </a:pPr>
+            <a:r>
+              <a:rPr lang="en-US" sz="1400" b="1" dirty="0">
+                <a:solidFill>
+                  <a:srgbClr val="2B2318"/>
+                </a:solidFill>
+                <a:highlight>
+                  <a:srgbClr val="F3DDA6"/>
+                </a:highlight>
+                <a:latin typeface="Calibri" pitchFamily="34" charset="0"/>
+                <a:ea typeface="Calibri" pitchFamily="34" charset="-122"/>
+                <a:cs typeface="Calibri" pitchFamily="34" charset="-120"/>
+              </a:rPr>
+              <a:t>Kolonisation</a:t>
+            </a:r>
+            <a:pPr indent="0" marL="0">
+              <a:buNone/>
+            </a:pPr>
+            <a:r>
+              <a:rPr lang="en-US" sz="1400" dirty="0">
+                <a:solidFill>
+                  <a:srgbClr val="2B2318"/>
+                </a:solidFill>
+                <a:latin typeface="Calibri" pitchFamily="34" charset="0"/>
+                <a:ea typeface="Calibri" pitchFamily="34" charset="-122"/>
+                <a:cs typeface="Calibri" pitchFamily="34" charset="-120"/>
+              </a:rPr>
+              <a:t>.</a:t>
+            </a:r>
+            <a:pPr indent="0" marL="0">
+              <a:buNone/>
+            </a:pPr>
+            <a:endParaRPr lang="en-US" sz="1400" dirty="0"/>
+          </a:p>
+          <a:p>
+            <a:pPr indent="0" marL="0">
+              <a:buNone/>
+            </a:pPr>
+            <a:r>
+              <a:rPr lang="en-US" sz="500" dirty="0">
+                <a:solidFill>
+                  <a:srgbClr val="2B2318"/>
+                </a:solidFill>
+                <a:latin typeface="Calibri" pitchFamily="34" charset="0"/>
+                <a:ea typeface="Calibri" pitchFamily="34" charset="-122"/>
+                <a:cs typeface="Calibri" pitchFamily="34" charset="-120"/>
+              </a:rPr>
+              <a:t> </a:t>
+            </a:r>
+            <a:endParaRPr lang="en-US" sz="1400" dirty="0"/>
+          </a:p>
+          <a:p>
+            <a:pPr indent="0" marL="0">
+              <a:buNone/>
+            </a:pPr>
+            <a:r>
+              <a:rPr lang="en-US" sz="1400" dirty="0">
+                <a:solidFill>
+                  <a:srgbClr val="2B2318"/>
+                </a:solidFill>
+                <a:latin typeface="Calibri" pitchFamily="34" charset="0"/>
+                <a:ea typeface="Calibri" pitchFamily="34" charset="-122"/>
+                <a:cs typeface="Calibri" pitchFamily="34" charset="-120"/>
+              </a:rPr>
+              <a:t>Das meiste Land gehörte wenigen reichen Familien, dem </a:t>
+            </a:r>
+            <a:pPr indent="0" marL="0">
+              <a:buNone/>
+            </a:pPr>
+            <a:r>
+              <a:rPr lang="en-US" sz="1400" b="1" dirty="0">
+                <a:solidFill>
+                  <a:srgbClr val="2B2318"/>
+                </a:solidFill>
+                <a:highlight>
+                  <a:srgbClr val="F3DDA6"/>
+                </a:highlight>
+                <a:latin typeface="Calibri" pitchFamily="34" charset="0"/>
+                <a:ea typeface="Calibri" pitchFamily="34" charset="-122"/>
+                <a:cs typeface="Calibri" pitchFamily="34" charset="-120"/>
+              </a:rPr>
+              <a:t>Adel</a:t>
+            </a:r>
+            <a:pPr indent="0" marL="0">
+              <a:buNone/>
+            </a:pPr>
+            <a:r>
+              <a:rPr lang="en-US" sz="1400" dirty="0">
+                <a:solidFill>
+                  <a:srgbClr val="2B2318"/>
+                </a:solidFill>
+                <a:latin typeface="Calibri" pitchFamily="34" charset="0"/>
+                <a:ea typeface="Calibri" pitchFamily="34" charset="-122"/>
+                <a:cs typeface="Calibri" pitchFamily="34" charset="-120"/>
+              </a:rPr>
+              <a:t>. Jede dieser Familien gehörte zu einem Geschlechterverband, einem </a:t>
+            </a:r>
+            <a:pPr indent="0" marL="0">
+              <a:buNone/>
+            </a:pPr>
+            <a:r>
+              <a:rPr lang="en-US" sz="1400" b="1" dirty="0">
+                <a:solidFill>
+                  <a:srgbClr val="2B2318"/>
+                </a:solidFill>
+                <a:highlight>
+                  <a:srgbClr val="F3DDA6"/>
+                </a:highlight>
+                <a:latin typeface="Calibri" pitchFamily="34" charset="0"/>
+                <a:ea typeface="Calibri" pitchFamily="34" charset="-122"/>
+                <a:cs typeface="Calibri" pitchFamily="34" charset="-120"/>
+              </a:rPr>
+              <a:t>Genos</a:t>
+            </a:r>
+            <a:pPr indent="0" marL="0">
+              <a:buNone/>
+            </a:pPr>
+            <a:r>
+              <a:rPr lang="en-US" sz="1400" dirty="0">
+                <a:solidFill>
+                  <a:srgbClr val="2B2318"/>
+                </a:solidFill>
+                <a:latin typeface="Calibri" pitchFamily="34" charset="0"/>
+                <a:ea typeface="Calibri" pitchFamily="34" charset="-122"/>
+                <a:cs typeface="Calibri" pitchFamily="34" charset="-120"/>
+              </a:rPr>
+              <a:t>. Alle Athener waren außerdem in vier große Stammesverbände eingeteilt; ein solcher Verband hieß </a:t>
+            </a:r>
+            <a:pPr indent="0" marL="0">
+              <a:buNone/>
+            </a:pPr>
+            <a:r>
+              <a:rPr lang="en-US" sz="1400" b="1" dirty="0">
+                <a:solidFill>
+                  <a:srgbClr val="2B2318"/>
+                </a:solidFill>
+                <a:highlight>
+                  <a:srgbClr val="F3DDA6"/>
+                </a:highlight>
+                <a:latin typeface="Calibri" pitchFamily="34" charset="0"/>
+                <a:ea typeface="Calibri" pitchFamily="34" charset="-122"/>
+                <a:cs typeface="Calibri" pitchFamily="34" charset="-120"/>
+              </a:rPr>
+              <a:t>Phyle</a:t>
+            </a:r>
+            <a:pPr indent="0" marL="0">
+              <a:buNone/>
+            </a:pPr>
+            <a:r>
+              <a:rPr lang="en-US" sz="1400" dirty="0">
+                <a:solidFill>
+                  <a:srgbClr val="2B2318"/>
+                </a:solidFill>
+                <a:latin typeface="Calibri" pitchFamily="34" charset="0"/>
+                <a:ea typeface="Calibri" pitchFamily="34" charset="-122"/>
+                <a:cs typeface="Calibri" pitchFamily="34" charset="-120"/>
+              </a:rPr>
+              <a:t>. Die Adligen hatten auch die politische Macht. Diese Herrschaft der „Besten“ nennt man </a:t>
+            </a:r>
+            <a:pPr indent="0" marL="0">
+              <a:buNone/>
+            </a:pPr>
+            <a:r>
+              <a:rPr lang="en-US" sz="1400" b="1" dirty="0">
+                <a:solidFill>
+                  <a:srgbClr val="2B2318"/>
+                </a:solidFill>
+                <a:highlight>
+                  <a:srgbClr val="F3DDA6"/>
+                </a:highlight>
+                <a:latin typeface="Calibri" pitchFamily="34" charset="0"/>
+                <a:ea typeface="Calibri" pitchFamily="34" charset="-122"/>
+                <a:cs typeface="Calibri" pitchFamily="34" charset="-120"/>
+              </a:rPr>
+              <a:t>Aristokratie</a:t>
+            </a:r>
+            <a:pPr indent="0" marL="0">
+              <a:buNone/>
+            </a:pPr>
+            <a:r>
+              <a:rPr lang="en-US" sz="1400" dirty="0">
+                <a:solidFill>
+                  <a:srgbClr val="2B2318"/>
+                </a:solidFill>
+                <a:latin typeface="Calibri" pitchFamily="34" charset="0"/>
+                <a:ea typeface="Calibri" pitchFamily="34" charset="-122"/>
+                <a:cs typeface="Calibri" pitchFamily="34" charset="-120"/>
+              </a:rPr>
+              <a:t>. Aus ihren Reihen kamen die Archonten, und ihr Rat tagte auf dem Hügel des Kriegsgottes Ares. Er hieß deshalb </a:t>
+            </a:r>
+            <a:pPr indent="0" marL="0">
+              <a:buNone/>
+            </a:pPr>
+            <a:r>
+              <a:rPr lang="en-US" sz="1400" b="1" dirty="0">
+                <a:solidFill>
+                  <a:srgbClr val="2B2318"/>
+                </a:solidFill>
+                <a:highlight>
+                  <a:srgbClr val="F3DDA6"/>
+                </a:highlight>
+                <a:latin typeface="Calibri" pitchFamily="34" charset="0"/>
+                <a:ea typeface="Calibri" pitchFamily="34" charset="-122"/>
+                <a:cs typeface="Calibri" pitchFamily="34" charset="-120"/>
+              </a:rPr>
+              <a:t>Areopag</a:t>
+            </a:r>
+            <a:pPr indent="0" marL="0">
+              <a:buNone/>
+            </a:pPr>
+            <a:r>
+              <a:rPr lang="en-US" sz="1400" dirty="0">
+                <a:solidFill>
+                  <a:srgbClr val="2B2318"/>
+                </a:solidFill>
+                <a:latin typeface="Calibri" pitchFamily="34" charset="0"/>
+                <a:ea typeface="Calibri" pitchFamily="34" charset="-122"/>
+                <a:cs typeface="Calibri" pitchFamily="34" charset="-120"/>
+              </a:rPr>
+              <a:t>.</a:t>
+            </a:r>
+            <a:pPr indent="0" marL="0">
+              <a:buNone/>
+            </a:pPr>
+            <a:endParaRPr lang="en-US" sz="1400" dirty="0"/>
+          </a:p>
+          <a:p>
+            <a:pPr indent="0" marL="0">
+              <a:buNone/>
+            </a:pPr>
+            <a:r>
+              <a:rPr lang="en-US" sz="500" dirty="0">
+                <a:solidFill>
+                  <a:srgbClr val="2B2318"/>
+                </a:solidFill>
+                <a:latin typeface="Calibri" pitchFamily="34" charset="0"/>
+                <a:ea typeface="Calibri" pitchFamily="34" charset="-122"/>
+                <a:cs typeface="Calibri" pitchFamily="34" charset="-120"/>
+              </a:rPr>
+              <a:t> </a:t>
+            </a:r>
+            <a:endParaRPr lang="en-US" sz="1400" dirty="0"/>
+          </a:p>
+          <a:p>
+            <a:pPr indent="0" marL="0">
+              <a:buNone/>
+            </a:pPr>
+            <a:r>
+              <a:rPr lang="en-US" sz="1400" dirty="0">
+                <a:solidFill>
+                  <a:srgbClr val="2B2318"/>
+                </a:solidFill>
+                <a:latin typeface="Calibri" pitchFamily="34" charset="0"/>
+                <a:ea typeface="Calibri" pitchFamily="34" charset="-122"/>
+                <a:cs typeface="Calibri" pitchFamily="34" charset="-120"/>
+              </a:rPr>
+              <a:t>Viele Kleinbauern dagegen konnten von ihrem Land kaum leben. Sie liehen sich Saatgut und Getreide bei den Adligen und gerieten so in </a:t>
+            </a:r>
+            <a:pPr indent="0" marL="0">
+              <a:buNone/>
+            </a:pPr>
+            <a:r>
+              <a:rPr lang="en-US" sz="1400" b="1" dirty="0">
+                <a:solidFill>
+                  <a:srgbClr val="2B2318"/>
+                </a:solidFill>
+                <a:highlight>
+                  <a:srgbClr val="F3DDA6"/>
+                </a:highlight>
+                <a:latin typeface="Calibri" pitchFamily="34" charset="0"/>
+                <a:ea typeface="Calibri" pitchFamily="34" charset="-122"/>
+                <a:cs typeface="Calibri" pitchFamily="34" charset="-120"/>
+              </a:rPr>
+              <a:t>Schulden</a:t>
+            </a:r>
+            <a:pPr indent="0" marL="0">
+              <a:buNone/>
+            </a:pPr>
+            <a:r>
+              <a:rPr lang="en-US" sz="1400" dirty="0">
+                <a:solidFill>
+                  <a:srgbClr val="2B2318"/>
+                </a:solidFill>
+                <a:latin typeface="Calibri" pitchFamily="34" charset="0"/>
+                <a:ea typeface="Calibri" pitchFamily="34" charset="-122"/>
+                <a:cs typeface="Calibri" pitchFamily="34" charset="-120"/>
+              </a:rPr>
+              <a:t>.</a:t>
+            </a:r>
+            <a:endParaRPr lang="en-US" sz="1400" dirty="0"/>
+          </a:p>
+        </p:txBody>
+      </p:sp>
+      <p:sp>
+        <p:nvSpPr>
+          <p:cNvPr id="5" name="Shape 3"/>
+          <p:cNvSpPr/>
+          <p:nvPr/>
+        </p:nvSpPr>
+        <p:spPr>
+          <a:xfrm>
+            <a:off x="457200" y="4297680"/>
+            <a:ext cx="8229600" cy="384048"/>
           </a:xfrm>
           <a:prstGeom prst="roundRect">
             <a:avLst>
-              <a:gd name="adj" fmla="val 31250"/>
-            </a:avLst>
-          </a:prstGeom>
-          <a:solidFill>
-            <a:srgbClr val="2B2318"/>
-          </a:solidFill>
-          <a:ln/>
-        </p:spPr>
-        <p:txBody>
-          <a:bodyPr wrap="square" lIns="25400" tIns="25400" rIns="25400" bIns="25400" rtlCol="0" anchor="ctr"/>
-          <a:lstStyle/>
-          <a:p>
-            <a:pPr algn="ctr" indent="0" marL="0">
-              <a:buNone/>
-            </a:pPr>
-            <a:r>
-              <a:rPr lang="en-US" sz="1100" b="1" dirty="0">
-                <a:solidFill>
-                  <a:srgbClr val="FFFFFF"/>
-                </a:solidFill>
-                <a:latin typeface="Calibri" pitchFamily="34" charset="0"/>
-                <a:ea typeface="Calibri" pitchFamily="34" charset="-122"/>
-                <a:cs typeface="Calibri" pitchFamily="34" charset="-120"/>
-              </a:rPr>
-              <a:t>7 Min.</a:t>
-            </a:r>
-            <a:endParaRPr lang="en-US" sz="1100" dirty="0"/>
-          </a:p>
-        </p:txBody>
-      </p:sp>
-      <p:sp>
-        <p:nvSpPr>
-          <p:cNvPr id="5" name="Shape 3"/>
-          <p:cNvSpPr/>
-          <p:nvPr/>
-        </p:nvSpPr>
-        <p:spPr>
-          <a:xfrm>
-            <a:off x="457200" y="1325880"/>
-            <a:ext cx="8229600" cy="1005840"/>
-          </a:xfrm>
-          <a:prstGeom prst="roundRect">
-            <a:avLst>
-              <a:gd name="adj" fmla="val 7273"/>
+              <a:gd name="adj" fmla="val 19048"/>
             </a:avLst>
           </a:prstGeom>
           <a:solidFill>
@@ -12572,8 +12979,8 @@
         </p:nvSpPr>
         <p:spPr>
           <a:xfrm>
-            <a:off x="731520" y="1417320"/>
-            <a:ext cx="7680960" cy="822960"/>
+            <a:off x="640080" y="4297680"/>
+            <a:ext cx="7863840" cy="384048"/>
           </a:xfrm>
           <a:prstGeom prst="rect">
             <a:avLst/>
@@ -12589,252 +12996,15 @@
               <a:buNone/>
             </a:pPr>
             <a:r>
-              <a:rPr lang="en-US" sz="2200" b="1" dirty="0">
+              <a:rPr lang="en-US" sz="1300" b="1" dirty="0">
                 <a:solidFill>
                   <a:srgbClr val="FFFFFF"/>
                 </a:solidFill>
-                <a:latin typeface="Cambria" pitchFamily="34" charset="0"/>
-                <a:ea typeface="Cambria" pitchFamily="34" charset="-122"/>
-                <a:cs typeface="Cambria" pitchFamily="34" charset="-120"/>
-              </a:rPr>
-              <a:t>Welcher Faktor war für die Entstehung der Poleis am wichtigsten?</a:t>
-            </a:r>
-            <a:endParaRPr lang="en-US" sz="2200" dirty="0"/>
-          </a:p>
-        </p:txBody>
-      </p:sp>
-      <p:sp>
-        <p:nvSpPr>
-          <p:cNvPr id="7" name="Shape 5"/>
-          <p:cNvSpPr/>
-          <p:nvPr/>
-        </p:nvSpPr>
-        <p:spPr>
-          <a:xfrm>
-            <a:off x="457200" y="2560320"/>
-            <a:ext cx="4754880" cy="1691640"/>
-          </a:xfrm>
-          <a:prstGeom prst="roundRect">
-            <a:avLst>
-              <a:gd name="adj" fmla="val 4324"/>
-            </a:avLst>
-          </a:prstGeom>
-          <a:solidFill>
-            <a:srgbClr val="F4ECDE"/>
-          </a:solidFill>
-          <a:ln w="12700">
-            <a:solidFill>
-              <a:srgbClr val="F4ECDE"/>
-            </a:solidFill>
-            <a:prstDash val="solid"/>
-          </a:ln>
-        </p:spPr>
-      </p:sp>
-      <p:sp>
-        <p:nvSpPr>
-          <p:cNvPr id="8" name="Text 6"/>
-          <p:cNvSpPr txBox="1"/>
-          <p:nvPr/>
-        </p:nvSpPr>
-        <p:spPr>
-          <a:xfrm>
-            <a:off x="685800" y="2697480"/>
-            <a:ext cx="4389120" cy="548640"/>
-          </a:xfrm>
-          <a:prstGeom prst="rect">
-            <a:avLst/>
-          </a:prstGeom>
-          <a:noFill/>
-          <a:ln/>
-        </p:spPr>
-        <p:txBody>
-          <a:bodyPr wrap="square" lIns="0" tIns="0" rIns="0" bIns="0" rtlCol="0" anchor="t"/>
-          <a:lstStyle/>
-          <a:p>
-            <a:pPr indent="0" marL="0">
-              <a:buNone/>
-            </a:pPr>
-            <a:r>
-              <a:rPr lang="en-US" sz="1400" b="1" dirty="0">
-                <a:solidFill>
-                  <a:srgbClr val="2B2318"/>
-                </a:solidFill>
-                <a:latin typeface="Calibri" pitchFamily="34" charset="0"/>
-                <a:ea typeface="Calibri" pitchFamily="34" charset="-122"/>
-                <a:cs typeface="Calibri" pitchFamily="34" charset="-120"/>
-              </a:rPr>
-              <a:t>Schreibt 2–3 Sätze. Nutzt den Lückentext.</a:t>
-            </a:r>
-            <a:endParaRPr lang="en-US" sz="1400" dirty="0"/>
-          </a:p>
-        </p:txBody>
-      </p:sp>
-      <p:sp>
-        <p:nvSpPr>
-          <p:cNvPr id="9" name="Text 7"/>
-          <p:cNvSpPr txBox="1"/>
-          <p:nvPr/>
-        </p:nvSpPr>
-        <p:spPr>
-          <a:xfrm>
-            <a:off x="685800" y="3337560"/>
-            <a:ext cx="4389120" cy="822960"/>
-          </a:xfrm>
-          <a:prstGeom prst="rect">
-            <a:avLst/>
-          </a:prstGeom>
-          <a:noFill/>
-          <a:ln/>
-        </p:spPr>
-        <p:txBody>
-          <a:bodyPr wrap="square" lIns="0" tIns="0" rIns="0" bIns="0" rtlCol="0" anchor="t"/>
-          <a:lstStyle/>
-          <a:p>
-            <a:pPr indent="0" marL="0">
-              <a:buNone/>
-            </a:pPr>
-            <a:r>
-              <a:rPr lang="en-US" sz="1400" i="1" dirty="0">
-                <a:solidFill>
-                  <a:srgbClr val="5A5044"/>
-                </a:solidFill>
-                <a:latin typeface="Calibri" pitchFamily="34" charset="0"/>
-                <a:ea typeface="Calibri" pitchFamily="34" charset="-122"/>
-                <a:cs typeface="Calibri" pitchFamily="34" charset="-120"/>
-              </a:rPr>
-              <a:t>„Im Kontext der damaligen Zeit war … am wichtigsten, da … Dies führte zu …“</a:t>
-            </a:r>
-            <a:endParaRPr lang="en-US" sz="1400" dirty="0"/>
-          </a:p>
-        </p:txBody>
-      </p:sp>
-      <p:sp>
-        <p:nvSpPr>
-          <p:cNvPr id="10" name="Shape 8"/>
-          <p:cNvSpPr/>
-          <p:nvPr/>
-        </p:nvSpPr>
-        <p:spPr>
-          <a:xfrm>
-            <a:off x="5440680" y="2560320"/>
-            <a:ext cx="3246120" cy="1691640"/>
-          </a:xfrm>
-          <a:prstGeom prst="roundRect">
-            <a:avLst>
-              <a:gd name="adj" fmla="val 4324"/>
-            </a:avLst>
-          </a:prstGeom>
-          <a:solidFill>
-            <a:srgbClr val="FBF8F2"/>
-          </a:solidFill>
-          <a:ln w="19050">
-            <a:solidFill>
-              <a:srgbClr val="D9A441"/>
-            </a:solidFill>
-            <a:prstDash val="solid"/>
-          </a:ln>
-        </p:spPr>
-      </p:sp>
-      <p:sp>
-        <p:nvSpPr>
-          <p:cNvPr id="11" name="Text 9"/>
-          <p:cNvSpPr txBox="1"/>
-          <p:nvPr/>
-        </p:nvSpPr>
-        <p:spPr>
-          <a:xfrm>
-            <a:off x="5669280" y="2697480"/>
-            <a:ext cx="2834640" cy="320040"/>
-          </a:xfrm>
-          <a:prstGeom prst="rect">
-            <a:avLst/>
-          </a:prstGeom>
-          <a:noFill/>
-          <a:ln/>
-        </p:spPr>
-        <p:txBody>
-          <a:bodyPr wrap="square" lIns="0" tIns="0" rIns="0" bIns="0" rtlCol="0" anchor="t"/>
-          <a:lstStyle/>
-          <a:p>
-            <a:pPr indent="0" marL="0">
-              <a:buNone/>
-            </a:pPr>
-            <a:r>
-              <a:rPr lang="en-US" sz="1500" b="1" dirty="0">
-                <a:solidFill>
-                  <a:srgbClr val="AD4426"/>
-                </a:solidFill>
-                <a:latin typeface="Cambria" pitchFamily="34" charset="0"/>
-                <a:ea typeface="Cambria" pitchFamily="34" charset="-122"/>
-                <a:cs typeface="Cambria" pitchFamily="34" charset="-120"/>
-              </a:rPr>
-              <a:t>Partnercheck</a:t>
-            </a:r>
-            <a:endParaRPr lang="en-US" sz="1500" dirty="0"/>
-          </a:p>
-        </p:txBody>
-      </p:sp>
-      <p:sp>
-        <p:nvSpPr>
-          <p:cNvPr id="12" name="Shape 10"/>
-          <p:cNvSpPr/>
-          <p:nvPr/>
-        </p:nvSpPr>
-        <p:spPr>
-          <a:xfrm>
-            <a:off x="5669280" y="3154680"/>
-            <a:ext cx="219456" cy="219456"/>
-          </a:xfrm>
-          <a:prstGeom prst="roundRect">
-            <a:avLst>
-              <a:gd name="adj" fmla="val 16667"/>
-            </a:avLst>
-          </a:prstGeom>
-          <a:solidFill>
-            <a:srgbClr val="FFFFFF"/>
-          </a:solidFill>
-          <a:ln w="19050">
-            <a:solidFill>
-              <a:srgbClr val="D9A441"/>
-            </a:solidFill>
-            <a:prstDash val="solid"/>
-          </a:ln>
-        </p:spPr>
-      </p:sp>
-      <p:sp>
-        <p:nvSpPr>
-          <p:cNvPr id="13" name="Text 11"/>
-          <p:cNvSpPr txBox="1"/>
-          <p:nvPr/>
-        </p:nvSpPr>
-        <p:spPr>
-          <a:xfrm>
-            <a:off x="5989320" y="3108960"/>
-            <a:ext cx="2606040" cy="310896"/>
-          </a:xfrm>
-          <a:prstGeom prst="rect">
-            <a:avLst/>
-          </a:prstGeom>
-          <a:noFill/>
-          <a:ln/>
-        </p:spPr>
-        <p:txBody>
-          <a:bodyPr wrap="square" lIns="0" tIns="0" rIns="0" bIns="0" rtlCol="0" anchor="ctr"/>
-          <a:lstStyle/>
-          <a:p>
-            <a:pPr indent="0" marL="0">
-              <a:buNone/>
-            </a:pPr>
-            <a:r>
-              <a:rPr lang="en-US" sz="1300" dirty="0">
-                <a:solidFill>
-                  <a:srgbClr val="2B2318"/>
-                </a:solidFill>
-                <a:latin typeface="Calibri" pitchFamily="34" charset="0"/>
-                <a:ea typeface="Calibri" pitchFamily="34" charset="-122"/>
-                <a:cs typeface="Calibri" pitchFamily="34" charset="-120"/>
-              </a:rPr>
-              <a:t>Maßstäbe der damaligen Zeit</a:t>
+                <a:latin typeface="Calibri" pitchFamily="34" charset="0"/>
+                <a:ea typeface="Calibri" pitchFamily="34" charset="-122"/>
+                <a:cs typeface="Calibri" pitchFamily="34" charset="-120"/>
+              </a:rPr>
+              <a:t>Und jetzt? Was passiert, wenn die Bauern ihre Schulden nicht zurückzahlen können?</a:t>
             </a:r>
             <a:endParaRPr lang="en-US" sz="1300" dirty="0"/>
           </a:p>
@@ -12842,118 +13012,13 @@
       </p:sp>
       <p:sp>
         <p:nvSpPr>
-          <p:cNvPr id="14" name="Shape 12"/>
-          <p:cNvSpPr/>
-          <p:nvPr/>
-        </p:nvSpPr>
-        <p:spPr>
-          <a:xfrm>
-            <a:off x="5669280" y="3611880"/>
-            <a:ext cx="219456" cy="219456"/>
-          </a:xfrm>
-          <a:prstGeom prst="roundRect">
-            <a:avLst>
-              <a:gd name="adj" fmla="val 16667"/>
-            </a:avLst>
-          </a:prstGeom>
-          <a:solidFill>
-            <a:srgbClr val="FFFFFF"/>
-          </a:solidFill>
-          <a:ln w="19050">
-            <a:solidFill>
-              <a:srgbClr val="D9A441"/>
-            </a:solidFill>
-            <a:prstDash val="solid"/>
-          </a:ln>
-        </p:spPr>
-      </p:sp>
-      <p:sp>
-        <p:nvSpPr>
-          <p:cNvPr id="15" name="Text 13"/>
-          <p:cNvSpPr txBox="1"/>
-          <p:nvPr/>
-        </p:nvSpPr>
-        <p:spPr>
-          <a:xfrm>
-            <a:off x="5989320" y="3566160"/>
-            <a:ext cx="2606040" cy="310896"/>
-          </a:xfrm>
-          <a:prstGeom prst="rect">
-            <a:avLst/>
-          </a:prstGeom>
-          <a:noFill/>
-          <a:ln/>
-        </p:spPr>
-        <p:txBody>
-          <a:bodyPr wrap="square" lIns="0" tIns="0" rIns="0" bIns="0" rtlCol="0" anchor="ctr"/>
-          <a:lstStyle/>
-          <a:p>
-            <a:pPr indent="0" marL="0">
-              <a:buNone/>
-            </a:pPr>
-            <a:r>
-              <a:rPr lang="en-US" sz="1300" dirty="0">
-                <a:solidFill>
-                  <a:srgbClr val="2B2318"/>
-                </a:solidFill>
-                <a:latin typeface="Calibri" pitchFamily="34" charset="0"/>
-                <a:ea typeface="Calibri" pitchFamily="34" charset="-122"/>
-                <a:cs typeface="Calibri" pitchFamily="34" charset="-120"/>
-              </a:rPr>
-              <a:t>begründet (weil, da, führte zu)</a:t>
-            </a:r>
-            <a:endParaRPr lang="en-US" sz="1300" dirty="0"/>
-          </a:p>
-        </p:txBody>
-      </p:sp>
-      <p:sp>
-        <p:nvSpPr>
-          <p:cNvPr id="16" name="Text 14"/>
-          <p:cNvSpPr txBox="1"/>
-          <p:nvPr/>
-        </p:nvSpPr>
-        <p:spPr>
-          <a:xfrm>
-            <a:off x="457200" y="4754880"/>
-            <a:ext cx="4572000" cy="182880"/>
-          </a:xfrm>
-          <a:prstGeom prst="rect">
-            <a:avLst/>
-          </a:prstGeom>
-          <a:noFill/>
-          <a:ln/>
-        </p:spPr>
-        <p:txBody>
-          <a:bodyPr wrap="square" lIns="0" tIns="0" rIns="0" bIns="0" rtlCol="0" anchor="t"/>
-          <a:lstStyle/>
-          <a:p>
-            <a:pPr indent="0" marL="0">
-              <a:buNone/>
-            </a:pPr>
-            <a:r>
-              <a:rPr lang="en-US" sz="900" dirty="0">
-                <a:solidFill>
-                  <a:srgbClr val="998C77"/>
-                </a:solidFill>
-                <a:latin typeface="Calibri" pitchFamily="34" charset="0"/>
-                <a:ea typeface="Calibri" pitchFamily="34" charset="-122"/>
-                <a:cs typeface="Calibri" pitchFamily="34" charset="-120"/>
-              </a:rPr>
-              <a:t>Von der Polis zur Krise</a:t>
-            </a:r>
-            <a:endParaRPr lang="en-US" sz="900" dirty="0"/>
-          </a:p>
-        </p:txBody>
-      </p:sp>
-      <p:sp>
-        <p:nvSpPr>
-          <p:cNvPr id="17" name="Text 15"/>
-          <p:cNvSpPr txBox="1"/>
-          <p:nvPr/>
-        </p:nvSpPr>
-        <p:spPr>
-          <a:xfrm>
-            <a:off x="8229600" y="4754880"/>
+          <p:cNvPr id="7" name="Text 5"/>
+          <p:cNvSpPr txBox="1"/>
+          <p:nvPr/>
+        </p:nvSpPr>
+        <p:spPr>
+          <a:xfrm>
+            <a:off x="8229600" y="4800600"/>
             <a:ext cx="457200" cy="182880"/>
           </a:xfrm>
           <a:prstGeom prst="rect">
@@ -12995,6 +13060,606 @@
 <file path=ppt/slides/slide23.xml><?xml version="1.0" encoding="utf-8"?>
 <p:sld xmlns:a="http://schemas.openxmlformats.org/drawingml/2006/main" xmlns:r="http://schemas.openxmlformats.org/officeDocument/2006/relationships" xmlns:p="http://schemas.openxmlformats.org/presentationml/2006/main">
   <p:cSld name="Slide 23">
+    <p:bg>
+      <p:bgPr>
+        <a:solidFill>
+          <a:srgbClr val="FFFFFF"/>
+        </a:solidFill>
+      </p:bgPr>
+    </p:bg>
+    <p:spTree>
+      <p:nvGrpSpPr>
+        <p:cNvPr id="1" name=""/>
+        <p:cNvGrpSpPr/>
+        <p:nvPr/>
+      </p:nvGrpSpPr>
+      <p:grpSpPr>
+        <a:xfrm>
+          <a:off x="0" y="0"/>
+          <a:ext cx="0" cy="0"/>
+          <a:chOff x="0" y="0"/>
+          <a:chExt cx="0" cy="0"/>
+        </a:xfrm>
+      </p:grpSpPr>
+      <p:sp>
+        <p:nvSpPr>
+          <p:cNvPr id="2" name="Text 0"/>
+          <p:cNvSpPr txBox="1"/>
+          <p:nvPr/>
+        </p:nvSpPr>
+        <p:spPr>
+          <a:xfrm>
+            <a:off x="457200" y="320040"/>
+            <a:ext cx="8229600" cy="228600"/>
+          </a:xfrm>
+          <a:prstGeom prst="rect">
+            <a:avLst/>
+          </a:prstGeom>
+          <a:noFill/>
+          <a:ln/>
+        </p:spPr>
+        <p:txBody>
+          <a:bodyPr wrap="square" lIns="0" tIns="0" rIns="0" bIns="0" rtlCol="0" anchor="t"/>
+          <a:lstStyle/>
+          <a:p>
+            <a:pPr indent="0" marL="0">
+              <a:buNone/>
+            </a:pPr>
+            <a:r>
+              <a:rPr lang="en-US" sz="1100" b="1" spc="200" kern="0" dirty="0">
+                <a:solidFill>
+                  <a:srgbClr val="AD4426"/>
+                </a:solidFill>
+                <a:latin typeface="Calibri" pitchFamily="34" charset="0"/>
+                <a:ea typeface="Calibri" pitchFamily="34" charset="-122"/>
+                <a:cs typeface="Calibri" pitchFamily="34" charset="-120"/>
+              </a:rPr>
+              <a:t>WIEDERHOLUNG · EINZELARBEIT · HEFT</a:t>
+            </a:r>
+            <a:endParaRPr lang="en-US" sz="1100" dirty="0"/>
+          </a:p>
+        </p:txBody>
+      </p:sp>
+      <p:sp>
+        <p:nvSpPr>
+          <p:cNvPr id="3" name="Text 1"/>
+          <p:cNvSpPr txBox="1"/>
+          <p:nvPr/>
+        </p:nvSpPr>
+        <p:spPr>
+          <a:xfrm>
+            <a:off x="457200" y="548640"/>
+            <a:ext cx="8229600" cy="594360"/>
+          </a:xfrm>
+          <a:prstGeom prst="rect">
+            <a:avLst/>
+          </a:prstGeom>
+          <a:noFill/>
+          <a:ln/>
+        </p:spPr>
+        <p:txBody>
+          <a:bodyPr wrap="square" lIns="0" tIns="0" rIns="0" bIns="0" rtlCol="0" anchor="t"/>
+          <a:lstStyle/>
+          <a:p>
+            <a:pPr indent="0" marL="0">
+              <a:buNone/>
+            </a:pPr>
+            <a:r>
+              <a:rPr lang="en-US" sz="2800" b="1" dirty="0">
+                <a:solidFill>
+                  <a:srgbClr val="2B2318"/>
+                </a:solidFill>
+                <a:latin typeface="Cambria" pitchFamily="34" charset="0"/>
+                <a:ea typeface="Cambria" pitchFamily="34" charset="-122"/>
+                <a:cs typeface="Cambria" pitchFamily="34" charset="-120"/>
+              </a:rPr>
+              <a:t>Ein Sachurteil formulieren</a:t>
+            </a:r>
+            <a:endParaRPr lang="en-US" sz="2800" dirty="0"/>
+          </a:p>
+        </p:txBody>
+      </p:sp>
+      <p:sp>
+        <p:nvSpPr>
+          <p:cNvPr id="4" name="Text 2"/>
+          <p:cNvSpPr txBox="1"/>
+          <p:nvPr/>
+        </p:nvSpPr>
+        <p:spPr>
+          <a:xfrm>
+            <a:off x="7315200" y="347472"/>
+            <a:ext cx="1371600" cy="292608"/>
+          </a:xfrm>
+          <a:prstGeom prst="roundRect">
+            <a:avLst>
+              <a:gd name="adj" fmla="val 31250"/>
+            </a:avLst>
+          </a:prstGeom>
+          <a:solidFill>
+            <a:srgbClr val="2B2318"/>
+          </a:solidFill>
+          <a:ln/>
+        </p:spPr>
+        <p:txBody>
+          <a:bodyPr wrap="square" lIns="25400" tIns="25400" rIns="25400" bIns="25400" rtlCol="0" anchor="ctr"/>
+          <a:lstStyle/>
+          <a:p>
+            <a:pPr algn="ctr" indent="0" marL="0">
+              <a:buNone/>
+            </a:pPr>
+            <a:r>
+              <a:rPr lang="en-US" sz="1100" b="1" dirty="0">
+                <a:solidFill>
+                  <a:srgbClr val="FFFFFF"/>
+                </a:solidFill>
+                <a:latin typeface="Calibri" pitchFamily="34" charset="0"/>
+                <a:ea typeface="Calibri" pitchFamily="34" charset="-122"/>
+                <a:cs typeface="Calibri" pitchFamily="34" charset="-120"/>
+              </a:rPr>
+              <a:t>7 Min.</a:t>
+            </a:r>
+            <a:endParaRPr lang="en-US" sz="1100" dirty="0"/>
+          </a:p>
+        </p:txBody>
+      </p:sp>
+      <p:sp>
+        <p:nvSpPr>
+          <p:cNvPr id="5" name="Shape 3"/>
+          <p:cNvSpPr/>
+          <p:nvPr/>
+        </p:nvSpPr>
+        <p:spPr>
+          <a:xfrm>
+            <a:off x="457200" y="1325880"/>
+            <a:ext cx="8229600" cy="1005840"/>
+          </a:xfrm>
+          <a:prstGeom prst="roundRect">
+            <a:avLst>
+              <a:gd name="adj" fmla="val 7273"/>
+            </a:avLst>
+          </a:prstGeom>
+          <a:solidFill>
+            <a:srgbClr val="2B2318"/>
+          </a:solidFill>
+          <a:ln w="12700">
+            <a:solidFill>
+              <a:srgbClr val="2B2318"/>
+            </a:solidFill>
+            <a:prstDash val="solid"/>
+          </a:ln>
+        </p:spPr>
+      </p:sp>
+      <p:sp>
+        <p:nvSpPr>
+          <p:cNvPr id="6" name="Text 4"/>
+          <p:cNvSpPr txBox="1"/>
+          <p:nvPr/>
+        </p:nvSpPr>
+        <p:spPr>
+          <a:xfrm>
+            <a:off x="731520" y="1417320"/>
+            <a:ext cx="7680960" cy="822960"/>
+          </a:xfrm>
+          <a:prstGeom prst="rect">
+            <a:avLst/>
+          </a:prstGeom>
+          <a:noFill/>
+          <a:ln/>
+        </p:spPr>
+        <p:txBody>
+          <a:bodyPr wrap="square" lIns="0" tIns="0" rIns="0" bIns="0" rtlCol="0" anchor="ctr"/>
+          <a:lstStyle/>
+          <a:p>
+            <a:pPr indent="0" marL="0">
+              <a:buNone/>
+            </a:pPr>
+            <a:r>
+              <a:rPr lang="en-US" sz="2200" b="1" dirty="0">
+                <a:solidFill>
+                  <a:srgbClr val="FFFFFF"/>
+                </a:solidFill>
+                <a:latin typeface="Cambria" pitchFamily="34" charset="0"/>
+                <a:ea typeface="Cambria" pitchFamily="34" charset="-122"/>
+                <a:cs typeface="Cambria" pitchFamily="34" charset="-120"/>
+              </a:rPr>
+              <a:t>Welcher Faktor war für die Entstehung der Poleis am wichtigsten?</a:t>
+            </a:r>
+            <a:endParaRPr lang="en-US" sz="2200" dirty="0"/>
+          </a:p>
+        </p:txBody>
+      </p:sp>
+      <p:sp>
+        <p:nvSpPr>
+          <p:cNvPr id="7" name="Shape 5"/>
+          <p:cNvSpPr/>
+          <p:nvPr/>
+        </p:nvSpPr>
+        <p:spPr>
+          <a:xfrm>
+            <a:off x="457200" y="2560320"/>
+            <a:ext cx="4754880" cy="1691640"/>
+          </a:xfrm>
+          <a:prstGeom prst="roundRect">
+            <a:avLst>
+              <a:gd name="adj" fmla="val 4324"/>
+            </a:avLst>
+          </a:prstGeom>
+          <a:solidFill>
+            <a:srgbClr val="F4ECDE"/>
+          </a:solidFill>
+          <a:ln w="12700">
+            <a:solidFill>
+              <a:srgbClr val="F4ECDE"/>
+            </a:solidFill>
+            <a:prstDash val="solid"/>
+          </a:ln>
+        </p:spPr>
+      </p:sp>
+      <p:sp>
+        <p:nvSpPr>
+          <p:cNvPr id="8" name="Text 6"/>
+          <p:cNvSpPr txBox="1"/>
+          <p:nvPr/>
+        </p:nvSpPr>
+        <p:spPr>
+          <a:xfrm>
+            <a:off x="685800" y="2697480"/>
+            <a:ext cx="4389120" cy="548640"/>
+          </a:xfrm>
+          <a:prstGeom prst="rect">
+            <a:avLst/>
+          </a:prstGeom>
+          <a:noFill/>
+          <a:ln/>
+        </p:spPr>
+        <p:txBody>
+          <a:bodyPr wrap="square" lIns="0" tIns="0" rIns="0" bIns="0" rtlCol="0" anchor="t"/>
+          <a:lstStyle/>
+          <a:p>
+            <a:pPr indent="0" marL="0">
+              <a:buNone/>
+            </a:pPr>
+            <a:r>
+              <a:rPr lang="en-US" sz="1400" b="1" dirty="0">
+                <a:solidFill>
+                  <a:srgbClr val="2B2318"/>
+                </a:solidFill>
+                <a:latin typeface="Calibri" pitchFamily="34" charset="0"/>
+                <a:ea typeface="Calibri" pitchFamily="34" charset="-122"/>
+                <a:cs typeface="Calibri" pitchFamily="34" charset="-120"/>
+              </a:rPr>
+              <a:t>Schreibt 2–3 Sätze. Nutzt den Lückentext.</a:t>
+            </a:r>
+            <a:endParaRPr lang="en-US" sz="1400" dirty="0"/>
+          </a:p>
+        </p:txBody>
+      </p:sp>
+      <p:sp>
+        <p:nvSpPr>
+          <p:cNvPr id="9" name="Text 7"/>
+          <p:cNvSpPr txBox="1"/>
+          <p:nvPr/>
+        </p:nvSpPr>
+        <p:spPr>
+          <a:xfrm>
+            <a:off x="685800" y="3337560"/>
+            <a:ext cx="4389120" cy="822960"/>
+          </a:xfrm>
+          <a:prstGeom prst="rect">
+            <a:avLst/>
+          </a:prstGeom>
+          <a:noFill/>
+          <a:ln/>
+        </p:spPr>
+        <p:txBody>
+          <a:bodyPr wrap="square" lIns="0" tIns="0" rIns="0" bIns="0" rtlCol="0" anchor="t"/>
+          <a:lstStyle/>
+          <a:p>
+            <a:pPr indent="0" marL="0">
+              <a:buNone/>
+            </a:pPr>
+            <a:r>
+              <a:rPr lang="en-US" sz="1400" i="1" dirty="0">
+                <a:solidFill>
+                  <a:srgbClr val="5A5044"/>
+                </a:solidFill>
+                <a:latin typeface="Calibri" pitchFamily="34" charset="0"/>
+                <a:ea typeface="Calibri" pitchFamily="34" charset="-122"/>
+                <a:cs typeface="Calibri" pitchFamily="34" charset="-120"/>
+              </a:rPr>
+              <a:t>„Im Kontext der damaligen Zeit war … am wichtigsten, da … Dies führte zu …“</a:t>
+            </a:r>
+            <a:endParaRPr lang="en-US" sz="1400" dirty="0"/>
+          </a:p>
+        </p:txBody>
+      </p:sp>
+      <p:sp>
+        <p:nvSpPr>
+          <p:cNvPr id="10" name="Shape 8"/>
+          <p:cNvSpPr/>
+          <p:nvPr/>
+        </p:nvSpPr>
+        <p:spPr>
+          <a:xfrm>
+            <a:off x="5440680" y="2560320"/>
+            <a:ext cx="3246120" cy="1691640"/>
+          </a:xfrm>
+          <a:prstGeom prst="roundRect">
+            <a:avLst>
+              <a:gd name="adj" fmla="val 4324"/>
+            </a:avLst>
+          </a:prstGeom>
+          <a:solidFill>
+            <a:srgbClr val="FBF8F2"/>
+          </a:solidFill>
+          <a:ln w="19050">
+            <a:solidFill>
+              <a:srgbClr val="D9A441"/>
+            </a:solidFill>
+            <a:prstDash val="solid"/>
+          </a:ln>
+        </p:spPr>
+      </p:sp>
+      <p:sp>
+        <p:nvSpPr>
+          <p:cNvPr id="11" name="Text 9"/>
+          <p:cNvSpPr txBox="1"/>
+          <p:nvPr/>
+        </p:nvSpPr>
+        <p:spPr>
+          <a:xfrm>
+            <a:off x="5669280" y="2697480"/>
+            <a:ext cx="2834640" cy="320040"/>
+          </a:xfrm>
+          <a:prstGeom prst="rect">
+            <a:avLst/>
+          </a:prstGeom>
+          <a:noFill/>
+          <a:ln/>
+        </p:spPr>
+        <p:txBody>
+          <a:bodyPr wrap="square" lIns="0" tIns="0" rIns="0" bIns="0" rtlCol="0" anchor="t"/>
+          <a:lstStyle/>
+          <a:p>
+            <a:pPr indent="0" marL="0">
+              <a:buNone/>
+            </a:pPr>
+            <a:r>
+              <a:rPr lang="en-US" sz="1500" b="1" dirty="0">
+                <a:solidFill>
+                  <a:srgbClr val="AD4426"/>
+                </a:solidFill>
+                <a:latin typeface="Cambria" pitchFamily="34" charset="0"/>
+                <a:ea typeface="Cambria" pitchFamily="34" charset="-122"/>
+                <a:cs typeface="Cambria" pitchFamily="34" charset="-120"/>
+              </a:rPr>
+              <a:t>Partnercheck</a:t>
+            </a:r>
+            <a:endParaRPr lang="en-US" sz="1500" dirty="0"/>
+          </a:p>
+        </p:txBody>
+      </p:sp>
+      <p:sp>
+        <p:nvSpPr>
+          <p:cNvPr id="12" name="Shape 10"/>
+          <p:cNvSpPr/>
+          <p:nvPr/>
+        </p:nvSpPr>
+        <p:spPr>
+          <a:xfrm>
+            <a:off x="5669280" y="3154680"/>
+            <a:ext cx="219456" cy="219456"/>
+          </a:xfrm>
+          <a:prstGeom prst="roundRect">
+            <a:avLst>
+              <a:gd name="adj" fmla="val 16667"/>
+            </a:avLst>
+          </a:prstGeom>
+          <a:solidFill>
+            <a:srgbClr val="FFFFFF"/>
+          </a:solidFill>
+          <a:ln w="19050">
+            <a:solidFill>
+              <a:srgbClr val="D9A441"/>
+            </a:solidFill>
+            <a:prstDash val="solid"/>
+          </a:ln>
+        </p:spPr>
+      </p:sp>
+      <p:sp>
+        <p:nvSpPr>
+          <p:cNvPr id="13" name="Text 11"/>
+          <p:cNvSpPr txBox="1"/>
+          <p:nvPr/>
+        </p:nvSpPr>
+        <p:spPr>
+          <a:xfrm>
+            <a:off x="5989320" y="3108960"/>
+            <a:ext cx="2606040" cy="310896"/>
+          </a:xfrm>
+          <a:prstGeom prst="rect">
+            <a:avLst/>
+          </a:prstGeom>
+          <a:noFill/>
+          <a:ln/>
+        </p:spPr>
+        <p:txBody>
+          <a:bodyPr wrap="square" lIns="0" tIns="0" rIns="0" bIns="0" rtlCol="0" anchor="ctr"/>
+          <a:lstStyle/>
+          <a:p>
+            <a:pPr indent="0" marL="0">
+              <a:buNone/>
+            </a:pPr>
+            <a:r>
+              <a:rPr lang="en-US" sz="1300" dirty="0">
+                <a:solidFill>
+                  <a:srgbClr val="2B2318"/>
+                </a:solidFill>
+                <a:latin typeface="Calibri" pitchFamily="34" charset="0"/>
+                <a:ea typeface="Calibri" pitchFamily="34" charset="-122"/>
+                <a:cs typeface="Calibri" pitchFamily="34" charset="-120"/>
+              </a:rPr>
+              <a:t>Maßstäbe der damaligen Zeit</a:t>
+            </a:r>
+            <a:endParaRPr lang="en-US" sz="1300" dirty="0"/>
+          </a:p>
+        </p:txBody>
+      </p:sp>
+      <p:sp>
+        <p:nvSpPr>
+          <p:cNvPr id="14" name="Shape 12"/>
+          <p:cNvSpPr/>
+          <p:nvPr/>
+        </p:nvSpPr>
+        <p:spPr>
+          <a:xfrm>
+            <a:off x="5669280" y="3611880"/>
+            <a:ext cx="219456" cy="219456"/>
+          </a:xfrm>
+          <a:prstGeom prst="roundRect">
+            <a:avLst>
+              <a:gd name="adj" fmla="val 16667"/>
+            </a:avLst>
+          </a:prstGeom>
+          <a:solidFill>
+            <a:srgbClr val="FFFFFF"/>
+          </a:solidFill>
+          <a:ln w="19050">
+            <a:solidFill>
+              <a:srgbClr val="D9A441"/>
+            </a:solidFill>
+            <a:prstDash val="solid"/>
+          </a:ln>
+        </p:spPr>
+      </p:sp>
+      <p:sp>
+        <p:nvSpPr>
+          <p:cNvPr id="15" name="Text 13"/>
+          <p:cNvSpPr txBox="1"/>
+          <p:nvPr/>
+        </p:nvSpPr>
+        <p:spPr>
+          <a:xfrm>
+            <a:off x="5989320" y="3566160"/>
+            <a:ext cx="2606040" cy="310896"/>
+          </a:xfrm>
+          <a:prstGeom prst="rect">
+            <a:avLst/>
+          </a:prstGeom>
+          <a:noFill/>
+          <a:ln/>
+        </p:spPr>
+        <p:txBody>
+          <a:bodyPr wrap="square" lIns="0" tIns="0" rIns="0" bIns="0" rtlCol="0" anchor="ctr"/>
+          <a:lstStyle/>
+          <a:p>
+            <a:pPr indent="0" marL="0">
+              <a:buNone/>
+            </a:pPr>
+            <a:r>
+              <a:rPr lang="en-US" sz="1300" dirty="0">
+                <a:solidFill>
+                  <a:srgbClr val="2B2318"/>
+                </a:solidFill>
+                <a:latin typeface="Calibri" pitchFamily="34" charset="0"/>
+                <a:ea typeface="Calibri" pitchFamily="34" charset="-122"/>
+                <a:cs typeface="Calibri" pitchFamily="34" charset="-120"/>
+              </a:rPr>
+              <a:t>begründet (weil, da, führte zu)</a:t>
+            </a:r>
+            <a:endParaRPr lang="en-US" sz="1300" dirty="0"/>
+          </a:p>
+        </p:txBody>
+      </p:sp>
+      <p:sp>
+        <p:nvSpPr>
+          <p:cNvPr id="16" name="Text 14"/>
+          <p:cNvSpPr txBox="1"/>
+          <p:nvPr/>
+        </p:nvSpPr>
+        <p:spPr>
+          <a:xfrm>
+            <a:off x="457200" y="4754880"/>
+            <a:ext cx="4572000" cy="182880"/>
+          </a:xfrm>
+          <a:prstGeom prst="rect">
+            <a:avLst/>
+          </a:prstGeom>
+          <a:noFill/>
+          <a:ln/>
+        </p:spPr>
+        <p:txBody>
+          <a:bodyPr wrap="square" lIns="0" tIns="0" rIns="0" bIns="0" rtlCol="0" anchor="t"/>
+          <a:lstStyle/>
+          <a:p>
+            <a:pPr indent="0" marL="0">
+              <a:buNone/>
+            </a:pPr>
+            <a:r>
+              <a:rPr lang="en-US" sz="900" dirty="0">
+                <a:solidFill>
+                  <a:srgbClr val="998C77"/>
+                </a:solidFill>
+                <a:latin typeface="Calibri" pitchFamily="34" charset="0"/>
+                <a:ea typeface="Calibri" pitchFamily="34" charset="-122"/>
+                <a:cs typeface="Calibri" pitchFamily="34" charset="-120"/>
+              </a:rPr>
+              <a:t>Von der Polis zur Krise</a:t>
+            </a:r>
+            <a:endParaRPr lang="en-US" sz="900" dirty="0"/>
+          </a:p>
+        </p:txBody>
+      </p:sp>
+      <p:sp>
+        <p:nvSpPr>
+          <p:cNvPr id="17" name="Text 15"/>
+          <p:cNvSpPr txBox="1"/>
+          <p:nvPr/>
+        </p:nvSpPr>
+        <p:spPr>
+          <a:xfrm>
+            <a:off x="8229600" y="4754880"/>
+            <a:ext cx="457200" cy="182880"/>
+          </a:xfrm>
+          <a:prstGeom prst="rect">
+            <a:avLst/>
+          </a:prstGeom>
+          <a:noFill/>
+          <a:ln/>
+        </p:spPr>
+        <p:txBody>
+          <a:bodyPr wrap="square" lIns="0" tIns="0" rIns="0" bIns="0" rtlCol="0" anchor="t"/>
+          <a:lstStyle/>
+          <a:p>
+            <a:pPr algn="r" indent="0" marL="0">
+              <a:buNone/>
+            </a:pPr>
+            <a:r>
+              <a:rPr lang="en-US" sz="900" dirty="0">
+                <a:solidFill>
+                  <a:srgbClr val="998C77"/>
+                </a:solidFill>
+                <a:latin typeface="Calibri" pitchFamily="34" charset="0"/>
+                <a:ea typeface="Calibri" pitchFamily="34" charset="-122"/>
+                <a:cs typeface="Calibri" pitchFamily="34" charset="-120"/>
+              </a:rPr>
+              <a:t>23</a:t>
+            </a:r>
+            <a:endParaRPr lang="en-US" sz="900" dirty="0"/>
+          </a:p>
+        </p:txBody>
+      </p:sp>
+    </p:spTree>
+  </p:cSld>
+  <p:clrMapOvr>
+    <a:masterClrMapping/>
+  </p:clrMapOvr>
+</p:sld>
+</file>
+
+<file path=ppt/slides/slide24.xml><?xml version="1.0" encoding="utf-8"?>
+<p:sld xmlns:a="http://schemas.openxmlformats.org/drawingml/2006/main" xmlns:r="http://schemas.openxmlformats.org/officeDocument/2006/relationships" xmlns:p="http://schemas.openxmlformats.org/presentationml/2006/main">
+  <p:cSld name="Slide 24">
     <p:bg>
       <p:bgPr>
         <a:solidFill>
@@ -13386,7 +14051,7 @@
                 <a:ea typeface="Calibri" pitchFamily="34" charset="-122"/>
                 <a:cs typeface="Calibri" pitchFamily="34" charset="-120"/>
               </a:rPr>
-              <a:t>23</a:t>
+              <a:t>24</a:t>
             </a:r>
             <a:endParaRPr lang="en-US" sz="900" dirty="0"/>
           </a:p>
@@ -13400,9 +14065,9 @@
 </p:sld>
 </file>
 
-<file path=ppt/slides/slide24.xml><?xml version="1.0" encoding="utf-8"?>
+<file path=ppt/slides/slide25.xml><?xml version="1.0" encoding="utf-8"?>
 <p:sld xmlns:a="http://schemas.openxmlformats.org/drawingml/2006/main" xmlns:r="http://schemas.openxmlformats.org/officeDocument/2006/relationships" xmlns:p="http://schemas.openxmlformats.org/presentationml/2006/main">
-  <p:cSld name="Slide 24">
+  <p:cSld name="Slide 25">
     <p:bg>
       <p:bgPr>
         <a:solidFill>
@@ -13504,7 +14169,7 @@
       </p:sp>
       <p:graphicFrame>
         <p:nvGraphicFramePr>
-          <p:cNvPr id="25" name="Table 0"/>
+          <p:cNvPr id="26" name="Table 0"/>
           <p:cNvGraphicFramePr>
             <a:graphicFrameLocks noGrp="1"/>
           </p:cNvGraphicFramePr>
@@ -15168,648 +15833,6 @@
                 <a:ea typeface="Calibri" pitchFamily="34" charset="-122"/>
                 <a:cs typeface="Calibri" pitchFamily="34" charset="-120"/>
               </a:rPr>
-              <a:t>24</a:t>
-            </a:r>
-            <a:endParaRPr lang="en-US" sz="900" dirty="0"/>
-          </a:p>
-        </p:txBody>
-      </p:sp>
-    </p:spTree>
-  </p:cSld>
-  <p:clrMapOvr>
-    <a:masterClrMapping/>
-  </p:clrMapOvr>
-</p:sld>
-</file>
-
-<file path=ppt/slides/slide25.xml><?xml version="1.0" encoding="utf-8"?>
-<p:sld xmlns:a="http://schemas.openxmlformats.org/drawingml/2006/main" xmlns:r="http://schemas.openxmlformats.org/officeDocument/2006/relationships" xmlns:p="http://schemas.openxmlformats.org/presentationml/2006/main">
-  <p:cSld name="Slide 25">
-    <p:bg>
-      <p:bgPr>
-        <a:solidFill>
-          <a:srgbClr val="FFFFFF"/>
-        </a:solidFill>
-      </p:bgPr>
-    </p:bg>
-    <p:spTree>
-      <p:nvGrpSpPr>
-        <p:cNvPr id="1" name=""/>
-        <p:cNvGrpSpPr/>
-        <p:nvPr/>
-      </p:nvGrpSpPr>
-      <p:grpSpPr>
-        <a:xfrm>
-          <a:off x="0" y="0"/>
-          <a:ext cx="0" cy="0"/>
-          <a:chOff x="0" y="0"/>
-          <a:chExt cx="0" cy="0"/>
-        </a:xfrm>
-      </p:grpSpPr>
-      <p:sp>
-        <p:nvSpPr>
-          <p:cNvPr id="2" name="Text 0"/>
-          <p:cNvSpPr txBox="1"/>
-          <p:nvPr/>
-        </p:nvSpPr>
-        <p:spPr>
-          <a:xfrm>
-            <a:off x="457200" y="320040"/>
-            <a:ext cx="8229600" cy="228600"/>
-          </a:xfrm>
-          <a:prstGeom prst="rect">
-            <a:avLst/>
-          </a:prstGeom>
-          <a:noFill/>
-          <a:ln/>
-        </p:spPr>
-        <p:txBody>
-          <a:bodyPr wrap="square" lIns="0" tIns="0" rIns="0" bIns="0" rtlCol="0" anchor="t"/>
-          <a:lstStyle/>
-          <a:p>
-            <a:pPr indent="0" marL="0">
-              <a:buNone/>
-            </a:pPr>
-            <a:r>
-              <a:rPr lang="en-US" sz="1100" b="1" spc="200" kern="0" dirty="0">
-                <a:solidFill>
-                  <a:srgbClr val="AD4426"/>
-                </a:solidFill>
-                <a:latin typeface="Calibri" pitchFamily="34" charset="0"/>
-                <a:ea typeface="Calibri" pitchFamily="34" charset="-122"/>
-                <a:cs typeface="Calibri" pitchFamily="34" charset="-120"/>
-              </a:rPr>
-              <a:t>PARTNERARBEIT · LB S. 20</a:t>
-            </a:r>
-            <a:endParaRPr lang="en-US" sz="1100" dirty="0"/>
-          </a:p>
-        </p:txBody>
-      </p:sp>
-      <p:sp>
-        <p:nvSpPr>
-          <p:cNvPr id="3" name="Text 1"/>
-          <p:cNvSpPr txBox="1"/>
-          <p:nvPr/>
-        </p:nvSpPr>
-        <p:spPr>
-          <a:xfrm>
-            <a:off x="457200" y="548640"/>
-            <a:ext cx="8229600" cy="594360"/>
-          </a:xfrm>
-          <a:prstGeom prst="rect">
-            <a:avLst/>
-          </a:prstGeom>
-          <a:noFill/>
-          <a:ln/>
-        </p:spPr>
-        <p:txBody>
-          <a:bodyPr wrap="square" lIns="0" tIns="0" rIns="0" bIns="0" rtlCol="0" anchor="t"/>
-          <a:lstStyle/>
-          <a:p>
-            <a:pPr indent="0" marL="0">
-              <a:buNone/>
-            </a:pPr>
-            <a:r>
-              <a:rPr lang="en-US" sz="2800" b="1" dirty="0">
-                <a:solidFill>
-                  <a:srgbClr val="2B2318"/>
-                </a:solidFill>
-                <a:latin typeface="Cambria" pitchFamily="34" charset="0"/>
-                <a:ea typeface="Cambria" pitchFamily="34" charset="-122"/>
-                <a:cs typeface="Cambria" pitchFamily="34" charset="-120"/>
-              </a:rPr>
-              <a:t>Drakon: Was ändert er?</a:t>
-            </a:r>
-            <a:endParaRPr lang="en-US" sz="2800" dirty="0"/>
-          </a:p>
-        </p:txBody>
-      </p:sp>
-      <p:sp>
-        <p:nvSpPr>
-          <p:cNvPr id="4" name="Text 2"/>
-          <p:cNvSpPr txBox="1"/>
-          <p:nvPr/>
-        </p:nvSpPr>
-        <p:spPr>
-          <a:xfrm>
-            <a:off x="7315200" y="347472"/>
-            <a:ext cx="1371600" cy="292608"/>
-          </a:xfrm>
-          <a:prstGeom prst="roundRect">
-            <a:avLst>
-              <a:gd name="adj" fmla="val 31250"/>
-            </a:avLst>
-          </a:prstGeom>
-          <a:solidFill>
-            <a:srgbClr val="2B2318"/>
-          </a:solidFill>
-          <a:ln/>
-        </p:spPr>
-        <p:txBody>
-          <a:bodyPr wrap="square" lIns="25400" tIns="25400" rIns="25400" bIns="25400" rtlCol="0" anchor="ctr"/>
-          <a:lstStyle/>
-          <a:p>
-            <a:pPr algn="ctr" indent="0" marL="0">
-              <a:buNone/>
-            </a:pPr>
-            <a:r>
-              <a:rPr lang="en-US" sz="1100" b="1" dirty="0">
-                <a:solidFill>
-                  <a:srgbClr val="FFFFFF"/>
-                </a:solidFill>
-                <a:latin typeface="Calibri" pitchFamily="34" charset="0"/>
-                <a:ea typeface="Calibri" pitchFamily="34" charset="-122"/>
-                <a:cs typeface="Calibri" pitchFamily="34" charset="-120"/>
-              </a:rPr>
-              <a:t>8 Min.</a:t>
-            </a:r>
-            <a:endParaRPr lang="en-US" sz="1100" dirty="0"/>
-          </a:p>
-        </p:txBody>
-      </p:sp>
-      <p:sp>
-        <p:nvSpPr>
-          <p:cNvPr id="5" name="Shape 3"/>
-          <p:cNvSpPr/>
-          <p:nvPr/>
-        </p:nvSpPr>
-        <p:spPr>
-          <a:xfrm>
-            <a:off x="457200" y="1325880"/>
-            <a:ext cx="5120640" cy="2926080"/>
-          </a:xfrm>
-          <a:prstGeom prst="roundRect">
-            <a:avLst>
-              <a:gd name="adj" fmla="val 2500"/>
-            </a:avLst>
-          </a:prstGeom>
-          <a:solidFill>
-            <a:srgbClr val="F4ECDE"/>
-          </a:solidFill>
-          <a:ln w="12700">
-            <a:solidFill>
-              <a:srgbClr val="F4ECDE"/>
-            </a:solidFill>
-            <a:prstDash val="solid"/>
-          </a:ln>
-        </p:spPr>
-      </p:sp>
-      <p:sp>
-        <p:nvSpPr>
-          <p:cNvPr id="6" name="Text 4"/>
-          <p:cNvSpPr txBox="1"/>
-          <p:nvPr/>
-        </p:nvSpPr>
-        <p:spPr>
-          <a:xfrm>
-            <a:off x="685800" y="1554480"/>
-            <a:ext cx="457200" cy="457200"/>
-          </a:xfrm>
-          <a:prstGeom prst="ellipse">
-            <a:avLst/>
-          </a:prstGeom>
-          <a:solidFill>
-            <a:srgbClr val="AD4426"/>
-          </a:solidFill>
-          <a:ln/>
-        </p:spPr>
-        <p:txBody>
-          <a:bodyPr wrap="square" lIns="0" tIns="0" rIns="0" bIns="0" rtlCol="0" anchor="ctr"/>
-          <a:lstStyle/>
-          <a:p>
-            <a:pPr algn="ctr" indent="0" marL="0">
-              <a:buNone/>
-            </a:pPr>
-            <a:r>
-              <a:rPr lang="en-US" sz="1800" b="1" dirty="0">
-                <a:solidFill>
-                  <a:srgbClr val="FFFFFF"/>
-                </a:solidFill>
-                <a:latin typeface="Cambria" pitchFamily="34" charset="0"/>
-                <a:ea typeface="Cambria" pitchFamily="34" charset="-122"/>
-                <a:cs typeface="Cambria" pitchFamily="34" charset="-120"/>
-              </a:rPr>
-              <a:t>1</a:t>
-            </a:r>
-            <a:endParaRPr lang="en-US" sz="1800" dirty="0"/>
-          </a:p>
-        </p:txBody>
-      </p:sp>
-      <p:sp>
-        <p:nvSpPr>
-          <p:cNvPr id="7" name="Text 5"/>
-          <p:cNvSpPr txBox="1"/>
-          <p:nvPr/>
-        </p:nvSpPr>
-        <p:spPr>
-          <a:xfrm>
-            <a:off x="1325880" y="1554480"/>
-            <a:ext cx="4023360" cy="640080"/>
-          </a:xfrm>
-          <a:prstGeom prst="rect">
-            <a:avLst/>
-          </a:prstGeom>
-          <a:noFill/>
-          <a:ln/>
-        </p:spPr>
-        <p:txBody>
-          <a:bodyPr wrap="square" lIns="0" tIns="0" rIns="0" bIns="0" rtlCol="0" anchor="ctr"/>
-          <a:lstStyle/>
-          <a:p>
-            <a:pPr indent="0" marL="0">
-              <a:buNone/>
-            </a:pPr>
-            <a:r>
-              <a:rPr lang="en-US" sz="1500" dirty="0">
-                <a:solidFill>
-                  <a:srgbClr val="2B2318"/>
-                </a:solidFill>
-                <a:latin typeface="Calibri" pitchFamily="34" charset="0"/>
-                <a:ea typeface="Calibri" pitchFamily="34" charset="-122"/>
-                <a:cs typeface="Calibri" pitchFamily="34" charset="-120"/>
-              </a:rPr>
-              <a:t>Lest im LB S. 20 den Abschnitt „Die Gesetzgebung des Drakon“.</a:t>
-            </a:r>
-            <a:endParaRPr lang="en-US" sz="1500" dirty="0"/>
-          </a:p>
-        </p:txBody>
-      </p:sp>
-      <p:sp>
-        <p:nvSpPr>
-          <p:cNvPr id="8" name="Text 6"/>
-          <p:cNvSpPr txBox="1"/>
-          <p:nvPr/>
-        </p:nvSpPr>
-        <p:spPr>
-          <a:xfrm>
-            <a:off x="685800" y="2377440"/>
-            <a:ext cx="457200" cy="457200"/>
-          </a:xfrm>
-          <a:prstGeom prst="ellipse">
-            <a:avLst/>
-          </a:prstGeom>
-          <a:solidFill>
-            <a:srgbClr val="AD4426"/>
-          </a:solidFill>
-          <a:ln/>
-        </p:spPr>
-        <p:txBody>
-          <a:bodyPr wrap="square" lIns="0" tIns="0" rIns="0" bIns="0" rtlCol="0" anchor="ctr"/>
-          <a:lstStyle/>
-          <a:p>
-            <a:pPr algn="ctr" indent="0" marL="0">
-              <a:buNone/>
-            </a:pPr>
-            <a:r>
-              <a:rPr lang="en-US" sz="1800" b="1" dirty="0">
-                <a:solidFill>
-                  <a:srgbClr val="FFFFFF"/>
-                </a:solidFill>
-                <a:latin typeface="Cambria" pitchFamily="34" charset="0"/>
-                <a:ea typeface="Cambria" pitchFamily="34" charset="-122"/>
-                <a:cs typeface="Cambria" pitchFamily="34" charset="-120"/>
-              </a:rPr>
-              <a:t>2</a:t>
-            </a:r>
-            <a:endParaRPr lang="en-US" sz="1800" dirty="0"/>
-          </a:p>
-        </p:txBody>
-      </p:sp>
-      <p:sp>
-        <p:nvSpPr>
-          <p:cNvPr id="9" name="Text 7"/>
-          <p:cNvSpPr txBox="1"/>
-          <p:nvPr/>
-        </p:nvSpPr>
-        <p:spPr>
-          <a:xfrm>
-            <a:off x="1325880" y="2377440"/>
-            <a:ext cx="4023360" cy="457200"/>
-          </a:xfrm>
-          <a:prstGeom prst="rect">
-            <a:avLst/>
-          </a:prstGeom>
-          <a:noFill/>
-          <a:ln/>
-        </p:spPr>
-        <p:txBody>
-          <a:bodyPr wrap="square" lIns="0" tIns="0" rIns="0" bIns="0" rtlCol="0" anchor="ctr"/>
-          <a:lstStyle/>
-          <a:p>
-            <a:pPr indent="0" marL="0">
-              <a:buNone/>
-            </a:pPr>
-            <a:r>
-              <a:rPr lang="en-US" sz="1500" dirty="0">
-                <a:solidFill>
-                  <a:srgbClr val="2B2318"/>
-                </a:solidFill>
-                <a:latin typeface="Calibri" pitchFamily="34" charset="0"/>
-                <a:ea typeface="Calibri" pitchFamily="34" charset="-122"/>
-                <a:cs typeface="Calibri" pitchFamily="34" charset="-120"/>
-              </a:rPr>
-              <a:t>Füllt die Spalte „Drakon“ aus: ✔, ~ oder ✘.</a:t>
-            </a:r>
-            <a:endParaRPr lang="en-US" sz="1500" dirty="0"/>
-          </a:p>
-        </p:txBody>
-      </p:sp>
-      <p:sp>
-        <p:nvSpPr>
-          <p:cNvPr id="10" name="Text 8"/>
-          <p:cNvSpPr txBox="1"/>
-          <p:nvPr/>
-        </p:nvSpPr>
-        <p:spPr>
-          <a:xfrm>
-            <a:off x="685800" y="3108960"/>
-            <a:ext cx="457200" cy="457200"/>
-          </a:xfrm>
-          <a:prstGeom prst="ellipse">
-            <a:avLst/>
-          </a:prstGeom>
-          <a:solidFill>
-            <a:srgbClr val="AD4426"/>
-          </a:solidFill>
-          <a:ln/>
-        </p:spPr>
-        <p:txBody>
-          <a:bodyPr wrap="square" lIns="0" tIns="0" rIns="0" bIns="0" rtlCol="0" anchor="ctr"/>
-          <a:lstStyle/>
-          <a:p>
-            <a:pPr algn="ctr" indent="0" marL="0">
-              <a:buNone/>
-            </a:pPr>
-            <a:r>
-              <a:rPr lang="en-US" sz="1800" b="1" dirty="0">
-                <a:solidFill>
-                  <a:srgbClr val="FFFFFF"/>
-                </a:solidFill>
-                <a:latin typeface="Cambria" pitchFamily="34" charset="0"/>
-                <a:ea typeface="Cambria" pitchFamily="34" charset="-122"/>
-                <a:cs typeface="Cambria" pitchFamily="34" charset="-120"/>
-              </a:rPr>
-              <a:t>3</a:t>
-            </a:r>
-            <a:endParaRPr lang="en-US" sz="1800" dirty="0"/>
-          </a:p>
-        </p:txBody>
-      </p:sp>
-      <p:sp>
-        <p:nvSpPr>
-          <p:cNvPr id="11" name="Text 9"/>
-          <p:cNvSpPr txBox="1"/>
-          <p:nvPr/>
-        </p:nvSpPr>
-        <p:spPr>
-          <a:xfrm>
-            <a:off x="1325880" y="3108960"/>
-            <a:ext cx="4023360" cy="640080"/>
-          </a:xfrm>
-          <a:prstGeom prst="rect">
-            <a:avLst/>
-          </a:prstGeom>
-          <a:noFill/>
-          <a:ln/>
-        </p:spPr>
-        <p:txBody>
-          <a:bodyPr wrap="square" lIns="0" tIns="0" rIns="0" bIns="0" rtlCol="0" anchor="ctr"/>
-          <a:lstStyle/>
-          <a:p>
-            <a:pPr indent="0" marL="0">
-              <a:buNone/>
-            </a:pPr>
-            <a:r>
-              <a:rPr lang="en-US" sz="1500" dirty="0">
-                <a:solidFill>
-                  <a:srgbClr val="2B2318"/>
-                </a:solidFill>
-                <a:latin typeface="Calibri" pitchFamily="34" charset="0"/>
-                <a:ea typeface="Calibri" pitchFamily="34" charset="-122"/>
-                <a:cs typeface="Calibri" pitchFamily="34" charset="-120"/>
-              </a:rPr>
-              <a:t>Notiert zu jedem Feld ein Stichwort als Beleg aus dem Text.</a:t>
-            </a:r>
-            <a:endParaRPr lang="en-US" sz="1500" dirty="0"/>
-          </a:p>
-        </p:txBody>
-      </p:sp>
-      <p:sp>
-        <p:nvSpPr>
-          <p:cNvPr id="12" name="Shape 10"/>
-          <p:cNvSpPr/>
-          <p:nvPr/>
-        </p:nvSpPr>
-        <p:spPr>
-          <a:xfrm>
-            <a:off x="5806440" y="1325880"/>
-            <a:ext cx="2880360" cy="2926080"/>
-          </a:xfrm>
-          <a:prstGeom prst="roundRect">
-            <a:avLst>
-              <a:gd name="adj" fmla="val 2540"/>
-            </a:avLst>
-          </a:prstGeom>
-          <a:solidFill>
-            <a:srgbClr val="2B2318"/>
-          </a:solidFill>
-          <a:ln w="12700">
-            <a:solidFill>
-              <a:srgbClr val="2B2318"/>
-            </a:solidFill>
-            <a:prstDash val="solid"/>
-          </a:ln>
-        </p:spPr>
-      </p:sp>
-      <p:sp>
-        <p:nvSpPr>
-          <p:cNvPr id="13" name="Text 11"/>
-          <p:cNvSpPr txBox="1"/>
-          <p:nvPr/>
-        </p:nvSpPr>
-        <p:spPr>
-          <a:xfrm>
-            <a:off x="6035040" y="1508760"/>
-            <a:ext cx="2468880" cy="320040"/>
-          </a:xfrm>
-          <a:prstGeom prst="rect">
-            <a:avLst/>
-          </a:prstGeom>
-          <a:noFill/>
-          <a:ln/>
-        </p:spPr>
-        <p:txBody>
-          <a:bodyPr wrap="square" lIns="0" tIns="0" rIns="0" bIns="0" rtlCol="0" anchor="t"/>
-          <a:lstStyle/>
-          <a:p>
-            <a:pPr indent="0" marL="0">
-              <a:buNone/>
-            </a:pPr>
-            <a:r>
-              <a:rPr lang="en-US" sz="1400" b="1" dirty="0">
-                <a:solidFill>
-                  <a:srgbClr val="D9A441"/>
-                </a:solidFill>
-                <a:latin typeface="Calibri" pitchFamily="34" charset="0"/>
-                <a:ea typeface="Calibri" pitchFamily="34" charset="-122"/>
-                <a:cs typeface="Calibri" pitchFamily="34" charset="-120"/>
-              </a:rPr>
-              <a:t>Beispiel</a:t>
-            </a:r>
-            <a:endParaRPr lang="en-US" sz="1400" dirty="0"/>
-          </a:p>
-        </p:txBody>
-      </p:sp>
-      <p:sp>
-        <p:nvSpPr>
-          <p:cNvPr id="14" name="Text 12"/>
-          <p:cNvSpPr txBox="1"/>
-          <p:nvPr/>
-        </p:nvSpPr>
-        <p:spPr>
-          <a:xfrm>
-            <a:off x="6035040" y="1920240"/>
-            <a:ext cx="2468880" cy="457200"/>
-          </a:xfrm>
-          <a:prstGeom prst="rect">
-            <a:avLst/>
-          </a:prstGeom>
-          <a:noFill/>
-          <a:ln/>
-        </p:spPr>
-        <p:txBody>
-          <a:bodyPr wrap="square" lIns="0" tIns="0" rIns="0" bIns="0" rtlCol="0" anchor="t"/>
-          <a:lstStyle/>
-          <a:p>
-            <a:pPr indent="0" marL="0">
-              <a:buNone/>
-            </a:pPr>
-            <a:r>
-              <a:rPr lang="en-US" sz="2400" b="1" dirty="0">
-                <a:solidFill>
-                  <a:srgbClr val="FFFFFF"/>
-                </a:solidFill>
-                <a:latin typeface="Cambria" pitchFamily="34" charset="0"/>
-                <a:ea typeface="Cambria" pitchFamily="34" charset="-122"/>
-                <a:cs typeface="Cambria" pitchFamily="34" charset="-120"/>
-              </a:rPr>
-              <a:t>P3  ~</a:t>
-            </a:r>
-            <a:endParaRPr lang="en-US" sz="2400" dirty="0"/>
-          </a:p>
-        </p:txBody>
-      </p:sp>
-      <p:sp>
-        <p:nvSpPr>
-          <p:cNvPr id="15" name="Text 13"/>
-          <p:cNvSpPr txBox="1"/>
-          <p:nvPr/>
-        </p:nvSpPr>
-        <p:spPr>
-          <a:xfrm>
-            <a:off x="6035040" y="2468880"/>
-            <a:ext cx="2468880" cy="1554480"/>
-          </a:xfrm>
-          <a:prstGeom prst="rect">
-            <a:avLst/>
-          </a:prstGeom>
-          <a:noFill/>
-          <a:ln/>
-        </p:spPr>
-        <p:txBody>
-          <a:bodyPr wrap="square" lIns="0" tIns="0" rIns="0" bIns="0" rtlCol="0" anchor="t"/>
-          <a:lstStyle/>
-          <a:p>
-            <a:pPr indent="0" marL="0">
-              <a:buNone/>
-            </a:pPr>
-            <a:r>
-              <a:rPr lang="en-US" sz="1300" i="1" dirty="0">
-                <a:solidFill>
-                  <a:srgbClr val="E8DFD0"/>
-                </a:solidFill>
-                <a:latin typeface="Calibri" pitchFamily="34" charset="0"/>
-                <a:ea typeface="Calibri" pitchFamily="34" charset="-122"/>
-                <a:cs typeface="Calibri" pitchFamily="34" charset="-120"/>
-              </a:rPr>
-              <a:t>„geschriebenes Recht für alle Bürger, Blutrache aufgehoben, aber strenge Strafen“</a:t>
-            </a:r>
-            <a:endParaRPr lang="en-US" sz="1300" dirty="0"/>
-          </a:p>
-        </p:txBody>
-      </p:sp>
-      <p:sp>
-        <p:nvSpPr>
-          <p:cNvPr id="16" name="Text 14"/>
-          <p:cNvSpPr txBox="1"/>
-          <p:nvPr/>
-        </p:nvSpPr>
-        <p:spPr>
-          <a:xfrm>
-            <a:off x="457200" y="4754880"/>
-            <a:ext cx="4572000" cy="182880"/>
-          </a:xfrm>
-          <a:prstGeom prst="rect">
-            <a:avLst/>
-          </a:prstGeom>
-          <a:noFill/>
-          <a:ln/>
-        </p:spPr>
-        <p:txBody>
-          <a:bodyPr wrap="square" lIns="0" tIns="0" rIns="0" bIns="0" rtlCol="0" anchor="t"/>
-          <a:lstStyle/>
-          <a:p>
-            <a:pPr indent="0" marL="0">
-              <a:buNone/>
-            </a:pPr>
-            <a:r>
-              <a:rPr lang="en-US" sz="900" dirty="0">
-                <a:solidFill>
-                  <a:srgbClr val="998C77"/>
-                </a:solidFill>
-                <a:latin typeface="Calibri" pitchFamily="34" charset="0"/>
-                <a:ea typeface="Calibri" pitchFamily="34" charset="-122"/>
-                <a:cs typeface="Calibri" pitchFamily="34" charset="-120"/>
-              </a:rPr>
-              <a:t>Von der Polis zur Krise</a:t>
-            </a:r>
-            <a:endParaRPr lang="en-US" sz="900" dirty="0"/>
-          </a:p>
-        </p:txBody>
-      </p:sp>
-      <p:sp>
-        <p:nvSpPr>
-          <p:cNvPr id="17" name="Text 15"/>
-          <p:cNvSpPr txBox="1"/>
-          <p:nvPr/>
-        </p:nvSpPr>
-        <p:spPr>
-          <a:xfrm>
-            <a:off x="8229600" y="4754880"/>
-            <a:ext cx="457200" cy="182880"/>
-          </a:xfrm>
-          <a:prstGeom prst="rect">
-            <a:avLst/>
-          </a:prstGeom>
-          <a:noFill/>
-          <a:ln/>
-        </p:spPr>
-        <p:txBody>
-          <a:bodyPr wrap="square" lIns="0" tIns="0" rIns="0" bIns="0" rtlCol="0" anchor="t"/>
-          <a:lstStyle/>
-          <a:p>
-            <a:pPr algn="r" indent="0" marL="0">
-              <a:buNone/>
-            </a:pPr>
-            <a:r>
-              <a:rPr lang="en-US" sz="900" dirty="0">
-                <a:solidFill>
-                  <a:srgbClr val="998C77"/>
-                </a:solidFill>
-                <a:latin typeface="Calibri" pitchFamily="34" charset="0"/>
-                <a:ea typeface="Calibri" pitchFamily="34" charset="-122"/>
-                <a:cs typeface="Calibri" pitchFamily="34" charset="-120"/>
-              </a:rPr>
               <a:t>25</a:t>
             </a:r>
             <a:endParaRPr lang="en-US" sz="900" dirty="0"/>
@@ -15881,7 +15904,7 @@
                 <a:ea typeface="Calibri" pitchFamily="34" charset="-122"/>
                 <a:cs typeface="Calibri" pitchFamily="34" charset="-120"/>
               </a:rPr>
-              <a:t>PARTNERARBEIT · LESETANDEM · LB S. 20–22</a:t>
+              <a:t>PARTNERARBEIT · LB S. 20</a:t>
             </a:r>
             <a:endParaRPr lang="en-US" sz="1100" dirty="0"/>
           </a:p>
@@ -15920,7 +15943,7 @@
                 <a:ea typeface="Cambria" pitchFamily="34" charset="-122"/>
                 <a:cs typeface="Cambria" pitchFamily="34" charset="-120"/>
               </a:rPr>
-              <a:t>Solon: Zwei Reformen, zwei Experten</a:t>
+              <a:t>Drakon: Was ändert er?</a:t>
             </a:r>
             <a:endParaRPr lang="en-US" sz="2800" dirty="0"/>
           </a:p>
@@ -15963,7 +15986,7 @@
                 <a:ea typeface="Calibri" pitchFamily="34" charset="-122"/>
                 <a:cs typeface="Calibri" pitchFamily="34" charset="-120"/>
               </a:rPr>
-              <a:t>15 Min.</a:t>
+              <a:t>8 Min.</a:t>
             </a:r>
             <a:endParaRPr lang="en-US" sz="1100" dirty="0"/>
           </a:p>
@@ -15978,11 +16001,11 @@
         <p:spPr>
           <a:xfrm>
             <a:off x="457200" y="1325880"/>
-            <a:ext cx="4023360" cy="1691640"/>
+            <a:ext cx="5120640" cy="2926080"/>
           </a:xfrm>
           <a:prstGeom prst="roundRect">
             <a:avLst>
-              <a:gd name="adj" fmla="val 4324"/>
+              <a:gd name="adj" fmla="val 2500"/>
             </a:avLst>
           </a:prstGeom>
           <a:solidFill>
@@ -16004,8 +16027,8 @@
         </p:nvSpPr>
         <p:spPr>
           <a:xfrm>
-            <a:off x="685800" y="1508760"/>
-            <a:ext cx="548640" cy="548640"/>
+            <a:off x="685800" y="1554480"/>
+            <a:ext cx="457200" cy="457200"/>
           </a:xfrm>
           <a:prstGeom prst="ellipse">
             <a:avLst/>
@@ -16023,7 +16046,7 @@
               <a:buNone/>
             </a:pPr>
             <a:r>
-              <a:rPr lang="en-US" sz="2200" b="1" dirty="0">
+              <a:rPr lang="en-US" sz="1800" b="1" dirty="0">
                 <a:solidFill>
                   <a:srgbClr val="FFFFFF"/>
                 </a:solidFill>
@@ -16031,9 +16054,9 @@
                 <a:ea typeface="Cambria" pitchFamily="34" charset="-122"/>
                 <a:cs typeface="Cambria" pitchFamily="34" charset="-120"/>
               </a:rPr>
-              <a:t>A</a:t>
-            </a:r>
-            <a:endParaRPr lang="en-US" sz="2200" dirty="0"/>
+              <a:t>1</a:t>
+            </a:r>
+            <a:endParaRPr lang="en-US" sz="1800" dirty="0"/>
           </a:p>
         </p:txBody>
       </p:sp>
@@ -16045,34 +16068,34 @@
         </p:nvSpPr>
         <p:spPr>
           <a:xfrm>
-            <a:off x="1417320" y="1481328"/>
-            <a:ext cx="2834640" cy="274320"/>
-          </a:xfrm>
-          <a:prstGeom prst="rect">
-            <a:avLst/>
-          </a:prstGeom>
-          <a:noFill/>
-          <a:ln/>
-        </p:spPr>
-        <p:txBody>
-          <a:bodyPr wrap="square" lIns="0" tIns="0" rIns="0" bIns="0" rtlCol="0" anchor="t"/>
-          <a:lstStyle/>
-          <a:p>
-            <a:pPr indent="0" marL="0">
-              <a:buNone/>
-            </a:pPr>
-            <a:r>
-              <a:rPr lang="en-US" sz="1200" b="1" dirty="0">
-                <a:solidFill>
-                  <a:srgbClr val="5A5044"/>
-                </a:solidFill>
-                <a:latin typeface="Calibri" pitchFamily="34" charset="0"/>
-                <a:ea typeface="Calibri" pitchFamily="34" charset="-122"/>
-                <a:cs typeface="Calibri" pitchFamily="34" charset="-120"/>
-              </a:rPr>
-              <a:t>Partner A</a:t>
-            </a:r>
-            <a:endParaRPr lang="en-US" sz="1200" dirty="0"/>
+            <a:off x="1325880" y="1554480"/>
+            <a:ext cx="4023360" cy="640080"/>
+          </a:xfrm>
+          <a:prstGeom prst="rect">
+            <a:avLst/>
+          </a:prstGeom>
+          <a:noFill/>
+          <a:ln/>
+        </p:spPr>
+        <p:txBody>
+          <a:bodyPr wrap="square" lIns="0" tIns="0" rIns="0" bIns="0" rtlCol="0" anchor="ctr"/>
+          <a:lstStyle/>
+          <a:p>
+            <a:pPr indent="0" marL="0">
+              <a:buNone/>
+            </a:pPr>
+            <a:r>
+              <a:rPr lang="en-US" sz="1500" dirty="0">
+                <a:solidFill>
+                  <a:srgbClr val="2B2318"/>
+                </a:solidFill>
+                <a:latin typeface="Calibri" pitchFamily="34" charset="0"/>
+                <a:ea typeface="Calibri" pitchFamily="34" charset="-122"/>
+                <a:cs typeface="Calibri" pitchFamily="34" charset="-120"/>
+              </a:rPr>
+              <a:t>Lest im LB S. 20 den Abschnitt „Die Gesetzgebung des Drakon“.</a:t>
+            </a:r>
+            <a:endParaRPr lang="en-US" sz="1500" dirty="0"/>
           </a:p>
         </p:txBody>
       </p:sp>
@@ -16084,34 +16107,36 @@
         </p:nvSpPr>
         <p:spPr>
           <a:xfrm>
-            <a:off x="1417320" y="1737360"/>
-            <a:ext cx="2834640" cy="365760"/>
-          </a:xfrm>
-          <a:prstGeom prst="rect">
-            <a:avLst/>
-          </a:prstGeom>
-          <a:noFill/>
-          <a:ln/>
-        </p:spPr>
-        <p:txBody>
-          <a:bodyPr wrap="square" lIns="0" tIns="0" rIns="0" bIns="0" rtlCol="0" anchor="t"/>
-          <a:lstStyle/>
-          <a:p>
-            <a:pPr indent="0" marL="0">
-              <a:buNone/>
-            </a:pPr>
-            <a:r>
-              <a:rPr lang="en-US" sz="1900" b="1" dirty="0">
-                <a:solidFill>
-                  <a:srgbClr val="2B2318"/>
+            <a:off x="685800" y="2377440"/>
+            <a:ext cx="457200" cy="457200"/>
+          </a:xfrm>
+          <a:prstGeom prst="ellipse">
+            <a:avLst/>
+          </a:prstGeom>
+          <a:solidFill>
+            <a:srgbClr val="AD4426"/>
+          </a:solidFill>
+          <a:ln/>
+        </p:spPr>
+        <p:txBody>
+          <a:bodyPr wrap="square" lIns="0" tIns="0" rIns="0" bIns="0" rtlCol="0" anchor="ctr"/>
+          <a:lstStyle/>
+          <a:p>
+            <a:pPr algn="ctr" indent="0" marL="0">
+              <a:buNone/>
+            </a:pPr>
+            <a:r>
+              <a:rPr lang="en-US" sz="1800" b="1" dirty="0">
+                <a:solidFill>
+                  <a:srgbClr val="FFFFFF"/>
                 </a:solidFill>
                 <a:latin typeface="Cambria" pitchFamily="34" charset="0"/>
                 <a:ea typeface="Cambria" pitchFamily="34" charset="-122"/>
                 <a:cs typeface="Cambria" pitchFamily="34" charset="-120"/>
               </a:rPr>
-              <a:t>Sozialreform</a:t>
-            </a:r>
-            <a:endParaRPr lang="en-US" sz="1900" dirty="0"/>
+              <a:t>2</a:t>
+            </a:r>
+            <a:endParaRPr lang="en-US" sz="1800" dirty="0"/>
           </a:p>
         </p:txBody>
       </p:sp>
@@ -16123,24 +16148,24 @@
         </p:nvSpPr>
         <p:spPr>
           <a:xfrm>
-            <a:off x="685800" y="2240280"/>
-            <a:ext cx="3611880" cy="685800"/>
-          </a:xfrm>
-          <a:prstGeom prst="rect">
-            <a:avLst/>
-          </a:prstGeom>
-          <a:noFill/>
-          <a:ln/>
-        </p:spPr>
-        <p:txBody>
-          <a:bodyPr wrap="square" lIns="0" tIns="0" rIns="0" bIns="0" rtlCol="0" anchor="t"/>
-          <a:lstStyle/>
-          <a:p>
-            <a:pPr indent="0" marL="0">
-              <a:buNone/>
-            </a:pPr>
-            <a:r>
-              <a:rPr lang="en-US" sz="1300" dirty="0">
+            <a:off x="1325880" y="2377440"/>
+            <a:ext cx="4023360" cy="457200"/>
+          </a:xfrm>
+          <a:prstGeom prst="rect">
+            <a:avLst/>
+          </a:prstGeom>
+          <a:noFill/>
+          <a:ln/>
+        </p:spPr>
+        <p:txBody>
+          <a:bodyPr wrap="square" lIns="0" tIns="0" rIns="0" bIns="0" rtlCol="0" anchor="ctr"/>
+          <a:lstStyle/>
+          <a:p>
+            <a:pPr indent="0" marL="0">
+              <a:buNone/>
+            </a:pPr>
+            <a:r>
+              <a:rPr lang="en-US" sz="1500" dirty="0">
                 <a:solidFill>
                   <a:srgbClr val="2B2318"/>
                 </a:solidFill>
@@ -16148,56 +16173,29 @@
                 <a:ea typeface="Calibri" pitchFamily="34" charset="-122"/>
                 <a:cs typeface="Calibri" pitchFamily="34" charset="-120"/>
               </a:rPr>
-              <a:t>S. 20 ab „Die Reform Solons“ bis S. 21 „… fremde Handwerker ins Land“</a:t>
-            </a:r>
-            <a:endParaRPr lang="en-US" sz="1300" dirty="0"/>
-          </a:p>
-        </p:txBody>
-      </p:sp>
-      <p:sp>
-        <p:nvSpPr>
-          <p:cNvPr id="10" name="Shape 8"/>
-          <p:cNvSpPr/>
-          <p:nvPr/>
-        </p:nvSpPr>
-        <p:spPr>
-          <a:xfrm>
-            <a:off x="4663440" y="1325880"/>
-            <a:ext cx="4023360" cy="1691640"/>
-          </a:xfrm>
-          <a:prstGeom prst="roundRect">
-            <a:avLst>
-              <a:gd name="adj" fmla="val 4324"/>
-            </a:avLst>
+              <a:t>Füllt die Spalte „Drakon“ aus: ✔, ~ oder ✘.</a:t>
+            </a:r>
+            <a:endParaRPr lang="en-US" sz="1500" dirty="0"/>
+          </a:p>
+        </p:txBody>
+      </p:sp>
+      <p:sp>
+        <p:nvSpPr>
+          <p:cNvPr id="10" name="Text 8"/>
+          <p:cNvSpPr txBox="1"/>
+          <p:nvPr/>
+        </p:nvSpPr>
+        <p:spPr>
+          <a:xfrm>
+            <a:off x="685800" y="3108960"/>
+            <a:ext cx="457200" cy="457200"/>
+          </a:xfrm>
+          <a:prstGeom prst="ellipse">
+            <a:avLst/>
           </a:prstGeom>
           <a:solidFill>
-            <a:srgbClr val="F4ECDE"/>
+            <a:srgbClr val="AD4426"/>
           </a:solidFill>
-          <a:ln w="12700">
-            <a:solidFill>
-              <a:srgbClr val="F4ECDE"/>
-            </a:solidFill>
-            <a:prstDash val="solid"/>
-          </a:ln>
-        </p:spPr>
-      </p:sp>
-      <p:sp>
-        <p:nvSpPr>
-          <p:cNvPr id="11" name="Text 9"/>
-          <p:cNvSpPr txBox="1"/>
-          <p:nvPr/>
-        </p:nvSpPr>
-        <p:spPr>
-          <a:xfrm>
-            <a:off x="4892040" y="1508760"/>
-            <a:ext cx="548640" cy="548640"/>
-          </a:xfrm>
-          <a:prstGeom prst="ellipse">
-            <a:avLst/>
-          </a:prstGeom>
-          <a:solidFill>
-            <a:srgbClr val="D9A441"/>
-          </a:solidFill>
           <a:ln/>
         </p:spPr>
         <p:txBody>
@@ -16208,151 +16206,73 @@
               <a:buNone/>
             </a:pPr>
             <a:r>
-              <a:rPr lang="en-US" sz="2200" b="1" dirty="0">
-                <a:solidFill>
-                  <a:srgbClr val="2B2318"/>
+              <a:rPr lang="en-US" sz="1800" b="1" dirty="0">
+                <a:solidFill>
+                  <a:srgbClr val="FFFFFF"/>
                 </a:solidFill>
                 <a:latin typeface="Cambria" pitchFamily="34" charset="0"/>
                 <a:ea typeface="Cambria" pitchFamily="34" charset="-122"/>
                 <a:cs typeface="Cambria" pitchFamily="34" charset="-120"/>
               </a:rPr>
-              <a:t>B</a:t>
-            </a:r>
-            <a:endParaRPr lang="en-US" sz="2200" dirty="0"/>
-          </a:p>
-        </p:txBody>
-      </p:sp>
-      <p:sp>
-        <p:nvSpPr>
-          <p:cNvPr id="12" name="Text 10"/>
-          <p:cNvSpPr txBox="1"/>
-          <p:nvPr/>
-        </p:nvSpPr>
-        <p:spPr>
-          <a:xfrm>
-            <a:off x="5623560" y="1481328"/>
-            <a:ext cx="2834640" cy="274320"/>
-          </a:xfrm>
-          <a:prstGeom prst="rect">
-            <a:avLst/>
-          </a:prstGeom>
-          <a:noFill/>
-          <a:ln/>
-        </p:spPr>
-        <p:txBody>
-          <a:bodyPr wrap="square" lIns="0" tIns="0" rIns="0" bIns="0" rtlCol="0" anchor="t"/>
-          <a:lstStyle/>
-          <a:p>
-            <a:pPr indent="0" marL="0">
-              <a:buNone/>
-            </a:pPr>
-            <a:r>
-              <a:rPr lang="en-US" sz="1200" b="1" dirty="0">
-                <a:solidFill>
-                  <a:srgbClr val="5A5044"/>
-                </a:solidFill>
-                <a:latin typeface="Calibri" pitchFamily="34" charset="0"/>
-                <a:ea typeface="Calibri" pitchFamily="34" charset="-122"/>
-                <a:cs typeface="Calibri" pitchFamily="34" charset="-120"/>
-              </a:rPr>
-              <a:t>Partner B</a:t>
-            </a:r>
-            <a:endParaRPr lang="en-US" sz="1200" dirty="0"/>
-          </a:p>
-        </p:txBody>
-      </p:sp>
-      <p:sp>
-        <p:nvSpPr>
-          <p:cNvPr id="13" name="Text 11"/>
-          <p:cNvSpPr txBox="1"/>
-          <p:nvPr/>
-        </p:nvSpPr>
-        <p:spPr>
-          <a:xfrm>
-            <a:off x="5623560" y="1737360"/>
-            <a:ext cx="2834640" cy="365760"/>
-          </a:xfrm>
-          <a:prstGeom prst="rect">
-            <a:avLst/>
-          </a:prstGeom>
-          <a:noFill/>
-          <a:ln/>
-        </p:spPr>
-        <p:txBody>
-          <a:bodyPr wrap="square" lIns="0" tIns="0" rIns="0" bIns="0" rtlCol="0" anchor="t"/>
-          <a:lstStyle/>
-          <a:p>
-            <a:pPr indent="0" marL="0">
-              <a:buNone/>
-            </a:pPr>
-            <a:r>
-              <a:rPr lang="en-US" sz="1900" b="1" dirty="0">
+              <a:t>3</a:t>
+            </a:r>
+            <a:endParaRPr lang="en-US" sz="1800" dirty="0"/>
+          </a:p>
+        </p:txBody>
+      </p:sp>
+      <p:sp>
+        <p:nvSpPr>
+          <p:cNvPr id="11" name="Text 9"/>
+          <p:cNvSpPr txBox="1"/>
+          <p:nvPr/>
+        </p:nvSpPr>
+        <p:spPr>
+          <a:xfrm>
+            <a:off x="1325880" y="3108960"/>
+            <a:ext cx="4023360" cy="640080"/>
+          </a:xfrm>
+          <a:prstGeom prst="rect">
+            <a:avLst/>
+          </a:prstGeom>
+          <a:noFill/>
+          <a:ln/>
+        </p:spPr>
+        <p:txBody>
+          <a:bodyPr wrap="square" lIns="0" tIns="0" rIns="0" bIns="0" rtlCol="0" anchor="ctr"/>
+          <a:lstStyle/>
+          <a:p>
+            <a:pPr indent="0" marL="0">
+              <a:buNone/>
+            </a:pPr>
+            <a:r>
+              <a:rPr lang="en-US" sz="1500" dirty="0">
                 <a:solidFill>
                   <a:srgbClr val="2B2318"/>
                 </a:solidFill>
-                <a:latin typeface="Cambria" pitchFamily="34" charset="0"/>
-                <a:ea typeface="Cambria" pitchFamily="34" charset="-122"/>
-                <a:cs typeface="Cambria" pitchFamily="34" charset="-120"/>
-              </a:rPr>
-              <a:t>Verfassungsreform</a:t>
-            </a:r>
-            <a:endParaRPr lang="en-US" sz="1900" dirty="0"/>
-          </a:p>
-        </p:txBody>
-      </p:sp>
-      <p:sp>
-        <p:nvSpPr>
-          <p:cNvPr id="14" name="Text 12"/>
-          <p:cNvSpPr txBox="1"/>
-          <p:nvPr/>
-        </p:nvSpPr>
-        <p:spPr>
-          <a:xfrm>
-            <a:off x="4892040" y="2240280"/>
-            <a:ext cx="3611880" cy="685800"/>
-          </a:xfrm>
-          <a:prstGeom prst="rect">
-            <a:avLst/>
-          </a:prstGeom>
-          <a:noFill/>
-          <a:ln/>
-        </p:spPr>
-        <p:txBody>
-          <a:bodyPr wrap="square" lIns="0" tIns="0" rIns="0" bIns="0" rtlCol="0" anchor="t"/>
-          <a:lstStyle/>
-          <a:p>
-            <a:pPr indent="0" marL="0">
-              <a:buNone/>
-            </a:pPr>
-            <a:r>
-              <a:rPr lang="en-US" sz="1300" dirty="0">
-                <a:solidFill>
-                  <a:srgbClr val="2B2318"/>
-                </a:solidFill>
-                <a:latin typeface="Calibri" pitchFamily="34" charset="0"/>
-                <a:ea typeface="Calibri" pitchFamily="34" charset="-122"/>
-                <a:cs typeface="Calibri" pitchFamily="34" charset="-120"/>
-              </a:rPr>
-              <a:t>S. 21 ab „Bei der Reform des Verfassungslebens …“ bis S. 22 „… M4, M5)“</a:t>
-            </a:r>
-            <a:endParaRPr lang="en-US" sz="1300" dirty="0"/>
-          </a:p>
-        </p:txBody>
-      </p:sp>
-      <p:sp>
-        <p:nvSpPr>
-          <p:cNvPr id="15" name="Shape 13"/>
+                <a:latin typeface="Calibri" pitchFamily="34" charset="0"/>
+                <a:ea typeface="Calibri" pitchFamily="34" charset="-122"/>
+                <a:cs typeface="Calibri" pitchFamily="34" charset="-120"/>
+              </a:rPr>
+              <a:t>Notiert zu jedem Feld ein Stichwort als Beleg aus dem Text.</a:t>
+            </a:r>
+            <a:endParaRPr lang="en-US" sz="1500" dirty="0"/>
+          </a:p>
+        </p:txBody>
+      </p:sp>
+      <p:sp>
+        <p:nvSpPr>
+          <p:cNvPr id="12" name="Shape 10"/>
           <p:cNvSpPr/>
           <p:nvPr/>
         </p:nvSpPr>
         <p:spPr>
           <a:xfrm>
-            <a:off x="457200" y="3291840"/>
-            <a:ext cx="2606040" cy="960120"/>
+            <a:off x="5806440" y="1325880"/>
+            <a:ext cx="2880360" cy="2926080"/>
           </a:xfrm>
           <a:prstGeom prst="roundRect">
             <a:avLst>
-              <a:gd name="adj" fmla="val 7619"/>
+              <a:gd name="adj" fmla="val 2540"/>
             </a:avLst>
           </a:prstGeom>
           <a:solidFill>
@@ -16368,343 +16288,124 @@
       </p:sp>
       <p:sp>
         <p:nvSpPr>
+          <p:cNvPr id="13" name="Text 11"/>
+          <p:cNvSpPr txBox="1"/>
+          <p:nvPr/>
+        </p:nvSpPr>
+        <p:spPr>
+          <a:xfrm>
+            <a:off x="6035040" y="1508760"/>
+            <a:ext cx="2468880" cy="320040"/>
+          </a:xfrm>
+          <a:prstGeom prst="rect">
+            <a:avLst/>
+          </a:prstGeom>
+          <a:noFill/>
+          <a:ln/>
+        </p:spPr>
+        <p:txBody>
+          <a:bodyPr wrap="square" lIns="0" tIns="0" rIns="0" bIns="0" rtlCol="0" anchor="t"/>
+          <a:lstStyle/>
+          <a:p>
+            <a:pPr indent="0" marL="0">
+              <a:buNone/>
+            </a:pPr>
+            <a:r>
+              <a:rPr lang="en-US" sz="1400" b="1" dirty="0">
+                <a:solidFill>
+                  <a:srgbClr val="D9A441"/>
+                </a:solidFill>
+                <a:latin typeface="Calibri" pitchFamily="34" charset="0"/>
+                <a:ea typeface="Calibri" pitchFamily="34" charset="-122"/>
+                <a:cs typeface="Calibri" pitchFamily="34" charset="-120"/>
+              </a:rPr>
+              <a:t>Beispiel</a:t>
+            </a:r>
+            <a:endParaRPr lang="en-US" sz="1400" dirty="0"/>
+          </a:p>
+        </p:txBody>
+      </p:sp>
+      <p:sp>
+        <p:nvSpPr>
+          <p:cNvPr id="14" name="Text 12"/>
+          <p:cNvSpPr txBox="1"/>
+          <p:nvPr/>
+        </p:nvSpPr>
+        <p:spPr>
+          <a:xfrm>
+            <a:off x="6035040" y="1920240"/>
+            <a:ext cx="2468880" cy="457200"/>
+          </a:xfrm>
+          <a:prstGeom prst="rect">
+            <a:avLst/>
+          </a:prstGeom>
+          <a:noFill/>
+          <a:ln/>
+        </p:spPr>
+        <p:txBody>
+          <a:bodyPr wrap="square" lIns="0" tIns="0" rIns="0" bIns="0" rtlCol="0" anchor="t"/>
+          <a:lstStyle/>
+          <a:p>
+            <a:pPr indent="0" marL="0">
+              <a:buNone/>
+            </a:pPr>
+            <a:r>
+              <a:rPr lang="en-US" sz="2400" b="1" dirty="0">
+                <a:solidFill>
+                  <a:srgbClr val="FFFFFF"/>
+                </a:solidFill>
+                <a:latin typeface="Cambria" pitchFamily="34" charset="0"/>
+                <a:ea typeface="Cambria" pitchFamily="34" charset="-122"/>
+                <a:cs typeface="Cambria" pitchFamily="34" charset="-120"/>
+              </a:rPr>
+              <a:t>P3  ~</a:t>
+            </a:r>
+            <a:endParaRPr lang="en-US" sz="2400" dirty="0"/>
+          </a:p>
+        </p:txBody>
+      </p:sp>
+      <p:sp>
+        <p:nvSpPr>
+          <p:cNvPr id="15" name="Text 13"/>
+          <p:cNvSpPr txBox="1"/>
+          <p:nvPr/>
+        </p:nvSpPr>
+        <p:spPr>
+          <a:xfrm>
+            <a:off x="6035040" y="2468880"/>
+            <a:ext cx="2468880" cy="1554480"/>
+          </a:xfrm>
+          <a:prstGeom prst="rect">
+            <a:avLst/>
+          </a:prstGeom>
+          <a:noFill/>
+          <a:ln/>
+        </p:spPr>
+        <p:txBody>
+          <a:bodyPr wrap="square" lIns="0" tIns="0" rIns="0" bIns="0" rtlCol="0" anchor="t"/>
+          <a:lstStyle/>
+          <a:p>
+            <a:pPr indent="0" marL="0">
+              <a:buNone/>
+            </a:pPr>
+            <a:r>
+              <a:rPr lang="en-US" sz="1300" i="1" dirty="0">
+                <a:solidFill>
+                  <a:srgbClr val="E8DFD0"/>
+                </a:solidFill>
+                <a:latin typeface="Calibri" pitchFamily="34" charset="0"/>
+                <a:ea typeface="Calibri" pitchFamily="34" charset="-122"/>
+                <a:cs typeface="Calibri" pitchFamily="34" charset="-120"/>
+              </a:rPr>
+              <a:t>„geschriebenes Recht für alle Bürger, Blutrache aufgehoben, aber strenge Strafen“</a:t>
+            </a:r>
+            <a:endParaRPr lang="en-US" sz="1300" dirty="0"/>
+          </a:p>
+        </p:txBody>
+      </p:sp>
+      <p:sp>
+        <p:nvSpPr>
           <p:cNvPr id="16" name="Text 14"/>
-          <p:cNvSpPr txBox="1"/>
-          <p:nvPr/>
-        </p:nvSpPr>
-        <p:spPr>
-          <a:xfrm>
-            <a:off x="640080" y="3401568"/>
-            <a:ext cx="2240280" cy="274320"/>
-          </a:xfrm>
-          <a:prstGeom prst="rect">
-            <a:avLst/>
-          </a:prstGeom>
-          <a:noFill/>
-          <a:ln/>
-        </p:spPr>
-        <p:txBody>
-          <a:bodyPr wrap="square" lIns="0" tIns="0" rIns="0" bIns="0" rtlCol="0" anchor="t"/>
-          <a:lstStyle/>
-          <a:p>
-            <a:pPr indent="0" marL="0">
-              <a:buNone/>
-            </a:pPr>
-            <a:r>
-              <a:rPr lang="en-US" sz="1200" b="1" dirty="0">
-                <a:solidFill>
-                  <a:srgbClr val="D9A441"/>
-                </a:solidFill>
-                <a:latin typeface="Calibri" pitchFamily="34" charset="0"/>
-                <a:ea typeface="Calibri" pitchFamily="34" charset="-122"/>
-                <a:cs typeface="Calibri" pitchFamily="34" charset="-120"/>
-              </a:rPr>
-              <a:t>7 Min.</a:t>
-            </a:r>
-            <a:endParaRPr lang="en-US" sz="1200" dirty="0"/>
-          </a:p>
-        </p:txBody>
-      </p:sp>
-      <p:sp>
-        <p:nvSpPr>
-          <p:cNvPr id="17" name="Text 15"/>
-          <p:cNvSpPr txBox="1"/>
-          <p:nvPr/>
-        </p:nvSpPr>
-        <p:spPr>
-          <a:xfrm>
-            <a:off x="640080" y="3703320"/>
-            <a:ext cx="2240280" cy="411480"/>
-          </a:xfrm>
-          <a:prstGeom prst="rect">
-            <a:avLst/>
-          </a:prstGeom>
-          <a:noFill/>
-          <a:ln/>
-        </p:spPr>
-        <p:txBody>
-          <a:bodyPr wrap="square" lIns="0" tIns="0" rIns="0" bIns="0" rtlCol="0" anchor="t"/>
-          <a:lstStyle/>
-          <a:p>
-            <a:pPr indent="0" marL="0">
-              <a:buNone/>
-            </a:pPr>
-            <a:r>
-              <a:rPr lang="en-US" sz="1600" b="1" dirty="0">
-                <a:solidFill>
-                  <a:srgbClr val="FFFFFF"/>
-                </a:solidFill>
-                <a:latin typeface="Calibri" pitchFamily="34" charset="0"/>
-                <a:ea typeface="Calibri" pitchFamily="34" charset="-122"/>
-                <a:cs typeface="Calibri" pitchFamily="34" charset="-120"/>
-              </a:rPr>
-              <a:t>Allein lesen</a:t>
-            </a:r>
-            <a:endParaRPr lang="en-US" sz="1600" dirty="0"/>
-          </a:p>
-        </p:txBody>
-      </p:sp>
-      <p:sp>
-        <p:nvSpPr>
-          <p:cNvPr id="18" name="Shape 16"/>
-          <p:cNvSpPr/>
-          <p:nvPr/>
-        </p:nvSpPr>
-        <p:spPr>
-          <a:xfrm>
-            <a:off x="3081528" y="3767328"/>
-            <a:ext cx="146304" cy="0"/>
-          </a:xfrm>
-          <a:prstGeom prst="line">
-            <a:avLst/>
-          </a:prstGeom>
-          <a:noFill/>
-          <a:ln w="28575">
-            <a:solidFill>
-              <a:srgbClr val="998C77"/>
-            </a:solidFill>
-            <a:prstDash val="solid"/>
-            <a:tailEnd type="triangle"/>
-          </a:ln>
-        </p:spPr>
-      </p:sp>
-      <p:sp>
-        <p:nvSpPr>
-          <p:cNvPr id="19" name="Shape 17"/>
-          <p:cNvSpPr/>
-          <p:nvPr/>
-        </p:nvSpPr>
-        <p:spPr>
-          <a:xfrm>
-            <a:off x="3246120" y="3291840"/>
-            <a:ext cx="2606040" cy="960120"/>
-          </a:xfrm>
-          <a:prstGeom prst="roundRect">
-            <a:avLst>
-              <a:gd name="adj" fmla="val 7619"/>
-            </a:avLst>
-          </a:prstGeom>
-          <a:solidFill>
-            <a:srgbClr val="2B2318"/>
-          </a:solidFill>
-          <a:ln w="12700">
-            <a:solidFill>
-              <a:srgbClr val="2B2318"/>
-            </a:solidFill>
-            <a:prstDash val="solid"/>
-          </a:ln>
-        </p:spPr>
-      </p:sp>
-      <p:sp>
-        <p:nvSpPr>
-          <p:cNvPr id="20" name="Text 18"/>
-          <p:cNvSpPr txBox="1"/>
-          <p:nvPr/>
-        </p:nvSpPr>
-        <p:spPr>
-          <a:xfrm>
-            <a:off x="3429000" y="3401568"/>
-            <a:ext cx="2240280" cy="274320"/>
-          </a:xfrm>
-          <a:prstGeom prst="rect">
-            <a:avLst/>
-          </a:prstGeom>
-          <a:noFill/>
-          <a:ln/>
-        </p:spPr>
-        <p:txBody>
-          <a:bodyPr wrap="square" lIns="0" tIns="0" rIns="0" bIns="0" rtlCol="0" anchor="t"/>
-          <a:lstStyle/>
-          <a:p>
-            <a:pPr indent="0" marL="0">
-              <a:buNone/>
-            </a:pPr>
-            <a:r>
-              <a:rPr lang="en-US" sz="1200" b="1" dirty="0">
-                <a:solidFill>
-                  <a:srgbClr val="D9A441"/>
-                </a:solidFill>
-                <a:latin typeface="Calibri" pitchFamily="34" charset="0"/>
-                <a:ea typeface="Calibri" pitchFamily="34" charset="-122"/>
-                <a:cs typeface="Calibri" pitchFamily="34" charset="-120"/>
-              </a:rPr>
-              <a:t>3 + 3 Min.</a:t>
-            </a:r>
-            <a:endParaRPr lang="en-US" sz="1200" dirty="0"/>
-          </a:p>
-        </p:txBody>
-      </p:sp>
-      <p:sp>
-        <p:nvSpPr>
-          <p:cNvPr id="21" name="Text 19"/>
-          <p:cNvSpPr txBox="1"/>
-          <p:nvPr/>
-        </p:nvSpPr>
-        <p:spPr>
-          <a:xfrm>
-            <a:off x="3429000" y="3703320"/>
-            <a:ext cx="2240280" cy="411480"/>
-          </a:xfrm>
-          <a:prstGeom prst="rect">
-            <a:avLst/>
-          </a:prstGeom>
-          <a:noFill/>
-          <a:ln/>
-        </p:spPr>
-        <p:txBody>
-          <a:bodyPr wrap="square" lIns="0" tIns="0" rIns="0" bIns="0" rtlCol="0" anchor="t"/>
-          <a:lstStyle/>
-          <a:p>
-            <a:pPr indent="0" marL="0">
-              <a:buNone/>
-            </a:pPr>
-            <a:r>
-              <a:rPr lang="en-US" sz="1600" b="1" dirty="0">
-                <a:solidFill>
-                  <a:srgbClr val="FFFFFF"/>
-                </a:solidFill>
-                <a:latin typeface="Calibri" pitchFamily="34" charset="0"/>
-                <a:ea typeface="Calibri" pitchFamily="34" charset="-122"/>
-                <a:cs typeface="Calibri" pitchFamily="34" charset="-120"/>
-              </a:rPr>
-              <a:t>Dem Partner erklären</a:t>
-            </a:r>
-            <a:endParaRPr lang="en-US" sz="1600" dirty="0"/>
-          </a:p>
-        </p:txBody>
-      </p:sp>
-      <p:sp>
-        <p:nvSpPr>
-          <p:cNvPr id="22" name="Shape 20"/>
-          <p:cNvSpPr/>
-          <p:nvPr/>
-        </p:nvSpPr>
-        <p:spPr>
-          <a:xfrm>
-            <a:off x="5870448" y="3767328"/>
-            <a:ext cx="146304" cy="0"/>
-          </a:xfrm>
-          <a:prstGeom prst="line">
-            <a:avLst/>
-          </a:prstGeom>
-          <a:noFill/>
-          <a:ln w="28575">
-            <a:solidFill>
-              <a:srgbClr val="998C77"/>
-            </a:solidFill>
-            <a:prstDash val="solid"/>
-            <a:tailEnd type="triangle"/>
-          </a:ln>
-        </p:spPr>
-      </p:sp>
-      <p:sp>
-        <p:nvSpPr>
-          <p:cNvPr id="23" name="Shape 21"/>
-          <p:cNvSpPr/>
-          <p:nvPr/>
-        </p:nvSpPr>
-        <p:spPr>
-          <a:xfrm>
-            <a:off x="6035040" y="3291840"/>
-            <a:ext cx="2606040" cy="960120"/>
-          </a:xfrm>
-          <a:prstGeom prst="roundRect">
-            <a:avLst>
-              <a:gd name="adj" fmla="val 7619"/>
-            </a:avLst>
-          </a:prstGeom>
-          <a:solidFill>
-            <a:srgbClr val="2B2318"/>
-          </a:solidFill>
-          <a:ln w="12700">
-            <a:solidFill>
-              <a:srgbClr val="2B2318"/>
-            </a:solidFill>
-            <a:prstDash val="solid"/>
-          </a:ln>
-        </p:spPr>
-      </p:sp>
-      <p:sp>
-        <p:nvSpPr>
-          <p:cNvPr id="24" name="Text 22"/>
-          <p:cNvSpPr txBox="1"/>
-          <p:nvPr/>
-        </p:nvSpPr>
-        <p:spPr>
-          <a:xfrm>
-            <a:off x="6217920" y="3401568"/>
-            <a:ext cx="2240280" cy="274320"/>
-          </a:xfrm>
-          <a:prstGeom prst="rect">
-            <a:avLst/>
-          </a:prstGeom>
-          <a:noFill/>
-          <a:ln/>
-        </p:spPr>
-        <p:txBody>
-          <a:bodyPr wrap="square" lIns="0" tIns="0" rIns="0" bIns="0" rtlCol="0" anchor="t"/>
-          <a:lstStyle/>
-          <a:p>
-            <a:pPr indent="0" marL="0">
-              <a:buNone/>
-            </a:pPr>
-            <a:r>
-              <a:rPr lang="en-US" sz="1200" b="1" dirty="0">
-                <a:solidFill>
-                  <a:srgbClr val="D9A441"/>
-                </a:solidFill>
-                <a:latin typeface="Calibri" pitchFamily="34" charset="0"/>
-                <a:ea typeface="Calibri" pitchFamily="34" charset="-122"/>
-                <a:cs typeface="Calibri" pitchFamily="34" charset="-120"/>
-              </a:rPr>
-              <a:t>2 Min.</a:t>
-            </a:r>
-            <a:endParaRPr lang="en-US" sz="1200" dirty="0"/>
-          </a:p>
-        </p:txBody>
-      </p:sp>
-      <p:sp>
-        <p:nvSpPr>
-          <p:cNvPr id="25" name="Text 23"/>
-          <p:cNvSpPr txBox="1"/>
-          <p:nvPr/>
-        </p:nvSpPr>
-        <p:spPr>
-          <a:xfrm>
-            <a:off x="6217920" y="3703320"/>
-            <a:ext cx="2240280" cy="411480"/>
-          </a:xfrm>
-          <a:prstGeom prst="rect">
-            <a:avLst/>
-          </a:prstGeom>
-          <a:noFill/>
-          <a:ln/>
-        </p:spPr>
-        <p:txBody>
-          <a:bodyPr wrap="square" lIns="0" tIns="0" rIns="0" bIns="0" rtlCol="0" anchor="t"/>
-          <a:lstStyle/>
-          <a:p>
-            <a:pPr indent="0" marL="0">
-              <a:buNone/>
-            </a:pPr>
-            <a:r>
-              <a:rPr lang="en-US" sz="1600" b="1" dirty="0">
-                <a:solidFill>
-                  <a:srgbClr val="FFFFFF"/>
-                </a:solidFill>
-                <a:latin typeface="Calibri" pitchFamily="34" charset="0"/>
-                <a:ea typeface="Calibri" pitchFamily="34" charset="-122"/>
-                <a:cs typeface="Calibri" pitchFamily="34" charset="-120"/>
-              </a:rPr>
-              <a:t>Spalte „Solon“ ausfüllen</a:t>
-            </a:r>
-            <a:endParaRPr lang="en-US" sz="1600" dirty="0"/>
-          </a:p>
-        </p:txBody>
-      </p:sp>
-      <p:sp>
-        <p:nvSpPr>
-          <p:cNvPr id="26" name="Text 24"/>
           <p:cNvSpPr txBox="1"/>
           <p:nvPr/>
         </p:nvSpPr>
@@ -16743,7 +16444,7 @@
       </p:sp>
       <p:sp>
         <p:nvSpPr>
-          <p:cNvPr id="27" name="Text 25"/>
+          <p:cNvPr id="17" name="Text 15"/>
           <p:cNvSpPr txBox="1"/>
           <p:nvPr/>
         </p:nvSpPr>
@@ -16845,7 +16546,7 @@
                 <a:ea typeface="Calibri" pitchFamily="34" charset="-122"/>
                 <a:cs typeface="Calibri" pitchFamily="34" charset="-120"/>
               </a:rPr>
-              <a:t>SICHERUNG · ERKLÄRVIDEO</a:t>
+              <a:t>PARTNERARBEIT · LESETANDEM · LB S. 20–22</a:t>
             </a:r>
             <a:endParaRPr lang="en-US" sz="1100" dirty="0"/>
           </a:p>
@@ -16884,7 +16585,7 @@
                 <a:ea typeface="Cambria" pitchFamily="34" charset="-122"/>
                 <a:cs typeface="Cambria" pitchFamily="34" charset="-120"/>
               </a:rPr>
-              <a:t>Solons Verfassung</a:t>
+              <a:t>Solon: Zwei Reformen, zwei Experten</a:t>
             </a:r>
             <a:endParaRPr lang="en-US" sz="2800" dirty="0"/>
           </a:p>
@@ -16927,59 +16628,396 @@
                 <a:ea typeface="Calibri" pitchFamily="34" charset="-122"/>
                 <a:cs typeface="Calibri" pitchFamily="34" charset="-120"/>
               </a:rPr>
-              <a:t>4 Min.</a:t>
+              <a:t>15 Min.</a:t>
             </a:r>
             <a:endParaRPr lang="en-US" sz="1100" dirty="0"/>
           </a:p>
         </p:txBody>
       </p:sp>
-      <p:pic>
-        <p:nvPicPr>
-          <p:cNvPr id="3" name="Media 0">
-            <a:hlinkClick r:id="" action="ppaction://media"/>
-          </p:cNvPr>
-          <p:cNvPicPr>
-            <a:picLocks noChangeAspect="1"/>
-          </p:cNvPicPr>
-          <p:nvPr>
-            <a:videoFile r:link="rId1"/>
-            <p:extLst>
-              <p:ext uri="{DAA4B4D4-6D71-4841-9C94-3DE7FCFB9230}">
-                <p14:media xmlns:p14="http://schemas.microsoft.com/office/powerpoint/2010/main" r:embed="rId2"/>
-              </p:ext>
-            </p:extLst>
-          </p:nvPr>
-        </p:nvPicPr>
-        <p:blipFill>
-          <a:blip r:embed="rId3"/>
-          <a:stretch>
-            <a:fillRect/>
-          </a:stretch>
-        </p:blipFill>
-        <p:spPr>
-          <a:xfrm>
-            <a:off x="457200" y="1280160"/>
-            <a:ext cx="5394960" cy="3035808"/>
-          </a:xfrm>
-          <a:prstGeom prst="rect">
-            <a:avLst/>
-          </a:prstGeom>
-        </p:spPr>
-      </p:pic>
-      <p:sp>
-        <p:nvSpPr>
-          <p:cNvPr id="6" name="Shape 3"/>
+      <p:sp>
+        <p:nvSpPr>
+          <p:cNvPr id="5" name="Shape 3"/>
           <p:cNvSpPr/>
           <p:nvPr/>
         </p:nvSpPr>
         <p:spPr>
           <a:xfrm>
-            <a:off x="6080760" y="1280160"/>
-            <a:ext cx="2606040" cy="3035808"/>
+            <a:off x="457200" y="1325880"/>
+            <a:ext cx="4023360" cy="1691640"/>
           </a:xfrm>
           <a:prstGeom prst="roundRect">
             <a:avLst>
-              <a:gd name="adj" fmla="val 2807"/>
+              <a:gd name="adj" fmla="val 4324"/>
+            </a:avLst>
+          </a:prstGeom>
+          <a:solidFill>
+            <a:srgbClr val="F4ECDE"/>
+          </a:solidFill>
+          <a:ln w="12700">
+            <a:solidFill>
+              <a:srgbClr val="F4ECDE"/>
+            </a:solidFill>
+            <a:prstDash val="solid"/>
+          </a:ln>
+        </p:spPr>
+      </p:sp>
+      <p:sp>
+        <p:nvSpPr>
+          <p:cNvPr id="6" name="Text 4"/>
+          <p:cNvSpPr txBox="1"/>
+          <p:nvPr/>
+        </p:nvSpPr>
+        <p:spPr>
+          <a:xfrm>
+            <a:off x="685800" y="1508760"/>
+            <a:ext cx="548640" cy="548640"/>
+          </a:xfrm>
+          <a:prstGeom prst="ellipse">
+            <a:avLst/>
+          </a:prstGeom>
+          <a:solidFill>
+            <a:srgbClr val="AD4426"/>
+          </a:solidFill>
+          <a:ln/>
+        </p:spPr>
+        <p:txBody>
+          <a:bodyPr wrap="square" lIns="0" tIns="0" rIns="0" bIns="0" rtlCol="0" anchor="ctr"/>
+          <a:lstStyle/>
+          <a:p>
+            <a:pPr algn="ctr" indent="0" marL="0">
+              <a:buNone/>
+            </a:pPr>
+            <a:r>
+              <a:rPr lang="en-US" sz="2200" b="1" dirty="0">
+                <a:solidFill>
+                  <a:srgbClr val="FFFFFF"/>
+                </a:solidFill>
+                <a:latin typeface="Cambria" pitchFamily="34" charset="0"/>
+                <a:ea typeface="Cambria" pitchFamily="34" charset="-122"/>
+                <a:cs typeface="Cambria" pitchFamily="34" charset="-120"/>
+              </a:rPr>
+              <a:t>A</a:t>
+            </a:r>
+            <a:endParaRPr lang="en-US" sz="2200" dirty="0"/>
+          </a:p>
+        </p:txBody>
+      </p:sp>
+      <p:sp>
+        <p:nvSpPr>
+          <p:cNvPr id="7" name="Text 5"/>
+          <p:cNvSpPr txBox="1"/>
+          <p:nvPr/>
+        </p:nvSpPr>
+        <p:spPr>
+          <a:xfrm>
+            <a:off x="1417320" y="1481328"/>
+            <a:ext cx="2834640" cy="274320"/>
+          </a:xfrm>
+          <a:prstGeom prst="rect">
+            <a:avLst/>
+          </a:prstGeom>
+          <a:noFill/>
+          <a:ln/>
+        </p:spPr>
+        <p:txBody>
+          <a:bodyPr wrap="square" lIns="0" tIns="0" rIns="0" bIns="0" rtlCol="0" anchor="t"/>
+          <a:lstStyle/>
+          <a:p>
+            <a:pPr indent="0" marL="0">
+              <a:buNone/>
+            </a:pPr>
+            <a:r>
+              <a:rPr lang="en-US" sz="1200" b="1" dirty="0">
+                <a:solidFill>
+                  <a:srgbClr val="5A5044"/>
+                </a:solidFill>
+                <a:latin typeface="Calibri" pitchFamily="34" charset="0"/>
+                <a:ea typeface="Calibri" pitchFamily="34" charset="-122"/>
+                <a:cs typeface="Calibri" pitchFamily="34" charset="-120"/>
+              </a:rPr>
+              <a:t>Partner A</a:t>
+            </a:r>
+            <a:endParaRPr lang="en-US" sz="1200" dirty="0"/>
+          </a:p>
+        </p:txBody>
+      </p:sp>
+      <p:sp>
+        <p:nvSpPr>
+          <p:cNvPr id="8" name="Text 6"/>
+          <p:cNvSpPr txBox="1"/>
+          <p:nvPr/>
+        </p:nvSpPr>
+        <p:spPr>
+          <a:xfrm>
+            <a:off x="1417320" y="1737360"/>
+            <a:ext cx="2834640" cy="365760"/>
+          </a:xfrm>
+          <a:prstGeom prst="rect">
+            <a:avLst/>
+          </a:prstGeom>
+          <a:noFill/>
+          <a:ln/>
+        </p:spPr>
+        <p:txBody>
+          <a:bodyPr wrap="square" lIns="0" tIns="0" rIns="0" bIns="0" rtlCol="0" anchor="t"/>
+          <a:lstStyle/>
+          <a:p>
+            <a:pPr indent="0" marL="0">
+              <a:buNone/>
+            </a:pPr>
+            <a:r>
+              <a:rPr lang="en-US" sz="1900" b="1" dirty="0">
+                <a:solidFill>
+                  <a:srgbClr val="2B2318"/>
+                </a:solidFill>
+                <a:latin typeface="Cambria" pitchFamily="34" charset="0"/>
+                <a:ea typeface="Cambria" pitchFamily="34" charset="-122"/>
+                <a:cs typeface="Cambria" pitchFamily="34" charset="-120"/>
+              </a:rPr>
+              <a:t>Sozialreform</a:t>
+            </a:r>
+            <a:endParaRPr lang="en-US" sz="1900" dirty="0"/>
+          </a:p>
+        </p:txBody>
+      </p:sp>
+      <p:sp>
+        <p:nvSpPr>
+          <p:cNvPr id="9" name="Text 7"/>
+          <p:cNvSpPr txBox="1"/>
+          <p:nvPr/>
+        </p:nvSpPr>
+        <p:spPr>
+          <a:xfrm>
+            <a:off x="685800" y="2240280"/>
+            <a:ext cx="3611880" cy="685800"/>
+          </a:xfrm>
+          <a:prstGeom prst="rect">
+            <a:avLst/>
+          </a:prstGeom>
+          <a:noFill/>
+          <a:ln/>
+        </p:spPr>
+        <p:txBody>
+          <a:bodyPr wrap="square" lIns="0" tIns="0" rIns="0" bIns="0" rtlCol="0" anchor="t"/>
+          <a:lstStyle/>
+          <a:p>
+            <a:pPr indent="0" marL="0">
+              <a:buNone/>
+            </a:pPr>
+            <a:r>
+              <a:rPr lang="en-US" sz="1300" dirty="0">
+                <a:solidFill>
+                  <a:srgbClr val="2B2318"/>
+                </a:solidFill>
+                <a:latin typeface="Calibri" pitchFamily="34" charset="0"/>
+                <a:ea typeface="Calibri" pitchFamily="34" charset="-122"/>
+                <a:cs typeface="Calibri" pitchFamily="34" charset="-120"/>
+              </a:rPr>
+              <a:t>S. 20 ab „Die Reform Solons“ bis S. 21 „… fremde Handwerker ins Land“</a:t>
+            </a:r>
+            <a:endParaRPr lang="en-US" sz="1300" dirty="0"/>
+          </a:p>
+        </p:txBody>
+      </p:sp>
+      <p:sp>
+        <p:nvSpPr>
+          <p:cNvPr id="10" name="Shape 8"/>
+          <p:cNvSpPr/>
+          <p:nvPr/>
+        </p:nvSpPr>
+        <p:spPr>
+          <a:xfrm>
+            <a:off x="4663440" y="1325880"/>
+            <a:ext cx="4023360" cy="1691640"/>
+          </a:xfrm>
+          <a:prstGeom prst="roundRect">
+            <a:avLst>
+              <a:gd name="adj" fmla="val 4324"/>
+            </a:avLst>
+          </a:prstGeom>
+          <a:solidFill>
+            <a:srgbClr val="F4ECDE"/>
+          </a:solidFill>
+          <a:ln w="12700">
+            <a:solidFill>
+              <a:srgbClr val="F4ECDE"/>
+            </a:solidFill>
+            <a:prstDash val="solid"/>
+          </a:ln>
+        </p:spPr>
+      </p:sp>
+      <p:sp>
+        <p:nvSpPr>
+          <p:cNvPr id="11" name="Text 9"/>
+          <p:cNvSpPr txBox="1"/>
+          <p:nvPr/>
+        </p:nvSpPr>
+        <p:spPr>
+          <a:xfrm>
+            <a:off x="4892040" y="1508760"/>
+            <a:ext cx="548640" cy="548640"/>
+          </a:xfrm>
+          <a:prstGeom prst="ellipse">
+            <a:avLst/>
+          </a:prstGeom>
+          <a:solidFill>
+            <a:srgbClr val="D9A441"/>
+          </a:solidFill>
+          <a:ln/>
+        </p:spPr>
+        <p:txBody>
+          <a:bodyPr wrap="square" lIns="0" tIns="0" rIns="0" bIns="0" rtlCol="0" anchor="ctr"/>
+          <a:lstStyle/>
+          <a:p>
+            <a:pPr algn="ctr" indent="0" marL="0">
+              <a:buNone/>
+            </a:pPr>
+            <a:r>
+              <a:rPr lang="en-US" sz="2200" b="1" dirty="0">
+                <a:solidFill>
+                  <a:srgbClr val="2B2318"/>
+                </a:solidFill>
+                <a:latin typeface="Cambria" pitchFamily="34" charset="0"/>
+                <a:ea typeface="Cambria" pitchFamily="34" charset="-122"/>
+                <a:cs typeface="Cambria" pitchFamily="34" charset="-120"/>
+              </a:rPr>
+              <a:t>B</a:t>
+            </a:r>
+            <a:endParaRPr lang="en-US" sz="2200" dirty="0"/>
+          </a:p>
+        </p:txBody>
+      </p:sp>
+      <p:sp>
+        <p:nvSpPr>
+          <p:cNvPr id="12" name="Text 10"/>
+          <p:cNvSpPr txBox="1"/>
+          <p:nvPr/>
+        </p:nvSpPr>
+        <p:spPr>
+          <a:xfrm>
+            <a:off x="5623560" y="1481328"/>
+            <a:ext cx="2834640" cy="274320"/>
+          </a:xfrm>
+          <a:prstGeom prst="rect">
+            <a:avLst/>
+          </a:prstGeom>
+          <a:noFill/>
+          <a:ln/>
+        </p:spPr>
+        <p:txBody>
+          <a:bodyPr wrap="square" lIns="0" tIns="0" rIns="0" bIns="0" rtlCol="0" anchor="t"/>
+          <a:lstStyle/>
+          <a:p>
+            <a:pPr indent="0" marL="0">
+              <a:buNone/>
+            </a:pPr>
+            <a:r>
+              <a:rPr lang="en-US" sz="1200" b="1" dirty="0">
+                <a:solidFill>
+                  <a:srgbClr val="5A5044"/>
+                </a:solidFill>
+                <a:latin typeface="Calibri" pitchFamily="34" charset="0"/>
+                <a:ea typeface="Calibri" pitchFamily="34" charset="-122"/>
+                <a:cs typeface="Calibri" pitchFamily="34" charset="-120"/>
+              </a:rPr>
+              <a:t>Partner B</a:t>
+            </a:r>
+            <a:endParaRPr lang="en-US" sz="1200" dirty="0"/>
+          </a:p>
+        </p:txBody>
+      </p:sp>
+      <p:sp>
+        <p:nvSpPr>
+          <p:cNvPr id="13" name="Text 11"/>
+          <p:cNvSpPr txBox="1"/>
+          <p:nvPr/>
+        </p:nvSpPr>
+        <p:spPr>
+          <a:xfrm>
+            <a:off x="5623560" y="1737360"/>
+            <a:ext cx="2834640" cy="365760"/>
+          </a:xfrm>
+          <a:prstGeom prst="rect">
+            <a:avLst/>
+          </a:prstGeom>
+          <a:noFill/>
+          <a:ln/>
+        </p:spPr>
+        <p:txBody>
+          <a:bodyPr wrap="square" lIns="0" tIns="0" rIns="0" bIns="0" rtlCol="0" anchor="t"/>
+          <a:lstStyle/>
+          <a:p>
+            <a:pPr indent="0" marL="0">
+              <a:buNone/>
+            </a:pPr>
+            <a:r>
+              <a:rPr lang="en-US" sz="1900" b="1" dirty="0">
+                <a:solidFill>
+                  <a:srgbClr val="2B2318"/>
+                </a:solidFill>
+                <a:latin typeface="Cambria" pitchFamily="34" charset="0"/>
+                <a:ea typeface="Cambria" pitchFamily="34" charset="-122"/>
+                <a:cs typeface="Cambria" pitchFamily="34" charset="-120"/>
+              </a:rPr>
+              <a:t>Verfassungsreform</a:t>
+            </a:r>
+            <a:endParaRPr lang="en-US" sz="1900" dirty="0"/>
+          </a:p>
+        </p:txBody>
+      </p:sp>
+      <p:sp>
+        <p:nvSpPr>
+          <p:cNvPr id="14" name="Text 12"/>
+          <p:cNvSpPr txBox="1"/>
+          <p:nvPr/>
+        </p:nvSpPr>
+        <p:spPr>
+          <a:xfrm>
+            <a:off x="4892040" y="2240280"/>
+            <a:ext cx="3611880" cy="685800"/>
+          </a:xfrm>
+          <a:prstGeom prst="rect">
+            <a:avLst/>
+          </a:prstGeom>
+          <a:noFill/>
+          <a:ln/>
+        </p:spPr>
+        <p:txBody>
+          <a:bodyPr wrap="square" lIns="0" tIns="0" rIns="0" bIns="0" rtlCol="0" anchor="t"/>
+          <a:lstStyle/>
+          <a:p>
+            <a:pPr indent="0" marL="0">
+              <a:buNone/>
+            </a:pPr>
+            <a:r>
+              <a:rPr lang="en-US" sz="1300" dirty="0">
+                <a:solidFill>
+                  <a:srgbClr val="2B2318"/>
+                </a:solidFill>
+                <a:latin typeface="Calibri" pitchFamily="34" charset="0"/>
+                <a:ea typeface="Calibri" pitchFamily="34" charset="-122"/>
+                <a:cs typeface="Calibri" pitchFamily="34" charset="-120"/>
+              </a:rPr>
+              <a:t>S. 21 ab „Bei der Reform des Verfassungslebens …“ bis S. 22 „… M4, M5)“</a:t>
+            </a:r>
+            <a:endParaRPr lang="en-US" sz="1300" dirty="0"/>
+          </a:p>
+        </p:txBody>
+      </p:sp>
+      <p:sp>
+        <p:nvSpPr>
+          <p:cNvPr id="15" name="Shape 13"/>
+          <p:cNvSpPr/>
+          <p:nvPr/>
+        </p:nvSpPr>
+        <p:spPr>
+          <a:xfrm>
+            <a:off x="457200" y="3291840"/>
+            <a:ext cx="2606040" cy="960120"/>
+          </a:xfrm>
+          <a:prstGeom prst="roundRect">
+            <a:avLst>
+              <a:gd name="adj" fmla="val 7619"/>
             </a:avLst>
           </a:prstGeom>
           <a:solidFill>
@@ -16995,14 +17033,14 @@
       </p:sp>
       <p:sp>
         <p:nvSpPr>
-          <p:cNvPr id="7" name="Text 4"/>
-          <p:cNvSpPr txBox="1"/>
-          <p:nvPr/>
-        </p:nvSpPr>
-        <p:spPr>
-          <a:xfrm>
-            <a:off x="6309360" y="1463040"/>
-            <a:ext cx="2194560" cy="320040"/>
+          <p:cNvPr id="16" name="Text 14"/>
+          <p:cNvSpPr txBox="1"/>
+          <p:nvPr/>
+        </p:nvSpPr>
+        <p:spPr>
+          <a:xfrm>
+            <a:off x="640080" y="3401568"/>
+            <a:ext cx="2240280" cy="274320"/>
           </a:xfrm>
           <a:prstGeom prst="rect">
             <a:avLst/>
@@ -17018,7 +17056,7 @@
               <a:buNone/>
             </a:pPr>
             <a:r>
-              <a:rPr lang="en-US" sz="1400" b="1" dirty="0">
+              <a:rPr lang="en-US" sz="1200" b="1" dirty="0">
                 <a:solidFill>
                   <a:srgbClr val="D9A441"/>
                 </a:solidFill>
@@ -17026,22 +17064,22 @@
                 <a:ea typeface="Calibri" pitchFamily="34" charset="-122"/>
                 <a:cs typeface="Calibri" pitchFamily="34" charset="-120"/>
               </a:rPr>
-              <a:t>Sehauftrag</a:t>
-            </a:r>
-            <a:endParaRPr lang="en-US" sz="1400" dirty="0"/>
-          </a:p>
-        </p:txBody>
-      </p:sp>
-      <p:sp>
-        <p:nvSpPr>
-          <p:cNvPr id="8" name="Text 5"/>
-          <p:cNvSpPr txBox="1"/>
-          <p:nvPr/>
-        </p:nvSpPr>
-        <p:spPr>
-          <a:xfrm>
-            <a:off x="6309360" y="1874520"/>
-            <a:ext cx="2194560" cy="1280160"/>
+              <a:t>7 Min.</a:t>
+            </a:r>
+            <a:endParaRPr lang="en-US" sz="1200" dirty="0"/>
+          </a:p>
+        </p:txBody>
+      </p:sp>
+      <p:sp>
+        <p:nvSpPr>
+          <p:cNvPr id="17" name="Text 15"/>
+          <p:cNvSpPr txBox="1"/>
+          <p:nvPr/>
+        </p:nvSpPr>
+        <p:spPr>
+          <a:xfrm>
+            <a:off x="640080" y="3703320"/>
+            <a:ext cx="2240280" cy="411480"/>
           </a:xfrm>
           <a:prstGeom prst="rect">
             <a:avLst/>
@@ -17057,30 +17095,81 @@
               <a:buNone/>
             </a:pPr>
             <a:r>
-              <a:rPr lang="en-US" sz="1700" b="1" dirty="0">
+              <a:rPr lang="en-US" sz="1600" b="1" dirty="0">
                 <a:solidFill>
                   <a:srgbClr val="FFFFFF"/>
                 </a:solidFill>
-                <a:latin typeface="Cambria" pitchFamily="34" charset="0"/>
-                <a:ea typeface="Cambria" pitchFamily="34" charset="-122"/>
-                <a:cs typeface="Cambria" pitchFamily="34" charset="-120"/>
-              </a:rPr>
-              <a:t>Prüft eure Einschätzung zu P4: Politische Macht nur beim Adel.</a:t>
-            </a:r>
-            <a:endParaRPr lang="en-US" sz="1700" dirty="0"/>
-          </a:p>
-        </p:txBody>
-      </p:sp>
-      <p:sp>
-        <p:nvSpPr>
-          <p:cNvPr id="9" name="Text 6"/>
-          <p:cNvSpPr txBox="1"/>
-          <p:nvPr/>
-        </p:nvSpPr>
-        <p:spPr>
-          <a:xfrm>
-            <a:off x="6309360" y="3383280"/>
-            <a:ext cx="2194560" cy="548640"/>
+                <a:latin typeface="Calibri" pitchFamily="34" charset="0"/>
+                <a:ea typeface="Calibri" pitchFamily="34" charset="-122"/>
+                <a:cs typeface="Calibri" pitchFamily="34" charset="-120"/>
+              </a:rPr>
+              <a:t>Allein lesen</a:t>
+            </a:r>
+            <a:endParaRPr lang="en-US" sz="1600" dirty="0"/>
+          </a:p>
+        </p:txBody>
+      </p:sp>
+      <p:sp>
+        <p:nvSpPr>
+          <p:cNvPr id="18" name="Shape 16"/>
+          <p:cNvSpPr/>
+          <p:nvPr/>
+        </p:nvSpPr>
+        <p:spPr>
+          <a:xfrm>
+            <a:off x="3081528" y="3767328"/>
+            <a:ext cx="146304" cy="0"/>
+          </a:xfrm>
+          <a:prstGeom prst="line">
+            <a:avLst/>
+          </a:prstGeom>
+          <a:noFill/>
+          <a:ln w="28575">
+            <a:solidFill>
+              <a:srgbClr val="998C77"/>
+            </a:solidFill>
+            <a:prstDash val="solid"/>
+            <a:tailEnd type="triangle"/>
+          </a:ln>
+        </p:spPr>
+      </p:sp>
+      <p:sp>
+        <p:nvSpPr>
+          <p:cNvPr id="19" name="Shape 17"/>
+          <p:cNvSpPr/>
+          <p:nvPr/>
+        </p:nvSpPr>
+        <p:spPr>
+          <a:xfrm>
+            <a:off x="3246120" y="3291840"/>
+            <a:ext cx="2606040" cy="960120"/>
+          </a:xfrm>
+          <a:prstGeom prst="roundRect">
+            <a:avLst>
+              <a:gd name="adj" fmla="val 7619"/>
+            </a:avLst>
+          </a:prstGeom>
+          <a:solidFill>
+            <a:srgbClr val="2B2318"/>
+          </a:solidFill>
+          <a:ln w="12700">
+            <a:solidFill>
+              <a:srgbClr val="2B2318"/>
+            </a:solidFill>
+            <a:prstDash val="solid"/>
+          </a:ln>
+        </p:spPr>
+      </p:sp>
+      <p:sp>
+        <p:nvSpPr>
+          <p:cNvPr id="20" name="Text 18"/>
+          <p:cNvSpPr txBox="1"/>
+          <p:nvPr/>
+        </p:nvSpPr>
+        <p:spPr>
+          <a:xfrm>
+            <a:off x="3429000" y="3401568"/>
+            <a:ext cx="2240280" cy="274320"/>
           </a:xfrm>
           <a:prstGeom prst="rect">
             <a:avLst/>
@@ -17096,23 +17185,191 @@
               <a:buNone/>
             </a:pPr>
             <a:r>
-              <a:rPr lang="en-US" sz="1400" dirty="0">
-                <a:solidFill>
-                  <a:srgbClr val="E8DFD0"/>
-                </a:solidFill>
-                <a:latin typeface="Calibri" pitchFamily="34" charset="0"/>
-                <a:ea typeface="Calibri" pitchFamily="34" charset="-122"/>
-                <a:cs typeface="Calibri" pitchFamily="34" charset="-120"/>
-              </a:rPr>
-              <a:t>Bleibt ihr bei eurem Zeichen?</a:t>
-            </a:r>
-            <a:endParaRPr lang="en-US" sz="1400" dirty="0"/>
-          </a:p>
-        </p:txBody>
-      </p:sp>
-      <p:sp>
-        <p:nvSpPr>
-          <p:cNvPr id="10" name="Text 7"/>
+              <a:rPr lang="en-US" sz="1200" b="1" dirty="0">
+                <a:solidFill>
+                  <a:srgbClr val="D9A441"/>
+                </a:solidFill>
+                <a:latin typeface="Calibri" pitchFamily="34" charset="0"/>
+                <a:ea typeface="Calibri" pitchFamily="34" charset="-122"/>
+                <a:cs typeface="Calibri" pitchFamily="34" charset="-120"/>
+              </a:rPr>
+              <a:t>3 + 3 Min.</a:t>
+            </a:r>
+            <a:endParaRPr lang="en-US" sz="1200" dirty="0"/>
+          </a:p>
+        </p:txBody>
+      </p:sp>
+      <p:sp>
+        <p:nvSpPr>
+          <p:cNvPr id="21" name="Text 19"/>
+          <p:cNvSpPr txBox="1"/>
+          <p:nvPr/>
+        </p:nvSpPr>
+        <p:spPr>
+          <a:xfrm>
+            <a:off x="3429000" y="3703320"/>
+            <a:ext cx="2240280" cy="411480"/>
+          </a:xfrm>
+          <a:prstGeom prst="rect">
+            <a:avLst/>
+          </a:prstGeom>
+          <a:noFill/>
+          <a:ln/>
+        </p:spPr>
+        <p:txBody>
+          <a:bodyPr wrap="square" lIns="0" tIns="0" rIns="0" bIns="0" rtlCol="0" anchor="t"/>
+          <a:lstStyle/>
+          <a:p>
+            <a:pPr indent="0" marL="0">
+              <a:buNone/>
+            </a:pPr>
+            <a:r>
+              <a:rPr lang="en-US" sz="1600" b="1" dirty="0">
+                <a:solidFill>
+                  <a:srgbClr val="FFFFFF"/>
+                </a:solidFill>
+                <a:latin typeface="Calibri" pitchFamily="34" charset="0"/>
+                <a:ea typeface="Calibri" pitchFamily="34" charset="-122"/>
+                <a:cs typeface="Calibri" pitchFamily="34" charset="-120"/>
+              </a:rPr>
+              <a:t>Dem Partner erklären</a:t>
+            </a:r>
+            <a:endParaRPr lang="en-US" sz="1600" dirty="0"/>
+          </a:p>
+        </p:txBody>
+      </p:sp>
+      <p:sp>
+        <p:nvSpPr>
+          <p:cNvPr id="22" name="Shape 20"/>
+          <p:cNvSpPr/>
+          <p:nvPr/>
+        </p:nvSpPr>
+        <p:spPr>
+          <a:xfrm>
+            <a:off x="5870448" y="3767328"/>
+            <a:ext cx="146304" cy="0"/>
+          </a:xfrm>
+          <a:prstGeom prst="line">
+            <a:avLst/>
+          </a:prstGeom>
+          <a:noFill/>
+          <a:ln w="28575">
+            <a:solidFill>
+              <a:srgbClr val="998C77"/>
+            </a:solidFill>
+            <a:prstDash val="solid"/>
+            <a:tailEnd type="triangle"/>
+          </a:ln>
+        </p:spPr>
+      </p:sp>
+      <p:sp>
+        <p:nvSpPr>
+          <p:cNvPr id="23" name="Shape 21"/>
+          <p:cNvSpPr/>
+          <p:nvPr/>
+        </p:nvSpPr>
+        <p:spPr>
+          <a:xfrm>
+            <a:off x="6035040" y="3291840"/>
+            <a:ext cx="2606040" cy="960120"/>
+          </a:xfrm>
+          <a:prstGeom prst="roundRect">
+            <a:avLst>
+              <a:gd name="adj" fmla="val 7619"/>
+            </a:avLst>
+          </a:prstGeom>
+          <a:solidFill>
+            <a:srgbClr val="2B2318"/>
+          </a:solidFill>
+          <a:ln w="12700">
+            <a:solidFill>
+              <a:srgbClr val="2B2318"/>
+            </a:solidFill>
+            <a:prstDash val="solid"/>
+          </a:ln>
+        </p:spPr>
+      </p:sp>
+      <p:sp>
+        <p:nvSpPr>
+          <p:cNvPr id="24" name="Text 22"/>
+          <p:cNvSpPr txBox="1"/>
+          <p:nvPr/>
+        </p:nvSpPr>
+        <p:spPr>
+          <a:xfrm>
+            <a:off x="6217920" y="3401568"/>
+            <a:ext cx="2240280" cy="274320"/>
+          </a:xfrm>
+          <a:prstGeom prst="rect">
+            <a:avLst/>
+          </a:prstGeom>
+          <a:noFill/>
+          <a:ln/>
+        </p:spPr>
+        <p:txBody>
+          <a:bodyPr wrap="square" lIns="0" tIns="0" rIns="0" bIns="0" rtlCol="0" anchor="t"/>
+          <a:lstStyle/>
+          <a:p>
+            <a:pPr indent="0" marL="0">
+              <a:buNone/>
+            </a:pPr>
+            <a:r>
+              <a:rPr lang="en-US" sz="1200" b="1" dirty="0">
+                <a:solidFill>
+                  <a:srgbClr val="D9A441"/>
+                </a:solidFill>
+                <a:latin typeface="Calibri" pitchFamily="34" charset="0"/>
+                <a:ea typeface="Calibri" pitchFamily="34" charset="-122"/>
+                <a:cs typeface="Calibri" pitchFamily="34" charset="-120"/>
+              </a:rPr>
+              <a:t>2 Min.</a:t>
+            </a:r>
+            <a:endParaRPr lang="en-US" sz="1200" dirty="0"/>
+          </a:p>
+        </p:txBody>
+      </p:sp>
+      <p:sp>
+        <p:nvSpPr>
+          <p:cNvPr id="25" name="Text 23"/>
+          <p:cNvSpPr txBox="1"/>
+          <p:nvPr/>
+        </p:nvSpPr>
+        <p:spPr>
+          <a:xfrm>
+            <a:off x="6217920" y="3703320"/>
+            <a:ext cx="2240280" cy="411480"/>
+          </a:xfrm>
+          <a:prstGeom prst="rect">
+            <a:avLst/>
+          </a:prstGeom>
+          <a:noFill/>
+          <a:ln/>
+        </p:spPr>
+        <p:txBody>
+          <a:bodyPr wrap="square" lIns="0" tIns="0" rIns="0" bIns="0" rtlCol="0" anchor="t"/>
+          <a:lstStyle/>
+          <a:p>
+            <a:pPr indent="0" marL="0">
+              <a:buNone/>
+            </a:pPr>
+            <a:r>
+              <a:rPr lang="en-US" sz="1600" b="1" dirty="0">
+                <a:solidFill>
+                  <a:srgbClr val="FFFFFF"/>
+                </a:solidFill>
+                <a:latin typeface="Calibri" pitchFamily="34" charset="0"/>
+                <a:ea typeface="Calibri" pitchFamily="34" charset="-122"/>
+                <a:cs typeface="Calibri" pitchFamily="34" charset="-120"/>
+              </a:rPr>
+              <a:t>Spalte „Solon“ ausfüllen</a:t>
+            </a:r>
+            <a:endParaRPr lang="en-US" sz="1600" dirty="0"/>
+          </a:p>
+        </p:txBody>
+      </p:sp>
+      <p:sp>
+        <p:nvSpPr>
+          <p:cNvPr id="26" name="Text 24"/>
           <p:cNvSpPr txBox="1"/>
           <p:nvPr/>
         </p:nvSpPr>
@@ -17151,7 +17408,7 @@
       </p:sp>
       <p:sp>
         <p:nvSpPr>
-          <p:cNvPr id="11" name="Text 8"/>
+          <p:cNvPr id="27" name="Text 25"/>
           <p:cNvSpPr txBox="1"/>
           <p:nvPr/>
         </p:nvSpPr>
@@ -17253,7 +17510,7 @@
                 <a:ea typeface="Calibri" pitchFamily="34" charset="-122"/>
                 <a:cs typeface="Calibri" pitchFamily="34" charset="-120"/>
               </a:rPr>
-              <a:t>ABGLEICH · NUR STRITTIGE FELDER BESPRECHEN</a:t>
+              <a:t>SICHERUNG · ERKLÄRVIDEO</a:t>
             </a:r>
             <a:endParaRPr lang="en-US" sz="1100" dirty="0"/>
           </a:p>
@@ -17292,6 +17549,414 @@
                 <a:ea typeface="Cambria" pitchFamily="34" charset="-122"/>
                 <a:cs typeface="Cambria" pitchFamily="34" charset="-120"/>
               </a:rPr>
+              <a:t>Solons Verfassung</a:t>
+            </a:r>
+            <a:endParaRPr lang="en-US" sz="2800" dirty="0"/>
+          </a:p>
+        </p:txBody>
+      </p:sp>
+      <p:sp>
+        <p:nvSpPr>
+          <p:cNvPr id="4" name="Text 2"/>
+          <p:cNvSpPr txBox="1"/>
+          <p:nvPr/>
+        </p:nvSpPr>
+        <p:spPr>
+          <a:xfrm>
+            <a:off x="7315200" y="347472"/>
+            <a:ext cx="1371600" cy="292608"/>
+          </a:xfrm>
+          <a:prstGeom prst="roundRect">
+            <a:avLst>
+              <a:gd name="adj" fmla="val 31250"/>
+            </a:avLst>
+          </a:prstGeom>
+          <a:solidFill>
+            <a:srgbClr val="2B2318"/>
+          </a:solidFill>
+          <a:ln/>
+        </p:spPr>
+        <p:txBody>
+          <a:bodyPr wrap="square" lIns="25400" tIns="25400" rIns="25400" bIns="25400" rtlCol="0" anchor="ctr"/>
+          <a:lstStyle/>
+          <a:p>
+            <a:pPr algn="ctr" indent="0" marL="0">
+              <a:buNone/>
+            </a:pPr>
+            <a:r>
+              <a:rPr lang="en-US" sz="1100" b="1" dirty="0">
+                <a:solidFill>
+                  <a:srgbClr val="FFFFFF"/>
+                </a:solidFill>
+                <a:latin typeface="Calibri" pitchFamily="34" charset="0"/>
+                <a:ea typeface="Calibri" pitchFamily="34" charset="-122"/>
+                <a:cs typeface="Calibri" pitchFamily="34" charset="-120"/>
+              </a:rPr>
+              <a:t>4 Min.</a:t>
+            </a:r>
+            <a:endParaRPr lang="en-US" sz="1100" dirty="0"/>
+          </a:p>
+        </p:txBody>
+      </p:sp>
+      <p:pic>
+        <p:nvPicPr>
+          <p:cNvPr id="3" name="Media 0">
+            <a:hlinkClick r:id="" action="ppaction://media"/>
+          </p:cNvPr>
+          <p:cNvPicPr>
+            <a:picLocks noChangeAspect="1"/>
+          </p:cNvPicPr>
+          <p:nvPr>
+            <a:videoFile r:link="rId1"/>
+            <p:extLst>
+              <p:ext uri="{DAA4B4D4-6D71-4841-9C94-3DE7FCFB9230}">
+                <p14:media xmlns:p14="http://schemas.microsoft.com/office/powerpoint/2010/main" r:embed="rId2"/>
+              </p:ext>
+            </p:extLst>
+          </p:nvPr>
+        </p:nvPicPr>
+        <p:blipFill>
+          <a:blip r:embed="rId3"/>
+          <a:stretch>
+            <a:fillRect/>
+          </a:stretch>
+        </p:blipFill>
+        <p:spPr>
+          <a:xfrm>
+            <a:off x="457200" y="1280160"/>
+            <a:ext cx="5394960" cy="3035808"/>
+          </a:xfrm>
+          <a:prstGeom prst="rect">
+            <a:avLst/>
+          </a:prstGeom>
+        </p:spPr>
+      </p:pic>
+      <p:sp>
+        <p:nvSpPr>
+          <p:cNvPr id="6" name="Shape 3"/>
+          <p:cNvSpPr/>
+          <p:nvPr/>
+        </p:nvSpPr>
+        <p:spPr>
+          <a:xfrm>
+            <a:off x="6080760" y="1280160"/>
+            <a:ext cx="2606040" cy="3035808"/>
+          </a:xfrm>
+          <a:prstGeom prst="roundRect">
+            <a:avLst>
+              <a:gd name="adj" fmla="val 2807"/>
+            </a:avLst>
+          </a:prstGeom>
+          <a:solidFill>
+            <a:srgbClr val="2B2318"/>
+          </a:solidFill>
+          <a:ln w="12700">
+            <a:solidFill>
+              <a:srgbClr val="2B2318"/>
+            </a:solidFill>
+            <a:prstDash val="solid"/>
+          </a:ln>
+        </p:spPr>
+      </p:sp>
+      <p:sp>
+        <p:nvSpPr>
+          <p:cNvPr id="7" name="Text 4"/>
+          <p:cNvSpPr txBox="1"/>
+          <p:nvPr/>
+        </p:nvSpPr>
+        <p:spPr>
+          <a:xfrm>
+            <a:off x="6309360" y="1463040"/>
+            <a:ext cx="2194560" cy="320040"/>
+          </a:xfrm>
+          <a:prstGeom prst="rect">
+            <a:avLst/>
+          </a:prstGeom>
+          <a:noFill/>
+          <a:ln/>
+        </p:spPr>
+        <p:txBody>
+          <a:bodyPr wrap="square" lIns="0" tIns="0" rIns="0" bIns="0" rtlCol="0" anchor="t"/>
+          <a:lstStyle/>
+          <a:p>
+            <a:pPr indent="0" marL="0">
+              <a:buNone/>
+            </a:pPr>
+            <a:r>
+              <a:rPr lang="en-US" sz="1400" b="1" dirty="0">
+                <a:solidFill>
+                  <a:srgbClr val="D9A441"/>
+                </a:solidFill>
+                <a:latin typeface="Calibri" pitchFamily="34" charset="0"/>
+                <a:ea typeface="Calibri" pitchFamily="34" charset="-122"/>
+                <a:cs typeface="Calibri" pitchFamily="34" charset="-120"/>
+              </a:rPr>
+              <a:t>Sehauftrag</a:t>
+            </a:r>
+            <a:endParaRPr lang="en-US" sz="1400" dirty="0"/>
+          </a:p>
+        </p:txBody>
+      </p:sp>
+      <p:sp>
+        <p:nvSpPr>
+          <p:cNvPr id="8" name="Text 5"/>
+          <p:cNvSpPr txBox="1"/>
+          <p:nvPr/>
+        </p:nvSpPr>
+        <p:spPr>
+          <a:xfrm>
+            <a:off x="6309360" y="1874520"/>
+            <a:ext cx="2194560" cy="1280160"/>
+          </a:xfrm>
+          <a:prstGeom prst="rect">
+            <a:avLst/>
+          </a:prstGeom>
+          <a:noFill/>
+          <a:ln/>
+        </p:spPr>
+        <p:txBody>
+          <a:bodyPr wrap="square" lIns="0" tIns="0" rIns="0" bIns="0" rtlCol="0" anchor="t"/>
+          <a:lstStyle/>
+          <a:p>
+            <a:pPr indent="0" marL="0">
+              <a:buNone/>
+            </a:pPr>
+            <a:r>
+              <a:rPr lang="en-US" sz="1700" b="1" dirty="0">
+                <a:solidFill>
+                  <a:srgbClr val="FFFFFF"/>
+                </a:solidFill>
+                <a:latin typeface="Cambria" pitchFamily="34" charset="0"/>
+                <a:ea typeface="Cambria" pitchFamily="34" charset="-122"/>
+                <a:cs typeface="Cambria" pitchFamily="34" charset="-120"/>
+              </a:rPr>
+              <a:t>Prüft eure Einschätzung zu P4: Politische Macht nur beim Adel.</a:t>
+            </a:r>
+            <a:endParaRPr lang="en-US" sz="1700" dirty="0"/>
+          </a:p>
+        </p:txBody>
+      </p:sp>
+      <p:sp>
+        <p:nvSpPr>
+          <p:cNvPr id="9" name="Text 6"/>
+          <p:cNvSpPr txBox="1"/>
+          <p:nvPr/>
+        </p:nvSpPr>
+        <p:spPr>
+          <a:xfrm>
+            <a:off x="6309360" y="3383280"/>
+            <a:ext cx="2194560" cy="548640"/>
+          </a:xfrm>
+          <a:prstGeom prst="rect">
+            <a:avLst/>
+          </a:prstGeom>
+          <a:noFill/>
+          <a:ln/>
+        </p:spPr>
+        <p:txBody>
+          <a:bodyPr wrap="square" lIns="0" tIns="0" rIns="0" bIns="0" rtlCol="0" anchor="t"/>
+          <a:lstStyle/>
+          <a:p>
+            <a:pPr indent="0" marL="0">
+              <a:buNone/>
+            </a:pPr>
+            <a:r>
+              <a:rPr lang="en-US" sz="1400" dirty="0">
+                <a:solidFill>
+                  <a:srgbClr val="E8DFD0"/>
+                </a:solidFill>
+                <a:latin typeface="Calibri" pitchFamily="34" charset="0"/>
+                <a:ea typeface="Calibri" pitchFamily="34" charset="-122"/>
+                <a:cs typeface="Calibri" pitchFamily="34" charset="-120"/>
+              </a:rPr>
+              <a:t>Bleibt ihr bei eurem Zeichen?</a:t>
+            </a:r>
+            <a:endParaRPr lang="en-US" sz="1400" dirty="0"/>
+          </a:p>
+        </p:txBody>
+      </p:sp>
+      <p:sp>
+        <p:nvSpPr>
+          <p:cNvPr id="10" name="Text 7"/>
+          <p:cNvSpPr txBox="1"/>
+          <p:nvPr/>
+        </p:nvSpPr>
+        <p:spPr>
+          <a:xfrm>
+            <a:off x="457200" y="4754880"/>
+            <a:ext cx="4572000" cy="182880"/>
+          </a:xfrm>
+          <a:prstGeom prst="rect">
+            <a:avLst/>
+          </a:prstGeom>
+          <a:noFill/>
+          <a:ln/>
+        </p:spPr>
+        <p:txBody>
+          <a:bodyPr wrap="square" lIns="0" tIns="0" rIns="0" bIns="0" rtlCol="0" anchor="t"/>
+          <a:lstStyle/>
+          <a:p>
+            <a:pPr indent="0" marL="0">
+              <a:buNone/>
+            </a:pPr>
+            <a:r>
+              <a:rPr lang="en-US" sz="900" dirty="0">
+                <a:solidFill>
+                  <a:srgbClr val="998C77"/>
+                </a:solidFill>
+                <a:latin typeface="Calibri" pitchFamily="34" charset="0"/>
+                <a:ea typeface="Calibri" pitchFamily="34" charset="-122"/>
+                <a:cs typeface="Calibri" pitchFamily="34" charset="-120"/>
+              </a:rPr>
+              <a:t>Von der Polis zur Krise</a:t>
+            </a:r>
+            <a:endParaRPr lang="en-US" sz="900" dirty="0"/>
+          </a:p>
+        </p:txBody>
+      </p:sp>
+      <p:sp>
+        <p:nvSpPr>
+          <p:cNvPr id="11" name="Text 8"/>
+          <p:cNvSpPr txBox="1"/>
+          <p:nvPr/>
+        </p:nvSpPr>
+        <p:spPr>
+          <a:xfrm>
+            <a:off x="8229600" y="4754880"/>
+            <a:ext cx="457200" cy="182880"/>
+          </a:xfrm>
+          <a:prstGeom prst="rect">
+            <a:avLst/>
+          </a:prstGeom>
+          <a:noFill/>
+          <a:ln/>
+        </p:spPr>
+        <p:txBody>
+          <a:bodyPr wrap="square" lIns="0" tIns="0" rIns="0" bIns="0" rtlCol="0" anchor="t"/>
+          <a:lstStyle/>
+          <a:p>
+            <a:pPr algn="r" indent="0" marL="0">
+              <a:buNone/>
+            </a:pPr>
+            <a:r>
+              <a:rPr lang="en-US" sz="900" dirty="0">
+                <a:solidFill>
+                  <a:srgbClr val="998C77"/>
+                </a:solidFill>
+                <a:latin typeface="Calibri" pitchFamily="34" charset="0"/>
+                <a:ea typeface="Calibri" pitchFamily="34" charset="-122"/>
+                <a:cs typeface="Calibri" pitchFamily="34" charset="-120"/>
+              </a:rPr>
+              <a:t>28</a:t>
+            </a:r>
+            <a:endParaRPr lang="en-US" sz="900" dirty="0"/>
+          </a:p>
+        </p:txBody>
+      </p:sp>
+    </p:spTree>
+  </p:cSld>
+  <p:clrMapOvr>
+    <a:masterClrMapping/>
+  </p:clrMapOvr>
+</p:sld>
+</file>
+
+<file path=ppt/slides/slide29.xml><?xml version="1.0" encoding="utf-8"?>
+<p:sld xmlns:a="http://schemas.openxmlformats.org/drawingml/2006/main" xmlns:r="http://schemas.openxmlformats.org/officeDocument/2006/relationships" xmlns:p="http://schemas.openxmlformats.org/presentationml/2006/main">
+  <p:cSld name="Slide 29">
+    <p:bg>
+      <p:bgPr>
+        <a:solidFill>
+          <a:srgbClr val="FFFFFF"/>
+        </a:solidFill>
+      </p:bgPr>
+    </p:bg>
+    <p:spTree>
+      <p:nvGrpSpPr>
+        <p:cNvPr id="1" name=""/>
+        <p:cNvGrpSpPr/>
+        <p:nvPr/>
+      </p:nvGrpSpPr>
+      <p:grpSpPr>
+        <a:xfrm>
+          <a:off x="0" y="0"/>
+          <a:ext cx="0" cy="0"/>
+          <a:chOff x="0" y="0"/>
+          <a:chExt cx="0" cy="0"/>
+        </a:xfrm>
+      </p:grpSpPr>
+      <p:sp>
+        <p:nvSpPr>
+          <p:cNvPr id="2" name="Text 0"/>
+          <p:cNvSpPr txBox="1"/>
+          <p:nvPr/>
+        </p:nvSpPr>
+        <p:spPr>
+          <a:xfrm>
+            <a:off x="457200" y="320040"/>
+            <a:ext cx="8229600" cy="228600"/>
+          </a:xfrm>
+          <a:prstGeom prst="rect">
+            <a:avLst/>
+          </a:prstGeom>
+          <a:noFill/>
+          <a:ln/>
+        </p:spPr>
+        <p:txBody>
+          <a:bodyPr wrap="square" lIns="0" tIns="0" rIns="0" bIns="0" rtlCol="0" anchor="t"/>
+          <a:lstStyle/>
+          <a:p>
+            <a:pPr indent="0" marL="0">
+              <a:buNone/>
+            </a:pPr>
+            <a:r>
+              <a:rPr lang="en-US" sz="1100" b="1" spc="200" kern="0" dirty="0">
+                <a:solidFill>
+                  <a:srgbClr val="AD4426"/>
+                </a:solidFill>
+                <a:latin typeface="Calibri" pitchFamily="34" charset="0"/>
+                <a:ea typeface="Calibri" pitchFamily="34" charset="-122"/>
+                <a:cs typeface="Calibri" pitchFamily="34" charset="-120"/>
+              </a:rPr>
+              <a:t>ABGLEICH · NUR STRITTIGE FELDER BESPRECHEN</a:t>
+            </a:r>
+            <a:endParaRPr lang="en-US" sz="1100" dirty="0"/>
+          </a:p>
+        </p:txBody>
+      </p:sp>
+      <p:sp>
+        <p:nvSpPr>
+          <p:cNvPr id="3" name="Text 1"/>
+          <p:cNvSpPr txBox="1"/>
+          <p:nvPr/>
+        </p:nvSpPr>
+        <p:spPr>
+          <a:xfrm>
+            <a:off x="457200" y="548640"/>
+            <a:ext cx="8229600" cy="594360"/>
+          </a:xfrm>
+          <a:prstGeom prst="rect">
+            <a:avLst/>
+          </a:prstGeom>
+          <a:noFill/>
+          <a:ln/>
+        </p:spPr>
+        <p:txBody>
+          <a:bodyPr wrap="square" lIns="0" tIns="0" rIns="0" bIns="0" rtlCol="0" anchor="t"/>
+          <a:lstStyle/>
+          <a:p>
+            <a:pPr indent="0" marL="0">
+              <a:buNone/>
+            </a:pPr>
+            <a:r>
+              <a:rPr lang="en-US" sz="2800" b="1" dirty="0">
+                <a:solidFill>
+                  <a:srgbClr val="2B2318"/>
+                </a:solidFill>
+                <a:latin typeface="Cambria" pitchFamily="34" charset="0"/>
+                <a:ea typeface="Cambria" pitchFamily="34" charset="-122"/>
+                <a:cs typeface="Cambria" pitchFamily="34" charset="-120"/>
+              </a:rPr>
               <a:t>Mögliche Lösung</a:t>
             </a:r>
             <a:endParaRPr lang="en-US" sz="2800" dirty="0"/>
@@ -17300,7 +17965,7 @@
       </p:sp>
       <p:graphicFrame>
         <p:nvGraphicFramePr>
-          <p:cNvPr id="29" name="Table 0"/>
+          <p:cNvPr id="30" name="Table 0"/>
           <p:cNvGraphicFramePr>
             <a:graphicFrameLocks noGrp="1"/>
           </p:cNvGraphicFramePr>
@@ -19074,929 +19739,6 @@
                 <a:ea typeface="Calibri" pitchFamily="34" charset="-122"/>
                 <a:cs typeface="Calibri" pitchFamily="34" charset="-120"/>
               </a:rPr>
-              <a:t>28</a:t>
-            </a:r>
-            <a:endParaRPr lang="en-US" sz="900" dirty="0"/>
-          </a:p>
-        </p:txBody>
-      </p:sp>
-    </p:spTree>
-  </p:cSld>
-  <p:clrMapOvr>
-    <a:masterClrMapping/>
-  </p:clrMapOvr>
-</p:sld>
-</file>
-
-<file path=ppt/slides/slide29.xml><?xml version="1.0" encoding="utf-8"?>
-<p:sld xmlns:a="http://schemas.openxmlformats.org/drawingml/2006/main" xmlns:r="http://schemas.openxmlformats.org/officeDocument/2006/relationships" xmlns:p="http://schemas.openxmlformats.org/presentationml/2006/main">
-  <p:cSld name="Slide 29">
-    <p:bg>
-      <p:bgPr>
-        <a:solidFill>
-          <a:srgbClr val="FFFFFF"/>
-        </a:solidFill>
-      </p:bgPr>
-    </p:bg>
-    <p:spTree>
-      <p:nvGrpSpPr>
-        <p:cNvPr id="1" name=""/>
-        <p:cNvGrpSpPr/>
-        <p:nvPr/>
-      </p:nvGrpSpPr>
-      <p:grpSpPr>
-        <a:xfrm>
-          <a:off x="0" y="0"/>
-          <a:ext cx="0" cy="0"/>
-          <a:chOff x="0" y="0"/>
-          <a:chExt cx="0" cy="0"/>
-        </a:xfrm>
-      </p:grpSpPr>
-      <p:sp>
-        <p:nvSpPr>
-          <p:cNvPr id="2" name="Text 0"/>
-          <p:cNvSpPr txBox="1"/>
-          <p:nvPr/>
-        </p:nvSpPr>
-        <p:spPr>
-          <a:xfrm>
-            <a:off x="457200" y="320040"/>
-            <a:ext cx="8229600" cy="228600"/>
-          </a:xfrm>
-          <a:prstGeom prst="rect">
-            <a:avLst/>
-          </a:prstGeom>
-          <a:noFill/>
-          <a:ln/>
-        </p:spPr>
-        <p:txBody>
-          <a:bodyPr wrap="square" lIns="0" tIns="0" rIns="0" bIns="0" rtlCol="0" anchor="t"/>
-          <a:lstStyle/>
-          <a:p>
-            <a:pPr indent="0" marL="0">
-              <a:buNone/>
-            </a:pPr>
-            <a:r>
-              <a:rPr lang="en-US" sz="1100" b="1" spc="200" kern="0" dirty="0">
-                <a:solidFill>
-                  <a:srgbClr val="AD4426"/>
-                </a:solidFill>
-                <a:latin typeface="Calibri" pitchFamily="34" charset="0"/>
-                <a:ea typeface="Calibri" pitchFamily="34" charset="-122"/>
-                <a:cs typeface="Calibri" pitchFamily="34" charset="-120"/>
-              </a:rPr>
-              <a:t>EINZELARBEIT · HEFT</a:t>
-            </a:r>
-            <a:endParaRPr lang="en-US" sz="1100" dirty="0"/>
-          </a:p>
-        </p:txBody>
-      </p:sp>
-      <p:sp>
-        <p:nvSpPr>
-          <p:cNvPr id="3" name="Text 1"/>
-          <p:cNvSpPr txBox="1"/>
-          <p:nvPr/>
-        </p:nvSpPr>
-        <p:spPr>
-          <a:xfrm>
-            <a:off x="457200" y="548640"/>
-            <a:ext cx="8229600" cy="594360"/>
-          </a:xfrm>
-          <a:prstGeom prst="rect">
-            <a:avLst/>
-          </a:prstGeom>
-          <a:noFill/>
-          <a:ln/>
-        </p:spPr>
-        <p:txBody>
-          <a:bodyPr wrap="square" lIns="0" tIns="0" rIns="0" bIns="0" rtlCol="0" anchor="t"/>
-          <a:lstStyle/>
-          <a:p>
-            <a:pPr indent="0" marL="0">
-              <a:buNone/>
-            </a:pPr>
-            <a:r>
-              <a:rPr lang="en-US" sz="2800" b="1" dirty="0">
-                <a:solidFill>
-                  <a:srgbClr val="2B2318"/>
-                </a:solidFill>
-                <a:latin typeface="Cambria" pitchFamily="34" charset="0"/>
-                <a:ea typeface="Cambria" pitchFamily="34" charset="-122"/>
-                <a:cs typeface="Cambria" pitchFamily="34" charset="-120"/>
-              </a:rPr>
-              <a:t>Schriftliche Beurteilung</a:t>
-            </a:r>
-            <a:endParaRPr lang="en-US" sz="2800" dirty="0"/>
-          </a:p>
-        </p:txBody>
-      </p:sp>
-      <p:sp>
-        <p:nvSpPr>
-          <p:cNvPr id="4" name="Text 2"/>
-          <p:cNvSpPr txBox="1"/>
-          <p:nvPr/>
-        </p:nvSpPr>
-        <p:spPr>
-          <a:xfrm>
-            <a:off x="7315200" y="347472"/>
-            <a:ext cx="1371600" cy="292608"/>
-          </a:xfrm>
-          <a:prstGeom prst="roundRect">
-            <a:avLst>
-              <a:gd name="adj" fmla="val 31250"/>
-            </a:avLst>
-          </a:prstGeom>
-          <a:solidFill>
-            <a:srgbClr val="2B2318"/>
-          </a:solidFill>
-          <a:ln/>
-        </p:spPr>
-        <p:txBody>
-          <a:bodyPr wrap="square" lIns="25400" tIns="25400" rIns="25400" bIns="25400" rtlCol="0" anchor="ctr"/>
-          <a:lstStyle/>
-          <a:p>
-            <a:pPr algn="ctr" indent="0" marL="0">
-              <a:buNone/>
-            </a:pPr>
-            <a:r>
-              <a:rPr lang="en-US" sz="1100" b="1" dirty="0">
-                <a:solidFill>
-                  <a:srgbClr val="FFFFFF"/>
-                </a:solidFill>
-                <a:latin typeface="Calibri" pitchFamily="34" charset="0"/>
-                <a:ea typeface="Calibri" pitchFamily="34" charset="-122"/>
-                <a:cs typeface="Calibri" pitchFamily="34" charset="-120"/>
-              </a:rPr>
-              <a:t>17 Min.</a:t>
-            </a:r>
-            <a:endParaRPr lang="en-US" sz="1100" dirty="0"/>
-          </a:p>
-        </p:txBody>
-      </p:sp>
-      <p:sp>
-        <p:nvSpPr>
-          <p:cNvPr id="5" name="Shape 3"/>
-          <p:cNvSpPr/>
-          <p:nvPr/>
-        </p:nvSpPr>
-        <p:spPr>
-          <a:xfrm>
-            <a:off x="457200" y="1280160"/>
-            <a:ext cx="8229600" cy="868680"/>
-          </a:xfrm>
-          <a:prstGeom prst="roundRect">
-            <a:avLst>
-              <a:gd name="adj" fmla="val 8421"/>
-            </a:avLst>
-          </a:prstGeom>
-          <a:solidFill>
-            <a:srgbClr val="2B2318"/>
-          </a:solidFill>
-          <a:ln w="12700">
-            <a:solidFill>
-              <a:srgbClr val="2B2318"/>
-            </a:solidFill>
-            <a:prstDash val="solid"/>
-          </a:ln>
-        </p:spPr>
-      </p:sp>
-      <p:sp>
-        <p:nvSpPr>
-          <p:cNvPr id="6" name="Text 4"/>
-          <p:cNvSpPr txBox="1"/>
-          <p:nvPr/>
-        </p:nvSpPr>
-        <p:spPr>
-          <a:xfrm>
-            <a:off x="731520" y="1325880"/>
-            <a:ext cx="7680960" cy="777240"/>
-          </a:xfrm>
-          <a:prstGeom prst="rect">
-            <a:avLst/>
-          </a:prstGeom>
-          <a:noFill/>
-          <a:ln/>
-        </p:spPr>
-        <p:txBody>
-          <a:bodyPr wrap="square" lIns="0" tIns="0" rIns="0" bIns="0" rtlCol="0" anchor="ctr"/>
-          <a:lstStyle/>
-          <a:p>
-            <a:pPr indent="0" marL="0">
-              <a:buNone/>
-            </a:pPr>
-            <a:r>
-              <a:rPr lang="en-US" sz="2000" b="1" dirty="0">
-                <a:solidFill>
-                  <a:srgbClr val="FFFFFF"/>
-                </a:solidFill>
-                <a:latin typeface="Cambria" pitchFamily="34" charset="0"/>
-                <a:ea typeface="Cambria" pitchFamily="34" charset="-122"/>
-                <a:cs typeface="Cambria" pitchFamily="34" charset="-120"/>
-              </a:rPr>
-              <a:t>Beurteile, inwieweit es Drakon und Solon gelang, die Krise Athens zu lösen.</a:t>
-            </a:r>
-            <a:endParaRPr lang="en-US" sz="2000" dirty="0"/>
-          </a:p>
-        </p:txBody>
-      </p:sp>
-      <p:sp>
-        <p:nvSpPr>
-          <p:cNvPr id="7" name="Text 5"/>
-          <p:cNvSpPr txBox="1"/>
-          <p:nvPr/>
-        </p:nvSpPr>
-        <p:spPr>
-          <a:xfrm>
-            <a:off x="457200" y="2331720"/>
-            <a:ext cx="1554480" cy="822960"/>
-          </a:xfrm>
-          <a:prstGeom prst="roundRect">
-            <a:avLst>
-              <a:gd name="adj" fmla="val 8889"/>
-            </a:avLst>
-          </a:prstGeom>
-          <a:solidFill>
-            <a:srgbClr val="D9A441"/>
-          </a:solidFill>
-          <a:ln/>
-        </p:spPr>
-        <p:txBody>
-          <a:bodyPr wrap="square" lIns="0" tIns="0" rIns="0" bIns="0" rtlCol="0" anchor="ctr"/>
-          <a:lstStyle/>
-          <a:p>
-            <a:pPr algn="ctr" indent="0" marL="0">
-              <a:buNone/>
-            </a:pPr>
-            <a:r>
-              <a:rPr lang="en-US" sz="1500" b="1" dirty="0">
-                <a:solidFill>
-                  <a:srgbClr val="2B2318"/>
-                </a:solidFill>
-                <a:latin typeface="Calibri" pitchFamily="34" charset="0"/>
-                <a:ea typeface="Calibri" pitchFamily="34" charset="-122"/>
-                <a:cs typeface="Calibri" pitchFamily="34" charset="-120"/>
-              </a:rPr>
-              <a:t>Sachurteil</a:t>
-            </a:r>
-            <a:endParaRPr lang="en-US" sz="1500" dirty="0"/>
-          </a:p>
-        </p:txBody>
-      </p:sp>
-      <p:sp>
-        <p:nvSpPr>
-          <p:cNvPr id="8" name="Shape 6"/>
-          <p:cNvSpPr/>
-          <p:nvPr/>
-        </p:nvSpPr>
-        <p:spPr>
-          <a:xfrm>
-            <a:off x="2103120" y="2331720"/>
-            <a:ext cx="3383280" cy="822960"/>
-          </a:xfrm>
-          <a:prstGeom prst="roundRect">
-            <a:avLst>
-              <a:gd name="adj" fmla="val 8889"/>
-            </a:avLst>
-          </a:prstGeom>
-          <a:solidFill>
-            <a:srgbClr val="F4ECDE"/>
-          </a:solidFill>
-          <a:ln w="12700">
-            <a:solidFill>
-              <a:srgbClr val="F4ECDE"/>
-            </a:solidFill>
-            <a:prstDash val="solid"/>
-          </a:ln>
-        </p:spPr>
-      </p:sp>
-      <p:sp>
-        <p:nvSpPr>
-          <p:cNvPr id="9" name="Text 7"/>
-          <p:cNvSpPr txBox="1"/>
-          <p:nvPr/>
-        </p:nvSpPr>
-        <p:spPr>
-          <a:xfrm>
-            <a:off x="2240280" y="2404872"/>
-            <a:ext cx="3154680" cy="228600"/>
-          </a:xfrm>
-          <a:prstGeom prst="rect">
-            <a:avLst/>
-          </a:prstGeom>
-          <a:noFill/>
-          <a:ln/>
-        </p:spPr>
-        <p:txBody>
-          <a:bodyPr wrap="square" lIns="0" tIns="0" rIns="0" bIns="0" rtlCol="0" anchor="t"/>
-          <a:lstStyle/>
-          <a:p>
-            <a:pPr indent="0" marL="0">
-              <a:buNone/>
-            </a:pPr>
-            <a:r>
-              <a:rPr lang="en-US" sz="1100" b="1" dirty="0">
-                <a:solidFill>
-                  <a:srgbClr val="5A5044"/>
-                </a:solidFill>
-                <a:latin typeface="Calibri" pitchFamily="34" charset="0"/>
-                <a:ea typeface="Calibri" pitchFamily="34" charset="-122"/>
-                <a:cs typeface="Calibri" pitchFamily="34" charset="-120"/>
-              </a:rPr>
-              <a:t>3–4 Sätze, gestützt auf eure Tabelle</a:t>
-            </a:r>
-            <a:endParaRPr lang="en-US" sz="1100" dirty="0"/>
-          </a:p>
-        </p:txBody>
-      </p:sp>
-      <p:sp>
-        <p:nvSpPr>
-          <p:cNvPr id="10" name="Text 8"/>
-          <p:cNvSpPr txBox="1"/>
-          <p:nvPr/>
-        </p:nvSpPr>
-        <p:spPr>
-          <a:xfrm>
-            <a:off x="2240280" y="2624328"/>
-            <a:ext cx="3154680" cy="512064"/>
-          </a:xfrm>
-          <a:prstGeom prst="rect">
-            <a:avLst/>
-          </a:prstGeom>
-          <a:noFill/>
-          <a:ln/>
-        </p:spPr>
-        <p:txBody>
-          <a:bodyPr wrap="square" lIns="0" tIns="0" rIns="0" bIns="0" rtlCol="0" anchor="t"/>
-          <a:lstStyle/>
-          <a:p>
-            <a:pPr indent="0" marL="0">
-              <a:buNone/>
-            </a:pPr>
-            <a:r>
-              <a:rPr lang="en-US" sz="1100" i="1" dirty="0">
-                <a:solidFill>
-                  <a:srgbClr val="2B2318"/>
-                </a:solidFill>
-                <a:latin typeface="Calibri" pitchFamily="34" charset="0"/>
-                <a:ea typeface="Calibri" pitchFamily="34" charset="-122"/>
-                <a:cs typeface="Calibri" pitchFamily="34" charset="-120"/>
-              </a:rPr>
-              <a:t>„Aus Sicht der damaligen Zeit gelang es Solon weitgehend / nur teilweise …, da …“</a:t>
-            </a:r>
-            <a:endParaRPr lang="en-US" sz="1100" dirty="0"/>
-          </a:p>
-        </p:txBody>
-      </p:sp>
-      <p:sp>
-        <p:nvSpPr>
-          <p:cNvPr id="11" name="Text 9"/>
-          <p:cNvSpPr txBox="1"/>
-          <p:nvPr/>
-        </p:nvSpPr>
-        <p:spPr>
-          <a:xfrm>
-            <a:off x="457200" y="3319272"/>
-            <a:ext cx="1554480" cy="822960"/>
-          </a:xfrm>
-          <a:prstGeom prst="roundRect">
-            <a:avLst>
-              <a:gd name="adj" fmla="val 8889"/>
-            </a:avLst>
-          </a:prstGeom>
-          <a:solidFill>
-            <a:srgbClr val="AD4426"/>
-          </a:solidFill>
-          <a:ln/>
-        </p:spPr>
-        <p:txBody>
-          <a:bodyPr wrap="square" lIns="0" tIns="0" rIns="0" bIns="0" rtlCol="0" anchor="ctr"/>
-          <a:lstStyle/>
-          <a:p>
-            <a:pPr algn="ctr" indent="0" marL="0">
-              <a:buNone/>
-            </a:pPr>
-            <a:r>
-              <a:rPr lang="en-US" sz="1500" b="1" dirty="0">
-                <a:solidFill>
-                  <a:srgbClr val="FFFFFF"/>
-                </a:solidFill>
-                <a:latin typeface="Calibri" pitchFamily="34" charset="0"/>
-                <a:ea typeface="Calibri" pitchFamily="34" charset="-122"/>
-                <a:cs typeface="Calibri" pitchFamily="34" charset="-120"/>
-              </a:rPr>
-              <a:t>Werturteil</a:t>
-            </a:r>
-            <a:endParaRPr lang="en-US" sz="1500" dirty="0"/>
-          </a:p>
-        </p:txBody>
-      </p:sp>
-      <p:sp>
-        <p:nvSpPr>
-          <p:cNvPr id="12" name="Shape 10"/>
-          <p:cNvSpPr/>
-          <p:nvPr/>
-        </p:nvSpPr>
-        <p:spPr>
-          <a:xfrm>
-            <a:off x="2103120" y="3319272"/>
-            <a:ext cx="3383280" cy="822960"/>
-          </a:xfrm>
-          <a:prstGeom prst="roundRect">
-            <a:avLst>
-              <a:gd name="adj" fmla="val 8889"/>
-            </a:avLst>
-          </a:prstGeom>
-          <a:solidFill>
-            <a:srgbClr val="F4ECDE"/>
-          </a:solidFill>
-          <a:ln w="12700">
-            <a:solidFill>
-              <a:srgbClr val="F4ECDE"/>
-            </a:solidFill>
-            <a:prstDash val="solid"/>
-          </a:ln>
-        </p:spPr>
-      </p:sp>
-      <p:sp>
-        <p:nvSpPr>
-          <p:cNvPr id="13" name="Text 11"/>
-          <p:cNvSpPr txBox="1"/>
-          <p:nvPr/>
-        </p:nvSpPr>
-        <p:spPr>
-          <a:xfrm>
-            <a:off x="2240280" y="3392424"/>
-            <a:ext cx="3154680" cy="228600"/>
-          </a:xfrm>
-          <a:prstGeom prst="rect">
-            <a:avLst/>
-          </a:prstGeom>
-          <a:noFill/>
-          <a:ln/>
-        </p:spPr>
-        <p:txBody>
-          <a:bodyPr wrap="square" lIns="0" tIns="0" rIns="0" bIns="0" rtlCol="0" anchor="t"/>
-          <a:lstStyle/>
-          <a:p>
-            <a:pPr indent="0" marL="0">
-              <a:buNone/>
-            </a:pPr>
-            <a:r>
-              <a:rPr lang="en-US" sz="1100" b="1" dirty="0">
-                <a:solidFill>
-                  <a:srgbClr val="5A5044"/>
-                </a:solidFill>
-                <a:latin typeface="Calibri" pitchFamily="34" charset="0"/>
-                <a:ea typeface="Calibri" pitchFamily="34" charset="-122"/>
-                <a:cs typeface="Calibri" pitchFamily="34" charset="-120"/>
-              </a:rPr>
-              <a:t>2–3 Sätze</a:t>
-            </a:r>
-            <a:endParaRPr lang="en-US" sz="1100" dirty="0"/>
-          </a:p>
-        </p:txBody>
-      </p:sp>
-      <p:sp>
-        <p:nvSpPr>
-          <p:cNvPr id="14" name="Text 12"/>
-          <p:cNvSpPr txBox="1"/>
-          <p:nvPr/>
-        </p:nvSpPr>
-        <p:spPr>
-          <a:xfrm>
-            <a:off x="2240280" y="3611880"/>
-            <a:ext cx="3154680" cy="512064"/>
-          </a:xfrm>
-          <a:prstGeom prst="rect">
-            <a:avLst/>
-          </a:prstGeom>
-          <a:noFill/>
-          <a:ln/>
-        </p:spPr>
-        <p:txBody>
-          <a:bodyPr wrap="square" lIns="0" tIns="0" rIns="0" bIns="0" rtlCol="0" anchor="t"/>
-          <a:lstStyle/>
-          <a:p>
-            <a:pPr indent="0" marL="0">
-              <a:buNone/>
-            </a:pPr>
-            <a:r>
-              <a:rPr lang="en-US" sz="1100" i="1" dirty="0">
-                <a:solidFill>
-                  <a:srgbClr val="2B2318"/>
-                </a:solidFill>
-                <a:latin typeface="Calibri" pitchFamily="34" charset="0"/>
-                <a:ea typeface="Calibri" pitchFamily="34" charset="-122"/>
-                <a:cs typeface="Calibri" pitchFamily="34" charset="-120"/>
-              </a:rPr>
-              <a:t>„Gemessen an … halte ich …, weil …“</a:t>
-            </a:r>
-            <a:endParaRPr lang="en-US" sz="1100" dirty="0"/>
-          </a:p>
-        </p:txBody>
-      </p:sp>
-      <p:sp>
-        <p:nvSpPr>
-          <p:cNvPr id="15" name="Shape 13"/>
-          <p:cNvSpPr/>
-          <p:nvPr/>
-        </p:nvSpPr>
-        <p:spPr>
-          <a:xfrm>
-            <a:off x="5669280" y="2331720"/>
-            <a:ext cx="3017520" cy="1810512"/>
-          </a:xfrm>
-          <a:prstGeom prst="roundRect">
-            <a:avLst>
-              <a:gd name="adj" fmla="val 4040"/>
-            </a:avLst>
-          </a:prstGeom>
-          <a:solidFill>
-            <a:srgbClr val="FBF8F2"/>
-          </a:solidFill>
-          <a:ln w="19050">
-            <a:solidFill>
-              <a:srgbClr val="D9A441"/>
-            </a:solidFill>
-            <a:prstDash val="solid"/>
-          </a:ln>
-        </p:spPr>
-      </p:sp>
-      <p:sp>
-        <p:nvSpPr>
-          <p:cNvPr id="16" name="Text 14"/>
-          <p:cNvSpPr txBox="1"/>
-          <p:nvPr/>
-        </p:nvSpPr>
-        <p:spPr>
-          <a:xfrm>
-            <a:off x="5852160" y="2404872"/>
-            <a:ext cx="2651760" cy="274320"/>
-          </a:xfrm>
-          <a:prstGeom prst="rect">
-            <a:avLst/>
-          </a:prstGeom>
-          <a:noFill/>
-          <a:ln/>
-        </p:spPr>
-        <p:txBody>
-          <a:bodyPr wrap="square" lIns="0" tIns="0" rIns="0" bIns="0" rtlCol="0" anchor="t"/>
-          <a:lstStyle/>
-          <a:p>
-            <a:pPr indent="0" marL="0">
-              <a:buNone/>
-            </a:pPr>
-            <a:r>
-              <a:rPr lang="en-US" sz="1400" b="1" dirty="0">
-                <a:solidFill>
-                  <a:srgbClr val="AD4426"/>
-                </a:solidFill>
-                <a:latin typeface="Cambria" pitchFamily="34" charset="0"/>
-                <a:ea typeface="Cambria" pitchFamily="34" charset="-122"/>
-                <a:cs typeface="Cambria" pitchFamily="34" charset="-120"/>
-              </a:rPr>
-              <a:t>Partnercheck</a:t>
-            </a:r>
-            <a:endParaRPr lang="en-US" sz="1400" dirty="0"/>
-          </a:p>
-        </p:txBody>
-      </p:sp>
-      <p:sp>
-        <p:nvSpPr>
-          <p:cNvPr id="17" name="Shape 15"/>
-          <p:cNvSpPr/>
-          <p:nvPr/>
-        </p:nvSpPr>
-        <p:spPr>
-          <a:xfrm>
-            <a:off x="5852160" y="2779776"/>
-            <a:ext cx="201168" cy="201168"/>
-          </a:xfrm>
-          <a:prstGeom prst="roundRect">
-            <a:avLst>
-              <a:gd name="adj" fmla="val 18182"/>
-            </a:avLst>
-          </a:prstGeom>
-          <a:solidFill>
-            <a:srgbClr val="FFFFFF"/>
-          </a:solidFill>
-          <a:ln w="19050">
-            <a:solidFill>
-              <a:srgbClr val="D9A441"/>
-            </a:solidFill>
-            <a:prstDash val="solid"/>
-          </a:ln>
-        </p:spPr>
-      </p:sp>
-      <p:sp>
-        <p:nvSpPr>
-          <p:cNvPr id="18" name="Text 16"/>
-          <p:cNvSpPr txBox="1"/>
-          <p:nvPr/>
-        </p:nvSpPr>
-        <p:spPr>
-          <a:xfrm>
-            <a:off x="6144768" y="2743200"/>
-            <a:ext cx="2468880" cy="274320"/>
-          </a:xfrm>
-          <a:prstGeom prst="rect">
-            <a:avLst/>
-          </a:prstGeom>
-          <a:noFill/>
-          <a:ln/>
-        </p:spPr>
-        <p:txBody>
-          <a:bodyPr wrap="square" lIns="0" tIns="0" rIns="0" bIns="0" rtlCol="0" anchor="ctr"/>
-          <a:lstStyle/>
-          <a:p>
-            <a:pPr indent="0" marL="0">
-              <a:buNone/>
-            </a:pPr>
-            <a:r>
-              <a:rPr lang="en-US" sz="1200" dirty="0">
-                <a:solidFill>
-                  <a:srgbClr val="2B2318"/>
-                </a:solidFill>
-                <a:latin typeface="Calibri" pitchFamily="34" charset="0"/>
-                <a:ea typeface="Calibri" pitchFamily="34" charset="-122"/>
-                <a:cs typeface="Calibri" pitchFamily="34" charset="-120"/>
-              </a:rPr>
-              <a:t>Sachurteil: Maßstäbe der Zeit</a:t>
-            </a:r>
-            <a:endParaRPr lang="en-US" sz="1200" dirty="0"/>
-          </a:p>
-        </p:txBody>
-      </p:sp>
-      <p:sp>
-        <p:nvSpPr>
-          <p:cNvPr id="19" name="Shape 17"/>
-          <p:cNvSpPr/>
-          <p:nvPr/>
-        </p:nvSpPr>
-        <p:spPr>
-          <a:xfrm>
-            <a:off x="5852160" y="3118104"/>
-            <a:ext cx="201168" cy="201168"/>
-          </a:xfrm>
-          <a:prstGeom prst="roundRect">
-            <a:avLst>
-              <a:gd name="adj" fmla="val 18182"/>
-            </a:avLst>
-          </a:prstGeom>
-          <a:solidFill>
-            <a:srgbClr val="FFFFFF"/>
-          </a:solidFill>
-          <a:ln w="19050">
-            <a:solidFill>
-              <a:srgbClr val="D9A441"/>
-            </a:solidFill>
-            <a:prstDash val="solid"/>
-          </a:ln>
-        </p:spPr>
-      </p:sp>
-      <p:sp>
-        <p:nvSpPr>
-          <p:cNvPr id="20" name="Text 18"/>
-          <p:cNvSpPr txBox="1"/>
-          <p:nvPr/>
-        </p:nvSpPr>
-        <p:spPr>
-          <a:xfrm>
-            <a:off x="6144768" y="3081528"/>
-            <a:ext cx="2468880" cy="274320"/>
-          </a:xfrm>
-          <a:prstGeom prst="rect">
-            <a:avLst/>
-          </a:prstGeom>
-          <a:noFill/>
-          <a:ln/>
-        </p:spPr>
-        <p:txBody>
-          <a:bodyPr wrap="square" lIns="0" tIns="0" rIns="0" bIns="0" rtlCol="0" anchor="ctr"/>
-          <a:lstStyle/>
-          <a:p>
-            <a:pPr indent="0" marL="0">
-              <a:buNone/>
-            </a:pPr>
-            <a:r>
-              <a:rPr lang="en-US" sz="1200" dirty="0">
-                <a:solidFill>
-                  <a:srgbClr val="2B2318"/>
-                </a:solidFill>
-                <a:latin typeface="Calibri" pitchFamily="34" charset="0"/>
-                <a:ea typeface="Calibri" pitchFamily="34" charset="-122"/>
-                <a:cs typeface="Calibri" pitchFamily="34" charset="-120"/>
-              </a:rPr>
-              <a:t>Sachurteil: mit Belegen</a:t>
-            </a:r>
-            <a:endParaRPr lang="en-US" sz="1200" dirty="0"/>
-          </a:p>
-        </p:txBody>
-      </p:sp>
-      <p:sp>
-        <p:nvSpPr>
-          <p:cNvPr id="21" name="Shape 19"/>
-          <p:cNvSpPr/>
-          <p:nvPr/>
-        </p:nvSpPr>
-        <p:spPr>
-          <a:xfrm>
-            <a:off x="5852160" y="3456432"/>
-            <a:ext cx="201168" cy="201168"/>
-          </a:xfrm>
-          <a:prstGeom prst="roundRect">
-            <a:avLst>
-              <a:gd name="adj" fmla="val 18182"/>
-            </a:avLst>
-          </a:prstGeom>
-          <a:solidFill>
-            <a:srgbClr val="FFFFFF"/>
-          </a:solidFill>
-          <a:ln w="19050">
-            <a:solidFill>
-              <a:srgbClr val="D9A441"/>
-            </a:solidFill>
-            <a:prstDash val="solid"/>
-          </a:ln>
-        </p:spPr>
-      </p:sp>
-      <p:sp>
-        <p:nvSpPr>
-          <p:cNvPr id="22" name="Text 20"/>
-          <p:cNvSpPr txBox="1"/>
-          <p:nvPr/>
-        </p:nvSpPr>
-        <p:spPr>
-          <a:xfrm>
-            <a:off x="6144768" y="3419856"/>
-            <a:ext cx="2468880" cy="274320"/>
-          </a:xfrm>
-          <a:prstGeom prst="rect">
-            <a:avLst/>
-          </a:prstGeom>
-          <a:noFill/>
-          <a:ln/>
-        </p:spPr>
-        <p:txBody>
-          <a:bodyPr wrap="square" lIns="0" tIns="0" rIns="0" bIns="0" rtlCol="0" anchor="ctr"/>
-          <a:lstStyle/>
-          <a:p>
-            <a:pPr indent="0" marL="0">
-              <a:buNone/>
-            </a:pPr>
-            <a:r>
-              <a:rPr lang="en-US" sz="1200" dirty="0">
-                <a:solidFill>
-                  <a:srgbClr val="2B2318"/>
-                </a:solidFill>
-                <a:latin typeface="Calibri" pitchFamily="34" charset="0"/>
-                <a:ea typeface="Calibri" pitchFamily="34" charset="-122"/>
-                <a:cs typeface="Calibri" pitchFamily="34" charset="-120"/>
-              </a:rPr>
-              <a:t>Werturteil: Maßstab genannt</a:t>
-            </a:r>
-            <a:endParaRPr lang="en-US" sz="1200" dirty="0"/>
-          </a:p>
-        </p:txBody>
-      </p:sp>
-      <p:sp>
-        <p:nvSpPr>
-          <p:cNvPr id="23" name="Shape 21"/>
-          <p:cNvSpPr/>
-          <p:nvPr/>
-        </p:nvSpPr>
-        <p:spPr>
-          <a:xfrm>
-            <a:off x="5852160" y="3794760"/>
-            <a:ext cx="201168" cy="201168"/>
-          </a:xfrm>
-          <a:prstGeom prst="roundRect">
-            <a:avLst>
-              <a:gd name="adj" fmla="val 18182"/>
-            </a:avLst>
-          </a:prstGeom>
-          <a:solidFill>
-            <a:srgbClr val="FFFFFF"/>
-          </a:solidFill>
-          <a:ln w="19050">
-            <a:solidFill>
-              <a:srgbClr val="D9A441"/>
-            </a:solidFill>
-            <a:prstDash val="solid"/>
-          </a:ln>
-        </p:spPr>
-      </p:sp>
-      <p:sp>
-        <p:nvSpPr>
-          <p:cNvPr id="24" name="Text 22"/>
-          <p:cNvSpPr txBox="1"/>
-          <p:nvPr/>
-        </p:nvSpPr>
-        <p:spPr>
-          <a:xfrm>
-            <a:off x="6144768" y="3758184"/>
-            <a:ext cx="2468880" cy="274320"/>
-          </a:xfrm>
-          <a:prstGeom prst="rect">
-            <a:avLst/>
-          </a:prstGeom>
-          <a:noFill/>
-          <a:ln/>
-        </p:spPr>
-        <p:txBody>
-          <a:bodyPr wrap="square" lIns="0" tIns="0" rIns="0" bIns="0" rtlCol="0" anchor="ctr"/>
-          <a:lstStyle/>
-          <a:p>
-            <a:pPr indent="0" marL="0">
-              <a:buNone/>
-            </a:pPr>
-            <a:r>
-              <a:rPr lang="en-US" sz="1200" dirty="0">
-                <a:solidFill>
-                  <a:srgbClr val="2B2318"/>
-                </a:solidFill>
-                <a:latin typeface="Calibri" pitchFamily="34" charset="0"/>
-                <a:ea typeface="Calibri" pitchFamily="34" charset="-122"/>
-                <a:cs typeface="Calibri" pitchFamily="34" charset="-120"/>
-              </a:rPr>
-              <a:t>Werturteil: begründet</a:t>
-            </a:r>
-            <a:endParaRPr lang="en-US" sz="1200" dirty="0"/>
-          </a:p>
-        </p:txBody>
-      </p:sp>
-      <p:sp>
-        <p:nvSpPr>
-          <p:cNvPr id="25" name="Text 23"/>
-          <p:cNvSpPr txBox="1"/>
-          <p:nvPr/>
-        </p:nvSpPr>
-        <p:spPr>
-          <a:xfrm>
-            <a:off x="457200" y="4754880"/>
-            <a:ext cx="4572000" cy="182880"/>
-          </a:xfrm>
-          <a:prstGeom prst="rect">
-            <a:avLst/>
-          </a:prstGeom>
-          <a:noFill/>
-          <a:ln/>
-        </p:spPr>
-        <p:txBody>
-          <a:bodyPr wrap="square" lIns="0" tIns="0" rIns="0" bIns="0" rtlCol="0" anchor="t"/>
-          <a:lstStyle/>
-          <a:p>
-            <a:pPr indent="0" marL="0">
-              <a:buNone/>
-            </a:pPr>
-            <a:r>
-              <a:rPr lang="en-US" sz="900" dirty="0">
-                <a:solidFill>
-                  <a:srgbClr val="998C77"/>
-                </a:solidFill>
-                <a:latin typeface="Calibri" pitchFamily="34" charset="0"/>
-                <a:ea typeface="Calibri" pitchFamily="34" charset="-122"/>
-                <a:cs typeface="Calibri" pitchFamily="34" charset="-120"/>
-              </a:rPr>
-              <a:t>Von der Polis zur Krise</a:t>
-            </a:r>
-            <a:endParaRPr lang="en-US" sz="900" dirty="0"/>
-          </a:p>
-        </p:txBody>
-      </p:sp>
-      <p:sp>
-        <p:nvSpPr>
-          <p:cNvPr id="26" name="Text 24"/>
-          <p:cNvSpPr txBox="1"/>
-          <p:nvPr/>
-        </p:nvSpPr>
-        <p:spPr>
-          <a:xfrm>
-            <a:off x="8229600" y="4754880"/>
-            <a:ext cx="457200" cy="182880"/>
-          </a:xfrm>
-          <a:prstGeom prst="rect">
-            <a:avLst/>
-          </a:prstGeom>
-          <a:noFill/>
-          <a:ln/>
-        </p:spPr>
-        <p:txBody>
-          <a:bodyPr wrap="square" lIns="0" tIns="0" rIns="0" bIns="0" rtlCol="0" anchor="t"/>
-          <a:lstStyle/>
-          <a:p>
-            <a:pPr algn="r" indent="0" marL="0">
-              <a:buNone/>
-            </a:pPr>
-            <a:r>
-              <a:rPr lang="en-US" sz="900" dirty="0">
-                <a:solidFill>
-                  <a:srgbClr val="998C77"/>
-                </a:solidFill>
-                <a:latin typeface="Calibri" pitchFamily="34" charset="0"/>
-                <a:ea typeface="Calibri" pitchFamily="34" charset="-122"/>
-                <a:cs typeface="Calibri" pitchFamily="34" charset="-120"/>
-              </a:rPr>
               <a:t>29</a:t>
             </a:r>
             <a:endParaRPr lang="en-US" sz="900" dirty="0"/>
@@ -20523,7 +20265,7 @@
                 <a:ea typeface="Calibri" pitchFamily="34" charset="-122"/>
                 <a:cs typeface="Calibri" pitchFamily="34" charset="-120"/>
               </a:rPr>
-              <a:t>PLENUM · TAFEL</a:t>
+              <a:t>EINZELARBEIT · HEFT</a:t>
             </a:r>
             <a:endParaRPr lang="en-US" sz="1100" dirty="0"/>
           </a:p>
@@ -20562,7 +20304,7 @@
                 <a:ea typeface="Cambria" pitchFamily="34" charset="-122"/>
                 <a:cs typeface="Cambria" pitchFamily="34" charset="-120"/>
               </a:rPr>
-              <a:t>Wer gewinnt, wer verliert?</a:t>
+              <a:t>Schriftliche Beurteilung</a:t>
             </a:r>
             <a:endParaRPr lang="en-US" sz="2800" dirty="0"/>
           </a:p>
@@ -20605,7 +20347,7 @@
                 <a:ea typeface="Calibri" pitchFamily="34" charset="-122"/>
                 <a:cs typeface="Calibri" pitchFamily="34" charset="-120"/>
               </a:rPr>
-              <a:t>8 Min.</a:t>
+              <a:t>17 Min.</a:t>
             </a:r>
             <a:endParaRPr lang="en-US" sz="1100" dirty="0"/>
           </a:p>
@@ -20613,176 +20355,205 @@
       </p:sp>
       <p:sp>
         <p:nvSpPr>
-          <p:cNvPr id="5" name="Text 3"/>
-          <p:cNvSpPr txBox="1"/>
-          <p:nvPr/>
-        </p:nvSpPr>
-        <p:spPr>
-          <a:xfrm>
-            <a:off x="457200" y="1234440"/>
-            <a:ext cx="8229600" cy="365760"/>
-          </a:xfrm>
-          <a:prstGeom prst="rect">
-            <a:avLst/>
-          </a:prstGeom>
-          <a:noFill/>
-          <a:ln/>
-        </p:spPr>
-        <p:txBody>
-          <a:bodyPr wrap="square" lIns="0" tIns="0" rIns="0" bIns="0" rtlCol="0" anchor="t"/>
-          <a:lstStyle/>
-          <a:p>
-            <a:pPr indent="0" marL="0">
-              <a:buNone/>
-            </a:pPr>
-            <a:r>
-              <a:rPr lang="en-US" sz="1500" dirty="0">
-                <a:solidFill>
-                  <a:srgbClr val="2B2318"/>
-                </a:solidFill>
-                <a:latin typeface="Calibri" pitchFamily="34" charset="0"/>
-                <a:ea typeface="Calibri" pitchFamily="34" charset="-122"/>
-                <a:cs typeface="Calibri" pitchFamily="34" charset="-120"/>
-              </a:rPr>
-              <a:t>Hängt eine Figur an die passende Stelle der Linie und begründet in einem Satz.</a:t>
-            </a:r>
-            <a:endParaRPr lang="en-US" sz="1500" dirty="0"/>
-          </a:p>
-        </p:txBody>
-      </p:sp>
-      <p:sp>
-        <p:nvSpPr>
-          <p:cNvPr id="6" name="Shape 4"/>
+          <p:cNvPr id="5" name="Shape 3"/>
           <p:cNvSpPr/>
           <p:nvPr/>
         </p:nvSpPr>
         <p:spPr>
           <a:xfrm>
-            <a:off x="731520" y="2240280"/>
-            <a:ext cx="7680960" cy="0"/>
-          </a:xfrm>
-          <a:prstGeom prst="line">
-            <a:avLst/>
-          </a:prstGeom>
-          <a:noFill/>
-          <a:ln w="38100">
+            <a:off x="457200" y="1280160"/>
+            <a:ext cx="8229600" cy="868680"/>
+          </a:xfrm>
+          <a:prstGeom prst="roundRect">
+            <a:avLst>
+              <a:gd name="adj" fmla="val 8421"/>
+            </a:avLst>
+          </a:prstGeom>
+          <a:solidFill>
+            <a:srgbClr val="2B2318"/>
+          </a:solidFill>
+          <a:ln w="12700">
             <a:solidFill>
               <a:srgbClr val="2B2318"/>
             </a:solidFill>
             <a:prstDash val="solid"/>
-            <a:headEnd type="triangle"/>
-            <a:tailEnd type="triangle"/>
           </a:ln>
         </p:spPr>
       </p:sp>
       <p:sp>
         <p:nvSpPr>
+          <p:cNvPr id="6" name="Text 4"/>
+          <p:cNvSpPr txBox="1"/>
+          <p:nvPr/>
+        </p:nvSpPr>
+        <p:spPr>
+          <a:xfrm>
+            <a:off x="731520" y="1325880"/>
+            <a:ext cx="7680960" cy="777240"/>
+          </a:xfrm>
+          <a:prstGeom prst="rect">
+            <a:avLst/>
+          </a:prstGeom>
+          <a:noFill/>
+          <a:ln/>
+        </p:spPr>
+        <p:txBody>
+          <a:bodyPr wrap="square" lIns="0" tIns="0" rIns="0" bIns="0" rtlCol="0" anchor="ctr"/>
+          <a:lstStyle/>
+          <a:p>
+            <a:pPr indent="0" marL="0">
+              <a:buNone/>
+            </a:pPr>
+            <a:r>
+              <a:rPr lang="en-US" sz="2000" b="1" dirty="0">
+                <a:solidFill>
+                  <a:srgbClr val="FFFFFF"/>
+                </a:solidFill>
+                <a:latin typeface="Cambria" pitchFamily="34" charset="0"/>
+                <a:ea typeface="Cambria" pitchFamily="34" charset="-122"/>
+                <a:cs typeface="Cambria" pitchFamily="34" charset="-120"/>
+              </a:rPr>
+              <a:t>Beurteile, inwieweit es Drakon und Solon gelang, die Krise Athens zu lösen.</a:t>
+            </a:r>
+            <a:endParaRPr lang="en-US" sz="2000" dirty="0"/>
+          </a:p>
+        </p:txBody>
+      </p:sp>
+      <p:sp>
+        <p:nvSpPr>
           <p:cNvPr id="7" name="Text 5"/>
           <p:cNvSpPr txBox="1"/>
           <p:nvPr/>
         </p:nvSpPr>
         <p:spPr>
           <a:xfrm>
-            <a:off x="457200" y="2377440"/>
-            <a:ext cx="1371600" cy="320040"/>
-          </a:xfrm>
-          <a:prstGeom prst="rect">
-            <a:avLst/>
-          </a:prstGeom>
-          <a:noFill/>
-          <a:ln/>
-        </p:spPr>
-        <p:txBody>
-          <a:bodyPr wrap="square" lIns="0" tIns="0" rIns="0" bIns="0" rtlCol="0" anchor="t"/>
-          <a:lstStyle/>
-          <a:p>
-            <a:pPr indent="0" marL="0">
-              <a:buNone/>
-            </a:pPr>
-            <a:r>
-              <a:rPr lang="en-US" sz="1500" b="1" dirty="0">
-                <a:solidFill>
-                  <a:srgbClr val="AD4426"/>
-                </a:solidFill>
-                <a:latin typeface="Calibri" pitchFamily="34" charset="0"/>
-                <a:ea typeface="Calibri" pitchFamily="34" charset="-122"/>
-                <a:cs typeface="Calibri" pitchFamily="34" charset="-120"/>
-              </a:rPr>
-              <a:t>verliert</a:t>
-            </a:r>
-            <a:endParaRPr lang="en-US" sz="1500" dirty="0"/>
-          </a:p>
-        </p:txBody>
-      </p:sp>
-      <p:sp>
-        <p:nvSpPr>
-          <p:cNvPr id="8" name="Text 6"/>
-          <p:cNvSpPr txBox="1"/>
-          <p:nvPr/>
-        </p:nvSpPr>
-        <p:spPr>
-          <a:xfrm>
-            <a:off x="7315200" y="2377440"/>
-            <a:ext cx="1371600" cy="320040"/>
-          </a:xfrm>
-          <a:prstGeom prst="rect">
-            <a:avLst/>
-          </a:prstGeom>
-          <a:noFill/>
-          <a:ln/>
-        </p:spPr>
-        <p:txBody>
-          <a:bodyPr wrap="square" lIns="0" tIns="0" rIns="0" bIns="0" rtlCol="0" anchor="t"/>
-          <a:lstStyle/>
-          <a:p>
-            <a:pPr algn="r" indent="0" marL="0">
-              <a:buNone/>
-            </a:pPr>
-            <a:r>
-              <a:rPr lang="en-US" sz="1500" b="1" dirty="0">
-                <a:solidFill>
-                  <a:srgbClr val="3C783C"/>
-                </a:solidFill>
-                <a:latin typeface="Calibri" pitchFamily="34" charset="0"/>
-                <a:ea typeface="Calibri" pitchFamily="34" charset="-122"/>
-                <a:cs typeface="Calibri" pitchFamily="34" charset="-120"/>
-              </a:rPr>
-              <a:t>gewinnt</a:t>
-            </a:r>
-            <a:endParaRPr lang="en-US" sz="1500" dirty="0"/>
-          </a:p>
-        </p:txBody>
-      </p:sp>
-      <p:sp>
-        <p:nvSpPr>
-          <p:cNvPr id="9" name="Text 7"/>
-          <p:cNvSpPr txBox="1"/>
-          <p:nvPr/>
-        </p:nvSpPr>
-        <p:spPr>
-          <a:xfrm>
-            <a:off x="457200" y="2926080"/>
-            <a:ext cx="2606040" cy="457200"/>
+            <a:off x="457200" y="2331720"/>
+            <a:ext cx="1554480" cy="822960"/>
           </a:xfrm>
           <a:prstGeom prst="roundRect">
             <a:avLst>
-              <a:gd name="adj" fmla="val 20000"/>
+              <a:gd name="adj" fmla="val 8889"/>
+            </a:avLst>
+          </a:prstGeom>
+          <a:solidFill>
+            <a:srgbClr val="D9A441"/>
+          </a:solidFill>
+          <a:ln/>
+        </p:spPr>
+        <p:txBody>
+          <a:bodyPr wrap="square" lIns="0" tIns="0" rIns="0" bIns="0" rtlCol="0" anchor="ctr"/>
+          <a:lstStyle/>
+          <a:p>
+            <a:pPr algn="ctr" indent="0" marL="0">
+              <a:buNone/>
+            </a:pPr>
+            <a:r>
+              <a:rPr lang="en-US" sz="1500" b="1" dirty="0">
+                <a:solidFill>
+                  <a:srgbClr val="2B2318"/>
+                </a:solidFill>
+                <a:latin typeface="Calibri" pitchFamily="34" charset="0"/>
+                <a:ea typeface="Calibri" pitchFamily="34" charset="-122"/>
+                <a:cs typeface="Calibri" pitchFamily="34" charset="-120"/>
+              </a:rPr>
+              <a:t>Sachurteil</a:t>
+            </a:r>
+            <a:endParaRPr lang="en-US" sz="1500" dirty="0"/>
+          </a:p>
+        </p:txBody>
+      </p:sp>
+      <p:sp>
+        <p:nvSpPr>
+          <p:cNvPr id="8" name="Shape 6"/>
+          <p:cNvSpPr/>
+          <p:nvPr/>
+        </p:nvSpPr>
+        <p:spPr>
+          <a:xfrm>
+            <a:off x="2103120" y="2331720"/>
+            <a:ext cx="3383280" cy="822960"/>
+          </a:xfrm>
+          <a:prstGeom prst="roundRect">
+            <a:avLst>
+              <a:gd name="adj" fmla="val 8889"/>
             </a:avLst>
           </a:prstGeom>
           <a:solidFill>
             <a:srgbClr val="F4ECDE"/>
           </a:solidFill>
-          <a:ln/>
-        </p:spPr>
-        <p:txBody>
-          <a:bodyPr wrap="square" lIns="25400" tIns="25400" rIns="25400" bIns="25400" rtlCol="0" anchor="ctr"/>
-          <a:lstStyle/>
-          <a:p>
-            <a:pPr algn="ctr" indent="0" marL="0">
-              <a:buNone/>
-            </a:pPr>
-            <a:r>
-              <a:rPr lang="en-US" sz="1300" b="1" dirty="0">
+          <a:ln w="12700">
+            <a:solidFill>
+              <a:srgbClr val="F4ECDE"/>
+            </a:solidFill>
+            <a:prstDash val="solid"/>
+          </a:ln>
+        </p:spPr>
+      </p:sp>
+      <p:sp>
+        <p:nvSpPr>
+          <p:cNvPr id="9" name="Text 7"/>
+          <p:cNvSpPr txBox="1"/>
+          <p:nvPr/>
+        </p:nvSpPr>
+        <p:spPr>
+          <a:xfrm>
+            <a:off x="2240280" y="2404872"/>
+            <a:ext cx="3154680" cy="228600"/>
+          </a:xfrm>
+          <a:prstGeom prst="rect">
+            <a:avLst/>
+          </a:prstGeom>
+          <a:noFill/>
+          <a:ln/>
+        </p:spPr>
+        <p:txBody>
+          <a:bodyPr wrap="square" lIns="0" tIns="0" rIns="0" bIns="0" rtlCol="0" anchor="t"/>
+          <a:lstStyle/>
+          <a:p>
+            <a:pPr indent="0" marL="0">
+              <a:buNone/>
+            </a:pPr>
+            <a:r>
+              <a:rPr lang="en-US" sz="1100" b="1" dirty="0">
+                <a:solidFill>
+                  <a:srgbClr val="5A5044"/>
+                </a:solidFill>
+                <a:latin typeface="Calibri" pitchFamily="34" charset="0"/>
+                <a:ea typeface="Calibri" pitchFamily="34" charset="-122"/>
+                <a:cs typeface="Calibri" pitchFamily="34" charset="-120"/>
+              </a:rPr>
+              <a:t>3–4 Sätze, gestützt auf eure Tabelle</a:t>
+            </a:r>
+            <a:endParaRPr lang="en-US" sz="1100" dirty="0"/>
+          </a:p>
+        </p:txBody>
+      </p:sp>
+      <p:sp>
+        <p:nvSpPr>
+          <p:cNvPr id="10" name="Text 8"/>
+          <p:cNvSpPr txBox="1"/>
+          <p:nvPr/>
+        </p:nvSpPr>
+        <p:spPr>
+          <a:xfrm>
+            <a:off x="2240280" y="2624328"/>
+            <a:ext cx="3154680" cy="512064"/>
+          </a:xfrm>
+          <a:prstGeom prst="rect">
+            <a:avLst/>
+          </a:prstGeom>
+          <a:noFill/>
+          <a:ln/>
+        </p:spPr>
+        <p:txBody>
+          <a:bodyPr wrap="square" lIns="0" tIns="0" rIns="0" bIns="0" rtlCol="0" anchor="t"/>
+          <a:lstStyle/>
+          <a:p>
+            <a:pPr indent="0" marL="0">
+              <a:buNone/>
+            </a:pPr>
+            <a:r>
+              <a:rPr lang="en-US" sz="1100" i="1" dirty="0">
                 <a:solidFill>
                   <a:srgbClr val="2B2318"/>
                 </a:solidFill>
@@ -20790,42 +20561,147 @@
                 <a:ea typeface="Calibri" pitchFamily="34" charset="-122"/>
                 <a:cs typeface="Calibri" pitchFamily="34" charset="-120"/>
               </a:rPr>
-              <a:t>Kleinbauer</a:t>
-            </a:r>
-            <a:endParaRPr lang="en-US" sz="1300" dirty="0"/>
-          </a:p>
-        </p:txBody>
-      </p:sp>
-      <p:sp>
-        <p:nvSpPr>
-          <p:cNvPr id="10" name="Text 8"/>
-          <p:cNvSpPr txBox="1"/>
-          <p:nvPr/>
-        </p:nvSpPr>
-        <p:spPr>
-          <a:xfrm>
-            <a:off x="3246120" y="2926080"/>
-            <a:ext cx="2606040" cy="457200"/>
+              <a:t>„Aus Sicht der damaligen Zeit gelang es Solon weitgehend / nur teilweise …, da …“</a:t>
+            </a:r>
+            <a:endParaRPr lang="en-US" sz="1100" dirty="0"/>
+          </a:p>
+        </p:txBody>
+      </p:sp>
+      <p:sp>
+        <p:nvSpPr>
+          <p:cNvPr id="11" name="Text 9"/>
+          <p:cNvSpPr txBox="1"/>
+          <p:nvPr/>
+        </p:nvSpPr>
+        <p:spPr>
+          <a:xfrm>
+            <a:off x="457200" y="3319272"/>
+            <a:ext cx="1554480" cy="822960"/>
           </a:xfrm>
           <a:prstGeom prst="roundRect">
             <a:avLst>
-              <a:gd name="adj" fmla="val 20000"/>
+              <a:gd name="adj" fmla="val 8889"/>
+            </a:avLst>
+          </a:prstGeom>
+          <a:solidFill>
+            <a:srgbClr val="AD4426"/>
+          </a:solidFill>
+          <a:ln/>
+        </p:spPr>
+        <p:txBody>
+          <a:bodyPr wrap="square" lIns="0" tIns="0" rIns="0" bIns="0" rtlCol="0" anchor="ctr"/>
+          <a:lstStyle/>
+          <a:p>
+            <a:pPr algn="ctr" indent="0" marL="0">
+              <a:buNone/>
+            </a:pPr>
+            <a:r>
+              <a:rPr lang="en-US" sz="1500" b="1" dirty="0">
+                <a:solidFill>
+                  <a:srgbClr val="FFFFFF"/>
+                </a:solidFill>
+                <a:latin typeface="Calibri" pitchFamily="34" charset="0"/>
+                <a:ea typeface="Calibri" pitchFamily="34" charset="-122"/>
+                <a:cs typeface="Calibri" pitchFamily="34" charset="-120"/>
+              </a:rPr>
+              <a:t>Werturteil</a:t>
+            </a:r>
+            <a:endParaRPr lang="en-US" sz="1500" dirty="0"/>
+          </a:p>
+        </p:txBody>
+      </p:sp>
+      <p:sp>
+        <p:nvSpPr>
+          <p:cNvPr id="12" name="Shape 10"/>
+          <p:cNvSpPr/>
+          <p:nvPr/>
+        </p:nvSpPr>
+        <p:spPr>
+          <a:xfrm>
+            <a:off x="2103120" y="3319272"/>
+            <a:ext cx="3383280" cy="822960"/>
+          </a:xfrm>
+          <a:prstGeom prst="roundRect">
+            <a:avLst>
+              <a:gd name="adj" fmla="val 8889"/>
             </a:avLst>
           </a:prstGeom>
           <a:solidFill>
             <a:srgbClr val="F4ECDE"/>
           </a:solidFill>
-          <a:ln/>
-        </p:spPr>
-        <p:txBody>
-          <a:bodyPr wrap="square" lIns="25400" tIns="25400" rIns="25400" bIns="25400" rtlCol="0" anchor="ctr"/>
-          <a:lstStyle/>
-          <a:p>
-            <a:pPr algn="ctr" indent="0" marL="0">
-              <a:buNone/>
-            </a:pPr>
-            <a:r>
-              <a:rPr lang="en-US" sz="1300" b="1" dirty="0">
+          <a:ln w="12700">
+            <a:solidFill>
+              <a:srgbClr val="F4ECDE"/>
+            </a:solidFill>
+            <a:prstDash val="solid"/>
+          </a:ln>
+        </p:spPr>
+      </p:sp>
+      <p:sp>
+        <p:nvSpPr>
+          <p:cNvPr id="13" name="Text 11"/>
+          <p:cNvSpPr txBox="1"/>
+          <p:nvPr/>
+        </p:nvSpPr>
+        <p:spPr>
+          <a:xfrm>
+            <a:off x="2240280" y="3392424"/>
+            <a:ext cx="3154680" cy="228600"/>
+          </a:xfrm>
+          <a:prstGeom prst="rect">
+            <a:avLst/>
+          </a:prstGeom>
+          <a:noFill/>
+          <a:ln/>
+        </p:spPr>
+        <p:txBody>
+          <a:bodyPr wrap="square" lIns="0" tIns="0" rIns="0" bIns="0" rtlCol="0" anchor="t"/>
+          <a:lstStyle/>
+          <a:p>
+            <a:pPr indent="0" marL="0">
+              <a:buNone/>
+            </a:pPr>
+            <a:r>
+              <a:rPr lang="en-US" sz="1100" b="1" dirty="0">
+                <a:solidFill>
+                  <a:srgbClr val="5A5044"/>
+                </a:solidFill>
+                <a:latin typeface="Calibri" pitchFamily="34" charset="0"/>
+                <a:ea typeface="Calibri" pitchFamily="34" charset="-122"/>
+                <a:cs typeface="Calibri" pitchFamily="34" charset="-120"/>
+              </a:rPr>
+              <a:t>2–3 Sätze</a:t>
+            </a:r>
+            <a:endParaRPr lang="en-US" sz="1100" dirty="0"/>
+          </a:p>
+        </p:txBody>
+      </p:sp>
+      <p:sp>
+        <p:nvSpPr>
+          <p:cNvPr id="14" name="Text 12"/>
+          <p:cNvSpPr txBox="1"/>
+          <p:nvPr/>
+        </p:nvSpPr>
+        <p:spPr>
+          <a:xfrm>
+            <a:off x="2240280" y="3611880"/>
+            <a:ext cx="3154680" cy="512064"/>
+          </a:xfrm>
+          <a:prstGeom prst="rect">
+            <a:avLst/>
+          </a:prstGeom>
+          <a:noFill/>
+          <a:ln/>
+        </p:spPr>
+        <p:txBody>
+          <a:bodyPr wrap="square" lIns="0" tIns="0" rIns="0" bIns="0" rtlCol="0" anchor="t"/>
+          <a:lstStyle/>
+          <a:p>
+            <a:pPr indent="0" marL="0">
+              <a:buNone/>
+            </a:pPr>
+            <a:r>
+              <a:rPr lang="en-US" sz="1100" i="1" dirty="0">
                 <a:solidFill>
                   <a:srgbClr val="2B2318"/>
                 </a:solidFill>
@@ -20833,85 +20709,131 @@
                 <a:ea typeface="Calibri" pitchFamily="34" charset="-122"/>
                 <a:cs typeface="Calibri" pitchFamily="34" charset="-120"/>
               </a:rPr>
-              <a:t>Großgrundbesitzer</a:t>
-            </a:r>
-            <a:endParaRPr lang="en-US" sz="1300" dirty="0"/>
-          </a:p>
-        </p:txBody>
-      </p:sp>
-      <p:sp>
-        <p:nvSpPr>
-          <p:cNvPr id="11" name="Text 9"/>
-          <p:cNvSpPr txBox="1"/>
-          <p:nvPr/>
-        </p:nvSpPr>
-        <p:spPr>
-          <a:xfrm>
-            <a:off x="6035040" y="2926080"/>
-            <a:ext cx="2606040" cy="457200"/>
+              <a:t>„Gemessen an … halte ich …, weil …“</a:t>
+            </a:r>
+            <a:endParaRPr lang="en-US" sz="1100" dirty="0"/>
+          </a:p>
+        </p:txBody>
+      </p:sp>
+      <p:sp>
+        <p:nvSpPr>
+          <p:cNvPr id="15" name="Shape 13"/>
+          <p:cNvSpPr/>
+          <p:nvPr/>
+        </p:nvSpPr>
+        <p:spPr>
+          <a:xfrm>
+            <a:off x="5669280" y="2331720"/>
+            <a:ext cx="3017520" cy="1810512"/>
           </a:xfrm>
           <a:prstGeom prst="roundRect">
             <a:avLst>
-              <a:gd name="adj" fmla="val 20000"/>
+              <a:gd name="adj" fmla="val 4040"/>
             </a:avLst>
           </a:prstGeom>
           <a:solidFill>
-            <a:srgbClr val="F4ECDE"/>
+            <a:srgbClr val="FBF8F2"/>
           </a:solidFill>
-          <a:ln/>
-        </p:spPr>
-        <p:txBody>
-          <a:bodyPr wrap="square" lIns="25400" tIns="25400" rIns="25400" bIns="25400" rtlCol="0" anchor="ctr"/>
-          <a:lstStyle/>
-          <a:p>
-            <a:pPr algn="ctr" indent="0" marL="0">
-              <a:buNone/>
-            </a:pPr>
-            <a:r>
-              <a:rPr lang="en-US" sz="1300" b="1" dirty="0">
-                <a:solidFill>
-                  <a:srgbClr val="2B2318"/>
-                </a:solidFill>
-                <a:latin typeface="Calibri" pitchFamily="34" charset="0"/>
-                <a:ea typeface="Calibri" pitchFamily="34" charset="-122"/>
-                <a:cs typeface="Calibri" pitchFamily="34" charset="-120"/>
-              </a:rPr>
-              <a:t>Reicher Händler</a:t>
-            </a:r>
-            <a:endParaRPr lang="en-US" sz="1300" dirty="0"/>
-          </a:p>
-        </p:txBody>
-      </p:sp>
-      <p:sp>
-        <p:nvSpPr>
-          <p:cNvPr id="12" name="Text 10"/>
-          <p:cNvSpPr txBox="1"/>
-          <p:nvPr/>
-        </p:nvSpPr>
-        <p:spPr>
-          <a:xfrm>
-            <a:off x="457200" y="3493008"/>
-            <a:ext cx="2606040" cy="457200"/>
+          <a:ln w="19050">
+            <a:solidFill>
+              <a:srgbClr val="D9A441"/>
+            </a:solidFill>
+            <a:prstDash val="solid"/>
+          </a:ln>
+        </p:spPr>
+      </p:sp>
+      <p:sp>
+        <p:nvSpPr>
+          <p:cNvPr id="16" name="Text 14"/>
+          <p:cNvSpPr txBox="1"/>
+          <p:nvPr/>
+        </p:nvSpPr>
+        <p:spPr>
+          <a:xfrm>
+            <a:off x="5852160" y="2404872"/>
+            <a:ext cx="2651760" cy="274320"/>
+          </a:xfrm>
+          <a:prstGeom prst="rect">
+            <a:avLst/>
+          </a:prstGeom>
+          <a:noFill/>
+          <a:ln/>
+        </p:spPr>
+        <p:txBody>
+          <a:bodyPr wrap="square" lIns="0" tIns="0" rIns="0" bIns="0" rtlCol="0" anchor="t"/>
+          <a:lstStyle/>
+          <a:p>
+            <a:pPr indent="0" marL="0">
+              <a:buNone/>
+            </a:pPr>
+            <a:r>
+              <a:rPr lang="en-US" sz="1400" b="1" dirty="0">
+                <a:solidFill>
+                  <a:srgbClr val="AD4426"/>
+                </a:solidFill>
+                <a:latin typeface="Cambria" pitchFamily="34" charset="0"/>
+                <a:ea typeface="Cambria" pitchFamily="34" charset="-122"/>
+                <a:cs typeface="Cambria" pitchFamily="34" charset="-120"/>
+              </a:rPr>
+              <a:t>Partnercheck</a:t>
+            </a:r>
+            <a:endParaRPr lang="en-US" sz="1400" dirty="0"/>
+          </a:p>
+        </p:txBody>
+      </p:sp>
+      <p:sp>
+        <p:nvSpPr>
+          <p:cNvPr id="17" name="Shape 15"/>
+          <p:cNvSpPr/>
+          <p:nvPr/>
+        </p:nvSpPr>
+        <p:spPr>
+          <a:xfrm>
+            <a:off x="5852160" y="2779776"/>
+            <a:ext cx="201168" cy="201168"/>
           </a:xfrm>
           <a:prstGeom prst="roundRect">
             <a:avLst>
-              <a:gd name="adj" fmla="val 20000"/>
+              <a:gd name="adj" fmla="val 18182"/>
             </a:avLst>
           </a:prstGeom>
           <a:solidFill>
-            <a:srgbClr val="F4ECDE"/>
+            <a:srgbClr val="FFFFFF"/>
           </a:solidFill>
-          <a:ln/>
-        </p:spPr>
-        <p:txBody>
-          <a:bodyPr wrap="square" lIns="25400" tIns="25400" rIns="25400" bIns="25400" rtlCol="0" anchor="ctr"/>
-          <a:lstStyle/>
-          <a:p>
-            <a:pPr algn="ctr" indent="0" marL="0">
-              <a:buNone/>
-            </a:pPr>
-            <a:r>
-              <a:rPr lang="en-US" sz="1300" b="1" dirty="0">
+          <a:ln w="19050">
+            <a:solidFill>
+              <a:srgbClr val="D9A441"/>
+            </a:solidFill>
+            <a:prstDash val="solid"/>
+          </a:ln>
+        </p:spPr>
+      </p:sp>
+      <p:sp>
+        <p:nvSpPr>
+          <p:cNvPr id="18" name="Text 16"/>
+          <p:cNvSpPr txBox="1"/>
+          <p:nvPr/>
+        </p:nvSpPr>
+        <p:spPr>
+          <a:xfrm>
+            <a:off x="6144768" y="2743200"/>
+            <a:ext cx="2468880" cy="274320"/>
+          </a:xfrm>
+          <a:prstGeom prst="rect">
+            <a:avLst/>
+          </a:prstGeom>
+          <a:noFill/>
+          <a:ln/>
+        </p:spPr>
+        <p:txBody>
+          <a:bodyPr wrap="square" lIns="0" tIns="0" rIns="0" bIns="0" rtlCol="0" anchor="ctr"/>
+          <a:lstStyle/>
+          <a:p>
+            <a:pPr indent="0" marL="0">
+              <a:buNone/>
+            </a:pPr>
+            <a:r>
+              <a:rPr lang="en-US" sz="1200" dirty="0">
                 <a:solidFill>
                   <a:srgbClr val="2B2318"/>
                 </a:solidFill>
@@ -20919,42 +20841,65 @@
                 <a:ea typeface="Calibri" pitchFamily="34" charset="-122"/>
                 <a:cs typeface="Calibri" pitchFamily="34" charset="-120"/>
               </a:rPr>
-              <a:t>Verarmter Adliger</a:t>
-            </a:r>
-            <a:endParaRPr lang="en-US" sz="1300" dirty="0"/>
-          </a:p>
-        </p:txBody>
-      </p:sp>
-      <p:sp>
-        <p:nvSpPr>
-          <p:cNvPr id="13" name="Text 11"/>
-          <p:cNvSpPr txBox="1"/>
-          <p:nvPr/>
-        </p:nvSpPr>
-        <p:spPr>
-          <a:xfrm>
-            <a:off x="3246120" y="3493008"/>
-            <a:ext cx="2606040" cy="457200"/>
+              <a:t>Sachurteil: Maßstäbe der Zeit</a:t>
+            </a:r>
+            <a:endParaRPr lang="en-US" sz="1200" dirty="0"/>
+          </a:p>
+        </p:txBody>
+      </p:sp>
+      <p:sp>
+        <p:nvSpPr>
+          <p:cNvPr id="19" name="Shape 17"/>
+          <p:cNvSpPr/>
+          <p:nvPr/>
+        </p:nvSpPr>
+        <p:spPr>
+          <a:xfrm>
+            <a:off x="5852160" y="3118104"/>
+            <a:ext cx="201168" cy="201168"/>
           </a:xfrm>
           <a:prstGeom prst="roundRect">
             <a:avLst>
-              <a:gd name="adj" fmla="val 20000"/>
+              <a:gd name="adj" fmla="val 18182"/>
             </a:avLst>
           </a:prstGeom>
           <a:solidFill>
-            <a:srgbClr val="F4ECDE"/>
+            <a:srgbClr val="FFFFFF"/>
           </a:solidFill>
-          <a:ln/>
-        </p:spPr>
-        <p:txBody>
-          <a:bodyPr wrap="square" lIns="25400" tIns="25400" rIns="25400" bIns="25400" rtlCol="0" anchor="ctr"/>
-          <a:lstStyle/>
-          <a:p>
-            <a:pPr algn="ctr" indent="0" marL="0">
-              <a:buNone/>
-            </a:pPr>
-            <a:r>
-              <a:rPr lang="en-US" sz="1300" b="1" dirty="0">
+          <a:ln w="19050">
+            <a:solidFill>
+              <a:srgbClr val="D9A441"/>
+            </a:solidFill>
+            <a:prstDash val="solid"/>
+          </a:ln>
+        </p:spPr>
+      </p:sp>
+      <p:sp>
+        <p:nvSpPr>
+          <p:cNvPr id="20" name="Text 18"/>
+          <p:cNvSpPr txBox="1"/>
+          <p:nvPr/>
+        </p:nvSpPr>
+        <p:spPr>
+          <a:xfrm>
+            <a:off x="6144768" y="3081528"/>
+            <a:ext cx="2468880" cy="274320"/>
+          </a:xfrm>
+          <a:prstGeom prst="rect">
+            <a:avLst/>
+          </a:prstGeom>
+          <a:noFill/>
+          <a:ln/>
+        </p:spPr>
+        <p:txBody>
+          <a:bodyPr wrap="square" lIns="0" tIns="0" rIns="0" bIns="0" rtlCol="0" anchor="ctr"/>
+          <a:lstStyle/>
+          <a:p>
+            <a:pPr indent="0" marL="0">
+              <a:buNone/>
+            </a:pPr>
+            <a:r>
+              <a:rPr lang="en-US" sz="1200" dirty="0">
                 <a:solidFill>
                   <a:srgbClr val="2B2318"/>
                 </a:solidFill>
@@ -20962,42 +20907,65 @@
                 <a:ea typeface="Calibri" pitchFamily="34" charset="-122"/>
                 <a:cs typeface="Calibri" pitchFamily="34" charset="-120"/>
               </a:rPr>
-              <a:t>Zurückgekaufter Schuldsklave</a:t>
-            </a:r>
-            <a:endParaRPr lang="en-US" sz="1300" dirty="0"/>
-          </a:p>
-        </p:txBody>
-      </p:sp>
-      <p:sp>
-        <p:nvSpPr>
-          <p:cNvPr id="14" name="Text 12"/>
-          <p:cNvSpPr txBox="1"/>
-          <p:nvPr/>
-        </p:nvSpPr>
-        <p:spPr>
-          <a:xfrm>
-            <a:off x="6035040" y="3493008"/>
-            <a:ext cx="2606040" cy="457200"/>
+              <a:t>Sachurteil: mit Belegen</a:t>
+            </a:r>
+            <a:endParaRPr lang="en-US" sz="1200" dirty="0"/>
+          </a:p>
+        </p:txBody>
+      </p:sp>
+      <p:sp>
+        <p:nvSpPr>
+          <p:cNvPr id="21" name="Shape 19"/>
+          <p:cNvSpPr/>
+          <p:nvPr/>
+        </p:nvSpPr>
+        <p:spPr>
+          <a:xfrm>
+            <a:off x="5852160" y="3456432"/>
+            <a:ext cx="201168" cy="201168"/>
           </a:xfrm>
           <a:prstGeom prst="roundRect">
             <a:avLst>
-              <a:gd name="adj" fmla="val 20000"/>
+              <a:gd name="adj" fmla="val 18182"/>
             </a:avLst>
           </a:prstGeom>
           <a:solidFill>
-            <a:srgbClr val="F4ECDE"/>
+            <a:srgbClr val="FFFFFF"/>
           </a:solidFill>
-          <a:ln/>
-        </p:spPr>
-        <p:txBody>
-          <a:bodyPr wrap="square" lIns="25400" tIns="25400" rIns="25400" bIns="25400" rtlCol="0" anchor="ctr"/>
-          <a:lstStyle/>
-          <a:p>
-            <a:pPr algn="ctr" indent="0" marL="0">
-              <a:buNone/>
-            </a:pPr>
-            <a:r>
-              <a:rPr lang="en-US" sz="1300" b="1" dirty="0">
+          <a:ln w="19050">
+            <a:solidFill>
+              <a:srgbClr val="D9A441"/>
+            </a:solidFill>
+            <a:prstDash val="solid"/>
+          </a:ln>
+        </p:spPr>
+      </p:sp>
+      <p:sp>
+        <p:nvSpPr>
+          <p:cNvPr id="22" name="Text 20"/>
+          <p:cNvSpPr txBox="1"/>
+          <p:nvPr/>
+        </p:nvSpPr>
+        <p:spPr>
+          <a:xfrm>
+            <a:off x="6144768" y="3419856"/>
+            <a:ext cx="2468880" cy="274320"/>
+          </a:xfrm>
+          <a:prstGeom prst="rect">
+            <a:avLst/>
+          </a:prstGeom>
+          <a:noFill/>
+          <a:ln/>
+        </p:spPr>
+        <p:txBody>
+          <a:bodyPr wrap="square" lIns="0" tIns="0" rIns="0" bIns="0" rtlCol="0" anchor="ctr"/>
+          <a:lstStyle/>
+          <a:p>
+            <a:pPr indent="0" marL="0">
+              <a:buNone/>
+            </a:pPr>
+            <a:r>
+              <a:rPr lang="en-US" sz="1200" dirty="0">
                 <a:solidFill>
                   <a:srgbClr val="2B2318"/>
                 </a:solidFill>
@@ -21005,54 +20973,81 @@
                 <a:ea typeface="Calibri" pitchFamily="34" charset="-122"/>
                 <a:cs typeface="Calibri" pitchFamily="34" charset="-120"/>
               </a:rPr>
-              <a:t>Tagelöhner (Thete)</a:t>
-            </a:r>
-            <a:endParaRPr lang="en-US" sz="1300" dirty="0"/>
-          </a:p>
-        </p:txBody>
-      </p:sp>
-      <p:sp>
-        <p:nvSpPr>
-          <p:cNvPr id="15" name="Text 13"/>
-          <p:cNvSpPr txBox="1"/>
-          <p:nvPr/>
-        </p:nvSpPr>
-        <p:spPr>
-          <a:xfrm>
-            <a:off x="457200" y="4160520"/>
-            <a:ext cx="8229600" cy="320040"/>
-          </a:xfrm>
-          <a:prstGeom prst="rect">
-            <a:avLst/>
-          </a:prstGeom>
-          <a:noFill/>
-          <a:ln/>
-        </p:spPr>
-        <p:txBody>
-          <a:bodyPr wrap="square" lIns="0" tIns="0" rIns="0" bIns="0" rtlCol="0" anchor="t"/>
-          <a:lstStyle/>
-          <a:p>
-            <a:pPr indent="0" marL="0">
-              <a:buNone/>
-            </a:pPr>
-            <a:r>
-              <a:rPr lang="en-US" sz="1500" b="1" i="1" dirty="0">
-                <a:solidFill>
-                  <a:srgbClr val="AD4426"/>
-                </a:solidFill>
-                <a:latin typeface="Calibri" pitchFamily="34" charset="0"/>
-                <a:ea typeface="Calibri" pitchFamily="34" charset="-122"/>
-                <a:cs typeface="Calibri" pitchFamily="34" charset="-120"/>
-              </a:rPr>
-              <a:t>Und wo steht eine Frau?</a:t>
-            </a:r>
-            <a:endParaRPr lang="en-US" sz="1500" dirty="0"/>
-          </a:p>
-        </p:txBody>
-      </p:sp>
-      <p:sp>
-        <p:nvSpPr>
-          <p:cNvPr id="16" name="Text 14"/>
+              <a:t>Werturteil: Maßstab genannt</a:t>
+            </a:r>
+            <a:endParaRPr lang="en-US" sz="1200" dirty="0"/>
+          </a:p>
+        </p:txBody>
+      </p:sp>
+      <p:sp>
+        <p:nvSpPr>
+          <p:cNvPr id="23" name="Shape 21"/>
+          <p:cNvSpPr/>
+          <p:nvPr/>
+        </p:nvSpPr>
+        <p:spPr>
+          <a:xfrm>
+            <a:off x="5852160" y="3794760"/>
+            <a:ext cx="201168" cy="201168"/>
+          </a:xfrm>
+          <a:prstGeom prst="roundRect">
+            <a:avLst>
+              <a:gd name="adj" fmla="val 18182"/>
+            </a:avLst>
+          </a:prstGeom>
+          <a:solidFill>
+            <a:srgbClr val="FFFFFF"/>
+          </a:solidFill>
+          <a:ln w="19050">
+            <a:solidFill>
+              <a:srgbClr val="D9A441"/>
+            </a:solidFill>
+            <a:prstDash val="solid"/>
+          </a:ln>
+        </p:spPr>
+      </p:sp>
+      <p:sp>
+        <p:nvSpPr>
+          <p:cNvPr id="24" name="Text 22"/>
+          <p:cNvSpPr txBox="1"/>
+          <p:nvPr/>
+        </p:nvSpPr>
+        <p:spPr>
+          <a:xfrm>
+            <a:off x="6144768" y="3758184"/>
+            <a:ext cx="2468880" cy="274320"/>
+          </a:xfrm>
+          <a:prstGeom prst="rect">
+            <a:avLst/>
+          </a:prstGeom>
+          <a:noFill/>
+          <a:ln/>
+        </p:spPr>
+        <p:txBody>
+          <a:bodyPr wrap="square" lIns="0" tIns="0" rIns="0" bIns="0" rtlCol="0" anchor="ctr"/>
+          <a:lstStyle/>
+          <a:p>
+            <a:pPr indent="0" marL="0">
+              <a:buNone/>
+            </a:pPr>
+            <a:r>
+              <a:rPr lang="en-US" sz="1200" dirty="0">
+                <a:solidFill>
+                  <a:srgbClr val="2B2318"/>
+                </a:solidFill>
+                <a:latin typeface="Calibri" pitchFamily="34" charset="0"/>
+                <a:ea typeface="Calibri" pitchFamily="34" charset="-122"/>
+                <a:cs typeface="Calibri" pitchFamily="34" charset="-120"/>
+              </a:rPr>
+              <a:t>Werturteil: begründet</a:t>
+            </a:r>
+            <a:endParaRPr lang="en-US" sz="1200" dirty="0"/>
+          </a:p>
+        </p:txBody>
+      </p:sp>
+      <p:sp>
+        <p:nvSpPr>
+          <p:cNvPr id="25" name="Text 23"/>
           <p:cNvSpPr txBox="1"/>
           <p:nvPr/>
         </p:nvSpPr>
@@ -21091,7 +21086,7 @@
       </p:sp>
       <p:sp>
         <p:nvSpPr>
-          <p:cNvPr id="17" name="Text 15"/>
+          <p:cNvPr id="26" name="Text 24"/>
           <p:cNvSpPr txBox="1"/>
           <p:nvPr/>
         </p:nvSpPr>
@@ -21139,6 +21134,676 @@
 <file path=ppt/slides/slide31.xml><?xml version="1.0" encoding="utf-8"?>
 <p:sld xmlns:a="http://schemas.openxmlformats.org/drawingml/2006/main" xmlns:r="http://schemas.openxmlformats.org/officeDocument/2006/relationships" xmlns:p="http://schemas.openxmlformats.org/presentationml/2006/main">
   <p:cSld name="Slide 31">
+    <p:bg>
+      <p:bgPr>
+        <a:solidFill>
+          <a:srgbClr val="FFFFFF"/>
+        </a:solidFill>
+      </p:bgPr>
+    </p:bg>
+    <p:spTree>
+      <p:nvGrpSpPr>
+        <p:cNvPr id="1" name=""/>
+        <p:cNvGrpSpPr/>
+        <p:nvPr/>
+      </p:nvGrpSpPr>
+      <p:grpSpPr>
+        <a:xfrm>
+          <a:off x="0" y="0"/>
+          <a:ext cx="0" cy="0"/>
+          <a:chOff x="0" y="0"/>
+          <a:chExt cx="0" cy="0"/>
+        </a:xfrm>
+      </p:grpSpPr>
+      <p:sp>
+        <p:nvSpPr>
+          <p:cNvPr id="2" name="Text 0"/>
+          <p:cNvSpPr txBox="1"/>
+          <p:nvPr/>
+        </p:nvSpPr>
+        <p:spPr>
+          <a:xfrm>
+            <a:off x="457200" y="320040"/>
+            <a:ext cx="8229600" cy="228600"/>
+          </a:xfrm>
+          <a:prstGeom prst="rect">
+            <a:avLst/>
+          </a:prstGeom>
+          <a:noFill/>
+          <a:ln/>
+        </p:spPr>
+        <p:txBody>
+          <a:bodyPr wrap="square" lIns="0" tIns="0" rIns="0" bIns="0" rtlCol="0" anchor="t"/>
+          <a:lstStyle/>
+          <a:p>
+            <a:pPr indent="0" marL="0">
+              <a:buNone/>
+            </a:pPr>
+            <a:r>
+              <a:rPr lang="en-US" sz="1100" b="1" spc="200" kern="0" dirty="0">
+                <a:solidFill>
+                  <a:srgbClr val="AD4426"/>
+                </a:solidFill>
+                <a:latin typeface="Calibri" pitchFamily="34" charset="0"/>
+                <a:ea typeface="Calibri" pitchFamily="34" charset="-122"/>
+                <a:cs typeface="Calibri" pitchFamily="34" charset="-120"/>
+              </a:rPr>
+              <a:t>PLENUM · TAFEL</a:t>
+            </a:r>
+            <a:endParaRPr lang="en-US" sz="1100" dirty="0"/>
+          </a:p>
+        </p:txBody>
+      </p:sp>
+      <p:sp>
+        <p:nvSpPr>
+          <p:cNvPr id="3" name="Text 1"/>
+          <p:cNvSpPr txBox="1"/>
+          <p:nvPr/>
+        </p:nvSpPr>
+        <p:spPr>
+          <a:xfrm>
+            <a:off x="457200" y="548640"/>
+            <a:ext cx="8229600" cy="594360"/>
+          </a:xfrm>
+          <a:prstGeom prst="rect">
+            <a:avLst/>
+          </a:prstGeom>
+          <a:noFill/>
+          <a:ln/>
+        </p:spPr>
+        <p:txBody>
+          <a:bodyPr wrap="square" lIns="0" tIns="0" rIns="0" bIns="0" rtlCol="0" anchor="t"/>
+          <a:lstStyle/>
+          <a:p>
+            <a:pPr indent="0" marL="0">
+              <a:buNone/>
+            </a:pPr>
+            <a:r>
+              <a:rPr lang="en-US" sz="2800" b="1" dirty="0">
+                <a:solidFill>
+                  <a:srgbClr val="2B2318"/>
+                </a:solidFill>
+                <a:latin typeface="Cambria" pitchFamily="34" charset="0"/>
+                <a:ea typeface="Cambria" pitchFamily="34" charset="-122"/>
+                <a:cs typeface="Cambria" pitchFamily="34" charset="-120"/>
+              </a:rPr>
+              <a:t>Wer gewinnt, wer verliert?</a:t>
+            </a:r>
+            <a:endParaRPr lang="en-US" sz="2800" dirty="0"/>
+          </a:p>
+        </p:txBody>
+      </p:sp>
+      <p:sp>
+        <p:nvSpPr>
+          <p:cNvPr id="4" name="Text 2"/>
+          <p:cNvSpPr txBox="1"/>
+          <p:nvPr/>
+        </p:nvSpPr>
+        <p:spPr>
+          <a:xfrm>
+            <a:off x="7315200" y="347472"/>
+            <a:ext cx="1371600" cy="292608"/>
+          </a:xfrm>
+          <a:prstGeom prst="roundRect">
+            <a:avLst>
+              <a:gd name="adj" fmla="val 31250"/>
+            </a:avLst>
+          </a:prstGeom>
+          <a:solidFill>
+            <a:srgbClr val="2B2318"/>
+          </a:solidFill>
+          <a:ln/>
+        </p:spPr>
+        <p:txBody>
+          <a:bodyPr wrap="square" lIns="25400" tIns="25400" rIns="25400" bIns="25400" rtlCol="0" anchor="ctr"/>
+          <a:lstStyle/>
+          <a:p>
+            <a:pPr algn="ctr" indent="0" marL="0">
+              <a:buNone/>
+            </a:pPr>
+            <a:r>
+              <a:rPr lang="en-US" sz="1100" b="1" dirty="0">
+                <a:solidFill>
+                  <a:srgbClr val="FFFFFF"/>
+                </a:solidFill>
+                <a:latin typeface="Calibri" pitchFamily="34" charset="0"/>
+                <a:ea typeface="Calibri" pitchFamily="34" charset="-122"/>
+                <a:cs typeface="Calibri" pitchFamily="34" charset="-120"/>
+              </a:rPr>
+              <a:t>8 Min.</a:t>
+            </a:r>
+            <a:endParaRPr lang="en-US" sz="1100" dirty="0"/>
+          </a:p>
+        </p:txBody>
+      </p:sp>
+      <p:sp>
+        <p:nvSpPr>
+          <p:cNvPr id="5" name="Text 3"/>
+          <p:cNvSpPr txBox="1"/>
+          <p:nvPr/>
+        </p:nvSpPr>
+        <p:spPr>
+          <a:xfrm>
+            <a:off x="457200" y="1234440"/>
+            <a:ext cx="8229600" cy="365760"/>
+          </a:xfrm>
+          <a:prstGeom prst="rect">
+            <a:avLst/>
+          </a:prstGeom>
+          <a:noFill/>
+          <a:ln/>
+        </p:spPr>
+        <p:txBody>
+          <a:bodyPr wrap="square" lIns="0" tIns="0" rIns="0" bIns="0" rtlCol="0" anchor="t"/>
+          <a:lstStyle/>
+          <a:p>
+            <a:pPr indent="0" marL="0">
+              <a:buNone/>
+            </a:pPr>
+            <a:r>
+              <a:rPr lang="en-US" sz="1500" dirty="0">
+                <a:solidFill>
+                  <a:srgbClr val="2B2318"/>
+                </a:solidFill>
+                <a:latin typeface="Calibri" pitchFamily="34" charset="0"/>
+                <a:ea typeface="Calibri" pitchFamily="34" charset="-122"/>
+                <a:cs typeface="Calibri" pitchFamily="34" charset="-120"/>
+              </a:rPr>
+              <a:t>Hängt eine Figur an die passende Stelle der Linie und begründet in einem Satz.</a:t>
+            </a:r>
+            <a:endParaRPr lang="en-US" sz="1500" dirty="0"/>
+          </a:p>
+        </p:txBody>
+      </p:sp>
+      <p:sp>
+        <p:nvSpPr>
+          <p:cNvPr id="6" name="Shape 4"/>
+          <p:cNvSpPr/>
+          <p:nvPr/>
+        </p:nvSpPr>
+        <p:spPr>
+          <a:xfrm>
+            <a:off x="731520" y="2240280"/>
+            <a:ext cx="7680960" cy="0"/>
+          </a:xfrm>
+          <a:prstGeom prst="line">
+            <a:avLst/>
+          </a:prstGeom>
+          <a:noFill/>
+          <a:ln w="38100">
+            <a:solidFill>
+              <a:srgbClr val="2B2318"/>
+            </a:solidFill>
+            <a:prstDash val="solid"/>
+            <a:headEnd type="triangle"/>
+            <a:tailEnd type="triangle"/>
+          </a:ln>
+        </p:spPr>
+      </p:sp>
+      <p:sp>
+        <p:nvSpPr>
+          <p:cNvPr id="7" name="Text 5"/>
+          <p:cNvSpPr txBox="1"/>
+          <p:nvPr/>
+        </p:nvSpPr>
+        <p:spPr>
+          <a:xfrm>
+            <a:off x="457200" y="2377440"/>
+            <a:ext cx="1371600" cy="320040"/>
+          </a:xfrm>
+          <a:prstGeom prst="rect">
+            <a:avLst/>
+          </a:prstGeom>
+          <a:noFill/>
+          <a:ln/>
+        </p:spPr>
+        <p:txBody>
+          <a:bodyPr wrap="square" lIns="0" tIns="0" rIns="0" bIns="0" rtlCol="0" anchor="t"/>
+          <a:lstStyle/>
+          <a:p>
+            <a:pPr indent="0" marL="0">
+              <a:buNone/>
+            </a:pPr>
+            <a:r>
+              <a:rPr lang="en-US" sz="1500" b="1" dirty="0">
+                <a:solidFill>
+                  <a:srgbClr val="AD4426"/>
+                </a:solidFill>
+                <a:latin typeface="Calibri" pitchFamily="34" charset="0"/>
+                <a:ea typeface="Calibri" pitchFamily="34" charset="-122"/>
+                <a:cs typeface="Calibri" pitchFamily="34" charset="-120"/>
+              </a:rPr>
+              <a:t>verliert</a:t>
+            </a:r>
+            <a:endParaRPr lang="en-US" sz="1500" dirty="0"/>
+          </a:p>
+        </p:txBody>
+      </p:sp>
+      <p:sp>
+        <p:nvSpPr>
+          <p:cNvPr id="8" name="Text 6"/>
+          <p:cNvSpPr txBox="1"/>
+          <p:nvPr/>
+        </p:nvSpPr>
+        <p:spPr>
+          <a:xfrm>
+            <a:off x="7315200" y="2377440"/>
+            <a:ext cx="1371600" cy="320040"/>
+          </a:xfrm>
+          <a:prstGeom prst="rect">
+            <a:avLst/>
+          </a:prstGeom>
+          <a:noFill/>
+          <a:ln/>
+        </p:spPr>
+        <p:txBody>
+          <a:bodyPr wrap="square" lIns="0" tIns="0" rIns="0" bIns="0" rtlCol="0" anchor="t"/>
+          <a:lstStyle/>
+          <a:p>
+            <a:pPr algn="r" indent="0" marL="0">
+              <a:buNone/>
+            </a:pPr>
+            <a:r>
+              <a:rPr lang="en-US" sz="1500" b="1" dirty="0">
+                <a:solidFill>
+                  <a:srgbClr val="3C783C"/>
+                </a:solidFill>
+                <a:latin typeface="Calibri" pitchFamily="34" charset="0"/>
+                <a:ea typeface="Calibri" pitchFamily="34" charset="-122"/>
+                <a:cs typeface="Calibri" pitchFamily="34" charset="-120"/>
+              </a:rPr>
+              <a:t>gewinnt</a:t>
+            </a:r>
+            <a:endParaRPr lang="en-US" sz="1500" dirty="0"/>
+          </a:p>
+        </p:txBody>
+      </p:sp>
+      <p:sp>
+        <p:nvSpPr>
+          <p:cNvPr id="9" name="Text 7"/>
+          <p:cNvSpPr txBox="1"/>
+          <p:nvPr/>
+        </p:nvSpPr>
+        <p:spPr>
+          <a:xfrm>
+            <a:off x="457200" y="2926080"/>
+            <a:ext cx="2606040" cy="457200"/>
+          </a:xfrm>
+          <a:prstGeom prst="roundRect">
+            <a:avLst>
+              <a:gd name="adj" fmla="val 20000"/>
+            </a:avLst>
+          </a:prstGeom>
+          <a:solidFill>
+            <a:srgbClr val="F4ECDE"/>
+          </a:solidFill>
+          <a:ln/>
+        </p:spPr>
+        <p:txBody>
+          <a:bodyPr wrap="square" lIns="25400" tIns="25400" rIns="25400" bIns="25400" rtlCol="0" anchor="ctr"/>
+          <a:lstStyle/>
+          <a:p>
+            <a:pPr algn="ctr" indent="0" marL="0">
+              <a:buNone/>
+            </a:pPr>
+            <a:r>
+              <a:rPr lang="en-US" sz="1300" b="1" dirty="0">
+                <a:solidFill>
+                  <a:srgbClr val="2B2318"/>
+                </a:solidFill>
+                <a:latin typeface="Calibri" pitchFamily="34" charset="0"/>
+                <a:ea typeface="Calibri" pitchFamily="34" charset="-122"/>
+                <a:cs typeface="Calibri" pitchFamily="34" charset="-120"/>
+              </a:rPr>
+              <a:t>Kleinbauer</a:t>
+            </a:r>
+            <a:endParaRPr lang="en-US" sz="1300" dirty="0"/>
+          </a:p>
+        </p:txBody>
+      </p:sp>
+      <p:sp>
+        <p:nvSpPr>
+          <p:cNvPr id="10" name="Text 8"/>
+          <p:cNvSpPr txBox="1"/>
+          <p:nvPr/>
+        </p:nvSpPr>
+        <p:spPr>
+          <a:xfrm>
+            <a:off x="3246120" y="2926080"/>
+            <a:ext cx="2606040" cy="457200"/>
+          </a:xfrm>
+          <a:prstGeom prst="roundRect">
+            <a:avLst>
+              <a:gd name="adj" fmla="val 20000"/>
+            </a:avLst>
+          </a:prstGeom>
+          <a:solidFill>
+            <a:srgbClr val="F4ECDE"/>
+          </a:solidFill>
+          <a:ln/>
+        </p:spPr>
+        <p:txBody>
+          <a:bodyPr wrap="square" lIns="25400" tIns="25400" rIns="25400" bIns="25400" rtlCol="0" anchor="ctr"/>
+          <a:lstStyle/>
+          <a:p>
+            <a:pPr algn="ctr" indent="0" marL="0">
+              <a:buNone/>
+            </a:pPr>
+            <a:r>
+              <a:rPr lang="en-US" sz="1300" b="1" dirty="0">
+                <a:solidFill>
+                  <a:srgbClr val="2B2318"/>
+                </a:solidFill>
+                <a:latin typeface="Calibri" pitchFamily="34" charset="0"/>
+                <a:ea typeface="Calibri" pitchFamily="34" charset="-122"/>
+                <a:cs typeface="Calibri" pitchFamily="34" charset="-120"/>
+              </a:rPr>
+              <a:t>Großgrundbesitzer</a:t>
+            </a:r>
+            <a:endParaRPr lang="en-US" sz="1300" dirty="0"/>
+          </a:p>
+        </p:txBody>
+      </p:sp>
+      <p:sp>
+        <p:nvSpPr>
+          <p:cNvPr id="11" name="Text 9"/>
+          <p:cNvSpPr txBox="1"/>
+          <p:nvPr/>
+        </p:nvSpPr>
+        <p:spPr>
+          <a:xfrm>
+            <a:off x="6035040" y="2926080"/>
+            <a:ext cx="2606040" cy="457200"/>
+          </a:xfrm>
+          <a:prstGeom prst="roundRect">
+            <a:avLst>
+              <a:gd name="adj" fmla="val 20000"/>
+            </a:avLst>
+          </a:prstGeom>
+          <a:solidFill>
+            <a:srgbClr val="F4ECDE"/>
+          </a:solidFill>
+          <a:ln/>
+        </p:spPr>
+        <p:txBody>
+          <a:bodyPr wrap="square" lIns="25400" tIns="25400" rIns="25400" bIns="25400" rtlCol="0" anchor="ctr"/>
+          <a:lstStyle/>
+          <a:p>
+            <a:pPr algn="ctr" indent="0" marL="0">
+              <a:buNone/>
+            </a:pPr>
+            <a:r>
+              <a:rPr lang="en-US" sz="1300" b="1" dirty="0">
+                <a:solidFill>
+                  <a:srgbClr val="2B2318"/>
+                </a:solidFill>
+                <a:latin typeface="Calibri" pitchFamily="34" charset="0"/>
+                <a:ea typeface="Calibri" pitchFamily="34" charset="-122"/>
+                <a:cs typeface="Calibri" pitchFamily="34" charset="-120"/>
+              </a:rPr>
+              <a:t>Reicher Händler</a:t>
+            </a:r>
+            <a:endParaRPr lang="en-US" sz="1300" dirty="0"/>
+          </a:p>
+        </p:txBody>
+      </p:sp>
+      <p:sp>
+        <p:nvSpPr>
+          <p:cNvPr id="12" name="Text 10"/>
+          <p:cNvSpPr txBox="1"/>
+          <p:nvPr/>
+        </p:nvSpPr>
+        <p:spPr>
+          <a:xfrm>
+            <a:off x="457200" y="3493008"/>
+            <a:ext cx="2606040" cy="457200"/>
+          </a:xfrm>
+          <a:prstGeom prst="roundRect">
+            <a:avLst>
+              <a:gd name="adj" fmla="val 20000"/>
+            </a:avLst>
+          </a:prstGeom>
+          <a:solidFill>
+            <a:srgbClr val="F4ECDE"/>
+          </a:solidFill>
+          <a:ln/>
+        </p:spPr>
+        <p:txBody>
+          <a:bodyPr wrap="square" lIns="25400" tIns="25400" rIns="25400" bIns="25400" rtlCol="0" anchor="ctr"/>
+          <a:lstStyle/>
+          <a:p>
+            <a:pPr algn="ctr" indent="0" marL="0">
+              <a:buNone/>
+            </a:pPr>
+            <a:r>
+              <a:rPr lang="en-US" sz="1300" b="1" dirty="0">
+                <a:solidFill>
+                  <a:srgbClr val="2B2318"/>
+                </a:solidFill>
+                <a:latin typeface="Calibri" pitchFamily="34" charset="0"/>
+                <a:ea typeface="Calibri" pitchFamily="34" charset="-122"/>
+                <a:cs typeface="Calibri" pitchFamily="34" charset="-120"/>
+              </a:rPr>
+              <a:t>Verarmter Adliger</a:t>
+            </a:r>
+            <a:endParaRPr lang="en-US" sz="1300" dirty="0"/>
+          </a:p>
+        </p:txBody>
+      </p:sp>
+      <p:sp>
+        <p:nvSpPr>
+          <p:cNvPr id="13" name="Text 11"/>
+          <p:cNvSpPr txBox="1"/>
+          <p:nvPr/>
+        </p:nvSpPr>
+        <p:spPr>
+          <a:xfrm>
+            <a:off x="3246120" y="3493008"/>
+            <a:ext cx="2606040" cy="457200"/>
+          </a:xfrm>
+          <a:prstGeom prst="roundRect">
+            <a:avLst>
+              <a:gd name="adj" fmla="val 20000"/>
+            </a:avLst>
+          </a:prstGeom>
+          <a:solidFill>
+            <a:srgbClr val="F4ECDE"/>
+          </a:solidFill>
+          <a:ln/>
+        </p:spPr>
+        <p:txBody>
+          <a:bodyPr wrap="square" lIns="25400" tIns="25400" rIns="25400" bIns="25400" rtlCol="0" anchor="ctr"/>
+          <a:lstStyle/>
+          <a:p>
+            <a:pPr algn="ctr" indent="0" marL="0">
+              <a:buNone/>
+            </a:pPr>
+            <a:r>
+              <a:rPr lang="en-US" sz="1300" b="1" dirty="0">
+                <a:solidFill>
+                  <a:srgbClr val="2B2318"/>
+                </a:solidFill>
+                <a:latin typeface="Calibri" pitchFamily="34" charset="0"/>
+                <a:ea typeface="Calibri" pitchFamily="34" charset="-122"/>
+                <a:cs typeface="Calibri" pitchFamily="34" charset="-120"/>
+              </a:rPr>
+              <a:t>Zurückgekaufter Schuldsklave</a:t>
+            </a:r>
+            <a:endParaRPr lang="en-US" sz="1300" dirty="0"/>
+          </a:p>
+        </p:txBody>
+      </p:sp>
+      <p:sp>
+        <p:nvSpPr>
+          <p:cNvPr id="14" name="Text 12"/>
+          <p:cNvSpPr txBox="1"/>
+          <p:nvPr/>
+        </p:nvSpPr>
+        <p:spPr>
+          <a:xfrm>
+            <a:off x="6035040" y="3493008"/>
+            <a:ext cx="2606040" cy="457200"/>
+          </a:xfrm>
+          <a:prstGeom prst="roundRect">
+            <a:avLst>
+              <a:gd name="adj" fmla="val 20000"/>
+            </a:avLst>
+          </a:prstGeom>
+          <a:solidFill>
+            <a:srgbClr val="F4ECDE"/>
+          </a:solidFill>
+          <a:ln/>
+        </p:spPr>
+        <p:txBody>
+          <a:bodyPr wrap="square" lIns="25400" tIns="25400" rIns="25400" bIns="25400" rtlCol="0" anchor="ctr"/>
+          <a:lstStyle/>
+          <a:p>
+            <a:pPr algn="ctr" indent="0" marL="0">
+              <a:buNone/>
+            </a:pPr>
+            <a:r>
+              <a:rPr lang="en-US" sz="1300" b="1" dirty="0">
+                <a:solidFill>
+                  <a:srgbClr val="2B2318"/>
+                </a:solidFill>
+                <a:latin typeface="Calibri" pitchFamily="34" charset="0"/>
+                <a:ea typeface="Calibri" pitchFamily="34" charset="-122"/>
+                <a:cs typeface="Calibri" pitchFamily="34" charset="-120"/>
+              </a:rPr>
+              <a:t>Tagelöhner (Thete)</a:t>
+            </a:r>
+            <a:endParaRPr lang="en-US" sz="1300" dirty="0"/>
+          </a:p>
+        </p:txBody>
+      </p:sp>
+      <p:sp>
+        <p:nvSpPr>
+          <p:cNvPr id="15" name="Text 13"/>
+          <p:cNvSpPr txBox="1"/>
+          <p:nvPr/>
+        </p:nvSpPr>
+        <p:spPr>
+          <a:xfrm>
+            <a:off x="457200" y="4160520"/>
+            <a:ext cx="8229600" cy="320040"/>
+          </a:xfrm>
+          <a:prstGeom prst="rect">
+            <a:avLst/>
+          </a:prstGeom>
+          <a:noFill/>
+          <a:ln/>
+        </p:spPr>
+        <p:txBody>
+          <a:bodyPr wrap="square" lIns="0" tIns="0" rIns="0" bIns="0" rtlCol="0" anchor="t"/>
+          <a:lstStyle/>
+          <a:p>
+            <a:pPr indent="0" marL="0">
+              <a:buNone/>
+            </a:pPr>
+            <a:r>
+              <a:rPr lang="en-US" sz="1500" b="1" i="1" dirty="0">
+                <a:solidFill>
+                  <a:srgbClr val="AD4426"/>
+                </a:solidFill>
+                <a:latin typeface="Calibri" pitchFamily="34" charset="0"/>
+                <a:ea typeface="Calibri" pitchFamily="34" charset="-122"/>
+                <a:cs typeface="Calibri" pitchFamily="34" charset="-120"/>
+              </a:rPr>
+              <a:t>Und wo steht eine Frau?</a:t>
+            </a:r>
+            <a:endParaRPr lang="en-US" sz="1500" dirty="0"/>
+          </a:p>
+        </p:txBody>
+      </p:sp>
+      <p:sp>
+        <p:nvSpPr>
+          <p:cNvPr id="16" name="Text 14"/>
+          <p:cNvSpPr txBox="1"/>
+          <p:nvPr/>
+        </p:nvSpPr>
+        <p:spPr>
+          <a:xfrm>
+            <a:off x="457200" y="4754880"/>
+            <a:ext cx="4572000" cy="182880"/>
+          </a:xfrm>
+          <a:prstGeom prst="rect">
+            <a:avLst/>
+          </a:prstGeom>
+          <a:noFill/>
+          <a:ln/>
+        </p:spPr>
+        <p:txBody>
+          <a:bodyPr wrap="square" lIns="0" tIns="0" rIns="0" bIns="0" rtlCol="0" anchor="t"/>
+          <a:lstStyle/>
+          <a:p>
+            <a:pPr indent="0" marL="0">
+              <a:buNone/>
+            </a:pPr>
+            <a:r>
+              <a:rPr lang="en-US" sz="900" dirty="0">
+                <a:solidFill>
+                  <a:srgbClr val="998C77"/>
+                </a:solidFill>
+                <a:latin typeface="Calibri" pitchFamily="34" charset="0"/>
+                <a:ea typeface="Calibri" pitchFamily="34" charset="-122"/>
+                <a:cs typeface="Calibri" pitchFamily="34" charset="-120"/>
+              </a:rPr>
+              <a:t>Von der Polis zur Krise</a:t>
+            </a:r>
+            <a:endParaRPr lang="en-US" sz="900" dirty="0"/>
+          </a:p>
+        </p:txBody>
+      </p:sp>
+      <p:sp>
+        <p:nvSpPr>
+          <p:cNvPr id="17" name="Text 15"/>
+          <p:cNvSpPr txBox="1"/>
+          <p:nvPr/>
+        </p:nvSpPr>
+        <p:spPr>
+          <a:xfrm>
+            <a:off x="8229600" y="4754880"/>
+            <a:ext cx="457200" cy="182880"/>
+          </a:xfrm>
+          <a:prstGeom prst="rect">
+            <a:avLst/>
+          </a:prstGeom>
+          <a:noFill/>
+          <a:ln/>
+        </p:spPr>
+        <p:txBody>
+          <a:bodyPr wrap="square" lIns="0" tIns="0" rIns="0" bIns="0" rtlCol="0" anchor="t"/>
+          <a:lstStyle/>
+          <a:p>
+            <a:pPr algn="r" indent="0" marL="0">
+              <a:buNone/>
+            </a:pPr>
+            <a:r>
+              <a:rPr lang="en-US" sz="900" dirty="0">
+                <a:solidFill>
+                  <a:srgbClr val="998C77"/>
+                </a:solidFill>
+                <a:latin typeface="Calibri" pitchFamily="34" charset="0"/>
+                <a:ea typeface="Calibri" pitchFamily="34" charset="-122"/>
+                <a:cs typeface="Calibri" pitchFamily="34" charset="-120"/>
+              </a:rPr>
+              <a:t>31</a:t>
+            </a:r>
+            <a:endParaRPr lang="en-US" sz="900" dirty="0"/>
+          </a:p>
+        </p:txBody>
+      </p:sp>
+    </p:spTree>
+  </p:cSld>
+  <p:clrMapOvr>
+    <a:masterClrMapping/>
+  </p:clrMapOvr>
+</p:sld>
+</file>
+
+<file path=ppt/slides/slide32.xml><?xml version="1.0" encoding="utf-8"?>
+<p:sld xmlns:a="http://schemas.openxmlformats.org/drawingml/2006/main" xmlns:r="http://schemas.openxmlformats.org/officeDocument/2006/relationships" xmlns:p="http://schemas.openxmlformats.org/presentationml/2006/main">
+  <p:cSld name="Slide 32">
     <p:bg>
       <p:bgPr>
         <a:solidFill>
@@ -21417,7 +22082,7 @@
                 <a:ea typeface="Calibri" pitchFamily="34" charset="-122"/>
                 <a:cs typeface="Calibri" pitchFamily="34" charset="-120"/>
               </a:rPr>
-              <a:t>31</a:t>
+              <a:t>32</a:t>
             </a:r>
             <a:endParaRPr lang="en-US" sz="900" dirty="0"/>
           </a:p>

--- a/Geschichte_11/Doppelstunde_Solon/Folien_Doppelstunde_Drakon_Solon.pptx
+++ b/Geschichte_11/Doppelstunde_Solon/Folien_Doppelstunde_Drakon_Solon.pptx
@@ -2117,7 +2117,7 @@
           <a:p>
             <a:r>
               <a:rPr lang="en-US" dirty="0"/>
-              <a:t>30–38 Min. Erwartung: P1 ✘ (Schuldknechtschaft bleibt), P2 ✘, P3 ~ (geschriebenes, verbindliches Recht, 51 Richter, Blutrache aufgehoben; Vollzug bleibt bei der Sippe), P4 ✘, P5 ✘. Das Beispiel P3 bewusst stehen lassen – es zeigt, wie ein Beleg aussieht.</a:t>
+              <a:t>30–38 Min. Erwartung: Schuldknechtschaft ✘ (Schuldknechtschaft bleibt), Landbesitz ✘, Recht ~ (geschriebenes, verbindliches Recht, 51 Richter, Blutrache aufgehoben; Vollzug bleibt bei der Sippe), Politische Macht ✘, Bürgerkrieg ✘. Das Beispiel „Recht nur beim Adel“ bewusst stehen lassen – es zeigt, wie ein Beleg aussieht.</a:t>
             </a:r>
             <a:endParaRPr lang="en-US" dirty="0"/>
           </a:p>
@@ -2384,11 +2384,11 @@
             <a:r>
               <a:rPr lang="en-US" dirty="0"/>
               <a:t>57–63 Min. Erst NACH der Besprechung zeigen. Begründungen:
-P1: Drakon ✘ / Solon ✔ Schulden getilgt, Verbot der Schuldknechtschaft, Rückkauf.
-P2: beide ✘ – Solon lehnt die Zwangsenteignung ab.
-P3: Drakon ~ geschriebenes Recht, Ende der Blutrache, aber strenge Strafen / Solon ✔ Klagerecht jedes Bürgers.
-P4: Solon ~ Rechte nach Besitz statt Herkunft, Volksversammlung gestärkt – aber Theten nicht wählbar, Archonten nur 1. Klasse.
-P5: Solon ~ zunächst Beruhigung, bald neue bürgerkriegsähnliche Kämpfe (LB S. 22).
+Schuldknechtschaft: Drakon ✘ / Solon ✔ Schulden getilgt, Verbot der Schuldknechtschaft, Rückkauf.
+Landbesitz: beide ✘ – Solon lehnt die Zwangsenteignung ab.
+Recht: Drakon ~ geschriebenes Recht, Ende der Blutrache, aber strenge Strafen / Solon ✔ Klagerecht jedes Bürgers.
+Politische Macht: Solon ~ Rechte nach Besitz statt Herkunft, Volksversammlung gestärkt – aber Theten nicht wählbar, Archonten nur 1. Klasse.
+Bürgerkrieg: Solon ~ zunächst Beruhigung, bald neue bürgerkriegsähnliche Kämpfe (LB S. 22).
 Abweichende, gut begründete Einschätzungen sind zulässig.</a:t>
             </a:r>
             <a:endParaRPr lang="en-US" dirty="0"/>
@@ -8874,24 +8874,24 @@
         </p:nvSpPr>
         <p:spPr>
           <a:xfrm>
-            <a:off x="457200" y="1115568"/>
-            <a:ext cx="8229600" cy="274320"/>
-          </a:xfrm>
-          <a:prstGeom prst="rect">
-            <a:avLst/>
-          </a:prstGeom>
-          <a:noFill/>
-          <a:ln/>
-        </p:spPr>
-        <p:txBody>
-          <a:bodyPr wrap="square" lIns="0" tIns="0" rIns="0" bIns="0" rtlCol="0" anchor="t"/>
-          <a:lstStyle/>
-          <a:p>
-            <a:pPr indent="0" marL="0">
-              <a:buNone/>
-            </a:pPr>
-            <a:r>
-              <a:rPr lang="en-US" sz="1300" i="1" dirty="0">
+            <a:off x="457200" y="1097280"/>
+            <a:ext cx="8229600" cy="420624"/>
+          </a:xfrm>
+          <a:prstGeom prst="rect">
+            <a:avLst/>
+          </a:prstGeom>
+          <a:noFill/>
+          <a:ln/>
+        </p:spPr>
+        <p:txBody>
+          <a:bodyPr wrap="square" lIns="0" tIns="0" rIns="0" bIns="0" rtlCol="0" anchor="ctr"/>
+          <a:lstStyle/>
+          <a:p>
+            <a:pPr indent="0" marL="0">
+              <a:buNone/>
+            </a:pPr>
+            <a:r>
+              <a:rPr lang="en-US" sz="1200" b="1" dirty="0">
                 <a:solidFill>
                   <a:srgbClr val="5A5044"/>
                 </a:solidFill>
@@ -8899,9 +8899,9 @@
                 <a:ea typeface="Calibri" pitchFamily="34" charset="-122"/>
                 <a:cs typeface="Calibri" pitchFamily="34" charset="-120"/>
               </a:rPr>
-              <a:t>Ergänzt die Lücken 1–14 mit dem Wortspeicher. Fett gedruckt: neue Begriffe.</a:t>
-            </a:r>
-            <a:endParaRPr lang="en-US" sz="1300" dirty="0"/>
+              <a:t>1. Lies den Text auf deinem Blatt.   2. Setze die Wörter aus dem Wortspeicher ein (jedes passt genau einmal).   3. Vergleiche mit deinem Nachbarn.</a:t>
+            </a:r>
+            <a:endParaRPr lang="en-US" sz="1200" dirty="0"/>
           </a:p>
         </p:txBody>
       </p:sp>
@@ -8913,12 +8913,12 @@
         </p:nvSpPr>
         <p:spPr>
           <a:xfrm>
-            <a:off x="457200" y="1444752"/>
-            <a:ext cx="8229600" cy="2286000"/>
+            <a:off x="457200" y="1572768"/>
+            <a:ext cx="8229600" cy="2139696"/>
           </a:xfrm>
           <a:prstGeom prst="roundRect">
             <a:avLst>
-              <a:gd name="adj" fmla="val 3200"/>
+              <a:gd name="adj" fmla="val 3419"/>
             </a:avLst>
           </a:prstGeom>
           <a:solidFill>
@@ -8940,8 +8940,8 @@
         </p:nvSpPr>
         <p:spPr>
           <a:xfrm>
-            <a:off x="621792" y="1490472"/>
-            <a:ext cx="7900416" cy="2194560"/>
+            <a:off x="621792" y="1600200"/>
+            <a:ext cx="7900416" cy="2084832"/>
           </a:xfrm>
           <a:prstGeom prst="rect">
             <a:avLst/>
@@ -8957,7 +8957,7 @@
               <a:buNone/>
             </a:pPr>
             <a:r>
-              <a:rPr lang="en-US" sz="1350" dirty="0">
+              <a:rPr lang="en-US" sz="1300" dirty="0">
                 <a:solidFill>
                   <a:srgbClr val="2B2318"/>
                 </a:solidFill>
@@ -8971,7 +8971,7 @@
               <a:buNone/>
             </a:pPr>
             <a:r>
-              <a:rPr lang="en-US" sz="1350" b="1" dirty="0">
+              <a:rPr lang="en-US" sz="1300" b="1" dirty="0">
                 <a:solidFill>
                   <a:srgbClr val="AD4426"/>
                 </a:solidFill>
@@ -8985,7 +8985,7 @@
               <a:buNone/>
             </a:pPr>
             <a:r>
-              <a:rPr lang="en-US" sz="1350" dirty="0">
+              <a:rPr lang="en-US" sz="1300" dirty="0">
                 <a:solidFill>
                   <a:srgbClr val="2B2318"/>
                 </a:solidFill>
@@ -8999,7 +8999,7 @@
               <a:buNone/>
             </a:pPr>
             <a:r>
-              <a:rPr lang="en-US" sz="1350" b="1" dirty="0">
+              <a:rPr lang="en-US" sz="1300" b="1" dirty="0">
                 <a:solidFill>
                   <a:srgbClr val="AD4426"/>
                 </a:solidFill>
@@ -9013,7 +9013,7 @@
               <a:buNone/>
             </a:pPr>
             <a:r>
-              <a:rPr lang="en-US" sz="1350" dirty="0">
+              <a:rPr lang="en-US" sz="1300" dirty="0">
                 <a:solidFill>
                   <a:srgbClr val="2B2318"/>
                 </a:solidFill>
@@ -9027,7 +9027,7 @@
               <a:buNone/>
             </a:pPr>
             <a:r>
-              <a:rPr lang="en-US" sz="1350" b="1" dirty="0">
+              <a:rPr lang="en-US" sz="1300" b="1" dirty="0">
                 <a:solidFill>
                   <a:srgbClr val="AD4426"/>
                 </a:solidFill>
@@ -9041,7 +9041,7 @@
               <a:buNone/>
             </a:pPr>
             <a:r>
-              <a:rPr lang="en-US" sz="1350" dirty="0">
+              <a:rPr lang="en-US" sz="1300" dirty="0">
                 <a:solidFill>
                   <a:srgbClr val="2B2318"/>
                 </a:solidFill>
@@ -9055,7 +9055,7 @@
               <a:buNone/>
             </a:pPr>
             <a:r>
-              <a:rPr lang="en-US" sz="1350" b="1" dirty="0">
+              <a:rPr lang="en-US" sz="1300" b="1" dirty="0">
                 <a:solidFill>
                   <a:srgbClr val="AD4426"/>
                 </a:solidFill>
@@ -9069,7 +9069,7 @@
               <a:buNone/>
             </a:pPr>
             <a:r>
-              <a:rPr lang="en-US" sz="1350" dirty="0">
+              <a:rPr lang="en-US" sz="1300" dirty="0">
                 <a:solidFill>
                   <a:srgbClr val="2B2318"/>
                 </a:solidFill>
@@ -9082,7 +9082,7 @@
             <a:pPr indent="0" marL="0">
               <a:buNone/>
             </a:pPr>
-            <a:endParaRPr lang="en-US" sz="1350" dirty="0"/>
+            <a:endParaRPr lang="en-US" sz="1300" dirty="0"/>
           </a:p>
           <a:p>
             <a:pPr indent="0" marL="0">
@@ -9099,14 +9099,14 @@
               </a:rPr>
               <a:t> </a:t>
             </a:r>
-            <a:endParaRPr lang="en-US" sz="1350" dirty="0"/>
-          </a:p>
-          <a:p>
-            <a:pPr indent="0" marL="0">
-              <a:buNone/>
-            </a:pPr>
-            <a:r>
-              <a:rPr lang="en-US" sz="1350" dirty="0">
+            <a:endParaRPr lang="en-US" sz="1300" dirty="0"/>
+          </a:p>
+          <a:p>
+            <a:pPr indent="0" marL="0">
+              <a:buNone/>
+            </a:pPr>
+            <a:r>
+              <a:rPr lang="en-US" sz="1300" dirty="0">
                 <a:solidFill>
                   <a:srgbClr val="2B2318"/>
                 </a:solidFill>
@@ -9120,7 +9120,7 @@
               <a:buNone/>
             </a:pPr>
             <a:r>
-              <a:rPr lang="en-US" sz="1350" b="1" dirty="0">
+              <a:rPr lang="en-US" sz="1300" b="1" dirty="0">
                 <a:solidFill>
                   <a:srgbClr val="AD4426"/>
                 </a:solidFill>
@@ -9134,7 +9134,7 @@
               <a:buNone/>
             </a:pPr>
             <a:r>
-              <a:rPr lang="en-US" sz="1350" dirty="0">
+              <a:rPr lang="en-US" sz="1300" dirty="0">
                 <a:solidFill>
                   <a:srgbClr val="2B2318"/>
                 </a:solidFill>
@@ -9148,7 +9148,7 @@
               <a:buNone/>
             </a:pPr>
             <a:r>
-              <a:rPr lang="en-US" sz="1350" b="1" dirty="0">
+              <a:rPr lang="en-US" sz="1300" b="1" dirty="0">
                 <a:solidFill>
                   <a:srgbClr val="AD4426"/>
                 </a:solidFill>
@@ -9162,7 +9162,7 @@
               <a:buNone/>
             </a:pPr>
             <a:r>
-              <a:rPr lang="en-US" sz="1350" dirty="0">
+              <a:rPr lang="en-US" sz="1300" dirty="0">
                 <a:solidFill>
                   <a:srgbClr val="2B2318"/>
                 </a:solidFill>
@@ -9176,7 +9176,7 @@
               <a:buNone/>
             </a:pPr>
             <a:r>
-              <a:rPr lang="en-US" sz="1350" b="1" dirty="0">
+              <a:rPr lang="en-US" sz="1300" b="1" dirty="0">
                 <a:solidFill>
                   <a:srgbClr val="AD4426"/>
                 </a:solidFill>
@@ -9190,7 +9190,7 @@
               <a:buNone/>
             </a:pPr>
             <a:r>
-              <a:rPr lang="en-US" sz="1350" dirty="0">
+              <a:rPr lang="en-US" sz="1300" dirty="0">
                 <a:solidFill>
                   <a:srgbClr val="2B2318"/>
                 </a:solidFill>
@@ -9204,7 +9204,7 @@
               <a:buNone/>
             </a:pPr>
             <a:r>
-              <a:rPr lang="en-US" sz="1350" b="1" dirty="0">
+              <a:rPr lang="en-US" sz="1300" b="1" dirty="0">
                 <a:solidFill>
                   <a:srgbClr val="AD4426"/>
                 </a:solidFill>
@@ -9218,7 +9218,7 @@
               <a:buNone/>
             </a:pPr>
             <a:r>
-              <a:rPr lang="en-US" sz="1350" dirty="0">
+              <a:rPr lang="en-US" sz="1300" dirty="0">
                 <a:solidFill>
                   <a:srgbClr val="2B2318"/>
                 </a:solidFill>
@@ -9228,7 +9228,7 @@
               </a:rPr>
               <a:t> (griechisch: „Zusammensiedlung“).</a:t>
             </a:r>
-            <a:endParaRPr lang="en-US" sz="1350" dirty="0"/>
+            <a:endParaRPr lang="en-US" sz="1300" dirty="0"/>
           </a:p>
         </p:txBody>
       </p:sp>
@@ -10853,24 +10853,24 @@
         </p:nvSpPr>
         <p:spPr>
           <a:xfrm>
-            <a:off x="457200" y="1115568"/>
-            <a:ext cx="8229600" cy="274320"/>
-          </a:xfrm>
-          <a:prstGeom prst="rect">
-            <a:avLst/>
-          </a:prstGeom>
-          <a:noFill/>
-          <a:ln/>
-        </p:spPr>
-        <p:txBody>
-          <a:bodyPr wrap="square" lIns="0" tIns="0" rIns="0" bIns="0" rtlCol="0" anchor="t"/>
-          <a:lstStyle/>
-          <a:p>
-            <a:pPr indent="0" marL="0">
-              <a:buNone/>
-            </a:pPr>
-            <a:r>
-              <a:rPr lang="en-US" sz="1300" i="1" dirty="0">
+            <a:off x="457200" y="1097280"/>
+            <a:ext cx="8229600" cy="420624"/>
+          </a:xfrm>
+          <a:prstGeom prst="rect">
+            <a:avLst/>
+          </a:prstGeom>
+          <a:noFill/>
+          <a:ln/>
+        </p:spPr>
+        <p:txBody>
+          <a:bodyPr wrap="square" lIns="0" tIns="0" rIns="0" bIns="0" rtlCol="0" anchor="ctr"/>
+          <a:lstStyle/>
+          <a:p>
+            <a:pPr indent="0" marL="0">
+              <a:buNone/>
+            </a:pPr>
+            <a:r>
+              <a:rPr lang="en-US" sz="1200" b="1" dirty="0">
                 <a:solidFill>
                   <a:srgbClr val="5A5044"/>
                 </a:solidFill>
@@ -10878,9 +10878,9 @@
                 <a:ea typeface="Calibri" pitchFamily="34" charset="-122"/>
                 <a:cs typeface="Calibri" pitchFamily="34" charset="-120"/>
               </a:rPr>
-              <a:t>Ergänzt die Lücken 7–14.</a:t>
-            </a:r>
-            <a:endParaRPr lang="en-US" sz="1300" dirty="0"/>
+              <a:t>Ergänze die Lücken 7–14. Schreibe danach unter den Text in einem Satz: Was passiert, wenn die Bauern ihre Schulden nicht zurückzahlen können?</a:t>
+            </a:r>
+            <a:endParaRPr lang="en-US" sz="1200" dirty="0"/>
           </a:p>
         </p:txBody>
       </p:sp>
@@ -10892,12 +10892,12 @@
         </p:nvSpPr>
         <p:spPr>
           <a:xfrm>
-            <a:off x="457200" y="1444752"/>
-            <a:ext cx="8229600" cy="2286000"/>
+            <a:off x="457200" y="1572768"/>
+            <a:ext cx="8229600" cy="2139696"/>
           </a:xfrm>
           <a:prstGeom prst="roundRect">
             <a:avLst>
-              <a:gd name="adj" fmla="val 3200"/>
+              <a:gd name="adj" fmla="val 3419"/>
             </a:avLst>
           </a:prstGeom>
           <a:solidFill>
@@ -10919,8 +10919,8 @@
         </p:nvSpPr>
         <p:spPr>
           <a:xfrm>
-            <a:off x="621792" y="1490472"/>
-            <a:ext cx="7900416" cy="2194560"/>
+            <a:off x="621792" y="1600200"/>
+            <a:ext cx="7900416" cy="2084832"/>
           </a:xfrm>
           <a:prstGeom prst="rect">
             <a:avLst/>
@@ -10936,7 +10936,7 @@
               <a:buNone/>
             </a:pPr>
             <a:r>
-              <a:rPr lang="en-US" sz="1250" dirty="0">
+              <a:rPr lang="en-US" sz="1200" dirty="0">
                 <a:solidFill>
                   <a:srgbClr val="2B2318"/>
                 </a:solidFill>
@@ -10950,7 +10950,7 @@
               <a:buNone/>
             </a:pPr>
             <a:r>
-              <a:rPr lang="en-US" sz="1250" b="1" dirty="0">
+              <a:rPr lang="en-US" sz="1200" b="1" dirty="0">
                 <a:solidFill>
                   <a:srgbClr val="AD4426"/>
                 </a:solidFill>
@@ -10964,7 +10964,7 @@
               <a:buNone/>
             </a:pPr>
             <a:r>
-              <a:rPr lang="en-US" sz="1250" dirty="0">
+              <a:rPr lang="en-US" sz="1200" dirty="0">
                 <a:solidFill>
                   <a:srgbClr val="2B2318"/>
                 </a:solidFill>
@@ -10978,7 +10978,7 @@
               <a:buNone/>
             </a:pPr>
             <a:r>
-              <a:rPr lang="en-US" sz="1250" b="1" dirty="0">
+              <a:rPr lang="en-US" sz="1200" b="1" dirty="0">
                 <a:solidFill>
                   <a:srgbClr val="AD4426"/>
                 </a:solidFill>
@@ -10992,7 +10992,7 @@
               <a:buNone/>
             </a:pPr>
             <a:r>
-              <a:rPr lang="en-US" sz="1250" dirty="0">
+              <a:rPr lang="en-US" sz="1200" dirty="0">
                 <a:solidFill>
                   <a:srgbClr val="2B2318"/>
                 </a:solidFill>
@@ -11005,7 +11005,7 @@
             <a:pPr indent="0" marL="0">
               <a:buNone/>
             </a:pPr>
-            <a:endParaRPr lang="en-US" sz="1250" dirty="0"/>
+            <a:endParaRPr lang="en-US" sz="1200" dirty="0"/>
           </a:p>
           <a:p>
             <a:pPr indent="0" marL="0">
@@ -11022,14 +11022,14 @@
               </a:rPr>
               <a:t> </a:t>
             </a:r>
-            <a:endParaRPr lang="en-US" sz="1250" dirty="0"/>
-          </a:p>
-          <a:p>
-            <a:pPr indent="0" marL="0">
-              <a:buNone/>
-            </a:pPr>
-            <a:r>
-              <a:rPr lang="en-US" sz="1250" dirty="0">
+            <a:endParaRPr lang="en-US" sz="1200" dirty="0"/>
+          </a:p>
+          <a:p>
+            <a:pPr indent="0" marL="0">
+              <a:buNone/>
+            </a:pPr>
+            <a:r>
+              <a:rPr lang="en-US" sz="1200" dirty="0">
                 <a:solidFill>
                   <a:srgbClr val="2B2318"/>
                 </a:solidFill>
@@ -11043,7 +11043,7 @@
               <a:buNone/>
             </a:pPr>
             <a:r>
-              <a:rPr lang="en-US" sz="1250" b="1" dirty="0">
+              <a:rPr lang="en-US" sz="1200" b="1" dirty="0">
                 <a:solidFill>
                   <a:srgbClr val="AD4426"/>
                 </a:solidFill>
@@ -11057,7 +11057,7 @@
               <a:buNone/>
             </a:pPr>
             <a:r>
-              <a:rPr lang="en-US" sz="1250" dirty="0">
+              <a:rPr lang="en-US" sz="1200" dirty="0">
                 <a:solidFill>
                   <a:srgbClr val="2B2318"/>
                 </a:solidFill>
@@ -11071,7 +11071,7 @@
               <a:buNone/>
             </a:pPr>
             <a:r>
-              <a:rPr lang="en-US" sz="1250" b="1" dirty="0">
+              <a:rPr lang="en-US" sz="1200" b="1" dirty="0">
                 <a:solidFill>
                   <a:srgbClr val="AD4426"/>
                 </a:solidFill>
@@ -11085,7 +11085,7 @@
               <a:buNone/>
             </a:pPr>
             <a:r>
-              <a:rPr lang="en-US" sz="1250" dirty="0">
+              <a:rPr lang="en-US" sz="1200" dirty="0">
                 <a:solidFill>
                   <a:srgbClr val="2B2318"/>
                 </a:solidFill>
@@ -11099,7 +11099,7 @@
               <a:buNone/>
             </a:pPr>
             <a:r>
-              <a:rPr lang="en-US" sz="1250" b="1" dirty="0">
+              <a:rPr lang="en-US" sz="1200" b="1" dirty="0">
                 <a:solidFill>
                   <a:srgbClr val="AD4426"/>
                 </a:solidFill>
@@ -11113,7 +11113,7 @@
               <a:buNone/>
             </a:pPr>
             <a:r>
-              <a:rPr lang="en-US" sz="1250" dirty="0">
+              <a:rPr lang="en-US" sz="1200" dirty="0">
                 <a:solidFill>
                   <a:srgbClr val="2B2318"/>
                 </a:solidFill>
@@ -11127,7 +11127,7 @@
               <a:buNone/>
             </a:pPr>
             <a:r>
-              <a:rPr lang="en-US" sz="1250" b="1" dirty="0">
+              <a:rPr lang="en-US" sz="1200" b="1" dirty="0">
                 <a:solidFill>
                   <a:srgbClr val="AD4426"/>
                 </a:solidFill>
@@ -11141,7 +11141,7 @@
               <a:buNone/>
             </a:pPr>
             <a:r>
-              <a:rPr lang="en-US" sz="1250" dirty="0">
+              <a:rPr lang="en-US" sz="1200" dirty="0">
                 <a:solidFill>
                   <a:srgbClr val="2B2318"/>
                 </a:solidFill>
@@ -11155,7 +11155,7 @@
               <a:buNone/>
             </a:pPr>
             <a:r>
-              <a:rPr lang="en-US" sz="1250" b="1" dirty="0">
+              <a:rPr lang="en-US" sz="1200" b="1" dirty="0">
                 <a:solidFill>
                   <a:srgbClr val="AD4426"/>
                 </a:solidFill>
@@ -11169,7 +11169,7 @@
               <a:buNone/>
             </a:pPr>
             <a:r>
-              <a:rPr lang="en-US" sz="1250" dirty="0">
+              <a:rPr lang="en-US" sz="1200" dirty="0">
                 <a:solidFill>
                   <a:srgbClr val="2B2318"/>
                 </a:solidFill>
@@ -11182,7 +11182,7 @@
             <a:pPr indent="0" marL="0">
               <a:buNone/>
             </a:pPr>
-            <a:endParaRPr lang="en-US" sz="1250" dirty="0"/>
+            <a:endParaRPr lang="en-US" sz="1200" dirty="0"/>
           </a:p>
           <a:p>
             <a:pPr indent="0" marL="0">
@@ -11199,14 +11199,14 @@
               </a:rPr>
               <a:t> </a:t>
             </a:r>
-            <a:endParaRPr lang="en-US" sz="1250" dirty="0"/>
-          </a:p>
-          <a:p>
-            <a:pPr indent="0" marL="0">
-              <a:buNone/>
-            </a:pPr>
-            <a:r>
-              <a:rPr lang="en-US" sz="1250" dirty="0">
+            <a:endParaRPr lang="en-US" sz="1200" dirty="0"/>
+          </a:p>
+          <a:p>
+            <a:pPr indent="0" marL="0">
+              <a:buNone/>
+            </a:pPr>
+            <a:r>
+              <a:rPr lang="en-US" sz="1200" dirty="0">
                 <a:solidFill>
                   <a:srgbClr val="2B2318"/>
                 </a:solidFill>
@@ -11220,7 +11220,7 @@
               <a:buNone/>
             </a:pPr>
             <a:r>
-              <a:rPr lang="en-US" sz="1250" b="1" dirty="0">
+              <a:rPr lang="en-US" sz="1200" b="1" dirty="0">
                 <a:solidFill>
                   <a:srgbClr val="AD4426"/>
                 </a:solidFill>
@@ -11234,7 +11234,7 @@
               <a:buNone/>
             </a:pPr>
             <a:r>
-              <a:rPr lang="en-US" sz="1250" dirty="0">
+              <a:rPr lang="en-US" sz="1200" dirty="0">
                 <a:solidFill>
                   <a:srgbClr val="2B2318"/>
                 </a:solidFill>
@@ -11244,7 +11244,7 @@
               </a:rPr>
               <a:t>.</a:t>
             </a:r>
-            <a:endParaRPr lang="en-US" sz="1250" dirty="0"/>
+            <a:endParaRPr lang="en-US" sz="1200" dirty="0"/>
           </a:p>
         </p:txBody>
       </p:sp>
@@ -13276,12 +13276,12 @@
         </p:nvSpPr>
         <p:spPr>
           <a:xfrm>
-            <a:off x="457200" y="2560320"/>
-            <a:ext cx="4754880" cy="1691640"/>
+            <a:off x="457200" y="2487168"/>
+            <a:ext cx="4754880" cy="1920240"/>
           </a:xfrm>
           <a:prstGeom prst="roundRect">
             <a:avLst>
-              <a:gd name="adj" fmla="val 4324"/>
+              <a:gd name="adj" fmla="val 3810"/>
             </a:avLst>
           </a:prstGeom>
           <a:solidFill>
@@ -13303,8 +13303,90 @@
         </p:nvSpPr>
         <p:spPr>
           <a:xfrm>
-            <a:off x="685800" y="2697480"/>
-            <a:ext cx="4389120" cy="548640"/>
+            <a:off x="658368" y="2578608"/>
+            <a:ext cx="4434840" cy="1188720"/>
+          </a:xfrm>
+          <a:prstGeom prst="rect">
+            <a:avLst/>
+          </a:prstGeom>
+          <a:noFill/>
+          <a:ln/>
+        </p:spPr>
+        <p:txBody>
+          <a:bodyPr wrap="square" lIns="0" tIns="0" rIns="0" bIns="0" rtlCol="0" anchor="ctr"/>
+          <a:lstStyle/>
+          <a:p>
+            <a:pPr indent="0" marL="0">
+              <a:spcAft>
+                <a:spcPts val="300"/>
+              </a:spcAft>
+              <a:buNone/>
+            </a:pPr>
+            <a:r>
+              <a:rPr lang="en-US" sz="1200" dirty="0">
+                <a:solidFill>
+                  <a:srgbClr val="2B2318"/>
+                </a:solidFill>
+                <a:latin typeface="Calibri" pitchFamily="34" charset="0"/>
+                <a:ea typeface="Calibri" pitchFamily="34" charset="-122"/>
+                <a:cs typeface="Calibri" pitchFamily="34" charset="-120"/>
+              </a:rPr>
+              <a:t>1. Entscheide dich für einen Faktor, z. B. Gebirge, Landmangel oder Adel.</a:t>
+            </a:r>
+            <a:endParaRPr lang="en-US" sz="1200" dirty="0"/>
+          </a:p>
+          <a:p>
+            <a:pPr indent="0" marL="0">
+              <a:spcAft>
+                <a:spcPts val="300"/>
+              </a:spcAft>
+              <a:buNone/>
+            </a:pPr>
+            <a:r>
+              <a:rPr lang="en-US" sz="1200" dirty="0">
+                <a:solidFill>
+                  <a:srgbClr val="2B2318"/>
+                </a:solidFill>
+                <a:latin typeface="Calibri" pitchFamily="34" charset="0"/>
+                <a:ea typeface="Calibri" pitchFamily="34" charset="-122"/>
+                <a:cs typeface="Calibri" pitchFamily="34" charset="-120"/>
+              </a:rPr>
+              <a:t>2. Begründe in 2–3 Sätzen mit Informationen aus dem Lückentext.</a:t>
+            </a:r>
+            <a:endParaRPr lang="en-US" sz="1200" dirty="0"/>
+          </a:p>
+          <a:p>
+            <a:pPr indent="0" marL="0">
+              <a:spcAft>
+                <a:spcPts val="300"/>
+              </a:spcAft>
+              <a:buNone/>
+            </a:pPr>
+            <a:r>
+              <a:rPr lang="en-US" sz="1200" dirty="0">
+                <a:solidFill>
+                  <a:srgbClr val="2B2318"/>
+                </a:solidFill>
+                <a:latin typeface="Calibri" pitchFamily="34" charset="0"/>
+                <a:ea typeface="Calibri" pitchFamily="34" charset="-122"/>
+                <a:cs typeface="Calibri" pitchFamily="34" charset="-120"/>
+              </a:rPr>
+              <a:t>3. Tausche mit deinem Nachbarn und prüft mit der Checkliste.</a:t>
+            </a:r>
+            <a:endParaRPr lang="en-US" sz="1200" dirty="0"/>
+          </a:p>
+        </p:txBody>
+      </p:sp>
+      <p:sp>
+        <p:nvSpPr>
+          <p:cNvPr id="9" name="Text 7"/>
+          <p:cNvSpPr txBox="1"/>
+          <p:nvPr/>
+        </p:nvSpPr>
+        <p:spPr>
+          <a:xfrm>
+            <a:off x="658368" y="3840480"/>
+            <a:ext cx="4434840" cy="502920"/>
           </a:xfrm>
           <a:prstGeom prst="rect">
             <a:avLst/>
@@ -13320,46 +13402,7 @@
               <a:buNone/>
             </a:pPr>
             <a:r>
-              <a:rPr lang="en-US" sz="1400" b="1" dirty="0">
-                <a:solidFill>
-                  <a:srgbClr val="2B2318"/>
-                </a:solidFill>
-                <a:latin typeface="Calibri" pitchFamily="34" charset="0"/>
-                <a:ea typeface="Calibri" pitchFamily="34" charset="-122"/>
-                <a:cs typeface="Calibri" pitchFamily="34" charset="-120"/>
-              </a:rPr>
-              <a:t>Schreibt 2–3 Sätze. Nutzt den Lückentext.</a:t>
-            </a:r>
-            <a:endParaRPr lang="en-US" sz="1400" dirty="0"/>
-          </a:p>
-        </p:txBody>
-      </p:sp>
-      <p:sp>
-        <p:nvSpPr>
-          <p:cNvPr id="9" name="Text 7"/>
-          <p:cNvSpPr txBox="1"/>
-          <p:nvPr/>
-        </p:nvSpPr>
-        <p:spPr>
-          <a:xfrm>
-            <a:off x="685800" y="3337560"/>
-            <a:ext cx="4389120" cy="822960"/>
-          </a:xfrm>
-          <a:prstGeom prst="rect">
-            <a:avLst/>
-          </a:prstGeom>
-          <a:noFill/>
-          <a:ln/>
-        </p:spPr>
-        <p:txBody>
-          <a:bodyPr wrap="square" lIns="0" tIns="0" rIns="0" bIns="0" rtlCol="0" anchor="t"/>
-          <a:lstStyle/>
-          <a:p>
-            <a:pPr indent="0" marL="0">
-              <a:buNone/>
-            </a:pPr>
-            <a:r>
-              <a:rPr lang="en-US" sz="1400" i="1" dirty="0">
+              <a:rPr lang="en-US" sz="1200" i="1" dirty="0">
                 <a:solidFill>
                   <a:srgbClr val="5A5044"/>
                 </a:solidFill>
@@ -13369,7 +13412,7 @@
               </a:rPr>
               <a:t>„Im Kontext der damaligen Zeit war … am wichtigsten, da … Dies führte zu …“</a:t>
             </a:r>
-            <a:endParaRPr lang="en-US" sz="1400" dirty="0"/>
+            <a:endParaRPr lang="en-US" sz="1200" dirty="0"/>
           </a:p>
         </p:txBody>
       </p:sp>
@@ -13381,12 +13424,12 @@
         </p:nvSpPr>
         <p:spPr>
           <a:xfrm>
-            <a:off x="5440680" y="2560320"/>
-            <a:ext cx="3246120" cy="1691640"/>
+            <a:off x="5440680" y="2487168"/>
+            <a:ext cx="3246120" cy="1920240"/>
           </a:xfrm>
           <a:prstGeom prst="roundRect">
             <a:avLst>
-              <a:gd name="adj" fmla="val 4324"/>
+              <a:gd name="adj" fmla="val 3810"/>
             </a:avLst>
           </a:prstGeom>
           <a:solidFill>
@@ -13876,8 +13919,8 @@
         </p:nvSpPr>
         <p:spPr>
           <a:xfrm>
-            <a:off x="731520" y="1965960"/>
-            <a:ext cx="4389120" cy="1097280"/>
+            <a:off x="731520" y="1920240"/>
+            <a:ext cx="4389120" cy="685800"/>
           </a:xfrm>
           <a:prstGeom prst="rect">
             <a:avLst/>
@@ -13893,7 +13936,7 @@
               <a:buNone/>
             </a:pPr>
             <a:r>
-              <a:rPr lang="en-US" sz="2200" b="1" dirty="0">
+              <a:rPr lang="en-US" sz="2000" b="1" dirty="0">
                 <a:solidFill>
                   <a:srgbClr val="FFFFFF"/>
                 </a:solidFill>
@@ -13901,9 +13944,9 @@
                 <a:ea typeface="Cambria" pitchFamily="34" charset="-122"/>
                 <a:cs typeface="Cambria" pitchFamily="34" charset="-120"/>
               </a:rPr>
-              <a:t>Notiert beim Hören: Welche Probleme hat Athen?</a:t>
-            </a:r>
-            <a:endParaRPr lang="en-US" sz="2200" dirty="0"/>
+              <a:t>Welche Probleme hat Athen um 600 v. Chr.?</a:t>
+            </a:r>
+            <a:endParaRPr lang="en-US" sz="2000" dirty="0"/>
           </a:p>
         </p:txBody>
       </p:sp>
@@ -13915,24 +13958,27 @@
         </p:nvSpPr>
         <p:spPr>
           <a:xfrm>
-            <a:off x="731520" y="3154680"/>
-            <a:ext cx="4389120" cy="365760"/>
-          </a:xfrm>
-          <a:prstGeom prst="rect">
-            <a:avLst/>
-          </a:prstGeom>
-          <a:noFill/>
-          <a:ln/>
-        </p:spPr>
-        <p:txBody>
-          <a:bodyPr wrap="square" lIns="0" tIns="0" rIns="0" bIns="0" rtlCol="0" anchor="t"/>
-          <a:lstStyle/>
-          <a:p>
-            <a:pPr indent="0" marL="0">
-              <a:buNone/>
-            </a:pPr>
-            <a:r>
-              <a:rPr lang="en-US" sz="1400" dirty="0">
+            <a:off x="731520" y="2697480"/>
+            <a:ext cx="4389120" cy="868680"/>
+          </a:xfrm>
+          <a:prstGeom prst="rect">
+            <a:avLst/>
+          </a:prstGeom>
+          <a:noFill/>
+          <a:ln/>
+        </p:spPr>
+        <p:txBody>
+          <a:bodyPr wrap="square" lIns="0" tIns="0" rIns="0" bIns="0" rtlCol="0" anchor="ctr"/>
+          <a:lstStyle/>
+          <a:p>
+            <a:pPr indent="0" marL="0">
+              <a:spcAft>
+                <a:spcPts val="400"/>
+              </a:spcAft>
+              <a:buNone/>
+            </a:pPr>
+            <a:r>
+              <a:rPr lang="en-US" sz="1300" dirty="0">
                 <a:solidFill>
                   <a:srgbClr val="E8DFD0"/>
                 </a:solidFill>
@@ -13940,9 +13986,29 @@
                 <a:ea typeface="Calibri" pitchFamily="34" charset="-122"/>
                 <a:cs typeface="Calibri" pitchFamily="34" charset="-120"/>
               </a:rPr>
-              <a:t>Stimmt eure Vermutung vom Ende des Lückentextes?</a:t>
-            </a:r>
-            <a:endParaRPr lang="en-US" sz="1400" dirty="0"/>
+              <a:t>1. Notiere beim Hören alle Probleme in Stichpunkten untereinander.</a:t>
+            </a:r>
+            <a:endParaRPr lang="en-US" sz="1300" dirty="0"/>
+          </a:p>
+          <a:p>
+            <a:pPr indent="0" marL="0">
+              <a:spcAft>
+                <a:spcPts val="400"/>
+              </a:spcAft>
+              <a:buNone/>
+            </a:pPr>
+            <a:r>
+              <a:rPr lang="en-US" sz="1300" dirty="0">
+                <a:solidFill>
+                  <a:srgbClr val="E8DFD0"/>
+                </a:solidFill>
+                <a:latin typeface="Calibri" pitchFamily="34" charset="0"/>
+                <a:ea typeface="Calibri" pitchFamily="34" charset="-122"/>
+                <a:cs typeface="Calibri" pitchFamily="34" charset="-120"/>
+              </a:rPr>
+              <a:t>2. Vergleiche danach mit deiner Vermutung vom Ende des Lückentextes.</a:t>
+            </a:r>
+            <a:endParaRPr lang="en-US" sz="1300" dirty="0"/>
           </a:p>
         </p:txBody>
       </p:sp>
@@ -14167,6 +14233,45 @@
           </a:p>
         </p:txBody>
       </p:sp>
+      <p:sp>
+        <p:nvSpPr>
+          <p:cNvPr id="4" name="Text 2"/>
+          <p:cNvSpPr txBox="1"/>
+          <p:nvPr/>
+        </p:nvSpPr>
+        <p:spPr>
+          <a:xfrm>
+            <a:off x="457200" y="1097280"/>
+            <a:ext cx="8229600" cy="320040"/>
+          </a:xfrm>
+          <a:prstGeom prst="rect">
+            <a:avLst/>
+          </a:prstGeom>
+          <a:noFill/>
+          <a:ln/>
+        </p:spPr>
+        <p:txBody>
+          <a:bodyPr wrap="square" lIns="0" tIns="0" rIns="0" bIns="0" rtlCol="0" anchor="t"/>
+          <a:lstStyle/>
+          <a:p>
+            <a:pPr indent="0" marL="0">
+              <a:buNone/>
+            </a:pPr>
+            <a:r>
+              <a:rPr lang="en-US" sz="1300" b="1" dirty="0">
+                <a:solidFill>
+                  <a:srgbClr val="5A5044"/>
+                </a:solidFill>
+                <a:latin typeface="Calibri" pitchFamily="34" charset="0"/>
+                <a:ea typeface="Calibri" pitchFamily="34" charset="-122"/>
+                <a:cs typeface="Calibri" pitchFamily="34" charset="-120"/>
+              </a:rPr>
+              <a:t>Übertrage die Tabelle in dein Heft. Lass in jeder Zeile Platz für Zeichen und Stichworte.</a:t>
+            </a:r>
+            <a:endParaRPr lang="en-US" sz="1300" dirty="0"/>
+          </a:p>
+        </p:txBody>
+      </p:sp>
       <p:graphicFrame>
         <p:nvGraphicFramePr>
           <p:cNvPr id="26" name="Table 0"/>
@@ -14182,7 +14287,7 @@
           </p:nvPr>
         </p:nvGraphicFramePr>
         <p:xfrm>
-          <a:off x="457200" y="1280160"/>
+          <a:off x="457200" y="1481328"/>
           <a:ext cx="8229600" cy="914400"/>
         </p:xfrm>
         <a:graphic>
@@ -14195,7 +14300,7 @@
                 <a:gridCol w="1645920"/>
                 <a:gridCol w="1645920"/>
               </a:tblGrid>
-              <a:tr h="475488">
+              <a:tr h="448056">
                 <a:tc>
                   <a:txBody>
                     <a:bodyPr/>
@@ -14458,7 +14563,7 @@
                   </a:tcPr>
                 </a:tc>
               </a:tr>
-              <a:tr h="475488">
+              <a:tr h="448056">
                 <a:tc>
                   <a:txBody>
                     <a:bodyPr/>
@@ -14476,7 +14581,7 @@
                           <a:ea typeface="Cambria" pitchFamily="34" charset="-122"/>
                           <a:cs typeface="Cambria" pitchFamily="34" charset="-120"/>
                         </a:rPr>
-                        <a:t>P1</a:t>
+                        <a:t>1</a:t>
                       </a:r>
                       <a:endParaRPr lang="en-US" sz="1500" dirty="0">
                         <a:latin typeface="Cambria" charset="0"/>
@@ -14710,7 +14815,7 @@
                   </a:tcPr>
                 </a:tc>
               </a:tr>
-              <a:tr h="475488">
+              <a:tr h="448056">
                 <a:tc>
                   <a:txBody>
                     <a:bodyPr/>
@@ -14728,7 +14833,7 @@
                           <a:ea typeface="Cambria" pitchFamily="34" charset="-122"/>
                           <a:cs typeface="Cambria" pitchFamily="34" charset="-120"/>
                         </a:rPr>
-                        <a:t>P2</a:t>
+                        <a:t>2</a:t>
                       </a:r>
                       <a:endParaRPr lang="en-US" sz="1500" dirty="0">
                         <a:latin typeface="Cambria" charset="0"/>
@@ -14962,7 +15067,7 @@
                   </a:tcPr>
                 </a:tc>
               </a:tr>
-              <a:tr h="475488">
+              <a:tr h="448056">
                 <a:tc>
                   <a:txBody>
                     <a:bodyPr/>
@@ -14980,7 +15085,7 @@
                           <a:ea typeface="Cambria" pitchFamily="34" charset="-122"/>
                           <a:cs typeface="Cambria" pitchFamily="34" charset="-120"/>
                         </a:rPr>
-                        <a:t>P3</a:t>
+                        <a:t>3</a:t>
                       </a:r>
                       <a:endParaRPr lang="en-US" sz="1500" dirty="0">
                         <a:latin typeface="Cambria" charset="0"/>
@@ -15214,7 +15319,7 @@
                   </a:tcPr>
                 </a:tc>
               </a:tr>
-              <a:tr h="475488">
+              <a:tr h="448056">
                 <a:tc>
                   <a:txBody>
                     <a:bodyPr/>
@@ -15232,7 +15337,7 @@
                           <a:ea typeface="Cambria" pitchFamily="34" charset="-122"/>
                           <a:cs typeface="Cambria" pitchFamily="34" charset="-120"/>
                         </a:rPr>
-                        <a:t>P4</a:t>
+                        <a:t>4</a:t>
                       </a:r>
                       <a:endParaRPr lang="en-US" sz="1500" dirty="0">
                         <a:latin typeface="Cambria" charset="0"/>
@@ -15466,7 +15571,7 @@
                   </a:tcPr>
                 </a:tc>
               </a:tr>
-              <a:tr h="475488">
+              <a:tr h="448056">
                 <a:tc>
                   <a:txBody>
                     <a:bodyPr/>
@@ -15484,7 +15589,7 @@
                           <a:ea typeface="Cambria" pitchFamily="34" charset="-122"/>
                           <a:cs typeface="Cambria" pitchFamily="34" charset="-120"/>
                         </a:rPr>
-                        <a:t>P5</a:t>
+                        <a:t>5</a:t>
                       </a:r>
                       <a:endParaRPr lang="en-US" sz="1500" dirty="0">
                         <a:latin typeface="Cambria" charset="0"/>
@@ -15724,7 +15829,7 @@
       </p:graphicFrame>
       <p:sp>
         <p:nvSpPr>
-          <p:cNvPr id="5" name="Text 2"/>
+          <p:cNvPr id="6" name="Text 3"/>
           <p:cNvSpPr txBox="1"/>
           <p:nvPr/>
         </p:nvSpPr>
@@ -15763,7 +15868,7 @@
       </p:sp>
       <p:sp>
         <p:nvSpPr>
-          <p:cNvPr id="6" name="Text 3"/>
+          <p:cNvPr id="7" name="Text 4"/>
           <p:cNvSpPr txBox="1"/>
           <p:nvPr/>
         </p:nvSpPr>
@@ -15802,7 +15907,7 @@
       </p:sp>
       <p:sp>
         <p:nvSpPr>
-          <p:cNvPr id="7" name="Text 4"/>
+          <p:cNvPr id="8" name="Text 5"/>
           <p:cNvSpPr txBox="1"/>
           <p:nvPr/>
         </p:nvSpPr>
@@ -16068,8 +16173,8 @@
         </p:nvSpPr>
         <p:spPr>
           <a:xfrm>
-            <a:off x="1325880" y="1554480"/>
-            <a:ext cx="4023360" cy="640080"/>
+            <a:off x="1325880" y="1481328"/>
+            <a:ext cx="4114800" cy="603504"/>
           </a:xfrm>
           <a:prstGeom prst="rect">
             <a:avLst/>
@@ -16085,7 +16190,7 @@
               <a:buNone/>
             </a:pPr>
             <a:r>
-              <a:rPr lang="en-US" sz="1500" dirty="0">
+              <a:rPr lang="en-US" sz="1400" dirty="0">
                 <a:solidFill>
                   <a:srgbClr val="2B2318"/>
                 </a:solidFill>
@@ -16095,7 +16200,7 @@
               </a:rPr>
               <a:t>Lest im LB S. 20 den Abschnitt „Die Gesetzgebung des Drakon“.</a:t>
             </a:r>
-            <a:endParaRPr lang="en-US" sz="1500" dirty="0"/>
+            <a:endParaRPr lang="en-US" sz="1400" dirty="0"/>
           </a:p>
         </p:txBody>
       </p:sp>
@@ -16107,7 +16212,7 @@
         </p:nvSpPr>
         <p:spPr>
           <a:xfrm>
-            <a:off x="685800" y="2377440"/>
+            <a:off x="685800" y="2286000"/>
             <a:ext cx="457200" cy="457200"/>
           </a:xfrm>
           <a:prstGeom prst="ellipse">
@@ -16148,8 +16253,8 @@
         </p:nvSpPr>
         <p:spPr>
           <a:xfrm>
-            <a:off x="1325880" y="2377440"/>
-            <a:ext cx="4023360" cy="457200"/>
+            <a:off x="1325880" y="2194560"/>
+            <a:ext cx="4114800" cy="868680"/>
           </a:xfrm>
           <a:prstGeom prst="rect">
             <a:avLst/>
@@ -16165,7 +16270,7 @@
               <a:buNone/>
             </a:pPr>
             <a:r>
-              <a:rPr lang="en-US" sz="1500" dirty="0">
+              <a:rPr lang="en-US" sz="1400" dirty="0">
                 <a:solidFill>
                   <a:srgbClr val="2B2318"/>
                 </a:solidFill>
@@ -16173,9 +16278,9 @@
                 <a:ea typeface="Calibri" pitchFamily="34" charset="-122"/>
                 <a:cs typeface="Calibri" pitchFamily="34" charset="-120"/>
               </a:rPr>
-              <a:t>Füllt die Spalte „Drakon“ aus: ✔, ~ oder ✘.</a:t>
-            </a:r>
-            <a:endParaRPr lang="en-US" sz="1500" dirty="0"/>
+              <a:t>Prüft für jedes der fünf Probleme in eurer Tabelle: Hat Drakon es gelöst? Tragt in die Spalte „Drakon“ ein: ✔ gelöst, ~ teilweise, ✘ nicht gelöst.</a:t>
+            </a:r>
+            <a:endParaRPr lang="en-US" sz="1400" dirty="0"/>
           </a:p>
         </p:txBody>
       </p:sp>
@@ -16187,7 +16292,7 @@
         </p:nvSpPr>
         <p:spPr>
           <a:xfrm>
-            <a:off x="685800" y="3108960"/>
+            <a:off x="685800" y="3310128"/>
             <a:ext cx="457200" cy="457200"/>
           </a:xfrm>
           <a:prstGeom prst="ellipse">
@@ -16228,8 +16333,8 @@
         </p:nvSpPr>
         <p:spPr>
           <a:xfrm>
-            <a:off x="1325880" y="3108960"/>
-            <a:ext cx="4023360" cy="640080"/>
+            <a:off x="1325880" y="3246120"/>
+            <a:ext cx="4114800" cy="603504"/>
           </a:xfrm>
           <a:prstGeom prst="rect">
             <a:avLst/>
@@ -16245,7 +16350,7 @@
               <a:buNone/>
             </a:pPr>
             <a:r>
-              <a:rPr lang="en-US" sz="1500" dirty="0">
+              <a:rPr lang="en-US" sz="1400" dirty="0">
                 <a:solidFill>
                   <a:srgbClr val="2B2318"/>
                 </a:solidFill>
@@ -16253,9 +16358,9 @@
                 <a:ea typeface="Calibri" pitchFamily="34" charset="-122"/>
                 <a:cs typeface="Calibri" pitchFamily="34" charset="-120"/>
               </a:rPr>
-              <a:t>Notiert zu jedem Feld ein Stichwort als Beleg aus dem Text.</a:t>
-            </a:r>
-            <a:endParaRPr lang="en-US" sz="1500" dirty="0"/>
+              <a:t>Schreibt hinter jedes Zeichen ein Stichwort aus dem Text als Beleg.</a:t>
+            </a:r>
+            <a:endParaRPr lang="en-US" sz="1400" dirty="0"/>
           </a:p>
         </p:txBody>
       </p:sp>
@@ -16333,8 +16438,8 @@
         </p:nvSpPr>
         <p:spPr>
           <a:xfrm>
-            <a:off x="6035040" y="1920240"/>
-            <a:ext cx="2468880" cy="457200"/>
+            <a:off x="6035040" y="1874520"/>
+            <a:ext cx="2468880" cy="640080"/>
           </a:xfrm>
           <a:prstGeom prst="rect">
             <a:avLst/>
@@ -16350,7 +16455,7 @@
               <a:buNone/>
             </a:pPr>
             <a:r>
-              <a:rPr lang="en-US" sz="2400" b="1" dirty="0">
+              <a:rPr lang="en-US" sz="1700" b="1" dirty="0">
                 <a:solidFill>
                   <a:srgbClr val="FFFFFF"/>
                 </a:solidFill>
@@ -16358,9 +16463,9 @@
                 <a:ea typeface="Cambria" pitchFamily="34" charset="-122"/>
                 <a:cs typeface="Cambria" pitchFamily="34" charset="-120"/>
               </a:rPr>
-              <a:t>P3  ~</a:t>
-            </a:r>
-            <a:endParaRPr lang="en-US" sz="2400" dirty="0"/>
+              <a:t>Recht nur beim Adel: ~</a:t>
+            </a:r>
+            <a:endParaRPr lang="en-US" sz="1700" dirty="0"/>
           </a:p>
         </p:txBody>
       </p:sp>
@@ -16372,8 +16477,8 @@
         </p:nvSpPr>
         <p:spPr>
           <a:xfrm>
-            <a:off x="6035040" y="2468880"/>
-            <a:ext cx="2468880" cy="1554480"/>
+            <a:off x="6035040" y="2606040"/>
+            <a:ext cx="2468880" cy="1463040"/>
           </a:xfrm>
           <a:prstGeom prst="rect">
             <a:avLst/>
@@ -16642,12 +16747,12 @@
         </p:nvSpPr>
         <p:spPr>
           <a:xfrm>
-            <a:off x="457200" y="1325880"/>
-            <a:ext cx="4023360" cy="1691640"/>
+            <a:off x="457200" y="1280160"/>
+            <a:ext cx="4023360" cy="1463040"/>
           </a:xfrm>
           <a:prstGeom prst="roundRect">
             <a:avLst>
-              <a:gd name="adj" fmla="val 4324"/>
+              <a:gd name="adj" fmla="val 5000"/>
             </a:avLst>
           </a:prstGeom>
           <a:solidFill>
@@ -16669,7 +16774,7 @@
         </p:nvSpPr>
         <p:spPr>
           <a:xfrm>
-            <a:off x="685800" y="1508760"/>
+            <a:off x="685800" y="1417320"/>
             <a:ext cx="548640" cy="548640"/>
           </a:xfrm>
           <a:prstGeom prst="ellipse">
@@ -16710,7 +16815,7 @@
         </p:nvSpPr>
         <p:spPr>
           <a:xfrm>
-            <a:off x="1417320" y="1481328"/>
+            <a:off x="1417320" y="1389888"/>
             <a:ext cx="2834640" cy="274320"/>
           </a:xfrm>
           <a:prstGeom prst="rect">
@@ -16749,7 +16854,7 @@
         </p:nvSpPr>
         <p:spPr>
           <a:xfrm>
-            <a:off x="1417320" y="1737360"/>
+            <a:off x="1417320" y="1645920"/>
             <a:ext cx="2834640" cy="365760"/>
           </a:xfrm>
           <a:prstGeom prst="rect">
@@ -16788,8 +16893,8 @@
         </p:nvSpPr>
         <p:spPr>
           <a:xfrm>
-            <a:off x="685800" y="2240280"/>
-            <a:ext cx="3611880" cy="685800"/>
+            <a:off x="685800" y="2103120"/>
+            <a:ext cx="3611880" cy="566928"/>
           </a:xfrm>
           <a:prstGeom prst="rect">
             <a:avLst/>
@@ -16805,7 +16910,7 @@
               <a:buNone/>
             </a:pPr>
             <a:r>
-              <a:rPr lang="en-US" sz="1300" dirty="0">
+              <a:rPr lang="en-US" sz="1250" dirty="0">
                 <a:solidFill>
                   <a:srgbClr val="2B2318"/>
                 </a:solidFill>
@@ -16815,7 +16920,7 @@
               </a:rPr>
               <a:t>S. 20 ab „Die Reform Solons“ bis S. 21 „… fremde Handwerker ins Land“</a:t>
             </a:r>
-            <a:endParaRPr lang="en-US" sz="1300" dirty="0"/>
+            <a:endParaRPr lang="en-US" sz="1250" dirty="0"/>
           </a:p>
         </p:txBody>
       </p:sp>
@@ -16827,12 +16932,12 @@
         </p:nvSpPr>
         <p:spPr>
           <a:xfrm>
-            <a:off x="4663440" y="1325880"/>
-            <a:ext cx="4023360" cy="1691640"/>
+            <a:off x="4663440" y="1280160"/>
+            <a:ext cx="4023360" cy="1463040"/>
           </a:xfrm>
           <a:prstGeom prst="roundRect">
             <a:avLst>
-              <a:gd name="adj" fmla="val 4324"/>
+              <a:gd name="adj" fmla="val 5000"/>
             </a:avLst>
           </a:prstGeom>
           <a:solidFill>
@@ -16854,7 +16959,7 @@
         </p:nvSpPr>
         <p:spPr>
           <a:xfrm>
-            <a:off x="4892040" y="1508760"/>
+            <a:off x="4892040" y="1417320"/>
             <a:ext cx="548640" cy="548640"/>
           </a:xfrm>
           <a:prstGeom prst="ellipse">
@@ -16895,7 +17000,7 @@
         </p:nvSpPr>
         <p:spPr>
           <a:xfrm>
-            <a:off x="5623560" y="1481328"/>
+            <a:off x="5623560" y="1389888"/>
             <a:ext cx="2834640" cy="274320"/>
           </a:xfrm>
           <a:prstGeom prst="rect">
@@ -16934,7 +17039,7 @@
         </p:nvSpPr>
         <p:spPr>
           <a:xfrm>
-            <a:off x="5623560" y="1737360"/>
+            <a:off x="5623560" y="1645920"/>
             <a:ext cx="2834640" cy="365760"/>
           </a:xfrm>
           <a:prstGeom prst="rect">
@@ -16973,8 +17078,8 @@
         </p:nvSpPr>
         <p:spPr>
           <a:xfrm>
-            <a:off x="4892040" y="2240280"/>
-            <a:ext cx="3611880" cy="685800"/>
+            <a:off x="4892040" y="2103120"/>
+            <a:ext cx="3611880" cy="566928"/>
           </a:xfrm>
           <a:prstGeom prst="rect">
             <a:avLst/>
@@ -16990,7 +17095,7 @@
               <a:buNone/>
             </a:pPr>
             <a:r>
-              <a:rPr lang="en-US" sz="1300" dirty="0">
+              <a:rPr lang="en-US" sz="1250" dirty="0">
                 <a:solidFill>
                   <a:srgbClr val="2B2318"/>
                 </a:solidFill>
@@ -17000,7 +17105,7 @@
               </a:rPr>
               <a:t>S. 21 ab „Bei der Reform des Verfassungslebens …“ bis S. 22 „… M4, M5)“</a:t>
             </a:r>
-            <a:endParaRPr lang="en-US" sz="1300" dirty="0"/>
+            <a:endParaRPr lang="en-US" sz="1250" dirty="0"/>
           </a:p>
         </p:txBody>
       </p:sp>
@@ -17012,12 +17117,12 @@
         </p:nvSpPr>
         <p:spPr>
           <a:xfrm>
-            <a:off x="457200" y="3291840"/>
-            <a:ext cx="2606040" cy="960120"/>
+            <a:off x="457200" y="2926080"/>
+            <a:ext cx="2606040" cy="1572768"/>
           </a:xfrm>
           <a:prstGeom prst="roundRect">
             <a:avLst>
-              <a:gd name="adj" fmla="val 7619"/>
+              <a:gd name="adj" fmla="val 4651"/>
             </a:avLst>
           </a:prstGeom>
           <a:solidFill>
@@ -17039,8 +17144,8 @@
         </p:nvSpPr>
         <p:spPr>
           <a:xfrm>
-            <a:off x="640080" y="3401568"/>
-            <a:ext cx="2240280" cy="274320"/>
+            <a:off x="640080" y="3017520"/>
+            <a:ext cx="2240280" cy="256032"/>
           </a:xfrm>
           <a:prstGeom prst="rect">
             <a:avLst/>
@@ -17078,8 +17183,8 @@
         </p:nvSpPr>
         <p:spPr>
           <a:xfrm>
-            <a:off x="640080" y="3703320"/>
-            <a:ext cx="2240280" cy="411480"/>
+            <a:off x="640080" y="3273552"/>
+            <a:ext cx="2240280" cy="320040"/>
           </a:xfrm>
           <a:prstGeom prst="rect">
             <a:avLst/>
@@ -17111,13 +17216,52 @@
       </p:sp>
       <p:sp>
         <p:nvSpPr>
-          <p:cNvPr id="18" name="Shape 16"/>
+          <p:cNvPr id="18" name="Text 16"/>
+          <p:cNvSpPr txBox="1"/>
+          <p:nvPr/>
+        </p:nvSpPr>
+        <p:spPr>
+          <a:xfrm>
+            <a:off x="640080" y="3611880"/>
+            <a:ext cx="2286000" cy="841248"/>
+          </a:xfrm>
+          <a:prstGeom prst="rect">
+            <a:avLst/>
+          </a:prstGeom>
+          <a:noFill/>
+          <a:ln/>
+        </p:spPr>
+        <p:txBody>
+          <a:bodyPr wrap="square" lIns="0" tIns="0" rIns="0" bIns="0" rtlCol="0" anchor="t"/>
+          <a:lstStyle/>
+          <a:p>
+            <a:pPr indent="0" marL="0">
+              <a:buNone/>
+            </a:pPr>
+            <a:r>
+              <a:rPr lang="en-US" sz="1150" dirty="0">
+                <a:solidFill>
+                  <a:srgbClr val="E8DFD0"/>
+                </a:solidFill>
+                <a:latin typeface="Calibri" pitchFamily="34" charset="0"/>
+                <a:ea typeface="Calibri" pitchFamily="34" charset="-122"/>
+                <a:cs typeface="Calibri" pitchFamily="34" charset="-120"/>
+              </a:rPr>
+              <a:t>Lies nur deinen Abschnitt. Notiere in Stichpunkten, was Solon ändert.</a:t>
+            </a:r>
+            <a:endParaRPr lang="en-US" sz="1150" dirty="0"/>
+          </a:p>
+        </p:txBody>
+      </p:sp>
+      <p:sp>
+        <p:nvSpPr>
+          <p:cNvPr id="19" name="Shape 17"/>
           <p:cNvSpPr/>
           <p:nvPr/>
         </p:nvSpPr>
         <p:spPr>
           <a:xfrm>
-            <a:off x="3081528" y="3767328"/>
+            <a:off x="3081528" y="3703320"/>
             <a:ext cx="146304" cy="0"/>
           </a:xfrm>
           <a:prstGeom prst="line">
@@ -17135,18 +17279,18 @@
       </p:sp>
       <p:sp>
         <p:nvSpPr>
-          <p:cNvPr id="19" name="Shape 17"/>
+          <p:cNvPr id="20" name="Shape 18"/>
           <p:cNvSpPr/>
           <p:nvPr/>
         </p:nvSpPr>
         <p:spPr>
           <a:xfrm>
-            <a:off x="3246120" y="3291840"/>
-            <a:ext cx="2606040" cy="960120"/>
+            <a:off x="3246120" y="2926080"/>
+            <a:ext cx="2606040" cy="1572768"/>
           </a:xfrm>
           <a:prstGeom prst="roundRect">
             <a:avLst>
-              <a:gd name="adj" fmla="val 7619"/>
+              <a:gd name="adj" fmla="val 4651"/>
             </a:avLst>
           </a:prstGeom>
           <a:solidFill>
@@ -17162,14 +17306,14 @@
       </p:sp>
       <p:sp>
         <p:nvSpPr>
-          <p:cNvPr id="20" name="Text 18"/>
-          <p:cNvSpPr txBox="1"/>
-          <p:nvPr/>
-        </p:nvSpPr>
-        <p:spPr>
-          <a:xfrm>
-            <a:off x="3429000" y="3401568"/>
-            <a:ext cx="2240280" cy="274320"/>
+          <p:cNvPr id="21" name="Text 19"/>
+          <p:cNvSpPr txBox="1"/>
+          <p:nvPr/>
+        </p:nvSpPr>
+        <p:spPr>
+          <a:xfrm>
+            <a:off x="3429000" y="3017520"/>
+            <a:ext cx="2240280" cy="256032"/>
           </a:xfrm>
           <a:prstGeom prst="rect">
             <a:avLst/>
@@ -17201,14 +17345,14 @@
       </p:sp>
       <p:sp>
         <p:nvSpPr>
-          <p:cNvPr id="21" name="Text 19"/>
-          <p:cNvSpPr txBox="1"/>
-          <p:nvPr/>
-        </p:nvSpPr>
-        <p:spPr>
-          <a:xfrm>
-            <a:off x="3429000" y="3703320"/>
-            <a:ext cx="2240280" cy="411480"/>
+          <p:cNvPr id="22" name="Text 20"/>
+          <p:cNvSpPr txBox="1"/>
+          <p:nvPr/>
+        </p:nvSpPr>
+        <p:spPr>
+          <a:xfrm>
+            <a:off x="3429000" y="3273552"/>
+            <a:ext cx="2240280" cy="320040"/>
           </a:xfrm>
           <a:prstGeom prst="rect">
             <a:avLst/>
@@ -17232,7 +17376,7 @@
                 <a:ea typeface="Calibri" pitchFamily="34" charset="-122"/>
                 <a:cs typeface="Calibri" pitchFamily="34" charset="-120"/>
               </a:rPr>
-              <a:t>Dem Partner erklären</a:t>
+              <a:t>Erklären</a:t>
             </a:r>
             <a:endParaRPr lang="en-US" sz="1600" dirty="0"/>
           </a:p>
@@ -17240,13 +17384,52 @@
       </p:sp>
       <p:sp>
         <p:nvSpPr>
-          <p:cNvPr id="22" name="Shape 20"/>
+          <p:cNvPr id="23" name="Text 21"/>
+          <p:cNvSpPr txBox="1"/>
+          <p:nvPr/>
+        </p:nvSpPr>
+        <p:spPr>
+          <a:xfrm>
+            <a:off x="3429000" y="3611880"/>
+            <a:ext cx="2286000" cy="841248"/>
+          </a:xfrm>
+          <a:prstGeom prst="rect">
+            <a:avLst/>
+          </a:prstGeom>
+          <a:noFill/>
+          <a:ln/>
+        </p:spPr>
+        <p:txBody>
+          <a:bodyPr wrap="square" lIns="0" tIns="0" rIns="0" bIns="0" rtlCol="0" anchor="t"/>
+          <a:lstStyle/>
+          <a:p>
+            <a:pPr indent="0" marL="0">
+              <a:buNone/>
+            </a:pPr>
+            <a:r>
+              <a:rPr lang="en-US" sz="1150" dirty="0">
+                <a:solidFill>
+                  <a:srgbClr val="E8DFD0"/>
+                </a:solidFill>
+                <a:latin typeface="Calibri" pitchFamily="34" charset="0"/>
+                <a:ea typeface="Calibri" pitchFamily="34" charset="-122"/>
+                <a:cs typeface="Calibri" pitchFamily="34" charset="-120"/>
+              </a:rPr>
+              <a:t>Erkläre deinem Partner mit deinen Notizen, was Solon ändert. Der Partner hört zu und fragt nach.</a:t>
+            </a:r>
+            <a:endParaRPr lang="en-US" sz="1150" dirty="0"/>
+          </a:p>
+        </p:txBody>
+      </p:sp>
+      <p:sp>
+        <p:nvSpPr>
+          <p:cNvPr id="24" name="Shape 22"/>
           <p:cNvSpPr/>
           <p:nvPr/>
         </p:nvSpPr>
         <p:spPr>
           <a:xfrm>
-            <a:off x="5870448" y="3767328"/>
+            <a:off x="5870448" y="3703320"/>
             <a:ext cx="146304" cy="0"/>
           </a:xfrm>
           <a:prstGeom prst="line">
@@ -17264,18 +17447,18 @@
       </p:sp>
       <p:sp>
         <p:nvSpPr>
-          <p:cNvPr id="23" name="Shape 21"/>
+          <p:cNvPr id="25" name="Shape 23"/>
           <p:cNvSpPr/>
           <p:nvPr/>
         </p:nvSpPr>
         <p:spPr>
           <a:xfrm>
-            <a:off x="6035040" y="3291840"/>
-            <a:ext cx="2606040" cy="960120"/>
+            <a:off x="6035040" y="2926080"/>
+            <a:ext cx="2606040" cy="1572768"/>
           </a:xfrm>
           <a:prstGeom prst="roundRect">
             <a:avLst>
-              <a:gd name="adj" fmla="val 7619"/>
+              <a:gd name="adj" fmla="val 4651"/>
             </a:avLst>
           </a:prstGeom>
           <a:solidFill>
@@ -17291,14 +17474,14 @@
       </p:sp>
       <p:sp>
         <p:nvSpPr>
-          <p:cNvPr id="24" name="Text 22"/>
-          <p:cNvSpPr txBox="1"/>
-          <p:nvPr/>
-        </p:nvSpPr>
-        <p:spPr>
-          <a:xfrm>
-            <a:off x="6217920" y="3401568"/>
-            <a:ext cx="2240280" cy="274320"/>
+          <p:cNvPr id="26" name="Text 24"/>
+          <p:cNvSpPr txBox="1"/>
+          <p:nvPr/>
+        </p:nvSpPr>
+        <p:spPr>
+          <a:xfrm>
+            <a:off x="6217920" y="3017520"/>
+            <a:ext cx="2240280" cy="256032"/>
           </a:xfrm>
           <a:prstGeom prst="rect">
             <a:avLst/>
@@ -17330,14 +17513,14 @@
       </p:sp>
       <p:sp>
         <p:nvSpPr>
-          <p:cNvPr id="25" name="Text 23"/>
-          <p:cNvSpPr txBox="1"/>
-          <p:nvPr/>
-        </p:nvSpPr>
-        <p:spPr>
-          <a:xfrm>
-            <a:off x="6217920" y="3703320"/>
-            <a:ext cx="2240280" cy="411480"/>
+          <p:cNvPr id="27" name="Text 25"/>
+          <p:cNvSpPr txBox="1"/>
+          <p:nvPr/>
+        </p:nvSpPr>
+        <p:spPr>
+          <a:xfrm>
+            <a:off x="6217920" y="3273552"/>
+            <a:ext cx="2240280" cy="320040"/>
           </a:xfrm>
           <a:prstGeom prst="rect">
             <a:avLst/>
@@ -17361,7 +17544,7 @@
                 <a:ea typeface="Calibri" pitchFamily="34" charset="-122"/>
                 <a:cs typeface="Calibri" pitchFamily="34" charset="-120"/>
               </a:rPr>
-              <a:t>Spalte „Solon“ ausfüllen</a:t>
+              <a:t>Eintragen</a:t>
             </a:r>
             <a:endParaRPr lang="en-US" sz="1600" dirty="0"/>
           </a:p>
@@ -17369,7 +17552,46 @@
       </p:sp>
       <p:sp>
         <p:nvSpPr>
-          <p:cNvPr id="26" name="Text 24"/>
+          <p:cNvPr id="28" name="Text 26"/>
+          <p:cNvSpPr txBox="1"/>
+          <p:nvPr/>
+        </p:nvSpPr>
+        <p:spPr>
+          <a:xfrm>
+            <a:off x="6217920" y="3611880"/>
+            <a:ext cx="2286000" cy="841248"/>
+          </a:xfrm>
+          <a:prstGeom prst="rect">
+            <a:avLst/>
+          </a:prstGeom>
+          <a:noFill/>
+          <a:ln/>
+        </p:spPr>
+        <p:txBody>
+          <a:bodyPr wrap="square" lIns="0" tIns="0" rIns="0" bIns="0" rtlCol="0" anchor="t"/>
+          <a:lstStyle/>
+          <a:p>
+            <a:pPr indent="0" marL="0">
+              <a:buNone/>
+            </a:pPr>
+            <a:r>
+              <a:rPr lang="en-US" sz="1150" dirty="0">
+                <a:solidFill>
+                  <a:srgbClr val="E8DFD0"/>
+                </a:solidFill>
+                <a:latin typeface="Calibri" pitchFamily="34" charset="0"/>
+                <a:ea typeface="Calibri" pitchFamily="34" charset="-122"/>
+                <a:cs typeface="Calibri" pitchFamily="34" charset="-120"/>
+              </a:rPr>
+              <a:t>Tragt gemeinsam die Spalte „Solon“ ein: Zeichen und Beleg für jedes Problem.</a:t>
+            </a:r>
+            <a:endParaRPr lang="en-US" sz="1150" dirty="0"/>
+          </a:p>
+        </p:txBody>
+      </p:sp>
+      <p:sp>
+        <p:nvSpPr>
+          <p:cNvPr id="29" name="Text 27"/>
           <p:cNvSpPr txBox="1"/>
           <p:nvPr/>
         </p:nvSpPr>
@@ -17408,7 +17630,7 @@
       </p:sp>
       <p:sp>
         <p:nvSpPr>
-          <p:cNvPr id="27" name="Text 25"/>
+          <p:cNvPr id="30" name="Text 28"/>
           <p:cNvSpPr txBox="1"/>
           <p:nvPr/>
         </p:nvSpPr>
@@ -17705,8 +17927,8 @@
         </p:nvSpPr>
         <p:spPr>
           <a:xfrm>
-            <a:off x="6309360" y="1874520"/>
-            <a:ext cx="2194560" cy="1280160"/>
+            <a:off x="6309360" y="1828800"/>
+            <a:ext cx="2194560" cy="960120"/>
           </a:xfrm>
           <a:prstGeom prst="rect">
             <a:avLst/>
@@ -17722,7 +17944,7 @@
               <a:buNone/>
             </a:pPr>
             <a:r>
-              <a:rPr lang="en-US" sz="1700" b="1" dirty="0">
+              <a:rPr lang="en-US" sz="1600" b="1" dirty="0">
                 <a:solidFill>
                   <a:srgbClr val="FFFFFF"/>
                 </a:solidFill>
@@ -17730,9 +17952,9 @@
                 <a:ea typeface="Cambria" pitchFamily="34" charset="-122"/>
                 <a:cs typeface="Cambria" pitchFamily="34" charset="-120"/>
               </a:rPr>
-              <a:t>Prüft eure Einschätzung zu P4: Politische Macht nur beim Adel.</a:t>
-            </a:r>
-            <a:endParaRPr lang="en-US" sz="1700" dirty="0"/>
+              <a:t>Achtet auf die Zeile „Politische Macht nur beim Adel“.</a:t>
+            </a:r>
+            <a:endParaRPr lang="en-US" sz="1600" dirty="0"/>
           </a:p>
         </p:txBody>
       </p:sp>
@@ -17744,8 +17966,8 @@
         </p:nvSpPr>
         <p:spPr>
           <a:xfrm>
-            <a:off x="6309360" y="3383280"/>
-            <a:ext cx="2194560" cy="548640"/>
+            <a:off x="6309360" y="2834640"/>
+            <a:ext cx="2194560" cy="1371600"/>
           </a:xfrm>
           <a:prstGeom prst="rect">
             <a:avLst/>
@@ -17761,7 +17983,7 @@
               <a:buNone/>
             </a:pPr>
             <a:r>
-              <a:rPr lang="en-US" sz="1400" dirty="0">
+              <a:rPr lang="en-US" sz="1250" dirty="0">
                 <a:solidFill>
                   <a:srgbClr val="E8DFD0"/>
                 </a:solidFill>
@@ -17769,9 +17991,9 @@
                 <a:ea typeface="Calibri" pitchFamily="34" charset="-122"/>
                 <a:cs typeface="Calibri" pitchFamily="34" charset="-120"/>
               </a:rPr>
-              <a:t>Bleibt ihr bei eurem Zeichen?</a:t>
-            </a:r>
-            <a:endParaRPr lang="en-US" sz="1400" dirty="0"/>
+              <a:t>Stimmt euer Zeichen in der Spalte „Solon“? Korrigiert es, falls nötig, und ergänzt einen Beleg aus dem Video.</a:t>
+            </a:r>
+            <a:endParaRPr lang="en-US" sz="1250" dirty="0"/>
           </a:p>
         </p:txBody>
       </p:sp>
@@ -18272,7 +18494,7 @@
                           <a:ea typeface="Cambria" pitchFamily="34" charset="-122"/>
                           <a:cs typeface="Cambria" pitchFamily="34" charset="-120"/>
                         </a:rPr>
-                        <a:t>P1</a:t>
+                        <a:t>1</a:t>
                       </a:r>
                       <a:endParaRPr lang="en-US" sz="1500" dirty="0">
                         <a:latin typeface="Cambria" charset="0"/>
@@ -18546,7 +18768,7 @@
                           <a:ea typeface="Cambria" pitchFamily="34" charset="-122"/>
                           <a:cs typeface="Cambria" pitchFamily="34" charset="-120"/>
                         </a:rPr>
-                        <a:t>P2</a:t>
+                        <a:t>2</a:t>
                       </a:r>
                       <a:endParaRPr lang="en-US" sz="1500" dirty="0">
                         <a:latin typeface="Cambria" charset="0"/>
@@ -18820,7 +19042,7 @@
                           <a:ea typeface="Cambria" pitchFamily="34" charset="-122"/>
                           <a:cs typeface="Cambria" pitchFamily="34" charset="-120"/>
                         </a:rPr>
-                        <a:t>P3</a:t>
+                        <a:t>3</a:t>
                       </a:r>
                       <a:endParaRPr lang="en-US" sz="1500" dirty="0">
                         <a:latin typeface="Cambria" charset="0"/>
@@ -19094,7 +19316,7 @@
                           <a:ea typeface="Cambria" pitchFamily="34" charset="-122"/>
                           <a:cs typeface="Cambria" pitchFamily="34" charset="-120"/>
                         </a:rPr>
-                        <a:t>P4</a:t>
+                        <a:t>4</a:t>
                       </a:r>
                       <a:endParaRPr lang="en-US" sz="1500" dirty="0">
                         <a:latin typeface="Cambria" charset="0"/>
@@ -19368,7 +19590,7 @@
                           <a:ea typeface="Cambria" pitchFamily="34" charset="-122"/>
                           <a:cs typeface="Cambria" pitchFamily="34" charset="-120"/>
                         </a:rPr>
-                        <a:t>P5</a:t>
+                        <a:t>5</a:t>
                       </a:r>
                       <a:endParaRPr lang="en-US" sz="1500" dirty="0">
                         <a:latin typeface="Cambria" charset="0"/>
@@ -20522,7 +20744,7 @@
                 <a:ea typeface="Calibri" pitchFamily="34" charset="-122"/>
                 <a:cs typeface="Calibri" pitchFamily="34" charset="-120"/>
               </a:rPr>
-              <a:t>3–4 Sätze, gestützt auf eure Tabelle</a:t>
+              <a:t>3–4 Sätze · nutze deine Tabelle</a:t>
             </a:r>
             <a:endParaRPr lang="en-US" sz="1100" dirty="0"/>
           </a:p>
@@ -20670,7 +20892,7 @@
                 <a:ea typeface="Calibri" pitchFamily="34" charset="-122"/>
                 <a:cs typeface="Calibri" pitchFamily="34" charset="-120"/>
               </a:rPr>
-              <a:t>2–3 Sätze</a:t>
+              <a:t>2–3 Sätze · nenne deinen Maßstab</a:t>
             </a:r>
             <a:endParaRPr lang="en-US" sz="1100" dirty="0"/>
           </a:p>
